--- a/04-reformulacion/TC5-8/TC5-8-AndiBite.pptx
+++ b/04-reformulacion/TC5-8/TC5-8-AndiBite.pptx
@@ -133,13 +133,13 @@
   <p:extLst>
     <p:ext uri="{521415D9-36F7-43E2-AB2F-B90AF26B5E84}">
       <p14:sectionLst xmlns:p14="http://schemas.microsoft.com/office/powerpoint/2010/main">
-        <p14:section name="Portada" id="{46ce0402-7536-553e-b83f-933f7a2c06db}">
+        <p14:section name="Portada" id="{dc06b089-9d59-bc08-8c12-ec7acf067954}">
           <p14:sldIdLst>
             <p14:sldId id="256"/>
             <p14:sldId id="257"/>
           </p14:sldIdLst>
         </p14:section>
-        <p14:section name="TC5 · Cliente, mercado y canal" id="{27758822-e03a-3e98-102c-52a3ef4277d7}">
+        <p14:section name="TC5 · Cliente, mercado y canal" id="{8d8d27a5-0685-5a67-59ff-8ecb22329587}">
           <p14:sldIdLst>
             <p14:sldId id="258"/>
             <p14:sldId id="259"/>
@@ -151,7 +151,7 @@
             <p14:sldId id="265"/>
           </p14:sldIdLst>
         </p14:section>
-        <p14:section name="TC6 · Relación e ingresos" id="{8625f247-3376-9492-bf9e-536863df9601}">
+        <p14:section name="TC6 · Relación e ingresos" id="{d74aa633-adeb-b6ce-84e3-0ec50a235b49}">
           <p14:sldIdLst>
             <p14:sldId id="266"/>
             <p14:sldId id="267"/>
@@ -160,7 +160,7 @@
             <p14:sldId id="270"/>
           </p14:sldIdLst>
         </p14:section>
-        <p14:section name="TC7 · Canvas" id="{e517f6f1-df49-0e08-ff61-8d0ba316d6df}">
+        <p14:section name="TC7 · Canvas" id="{a76c293f-4d07-aab4-3ac4-18fe02eb3866}">
           <p14:sldIdLst>
             <p14:sldId id="271"/>
             <p14:sldId id="272"/>
@@ -171,7 +171,7 @@
             <p14:sldId id="277"/>
           </p14:sldIdLst>
         </p14:section>
-        <p14:section name="TC8 · Propuesta de valor" id="{667d0f95-adf1-3b03-251d-984db9c87792}">
+        <p14:section name="TC8 · Propuesta de valor" id="{25ef3c35-3343-ba25-c258-5f58c6ff192e}">
           <p14:sldIdLst>
             <p14:sldId id="278"/>
             <p14:sldId id="279"/>
@@ -179,7 +179,7 @@
             <p14:sldId id="281"/>
           </p14:sldIdLst>
         </p14:section>
-        <p14:section name="Cierre" id="{d8ef73bc-1653-00f9-1666-f9011b42768c}">
+        <p14:section name="Cierre" id="{54fb7252-d3e5-39b0-5a54-b29dcddd043f}">
           <p14:sldIdLst>
             <p14:sldId id="282"/>
           </p14:sldIdLst>
@@ -4129,7 +4129,7 @@
           <a:p>
             <a:r>
               <a:rPr lang="en-US" dirty="0"/>
-              <a:t>Los seis tipos de relación de Osterwalder y cómo los usa AndiBite. Las tres fuertes (asistencia personal por WhatsApp, suscripción automática y comunidad de mamás embajadoras) sostienen la recompra; las de apoyo crecen con el volumen. Con los colegios y naturistas la relación es exclusiva: un socio responde por cada cuenta.</a:t>
+              <a:t>Los seis tipos de relación de Osterwalder y cómo los usa AndiBite. Las tres fuertes (asistencia personal por WhatsApp, recordatorio automático de recompra y comunidad de mamás embajadoras) sostienen la recompra; las de apoyo crecen con el volumen. Con los colegios y naturistas la relación es exclusiva: un socio responde por cada cuenta.</a:t>
             </a:r>
             <a:endParaRPr lang="en-US" dirty="0"/>
           </a:p>
@@ -4217,7 +4217,7 @@
           <a:p>
             <a:r>
               <a:rPr lang="en-US" dirty="0"/>
-              <a:t>Captar: la caja degustación (3 brownies a S/4 = S/12) hace que el niño pruebe delante de la madre; el cupón de S/3 empuja el primer pack. Fidelizar: suscripción quincenal con recordatorio por WhatsApp dos días antes. Crecer: mamá embajadora por salón y paso al pack de 12. Metas del documento 07: 300 familias en espera, 35 % de recompra a 60 días, 700 hogares activos.
+              <a:t>Captar: la caja degustación (3 brownies a S/4 = S/12) hace que el niño pruebe delante de la madre; el cupón de S/3 empuja el primer pack. Fidelizar: recordatorio por WhatsApp cuando el pack está por acabarse (unos 12 días después de la compra), sin suscripción ni compromiso. Crecer: mamá embajadora por salón y paso al pack de 12. Metas del documento 07: 300 familias en espera, 35 % de recompra a 60 días, 700 hogares activos.
 IMAGEN 3 — prompt para Nano Banana (proporción 9:16 · adjuntar la foto del empaque):
 Use the attached AndiBite package image only as a reference for the brand colors and the product. Top-down flat-lay photo of an open children's school lunchbox on a light wooden table: one mini chocolate brownie (about 5 x 3 cm, fudgy, dark cocoa color, crackly top) inside a small clear individual bag, fresh strawberries and banana slices in a small container, a reusable water bottle and a folded cloth napkin. Next to the lunchbox, the AndiBite stand-up pouch from the reference, slightly out of focus, label turned partly away. Soft natural morning light, clean food styling, warm palette of cream and chocolate brown with brick red accents. Vertical 9:16 composition, lunchbox centered, calm empty area at the top. Do not invent or rewrite any text on the package, no extra logos, no watermark.</a:t>
             </a:r>
@@ -4307,7 +4307,7 @@
           <a:p>
             <a:r>
               <a:rPr lang="en-US" dirty="0"/>
-              <a:t>Tipos de ingreso (Osterwalder): venta de activos (packs y unidades), suscripción (pack de 12 cada dos semanas), venta mayorista B2B y eventos. Porcentajes sobre las ventas con IGV del año 1 (S/302,900), hoja Proyeccion del Excel. Mecanismo de precio: fijo por lista, con descuento por volumen. Precios confirmados por el equipo el 9 de octubre de 2026.</a:t>
+              <a:t>Tipos de ingreso (Osterwalder): venta de activos (packs y unidades), venta por volumen (pack de 12), venta mayorista B2B y eventos. Porcentajes sobre las ventas con IGV del año 1 (S/302,900), hoja Proyeccion del Excel. Mecanismo de precio: fijo por lista, con descuento por volumen. Precios confirmados por el equipo el 9 de octubre de 2026.</a:t>
             </a:r>
             <a:endParaRPr lang="en-US" dirty="0"/>
           </a:p>
@@ -10986,7 +10986,7 @@
                   <a:schemeClr val="tx1"/>
                 </a:solidFill>
               </a:rPr>
-              <a:t>Suscripción quincenal con recordatorio 2 días antes</a:t>
+              <a:t>Recordatorio de recompra por WhatsApp a los 12 días</a:t>
             </a:r>
             <a:endParaRPr lang="en-US" sz="1500" dirty="0"/>
           </a:p>
@@ -11978,7 +11978,7 @@
                   <a:schemeClr val="tx1"/>
                 </a:solidFill>
               </a:rPr>
-              <a:t>Suscripción quincenal con recordatorio y cambio de sabores sin costo</a:t>
+              <a:t>Recordatorio de recompra por WhatsApp y cambio de sabores en cada pedido</a:t>
             </a:r>
             <a:endParaRPr lang="en-US" sz="1500" dirty="0"/>
           </a:p>
@@ -12886,7 +12886,7 @@
                   <a:schemeClr val="tx2"/>
                 </a:solidFill>
               </a:rPr>
-              <a:t>Suscripción "Semana completa"</a:t>
+              <a:t>Pack de 12 "Semana completa"</a:t>
             </a:r>
             <a:endParaRPr lang="en-US" sz="1400" dirty="0"/>
           </a:p>
@@ -12900,7 +12900,7 @@
                   <a:schemeClr val="accent2"/>
                 </a:solidFill>
               </a:rPr>
-              <a:t>Pack de 12 cada dos semanas: S/3.91 por brownie</a:t>
+              <a:t>Venta por volumen: S/3.91 por brownie</a:t>
             </a:r>
             <a:endParaRPr lang="en-US" sz="1400" dirty="0"/>
           </a:p>
@@ -21575,7 +21575,7 @@
                   <a:schemeClr val="tx1"/>
                 </a:solidFill>
               </a:rPr>
-              <a:t>Suscripción quincenal</a:t>
+              <a:t>Recordatorio de recompra</a:t>
             </a:r>
             <a:endParaRPr lang="en-US" sz="1300" dirty="0"/>
           </a:p>
@@ -22971,7 +22971,7 @@
                   <a:schemeClr val="tx1"/>
                 </a:solidFill>
               </a:rPr>
-              <a:t>Suscripción por WhatsApp</a:t>
+              <a:t>Pedido por WhatsApp</a:t>
             </a:r>
             <a:endParaRPr lang="en-US" sz="1200" dirty="0"/>
           </a:p>
@@ -34997,7 +34997,7 @@
                   <a:schemeClr val="tx1"/>
                 </a:solidFill>
               </a:rPr>
-              <a:t>Suscripción con recordatorio</a:t>
+              <a:t>Recordatorio para recomprar</a:t>
             </a:r>
             <a:endParaRPr lang="en-US" sz="1400" dirty="0"/>
           </a:p>
@@ -35907,7 +35907,7 @@
                   <a:schemeClr val="tx1"/>
                 </a:solidFill>
               </a:rPr>
-              <a:t>Recordatorio quincenal y cambio de sabores</a:t>
+              <a:t>Recordatorio de recompra y cambio de sabores</a:t>
             </a:r>
             <a:endParaRPr lang="en-US" sz="1400" dirty="0"/>
           </a:p>

--- a/04-reformulacion/TC5-8/TC5-8-AndiBite.pptx
+++ b/04-reformulacion/TC5-8/TC5-8-AndiBite.pptx
@@ -36,9 +36,11 @@
     <p:sldId id="284" r:id="rId30"/>
     <p:sldId id="285" r:id="rId31"/>
     <p:sldId id="286" r:id="rId32"/>
+    <p:sldId id="287" r:id="rId33"/>
+    <p:sldId id="288" r:id="rId34"/>
   </p:sldIdLst>
   <p:notesMasterIdLst>
-    <p:notesMasterId r:id="rId33"/>
+    <p:notesMasterId r:id="rId35"/>
   </p:notesMasterIdLst>
   <p:sldSz cx="12192000" cy="6858000"/>
   <p:notesSz cx="6858000" cy="12192000"/>
@@ -137,13 +139,13 @@
   <p:extLst>
     <p:ext uri="{521415D9-36F7-43E2-AB2F-B90AF26B5E84}">
       <p14:sectionLst xmlns:p14="http://schemas.microsoft.com/office/powerpoint/2010/main">
-        <p14:section name="Portada" id="{56d53f48-44a9-2d7c-d955-bdd458da64df}">
+        <p14:section name="Portada" id="{c3b8bb69-b414-c396-18b3-a7f853d6049f}">
           <p14:sldIdLst>
             <p14:sldId id="256"/>
             <p14:sldId id="257"/>
           </p14:sldIdLst>
         </p14:section>
-        <p14:section name="TC5 · Cliente, mercado y canal" id="{467ba15c-1258-fca0-63c5-94fa21126b28}">
+        <p14:section name="TC5 · Cliente, mercado y canal" id="{c75fdb58-3a5e-814a-8b50-0f6439749379}">
           <p14:sldIdLst>
             <p14:sldId id="258"/>
             <p14:sldId id="259"/>
@@ -157,7 +159,7 @@
             <p14:sldId id="267"/>
           </p14:sldIdLst>
         </p14:section>
-        <p14:section name="TC6 · Relación e ingresos" id="{a8e4e0b2-7964-4ba9-4aff-f522ef9d5a5d}">
+        <p14:section name="TC6 · Relación e ingresos" id="{067a395e-ce24-4e78-513e-f5a3ef12b990}">
           <p14:sldIdLst>
             <p14:sldId id="268"/>
             <p14:sldId id="269"/>
@@ -166,7 +168,7 @@
             <p14:sldId id="272"/>
           </p14:sldIdLst>
         </p14:section>
-        <p14:section name="TC7 · Canvas" id="{8b658756-a103-a5aa-889a-43ea0c71625e}">
+        <p14:section name="TC7 · Canvas" id="{0b9c3147-6d48-d61c-817e-90ab944da897}">
           <p14:sldIdLst>
             <p14:sldId id="273"/>
             <p14:sldId id="274"/>
@@ -179,17 +181,19 @@
             <p14:sldId id="281"/>
           </p14:sldIdLst>
         </p14:section>
-        <p14:section name="TC8 · Propuesta de valor" id="{a259d8b3-4563-e6fb-0689-da0936f60cf1}">
+        <p14:section name="TC8 · Propuesta de valor" id="{3ea92967-6eeb-7a23-3396-5ba5b4f6efc0}">
           <p14:sldIdLst>
             <p14:sldId id="282"/>
             <p14:sldId id="283"/>
             <p14:sldId id="284"/>
             <p14:sldId id="285"/>
+            <p14:sldId id="286"/>
+            <p14:sldId id="287"/>
           </p14:sldIdLst>
         </p14:section>
-        <p14:section name="Cierre" id="{dfee8523-33dd-b929-6456-35e158d1c87f}">
+        <p14:section name="Cierre" id="{aa15a221-9c37-1279-6c02-4149f3c5b515}">
           <p14:sldIdLst>
-            <p14:sldId id="286"/>
+            <p14:sldId id="288"/>
           </p14:sldIdLst>
         </p14:section>
       </p14:sectionLst>
@@ -831,40 +835,40 @@
                 <c:formatCode>General</c:formatCode>
                 <c:ptCount val="12"/>
                 <c:pt idx="0">
-                  <c:v>-2191</c:v>
+                  <c:v>-2456</c:v>
                 </c:pt>
                 <c:pt idx="1">
-                  <c:v>-807</c:v>
+                  <c:v>-1004</c:v>
                 </c:pt>
                 <c:pt idx="2">
-                  <c:v>1882</c:v>
+                  <c:v>1545</c:v>
                 </c:pt>
                 <c:pt idx="3">
-                  <c:v>1359</c:v>
+                  <c:v>895</c:v>
                 </c:pt>
                 <c:pt idx="4">
-                  <c:v>2021</c:v>
+                  <c:v>1508</c:v>
                 </c:pt>
                 <c:pt idx="5">
-                  <c:v>1662</c:v>
+                  <c:v>1090</c:v>
                 </c:pt>
                 <c:pt idx="6">
-                  <c:v>1391</c:v>
+                  <c:v>905</c:v>
                 </c:pt>
                 <c:pt idx="7">
-                  <c:v>2592</c:v>
+                  <c:v>1947</c:v>
                 </c:pt>
                 <c:pt idx="8">
-                  <c:v>3207</c:v>
+                  <c:v>2553</c:v>
                 </c:pt>
                 <c:pt idx="9">
-                  <c:v>3613</c:v>
+                  <c:v>2843</c:v>
                 </c:pt>
                 <c:pt idx="10">
-                  <c:v>3240</c:v>
+                  <c:v>2462</c:v>
                 </c:pt>
                 <c:pt idx="11">
-                  <c:v>2968</c:v>
+                  <c:v>2565</c:v>
                 </c:pt>
               </c:numCache>
             </c:numRef>
@@ -1114,13 +1118,13 @@
                     <c:v>Nutri H</c:v>
                   </c:pt>
                   <c:pt idx="3">
-                    <c:v>AndiBite pack de 12</c:v>
+                    <c:v>Fika</c:v>
                   </c:pt>
                   <c:pt idx="4">
-                    <c:v>Fika</c:v>
+                    <c:v>Mamalama</c:v>
                   </c:pt>
                   <c:pt idx="5">
-                    <c:v>Mamalama</c:v>
+                    <c:v>AndiBite pack de 12</c:v>
                   </c:pt>
                   <c:pt idx="6">
                     <c:v>AndiBite pack de 6</c:v>
@@ -1145,13 +1149,13 @@
                   <c:v>3.2</c:v>
                 </c:pt>
                 <c:pt idx="3">
-                  <c:v>0</c:v>
+                  <c:v>4</c:v>
                 </c:pt>
                 <c:pt idx="4">
-                  <c:v>4</c:v>
+                  <c:v>4.1</c:v>
                 </c:pt>
                 <c:pt idx="5">
-                  <c:v>4.1</c:v>
+                  <c:v>0</c:v>
                 </c:pt>
                 <c:pt idx="6">
                   <c:v>0</c:v>
@@ -1222,13 +1226,13 @@
                     <c:v>Nutri H</c:v>
                   </c:pt>
                   <c:pt idx="3">
-                    <c:v>AndiBite pack de 12</c:v>
+                    <c:v>Fika</c:v>
                   </c:pt>
                   <c:pt idx="4">
-                    <c:v>Fika</c:v>
+                    <c:v>Mamalama</c:v>
                   </c:pt>
                   <c:pt idx="5">
-                    <c:v>Mamalama</c:v>
+                    <c:v>AndiBite pack de 12</c:v>
                   </c:pt>
                   <c:pt idx="6">
                     <c:v>AndiBite pack de 6</c:v>
@@ -1253,16 +1257,16 @@
                   <c:v>0</c:v>
                 </c:pt>
                 <c:pt idx="3">
-                  <c:v>3.91</c:v>
+                  <c:v>0</c:v>
                 </c:pt>
                 <c:pt idx="4">
                   <c:v>0</c:v>
                 </c:pt>
                 <c:pt idx="5">
-                  <c:v>0</c:v>
+                  <c:v>4.16</c:v>
                 </c:pt>
                 <c:pt idx="6">
-                  <c:v>4.15</c:v>
+                  <c:v>4.48</c:v>
                 </c:pt>
               </c:numCache>
             </c:numRef>
@@ -2367,13 +2371,13 @@
               <c:numCache>
                 <c:ptCount val="3"/>
                 <c:pt idx="0">
-                  <c:v>137013</c:v>
+                  <c:v>146635</c:v>
                 </c:pt>
                 <c:pt idx="1">
-                  <c:v>78444</c:v>
+                  <c:v>83556</c:v>
                 </c:pt>
                 <c:pt idx="2">
-                  <c:v>15284</c:v>
+                  <c:v>16340</c:v>
                 </c:pt>
               </c:numCache>
             </c:numRef>
@@ -2565,40 +2569,40 @@
                 <c:formatCode>General</c:formatCode>
                 <c:ptCount val="12"/>
                 <c:pt idx="0">
-                  <c:v>3986</c:v>
+                  <c:v>4286</c:v>
                 </c:pt>
                 <c:pt idx="1">
-                  <c:v>13747</c:v>
+                  <c:v>14865</c:v>
                 </c:pt>
                 <c:pt idx="2">
-                  <c:v>17010</c:v>
+                  <c:v>18280</c:v>
                 </c:pt>
                 <c:pt idx="3">
-                  <c:v>16220</c:v>
+                  <c:v>17333</c:v>
                 </c:pt>
                 <c:pt idx="4">
-                  <c:v>17601</c:v>
+                  <c:v>18784</c:v>
                 </c:pt>
                 <c:pt idx="5">
-                  <c:v>17123</c:v>
+                  <c:v>18224</c:v>
                 </c:pt>
                 <c:pt idx="6">
-                  <c:v>16587</c:v>
+                  <c:v>17710</c:v>
                 </c:pt>
                 <c:pt idx="7">
-                  <c:v>22303</c:v>
+                  <c:v>23757</c:v>
                 </c:pt>
                 <c:pt idx="8">
-                  <c:v>24036</c:v>
+                  <c:v>25620</c:v>
                 </c:pt>
                 <c:pt idx="9">
-                  <c:v>25305</c:v>
+                  <c:v>26901</c:v>
                 </c:pt>
                 <c:pt idx="10">
-                  <c:v>24532</c:v>
+                  <c:v>26062</c:v>
                 </c:pt>
                 <c:pt idx="11">
-                  <c:v>32291</c:v>
+                  <c:v>34709</c:v>
                 </c:pt>
               </c:numCache>
             </c:numRef>
@@ -2863,16 +2867,16 @@
                 <c:formatCode>General</c:formatCode>
                 <c:ptCount val="5"/>
                 <c:pt idx="0">
-                  <c:v>0.34</c:v>
+                  <c:v>0.41</c:v>
                 </c:pt>
                 <c:pt idx="1">
-                  <c:v>1.06</c:v>
+                  <c:v>1.41</c:v>
                 </c:pt>
                 <c:pt idx="2">
-                  <c:v>1.79</c:v>
+                  <c:v>1.83</c:v>
                 </c:pt>
                 <c:pt idx="3">
-                  <c:v>2.4</c:v>
+                  <c:v>3.63</c:v>
                 </c:pt>
                 <c:pt idx="4">
                   <c:v>2.7</c:v>
@@ -3118,7 +3122,7 @@
                 <c:formatCode>General</c:formatCode>
                 <c:ptCount val="1"/>
                 <c:pt idx="0">
-                  <c:v>8.29</c:v>
+                  <c:v>9.98</c:v>
                 </c:pt>
               </c:numCache>
             </c:numRef>
@@ -3190,7 +3194,7 @@
                 <c:formatCode>General</c:formatCode>
                 <c:ptCount val="1"/>
                 <c:pt idx="0">
-                  <c:v>2.62</c:v>
+                  <c:v>2.69</c:v>
                 </c:pt>
               </c:numCache>
             </c:numRef>
@@ -3262,7 +3266,7 @@
                 <c:formatCode>General</c:formatCode>
                 <c:ptCount val="1"/>
                 <c:pt idx="0">
-                  <c:v>11.12</c:v>
+                  <c:v>10.97</c:v>
                 </c:pt>
               </c:numCache>
             </c:numRef>
@@ -3445,7 +3449,7 @@
                 </a:solidFill>
                 <a:latin typeface="+mn-lt"/>
               </a:rPr>
-              <a:t>Inversión inicial: S/37,894</a:t>
+              <a:t>Inversión inicial: S/45,358</a:t>
             </a:r>
           </a:p>
         </c:rich>
@@ -3740,7 +3744,7 @@
                   <c:v>Imprevistos</c:v>
                 </c:pt>
                 <c:pt idx="5">
-                  <c:v>Marca</c:v>
+                  <c:v>Marca y app</c:v>
                 </c:pt>
               </c:strCache>
             </c:strRef>
@@ -3751,7 +3755,7 @@
               <c:numCache>
                 <c:ptCount val="6"/>
                 <c:pt idx="0">
-                  <c:v>18369</c:v>
+                  <c:v>19155</c:v>
                 </c:pt>
                 <c:pt idx="1">
                   <c:v>4838</c:v>
@@ -3763,10 +3767,10 @@
                   <c:v>3741</c:v>
                 </c:pt>
                 <c:pt idx="4">
-                  <c:v>3445</c:v>
+                  <c:v>4123</c:v>
                 </c:pt>
                 <c:pt idx="5">
-                  <c:v>1250</c:v>
+                  <c:v>7250</c:v>
                 </c:pt>
               </c:numCache>
             </c:numRef>
@@ -3845,7 +3849,7 @@
                 </a:solidFill>
                 <a:latin typeface="+mn-lt"/>
               </a:rPr>
-              <a:t>Costos de operar al mes (promedio): S/6,326</a:t>
+              <a:t>Costos de operar al mes (promedio): S/6,576</a:t>
             </a:r>
           </a:p>
         </c:rich>
@@ -3950,6 +3954,16 @@
             <c:bubble3D val="0"/>
             <c:spPr>
               <a:solidFill>
+                <a:srgbClr val="4F7CAC"/>
+              </a:solidFill>
+              <a:effectLst/>
+            </c:spPr>
+          </c:dPt>
+          <c:dPt>
+            <c:idx val="7"/>
+            <c:bubble3D val="0"/>
+            <c:spPr>
+              <a:solidFill>
                 <a:srgbClr val="B9A089"/>
               </a:solidFill>
               <a:effectLst/>
@@ -4108,6 +4122,31 @@
             </c:dLbl>
             <c:dLbl>
               <c:idx val="6"/>
+              <c:numFmt formatCode="&quot;S/&quot;#,##0" sourceLinked="0"/>
+              <c:spPr/>
+              <c:txPr>
+                <a:bodyPr/>
+                <a:lstStyle/>
+                <a:p>
+                  <a:pPr>
+                    <a:defRPr sz="1000" b="1" i="0" u="none" strike="noStrike">
+                      <a:solidFill>
+                        <a:srgbClr val="FFFFFF"/>
+                      </a:solidFill>
+                      <a:latin typeface="+mn-lt"/>
+                    </a:defRPr>
+                  </a:pPr>
+                </a:p>
+              </c:txPr>
+              <c:showLegendKey val="0"/>
+              <c:showVal val="1"/>
+              <c:showCatName val="0"/>
+              <c:showSerName val="0"/>
+              <c:showPercent val="0"/>
+              <c:showBubbleSize val="0"/>
+            </c:dLbl>
+            <c:dLbl>
+              <c:idx val="7"/>
               <c:numFmt formatCode="&quot;S/&quot;#,##0" sourceLinked="0"/>
               <c:spPr/>
               <c:txPr>
@@ -4156,9 +4195,9 @@
           </c:dLbls>
           <c:cat>
             <c:strRef>
-              <c:f>Sheet1!$A$2:$A$8</c:f>
+              <c:f>Sheet1!$A$2:$A$9</c:f>
               <c:strCache>
-                <c:ptCount val="7"/>
+                <c:ptCount val="8"/>
                 <c:pt idx="0">
                   <c:v>Vendedores de stand</c:v>
                 </c:pt>
@@ -4178,6 +4217,9 @@
                   <c:v>Ferias</c:v>
                 </c:pt>
                 <c:pt idx="6">
+                  <c:v>App Andi</c:v>
+                </c:pt>
+                <c:pt idx="7">
                   <c:v>Depreciación</c:v>
                 </c:pt>
               </c:strCache>
@@ -4185,9 +4227,9 @@
           </c:cat>
           <c:val>
             <c:numRef>
-              <c:f>Sheet1!$B$2:$B$8</c:f>
+              <c:f>Sheet1!$B$2:$B$9</c:f>
               <c:numCache>
-                <c:ptCount val="7"/>
+                <c:ptCount val="8"/>
                 <c:pt idx="0">
                   <c:v>1973</c:v>
                 </c:pt>
@@ -4207,6 +4249,9 @@
                   <c:v>450</c:v>
                 </c:pt>
                 <c:pt idx="6">
+                  <c:v>250</c:v>
+                </c:pt>
+                <c:pt idx="7">
                   <c:v>134</c:v>
                 </c:pt>
               </c:numCache>
@@ -4479,7 +4524,7 @@
               <c:strCache>
                 <c:ptCount val="1"/>
                 <c:pt idx="0">
-                  <c:v>Punto de equilibrio (2,592)</c:v>
+                  <c:v>Punto de equilibrio (3,035)</c:v>
                 </c:pt>
               </c:strCache>
             </c:strRef>
@@ -4592,40 +4637,40 @@
                 <c:formatCode>General</c:formatCode>
                 <c:ptCount val="12"/>
                 <c:pt idx="0">
-                  <c:v>2592</c:v>
+                  <c:v>3035</c:v>
                 </c:pt>
                 <c:pt idx="1">
-                  <c:v>2592</c:v>
+                  <c:v>3035</c:v>
                 </c:pt>
                 <c:pt idx="2">
-                  <c:v>2592</c:v>
+                  <c:v>3035</c:v>
                 </c:pt>
                 <c:pt idx="3">
-                  <c:v>2592</c:v>
+                  <c:v>3035</c:v>
                 </c:pt>
                 <c:pt idx="4">
-                  <c:v>2592</c:v>
+                  <c:v>3035</c:v>
                 </c:pt>
                 <c:pt idx="5">
-                  <c:v>2592</c:v>
+                  <c:v>3035</c:v>
                 </c:pt>
                 <c:pt idx="6">
-                  <c:v>2592</c:v>
+                  <c:v>3035</c:v>
                 </c:pt>
                 <c:pt idx="7">
-                  <c:v>2592</c:v>
+                  <c:v>3035</c:v>
                 </c:pt>
                 <c:pt idx="8">
-                  <c:v>2592</c:v>
+                  <c:v>3035</c:v>
                 </c:pt>
                 <c:pt idx="9">
-                  <c:v>2592</c:v>
+                  <c:v>3035</c:v>
                 </c:pt>
                 <c:pt idx="10">
-                  <c:v>2592</c:v>
+                  <c:v>3035</c:v>
                 </c:pt>
                 <c:pt idx="11">
-                  <c:v>2592</c:v>
+                  <c:v>3035</c:v>
                 </c:pt>
               </c:numCache>
             </c:numRef>
@@ -5187,7 +5232,7 @@
           <a:p>
             <a:r>
               <a:rPr lang="en-US" dirty="0"/>
-              <a:t>Presentamos los trabajos de campo 5 a 8 de AndiBite, el mini brownie de 20 g con sangrecita. Todo sale de la misma base: el público reformulado (padres conscientes y planificados, NSE A/B), el costeo con maquila y los precios confirmados por el equipo el 9 de octubre de 2026 (pack de 6 a S/24.90).</a:t>
+              <a:t>Presentamos los trabajos de campo 5 a 8 de AndiBite, el mini brownie de 20 g con sangrecita. Todo sale de la misma base: el público reformulado (padres conscientes y planificados, NSE A/B), el costeo con maquila y los precios confirmados por el equipo el 10 de octubre de 2026 (unidad a S/6.00 y pack de 6 a S/27.90 en el stand). La innovación tecnológica es la app Andi, Misión Hierro, que viene con cada envase.</a:t>
             </a:r>
             <a:endParaRPr lang="en-US" dirty="0"/>
           </a:p>
@@ -5275,7 +5320,7 @@
           <a:p>
             <a:r>
               <a:rPr lang="en-US" dirty="0"/>
-              <a:t>Las cinco fases del canal según Osterwalder. Por indicación de la profesora, la venta física es el mejor escenario: el focus 1 mostró que sin prueba del niño no hay compra, y en el stand el niño prueba delante del padre. La compra se cierra en el stand (fase en rojo) y la recompra llega por WhatsApp con un recordatorio, sin suscripción. Canal directo (sesión 05: sin intermediarios, más esfuerzo y más control) frente a canal indirecto (minoristas que venden por nosotros). Unidades del año 1 (Excel, hoja Mensual): stands y carritos 22,625; WhatsApp 9,176; colegios 9,165; ferias 8,100; naturistas 3,720.</a:t>
+              <a:t>Las cinco fases del canal según Osterwalder. Por indicación de la profesora, la venta física es el mejor escenario: el focus 1 mostró que sin prueba del niño no hay compra, y en el stand el niño prueba delante del padre. La compra se cierra en el stand (fase en rojo). En la posventa, el padre escanea el QR del envase, ve en la app el hierro medido de su lote y recibe el aviso de recompra, que abre WhatsApp con el pedido listo, sin suscripción. Canal directo (sesión 05: sin intermediarios, más esfuerzo y más control) frente a canal indirecto (minoristas que venden por nosotros). Unidades del año 1 (Excel, hoja Mensual): stands y carritos 22,625; WhatsApp 9,176; colegios 9,165; ferias 8,100; naturistas 3,720.</a:t>
             </a:r>
             <a:endParaRPr lang="en-US" dirty="0"/>
           </a:p>
@@ -5363,7 +5408,7 @@
           <a:p>
             <a:r>
               <a:rPr lang="en-US" dirty="0"/>
-              <a:t>Criterios: margen por brownie (contribución por unidad del Excel antes de alquiler y personal: stand S/2.39, feria S/2.48, WhatsApp S/1.13, quiosco S/0.99, naturista S/0.89), control del mensaje, costo de entrada, alcance del segmento y prueba del niño, que según el focus 1 es la condición para comprar. La góndola del supermercado se queda con 20 a 40 % y paga a 30-90 días: entra en el año 2.</a:t>
+              <a:t>Criterios: margen por brownie (contribución por unidad del Excel antes de alquiler y personal: stand S/2.43, feria S/2.54, WhatsApp S/1.07, quiosco S/0.68, naturista S/0.61), control del mensaje, costo de entrada, alcance del segmento y prueba del niño, que según el focus 1 es la condición para comprar. La góndola del supermercado se queda con 20 a 40 % y paga a 30-90 días: entra en el año 2.</a:t>
             </a:r>
             <a:endParaRPr lang="en-US" dirty="0"/>
           </a:p>
@@ -5627,7 +5672,7 @@
           <a:p>
             <a:r>
               <a:rPr lang="en-US" dirty="0"/>
-              <a:t>Los seis tipos de relación de Osterwalder y cómo los usa AndiBite. Las tres fuertes (asistencia personal por WhatsApp, recordatorio automático de recompra y comunidad de mamás embajadoras) sostienen la recompra; las de apoyo crecen con el volumen. Con los colegios y naturistas la relación es exclusiva: un socio responde por cada cuenta.</a:t>
+              <a:t>Los seis tipos de relación de Osterwalder y cómo los usa AndiBite. Las fuertes (asistencia personal en el stand, autoservicio y servicio automático con la app Andi, Misión Hierro, y comunidad de mamás embajadoras) sostienen la recompra; las de apoyo crecen con el volumen. La app calcula cuándo se acaba el pack según cuántos come el niño a la semana y avisa al padre (documento 09). Con los colegios y naturistas la relación es exclusiva: un socio responde por cada cuenta.</a:t>
             </a:r>
             <a:endParaRPr lang="en-US" dirty="0"/>
           </a:p>
@@ -5715,7 +5760,7 @@
           <a:p>
             <a:r>
               <a:rPr lang="en-US" dirty="0"/>
-              <a:t>Captar: en el stand el niño prueba gratis delante del padre, que compra ahí mismo; la caja de 3 sabores (S/12) se lleva para la semana. Fidelizar: recordatorio por WhatsApp cuando el pack está por acabarse (unos 12 días después de la compra), sin suscripción ni compromiso. Crecer: mamá embajadora por salón y paso al pack de 12. Metas del modelo: 80 brownies por día en cada punto, 35 % de lo vendido en físico vuelve por WhatsApp y 3 puntos de venta desde agosto de 2027.
+              <a:t>Captar: en el stand el niño prueba gratis delante del padre, que compra ahí mismo; la caja de 3 sabores (S/12) se lleva para la semana. Fidelizar: la app Andi, Misión Hierro avisa cuando el pack está por acabarse y abre WhatsApp con el pedido listo, sin suscripción; además da el semáforo de hierro y el plan de loncheras de la semana. Crecer: mamá embajadora por salón y paso al pack de 12. Metas del modelo: 80 brownies por día en cada punto, 35 % de lo vendido en físico vuelve por WhatsApp y 3 puntos de venta desde agosto de 2027.
 IMAGEN 3 — prompt para Nano Banana (proporción 9:16 · adjuntar la foto del empaque):
 Use the attached AndiBite package image only as a reference for the brand colors and the product. Top-down flat-lay photo of an open children's school lunchbox on a light wooden table: one mini chocolate brownie (about 5 x 3 cm, fudgy, dark cocoa color, crackly top) inside a small clear individual bag, fresh strawberries and banana slices in a small container, a reusable water bottle and a folded cloth napkin. Next to the lunchbox, the AndiBite stand-up pouch from the reference, slightly out of focus, label turned partly away. Soft natural morning light, clean food styling, warm palette of cream and chocolate brown with brick red accents. Vertical 9:16 composition, lunchbox centered, calm empty area at the top. Do not invent or rewrite any text on the package, no extra logos, no watermark.</a:t>
             </a:r>
@@ -5805,7 +5850,7 @@
           <a:p>
             <a:r>
               <a:rPr lang="en-US" dirty="0"/>
-              <a:t>Tipos de ingreso (Osterwalder): venta de activos en stands y carritos, en ferias y eventos, y por WhatsApp; y venta mayorista B2B. Porcentajes sobre las ventas con IGV del año 1 (S/230,740, enero a diciembre de 2027), hoja Proyeccion del Excel. Mecanismo de precio: fijo por lista, con descuento por volumen. Precios confirmados por el equipo el 9 de octubre de 2026.</a:t>
+              <a:t>Tipos de ingreso (Osterwalder): venta de activos en stands y carritos, en ferias y eventos, y por WhatsApp; y venta mayorista B2B. Porcentajes sobre las ventas con IGV del año 1 (S/246,531, enero a diciembre de 2027), hoja Proyeccion del Excel. Mecanismo de precio: fijo por lista, con descuento por volumen. Precios confirmados por el equipo el 10 de octubre de 2026: suben para cubrir la sangrecita en polvo, el análisis de hierro de cada lote y la app.</a:t>
             </a:r>
             <a:endParaRPr lang="en-US" dirty="0"/>
           </a:p>
@@ -5893,7 +5938,7 @@
           <a:p>
             <a:r>
               <a:rPr lang="en-US" dirty="0"/>
-              <a:t>Datos del Excel (hojas Proyeccion y Mensual). En el stand 6 de cada 10 brownies se venden sueltos a S/5.50, por eso la unidad trae el 59 % de los ingresos. Enero es el mes de arranque (un punto y vacaciones); en febrero entra la campaña escolar, en marzo los colegios, en agosto el tercer punto y diciembre sube con las 2 ferias navideñas.</a:t>
+              <a:t>Datos del Excel (hojas Proyeccion y Mensual). En el stand 6 de cada 10 brownies se venden sueltos a S/6.00, por eso la unidad trae el 59 % de los ingresos. Enero es el mes de arranque (un punto y vacaciones); en febrero entra la campaña escolar, en marzo los colegios, en agosto el tercer punto y diciembre sube con las 2 ferias navideñas.</a:t>
             </a:r>
             <a:endParaRPr lang="en-US" dirty="0"/>
           </a:p>
@@ -6069,7 +6114,7 @@
           <a:p>
             <a:r>
               <a:rPr lang="en-US" dirty="0"/>
-              <a:t>Regla de las 3 C (sesión 07): una alianza es clave si cumple 2 o más: conecta con tu cliente, convierte valor en acción y complementa lo que no tienes. Todos los socios cumplen al menos 2. La planta y los proveedores no conectan con el cliente, pero convierten (producen) y complementan (planta con HACCP que no tenemos). Malls, supermercados y ferias cumplen las 3: tienen el público, permiten vender sin local propio y ponen el espacio.</a:t>
+              <a:t>Regla de las 3 C (sesión 07): una alianza es clave si cumple 2 o más: conecta con tu cliente, convierte valor en acción y complementa lo que no tienes. Todos los socios cumplen al menos 2. La planta y los proveedores no conectan con el cliente, pero convierten (producen) y complementan (planta con HACCP que no tenemos). Malls, supermercados y ferias cumplen las 3: tienen el público, permiten vender sin local propio y ponen el espacio. El proveedor de sangrecita de res en polvo liofilizada tiene registro sanitario, así que la planta no manipula sangre cruda. El desarrollador de la app y Google Cloud (servidor y IA del plan de loncheras) complementan lo digital, y la nutricionista y los pediatras conectan y validan.</a:t>
             </a:r>
             <a:endParaRPr lang="en-US" dirty="0"/>
           </a:p>
@@ -6245,7 +6290,7 @@
           <a:p>
             <a:r>
               <a:rPr lang="en-US" dirty="0"/>
-              <a:t>Test de la sesión 07: un recurso es clave si respondes sí a 2 de 3 preguntas: si falta, ¿la idea no funciona?, ¿te diferencia?, ¿es difícil de copiar? La fórmula, la marca con registro sanitario y la base de clientes de WhatsApp pasan las 3. Tipos: físicos, digitales, humanos, financieros e intangibles. La inversión inicial de S/37,894 está en la hoja Inversion del Excel: S/25,000 de los socios y un préstamo de S/13,000 en 24 cuotas.</a:t>
+              <a:t>Test de la sesión 07: un recurso es clave si respondes sí a 2 de 3 preguntas: si falta, ¿la idea no funciona?, ¿te diferencia?, ¿es difícil de copiar? La fórmula, la marca con registro sanitario y la app Andi, Misión Hierro con su base de clientes pasan las 3: la app junta el hierro medido de cada lote con los hábitos de compra de cada familia, algo que un competidor no copia rápido. Tipos: físicos, digitales, humanos, financieros e intangibles. La inversión inicial de S/45,358 está en la hoja Inversion del Excel: S/25,000 de los socios y un préstamo de S/20,500 en 24 cuotas.</a:t>
             </a:r>
             <a:endParaRPr lang="en-US" dirty="0"/>
           </a:p>
@@ -6333,7 +6378,7 @@
           <a:p>
             <a:r>
               <a:rPr lang="en-US" dirty="0"/>
-              <a:t>Sesión 08: toda actividad genera un costo. Tipos de actividad: producción, resolución de problemas y plataforma. Producir cuesta S/0.40 de insumos (sangrecita fresca) y S/0.45 de maquila por brownie; la calidad, S/250 por análisis de lote; vender en stands, S/600 por punto al mes de espacio y S/90 por día de vendedor; las ferias, S/1,800 cada una; la recompra, S/0.80 de delivery por brownie y el coordinador en planilla (S/709 al mes); el contenido, S/900 al mes de marketing.</a:t>
+              <a:t>Sesión 08: toda actividad genera un costo. Tipos de actividad: producción, resolución de problemas y plataforma. Producir cuesta S/0.605 de insumos (sangrecita de res en polvo, comprada lista a S/300 por kg) y S/0.45 de maquila por brownie; la calidad, S/625 por lote (microbiológico S/250 y hierro S/375, que se publica en la app); vender en stands, S/600 por punto al mes de espacio y S/90 por día de vendedor; las ferias, S/1,800 cada una; la recompra, S/0.80 de delivery por brownie y el coordinador en planilla (S/709 al mes); el contenido, S/900 al mes de marketing; y la app, S/250 al mes de servidor y mantenimiento más S/0.04 por código impreso.</a:t>
             </a:r>
             <a:endParaRPr lang="en-US" dirty="0"/>
           </a:p>
@@ -6421,7 +6466,7 @@
           <a:p>
             <a:r>
               <a:rPr lang="en-US" dirty="0"/>
-              <a:t>Hoja Costeo del Excel, opción B (cada brownie en bolsita, dentro del doypack). Precio en stand S/26.00 con IGV = S/22.03 sin IGV. Producción S/8.29: maquila S/2.70 (S/0.45 por brownie), insumos S/2.40 (S/0.40 por brownie, con sangrecita fresca de pollo que la planta cuece), empaque S/1.79, calidad, transporte y almacén S/1.06 y merma S/0.34. Degustación (1 brownie por cada 10 vendidos), movilidad, pasarela de 3 % y renta de 1 %: S/2.62. Contribución S/11.12 por pack, antes del espacio y del vendedor.</a:t>
+              <a:t>Hoja Costeo del Excel, opción B (cada brownie en bolsita, dentro del doypack). Precio en stand S/27.90 con IGV = S/23.64 sin IGV. Producción S/9.98: insumos S/3.63 (S/0.605 por brownie, con sangrecita de res en polvo liofilizada; la planta solo la hidrata), maquila S/2.70 (S/0.45 por brownie), empaque y etiquetas con el código de la app S/1.83, calidad con hierro medido por lote, transporte y almacén S/1.41 y merma S/0.41. Degustación (1 brownie por cada 10 vendidos), movilidad, pasarela de 3 % y renta de 1 %: S/2.69. Contribución S/10.97 por pack, antes del espacio y del vendedor.</a:t>
             </a:r>
             <a:endParaRPr lang="en-US" dirty="0"/>
           </a:p>
@@ -6509,7 +6554,7 @@
           <a:p>
             <a:r>
               <a:rPr lang="en-US" dirty="0"/>
-              <a:t>Hoja Inversion del Excel. Los documentos se consideran listos desde el primer día de ventas (enero de 2027, mes 1): su costo se paga una sola vez dentro de la inversión inicial y no limita la proyección. La póliza de responsabilidad civil para stands cuesta S/600 al año; la tasa del registro sanitario es S/0 con el TUPA 2026. El arranque incluye empaque (S/3,030), stock de enero y febrero (S/4,135), marketing de lanzamiento (S/3,204) y capital de trabajo (S/8,000).</a:t>
+              <a:t>Hoja Inversion del Excel. Los documentos se consideran listos desde el primer día de ventas (enero de 2027, mes 1): su costo se paga una sola vez dentro de la inversión inicial y no limita la proyección. La póliza de responsabilidad civil para stands cuesta S/600 al año; la tasa del registro sanitario es S/0 con el TUPA 2026. El arranque incluye empaque (S/3,150, con los códigos de la app), stock de enero y febrero (S/4,801, al costo con sangrecita en polvo), marketing de lanzamiento (S/3,204) y capital de trabajo (S/8,000). Marca y app suman S/7,250: identidad S/800, fotos S/300, web y dominio S/150 y la app Andi, Misión Hierro S/6,000 (documento 09).</a:t>
             </a:r>
             <a:endParaRPr lang="en-US" dirty="0"/>
           </a:p>
@@ -6597,7 +6642,7 @@
           <a:p>
             <a:r>
               <a:rPr lang="en-US" dirty="0"/>
-              <a:t>Tipos de costo (sesión 08): variables (insumos, maquila, empaque, delivery, pasarela), fijos (administración S/760, coordinador en planilla S/709, marketing S/900 y depreciación S/134: S/2,503 al mes) y de escala (espacio de S/600 y vendedor de S/90 por día por cada punto de venta que se abre). Stands y ferias del año: espacio S/16,800, vendedores S/23,670 y 3 ferias S/5,400. Cada brownie deja S/0.97 después de stands y ferias; el equilibrio es de 2,592 brownies al mes (432 packs de 6). Enero (un punto) y febrero quedan por debajo.</a:t>
+              <a:t>Tipos de costo (sesión 08): variables (insumos, maquila, empaque, delivery, pasarela), fijos (administración S/760, app S/250, coordinador en planilla S/709, marketing S/900 y depreciación S/134: S/2,753 al mes) y de escala (espacio de S/600 y vendedor de S/90 por día por cada punto de venta que se abre). Stands y ferias del año: espacio S/16,800, vendedores S/23,670 y 3 ferias S/5,400. Cada brownie deja S/0.91 después de stands y ferias; el equilibrio es de 3,035 brownies al mes (506 packs de 6). Enero (un punto) y febrero quedan por debajo.</a:t>
             </a:r>
             <a:endParaRPr lang="en-US" dirty="0"/>
           </a:p>
@@ -6685,7 +6730,7 @@
           <a:p>
             <a:r>
               <a:rPr lang="en-US" dirty="0"/>
-              <a:t>Resultado operativo mensual de la opción B (hoja Mensual del Excel), con vendedores en todos los stands y coordinador en planilla. Enero pierde S/2,191 (un solo punto y vacaciones) y febrero S/807 (feria de campaña escolar); desde marzo todos los meses ganan. Del resultado operativo (S/20,938) a la utilidad neta: más S/1,955 de pagos a cuenta ya restados, menos S/3,222 de intereses del préstamo y menos S/1,967 de impuesto a la renta (RMT, 10 %): S/17,704. La inversión de S/37,894 se recupera en el mes 18 (junio de 2028).</a:t>
+              <a:t>Resultado operativo mensual de la opción B (hoja Mensual del Excel), con vendedores en todos los stands y coordinador en planilla. Enero pierde S/2,456 (un solo punto y vacaciones) y febrero S/1,004 (feria de campaña escolar); desde marzo todos los meses ganan. Del resultado operativo (S/14,853) a la utilidad neta: más S/2,089 de pagos a cuenta ya restados, menos S/5,080 de intereses del préstamo y menos S/1,186 de impuesto a la renta (RMT, 10 %): S/10,676. La inversión de S/45,358 se recupera en el mes 24 (diciembre de 2028). Sensibilidad: si las ventas caen 20 %, la caja se vuelve negativa y haría falta una línea de crédito; si suben 20 %, se recupera en el mes 17.</a:t>
             </a:r>
             <a:endParaRPr lang="en-US" dirty="0"/>
           </a:p>
@@ -6773,7 +6818,7 @@
           <a:p>
             <a:r>
               <a:rPr lang="en-US" dirty="0"/>
-              <a:t>Modelo Canvas con los nueve bloques de Osterwalder y Pigneur, actualizado con la venta física como canal principal, los documentos dentro de la inversión inicial y el costeo con maquila. El detalle de cada bloque está en las diapositivas anteriores y en el documento 04-reformulacion/07.</a:t>
+              <a:t>Modelo Canvas con los nueve bloques de Osterwalder y Pigneur, actualizado con la venta física como canal principal, los documentos dentro de la inversión inicial, el costeo con maquila y sangrecita de res en polvo, y la app Andi, Misión Hierro como innovación tecnológica (propuesta de valor, relación, recursos, actividades, socios y costos). El detalle de cada bloque está en las diapositivas anteriores y en el documento 04-reformulacion/07.</a:t>
             </a:r>
             <a:endParaRPr lang="en-US" dirty="0"/>
           </a:p>
@@ -6949,7 +6994,7 @@
           <a:p>
             <a:r>
               <a:rPr lang="en-US" dirty="0"/>
-              <a:t>Value Proposition Canvas de Osterwalder. A la derecha, el perfil del cliente: trabajos, dolores y alegrías, con evidencia de las 10 entrevistas, el focus 1 y datos secundarios (Ipsos 2025, Kantar 2025, ENDES). A la izquierda, el mapa de valor: productos y servicios, aliviadores de dolor y creadores de alegrías. El encaje se detalla en la siguiente diapositiva.</a:t>
+              <a:t>Value Proposition Canvas de Osterwalder. A la derecha, el perfil del cliente: trabajos, dolores y alegrías, con evidencia de las 10 entrevistas, el focus 1 y datos secundarios (Ipsos 2025, Kantar 2025, ENDES). A la izquierda, el mapa de valor: productos y servicios (incluida la app Andi, Misión Hierro), aliviadores de dolor y creadores de alegrías. El encaje se detalla en la siguiente diapositiva.</a:t>
             </a:r>
             <a:endParaRPr lang="en-US" dirty="0"/>
           </a:p>
@@ -7213,7 +7258,7 @@
           <a:p>
             <a:r>
               <a:rPr lang="en-US" dirty="0"/>
-              <a:t>Precios por 20 g consultados el 3 de octubre de 2026 (documento 02): Nutri H S/3.20, Fika S/4.00, Mamalama S/4.10, Siete Dragones S/3.01, Bimbo Nutra Bien S/1.67. AndiBite: pack de 6 a S/24.90 (S/4.15 por brownie) y pack de 12 a S/46.90 (S/3.91). Completar con los datos del store check de La Molina.</a:t>
+              <a:t>La innovación tecnológica que pidió la profesora: una app propia que viene con el producto (documento 09). Es una app web instalable (PWA): el padre escanea el QR del envase y se abre, sin descargar nada. Modo padres: ve el hierro medido en laboratorio de su lote, el semáforo de hierro de la semana frente a una referencia por edad, el plan de loncheras (con IA de Gemini), el recordatorio del control de hemoglobina y la recompra en un clic por WhatsApp. Modo niños: Misión Hierro, con Andi, una llamita exploradora; cuatro juegos que enseñan a combinar hierro con vitamina C, superalimentos andinos, mitos y hábitos, con voz para los que no leen. Lo abre el padre y fija el tiempo de juego. Por la Ley 30021 (art. 8), el modo niño no muestra el producto ni premia la compra; Andi nunca dice "come AndiBite". Solo pedimos apodo y edad del niño (Ley 29733).</a:t>
             </a:r>
             <a:endParaRPr lang="en-US" dirty="0"/>
           </a:p>
@@ -7301,9 +7346,7 @@
           <a:p>
             <a:r>
               <a:rPr lang="en-US" dirty="0"/>
-              <a:t>Cierre con la propuesta de valor en una frase y los tres pasos siguientes: cargar los resultados del focus 2, cotizar los stands (Jockey, Larcomar, La Rambla, Wong, Vivanda) y la maquila, y elegir los dos primeros puntos de venta para enero y febrero de 2027.
-IMAGEN 4 — prompt para Nano Banana (proporción 2:3 · adjuntar la foto del empaque):
-Use the attached AndiBite package image only as a reference for the pouch and colors. Warm candid lifestyle photo of a 7-year-old Peruvian boy in a private school uniform (white polo shirt and navy sweater) sitting on a bench in a school courtyard at recess. He has just opened his lunchbox and smiles while holding a mini chocolate brownie; the AndiBite pouch is visible in the lunchbox with the label partly turned away. Soft daylight, shallow depth of field, background of blurred green trees and classmates. Warm color grading with chocolate brown, cream and brick red accents. Natural and unposed, eye-level camera, vertical 2:3 composition with the boy on the center-left. No text, no extra logos, no watermark.</a:t>
+              <a:t>Recorrido: el padre compra en el stand, escanea el QR del envase, ve el hierro medido de su lote (el dato que pedían Claudia y el 42 % que desconfía de lo envasado), usa el plan de loncheras y el semáforo durante la semana, y cuando el pack se está acabando la app le avisa y abre WhatsApp con el pedido listo. Costos, ya en el Excel v6: S/6,000 de inversión (diseño e ilustración S/1,500, modo padres y servidor S/2,500, modo niños S/1,500, pruebas y publicación S/500); S/250 al mes de Cloud Run, Firestore, IA y mantenimiento; S/0.04 por código impreso con dato variable; y S/375 por el análisis de hierro de cada lote, que se publica en la app. En total restan unos S/7,500 al resultado del año 1, a cambio de sostener el precio de S/6.00 y empujar la recompra.</a:t>
             </a:r>
             <a:endParaRPr lang="en-US" dirty="0"/>
           </a:p>
@@ -7327,6 +7370,184 @@
             <a:fld id="{F7021451-1387-4CA6-816F-3879F97B5CBC}" type="slidenum">
               <a:rPr lang="en-US"/>
               <a:t>31</a:t>
+            </a:fld>
+            <a:endParaRPr lang="en-US"/>
+          </a:p>
+        </p:txBody>
+      </p:sp>
+    </p:spTree>
+    <p:extLst>
+      <p:ext uri="{BB962C8B-B14F-4D97-AF65-F5344CB8AC3E}">
+        <p14:creationId xmlns:p14="http://schemas.microsoft.com/office/powerpoint/2010/main" val="1024086991"/>
+      </p:ext>
+    </p:extLst>
+  </p:cSld>
+  <p:clrMapOvr>
+    <a:masterClrMapping/>
+  </p:clrMapOvr>
+</p:notes>
+</file>
+
+<file path=ppt/notesSlides/notesSlide32.xml><?xml version="1.0" encoding="utf-8"?>
+<p:notes xmlns:a="http://schemas.openxmlformats.org/drawingml/2006/main" xmlns:r="http://schemas.openxmlformats.org/officeDocument/2006/relationships" xmlns:p="http://schemas.openxmlformats.org/presentationml/2006/main">
+  <p:cSld>
+    <p:spTree>
+      <p:nvGrpSpPr>
+        <p:cNvPr id="1" name=""/>
+        <p:cNvGrpSpPr/>
+        <p:nvPr/>
+      </p:nvGrpSpPr>
+      <p:grpSpPr>
+        <a:xfrm>
+          <a:off x="0" y="0"/>
+          <a:ext cx="0" cy="0"/>
+          <a:chOff x="0" y="0"/>
+          <a:chExt cx="0" cy="0"/>
+        </a:xfrm>
+      </p:grpSpPr>
+      <p:sp>
+        <p:nvSpPr>
+          <p:cNvPr id="2" name="Slide Image Placeholder 1"/>
+          <p:cNvSpPr>
+            <a:spLocks noGrp="1" noRot="1" noChangeAspect="1"/>
+          </p:cNvSpPr>
+          <p:nvPr>
+            <p:ph type="sldImg"/>
+          </p:nvPr>
+        </p:nvSpPr>
+        <p:spPr/>
+      </p:sp>
+      <p:sp>
+        <p:nvSpPr>
+          <p:cNvPr id="3" name="Notes Placeholder 2"/>
+          <p:cNvSpPr>
+            <a:spLocks noGrp="1"/>
+          </p:cNvSpPr>
+          <p:nvPr>
+            <p:ph type="body" idx="1"/>
+          </p:nvPr>
+        </p:nvSpPr>
+        <p:spPr/>
+        <p:txBody>
+          <a:bodyPr/>
+          <a:lstStyle/>
+          <a:p>
+            <a:r>
+              <a:rPr lang="en-US" dirty="0"/>
+              <a:t>Precios por 20 g consultados el 3 de octubre de 2026 (documento 02): Nutri H S/3.20, Fika S/4.00, Mamalama S/4.10, Siete Dragones S/3.01, Bimbo Nutra Bien S/1.67. AndiBite por WhatsApp: pack de 6 a S/26.90 (S/4.48 por brownie) y pack de 12 a S/49.90 (S/4.16); en el stand, pack de 6 a S/27.90 (S/4.65). Ningún competidor publica el hierro medido de cada lote ni ofrece una app para la familia. Completar con los datos del store check de La Molina.</a:t>
+            </a:r>
+            <a:endParaRPr lang="en-US" dirty="0"/>
+          </a:p>
+        </p:txBody>
+      </p:sp>
+      <p:sp>
+        <p:nvSpPr>
+          <p:cNvPr id="4" name="Slide Number Placeholder 3"/>
+          <p:cNvSpPr>
+            <a:spLocks noGrp="1"/>
+          </p:cNvSpPr>
+          <p:nvPr>
+            <p:ph type="sldNum" sz="quarter" idx="10"/>
+          </p:nvPr>
+        </p:nvSpPr>
+        <p:spPr/>
+        <p:txBody>
+          <a:bodyPr/>
+          <a:lstStyle/>
+          <a:p>
+            <a:fld id="{F7021451-1387-4CA6-816F-3879F97B5CBC}" type="slidenum">
+              <a:rPr lang="en-US"/>
+              <a:t>32</a:t>
+            </a:fld>
+            <a:endParaRPr lang="en-US"/>
+          </a:p>
+        </p:txBody>
+      </p:sp>
+    </p:spTree>
+    <p:extLst>
+      <p:ext uri="{BB962C8B-B14F-4D97-AF65-F5344CB8AC3E}">
+        <p14:creationId xmlns:p14="http://schemas.microsoft.com/office/powerpoint/2010/main" val="1024086991"/>
+      </p:ext>
+    </p:extLst>
+  </p:cSld>
+  <p:clrMapOvr>
+    <a:masterClrMapping/>
+  </p:clrMapOvr>
+</p:notes>
+</file>
+
+<file path=ppt/notesSlides/notesSlide33.xml><?xml version="1.0" encoding="utf-8"?>
+<p:notes xmlns:a="http://schemas.openxmlformats.org/drawingml/2006/main" xmlns:r="http://schemas.openxmlformats.org/officeDocument/2006/relationships" xmlns:p="http://schemas.openxmlformats.org/presentationml/2006/main">
+  <p:cSld>
+    <p:spTree>
+      <p:nvGrpSpPr>
+        <p:cNvPr id="1" name=""/>
+        <p:cNvGrpSpPr/>
+        <p:nvPr/>
+      </p:nvGrpSpPr>
+      <p:grpSpPr>
+        <a:xfrm>
+          <a:off x="0" y="0"/>
+          <a:ext cx="0" cy="0"/>
+          <a:chOff x="0" y="0"/>
+          <a:chExt cx="0" cy="0"/>
+        </a:xfrm>
+      </p:grpSpPr>
+      <p:sp>
+        <p:nvSpPr>
+          <p:cNvPr id="2" name="Slide Image Placeholder 1"/>
+          <p:cNvSpPr>
+            <a:spLocks noGrp="1" noRot="1" noChangeAspect="1"/>
+          </p:cNvSpPr>
+          <p:nvPr>
+            <p:ph type="sldImg"/>
+          </p:nvPr>
+        </p:nvSpPr>
+        <p:spPr/>
+      </p:sp>
+      <p:sp>
+        <p:nvSpPr>
+          <p:cNvPr id="3" name="Notes Placeholder 2"/>
+          <p:cNvSpPr>
+            <a:spLocks noGrp="1"/>
+          </p:cNvSpPr>
+          <p:nvPr>
+            <p:ph type="body" idx="1"/>
+          </p:nvPr>
+        </p:nvSpPr>
+        <p:spPr/>
+        <p:txBody>
+          <a:bodyPr/>
+          <a:lstStyle/>
+          <a:p>
+            <a:r>
+              <a:rPr lang="en-US" dirty="0"/>
+              <a:t>Cierre con la propuesta de valor en una frase y los tres pasos siguientes: cargar los resultados del focus 2; cotizar la sangrecita de res en polvo a granel y los stands (Jockey, Larcomar, La Rambla, Wong, Vivanda); y probar el prototipo de la app Andi, Misión Hierro con 10 familias en noviembre de 2026.
+IMAGEN 4 — prompt para Nano Banana (proporción 2:3 · adjuntar la foto del empaque):
+Use the attached AndiBite package image only as a reference for the pouch and colors. Warm candid lifestyle photo of a 7-year-old Peruvian boy in a private school uniform (white polo shirt and navy sweater) sitting on a bench in a school courtyard at recess. He has just opened his lunchbox and smiles while holding a mini chocolate brownie; the AndiBite pouch is visible in the lunchbox with the label partly turned away. Soft daylight, shallow depth of field, background of blurred green trees and classmates. Warm color grading with chocolate brown, cream and brick red accents. Natural and unposed, eye-level camera, vertical 2:3 composition with the boy on the center-left. No text, no extra logos, no watermark.</a:t>
+            </a:r>
+            <a:endParaRPr lang="en-US" dirty="0"/>
+          </a:p>
+        </p:txBody>
+      </p:sp>
+      <p:sp>
+        <p:nvSpPr>
+          <p:cNvPr id="4" name="Slide Number Placeholder 3"/>
+          <p:cNvSpPr>
+            <a:spLocks noGrp="1"/>
+          </p:cNvSpPr>
+          <p:nvPr>
+            <p:ph type="sldNum" sz="quarter" idx="10"/>
+          </p:nvPr>
+        </p:nvSpPr>
+        <p:spPr/>
+        <p:txBody>
+          <a:bodyPr/>
+          <a:lstStyle/>
+          <a:p>
+            <a:fld id="{F7021451-1387-4CA6-816F-3879F97B5CBC}" type="slidenum">
+              <a:rPr lang="en-US"/>
+              <a:t>33</a:t>
             </a:fld>
             <a:endParaRPr lang="en-US"/>
           </a:p>
@@ -7657,7 +7878,7 @@
           <a:p>
             <a:r>
               <a:rPr lang="en-US" dirty="0"/>
-              <a:t>Rodrigo Salazar, 42 años, La Molina. Gerente de operaciones; su esposa viaja por trabajo y él arma las loncheras. Ingreso familiar S/18,000 (hipótesis, A2). No busca salud, busca resolver: un pack que dure la semana, que aguante la mochila y que pueda pedir por WhatsApp con recordatorio. El pack de 12 a S/46.90 equivale a S/23.45 por cada 6, dentro de lo que pagaría (S/18 a 24).
+              <a:t>Rodrigo Salazar, 42 años, La Molina. Gerente de operaciones; su esposa viaja por trabajo y él arma las loncheras. Ingreso familiar S/18,000 (hipótesis, A2). No busca salud, busca resolver: un pack que dure la semana, que aguante la mochila y que pueda pedir por WhatsApp con recordatorio. El pack de 12 por WhatsApp a S/49.90 equivale a S/24.95 por cada 6, en el borde de lo que pagaría (S/18 a 24): lo que justifica la diferencia es que la app le arma las loncheras y le avisa antes de que se acabe el pack.
 IMAGEN 2 — prompt para Nano Banana (proporción 3:4):
 Photorealistic editorial portrait of a 42-year-old Peruvian man, an operations manager from La Molina, Lima. Short dark hair with a few grey strands, light stubble, friendly and practical expression, slightly hurried morning energy. He wears a navy quarter-zip sweater over a light blue shirt and a smartwatch. Early morning in a modern home kitchen: he holds his phone in one hand (a chat app on screen, not legible) while closing a child's school lunchbox with the other. Warm morning light, cream walls, wooden counter, small accents of chocolate brown and brick red. 85mm lens, f/2, shallow depth of field, natural skin texture. Vertical 3:4 composition, waist-up framing. No text, no logos, no watermark.</a:t>
             </a:r>
@@ -7835,7 +8056,7 @@
           <a:p>
             <a:r>
               <a:rPr lang="en-US" dirty="0"/>
-              <a:t>Embudo del documento 04 (APEIM 2025, CPI 2026, INEI, Kantar). TAM: todas las loncheras con horneado o snack envasado de niños de 4 a 11 años en Lima y Callao (S/130.9 millones). SAM: niños de NSE A/B en toda Lima a precio premium (S/62.8 millones). Núcleo: NSE A/B de las zonas 6 y 7 de APEIM (S/17.3 millones). SOM del año 1 (enero a diciembre de 2027): 52,786 brownies y S/230,740 con IGV, vendidos sobre todo en stands, carritos y ferias; es apenas el 1.2 % del núcleo. Ajuste de -5 % por el Censo 2025 aplicado en el documento 04.</a:t>
+              <a:t>Embudo del documento 04 (APEIM 2025, CPI 2026, INEI, Kantar). TAM: todas las loncheras con horneado o snack envasado de niños de 4 a 11 años en Lima y Callao (S/130.9 millones). SAM: niños de NSE A/B en toda Lima a precio premium (S/62.8 millones). Núcleo: NSE A/B de las zonas 6 y 7 de APEIM (S/17.3 millones). SOM del año 1 (enero a diciembre de 2027): 52,786 brownies y S/246,531 con IGV, vendidos sobre todo en stands, carritos y ferias; es apenas el 1.4 % del núcleo. Ajuste de -5 % por el Censo 2025 aplicado en el documento 04.</a:t>
             </a:r>
             <a:endParaRPr lang="en-US" dirty="0"/>
           </a:p>
@@ -9513,7 +9734,7 @@
                   <a:schemeClr val="tx1"/>
                 </a:solidFill>
               </a:rPr>
-              <a:t>Unidad a S/5.50 o pack a S/26, con Yape o tarjeta</a:t>
+              <a:t>Unidad a S/6 o pack a S/27.90, con Yape o tarjeta</a:t>
             </a:r>
             <a:endParaRPr lang="en-US" sz="1400" dirty="0"/>
           </a:p>
@@ -9779,7 +10000,7 @@
                   <a:schemeClr val="tx1"/>
                 </a:solidFill>
               </a:rPr>
-              <a:t>Recordatorio de recompra por WhatsApp y QR del lote</a:t>
+              <a:t>App Andi: hierro del lote y aviso de recompra</a:t>
             </a:r>
             <a:endParaRPr lang="en-US" sz="1400" dirty="0"/>
           </a:p>
@@ -14777,11 +14998,11 @@
             <a:avLst/>
           </a:prstGeom>
           <a:solidFill>
-            <a:schemeClr val="accent5"/>
+            <a:schemeClr val="accent1"/>
           </a:solidFill>
           <a:ln w="12700">
             <a:solidFill>
-              <a:schemeClr val="accent5"/>
+              <a:schemeClr val="accent1"/>
             </a:solidFill>
             <a:prstDash val="solid"/>
           </a:ln>
@@ -14864,11 +15085,11 @@
             </a:avLst>
           </a:prstGeom>
           <a:solidFill>
-            <a:schemeClr val="bg2"/>
+            <a:schemeClr val="accent1"/>
           </a:solidFill>
           <a:ln w="9525">
             <a:solidFill>
-              <a:schemeClr val="accent5"/>
+              <a:schemeClr val="accent1"/>
             </a:solidFill>
             <a:prstDash val="solid"/>
           </a:ln>
@@ -14901,10 +15122,10 @@
             <a:r>
               <a:rPr lang="en-US" sz="1000" b="1" dirty="0">
                 <a:solidFill>
-                  <a:schemeClr val="accent2"/>
-                </a:solidFill>
-              </a:rPr>
-              <a:t>APOYO</a:t>
+                  <a:schemeClr val="bg1"/>
+                </a:solidFill>
+              </a:rPr>
+              <a:t>FUERTE</a:t>
             </a:r>
             <a:endParaRPr lang="en-US" sz="1000" dirty="0"/>
           </a:p>
@@ -14940,7 +15161,7 @@
                   <a:schemeClr val="tx1"/>
                 </a:solidFill>
               </a:rPr>
-              <a:t>Catálogo de WhatsApp y link de pago, sin esperar respuesta</a:t>
+              <a:t>App Andi: hierro del lote, loncheras y pedido en un clic</a:t>
             </a:r>
             <a:endParaRPr lang="en-US" sz="1500" dirty="0"/>
           </a:p>
@@ -15158,7 +15379,7 @@
                   <a:schemeClr val="tx1"/>
                 </a:solidFill>
               </a:rPr>
-              <a:t>Recordatorio de recompra por WhatsApp a los 12 días</a:t>
+              <a:t>La app avisa cuando el pack se está acabando</a:t>
             </a:r>
             <a:endParaRPr lang="en-US" sz="1500" dirty="0"/>
           </a:p>
@@ -16150,7 +16371,7 @@
                   <a:schemeClr val="tx1"/>
                 </a:solidFill>
               </a:rPr>
-              <a:t>Recordatorio de recompra por WhatsApp y cambio de sabores en cada pedido</a:t>
+              <a:t>La app Andi avisa la recompra, arma loncheras y mide el hierro de la semana</a:t>
             </a:r>
             <a:endParaRPr lang="en-US" sz="1500" dirty="0"/>
           </a:p>
@@ -16925,7 +17146,7 @@
                   <a:schemeClr val="accent1"/>
                 </a:solidFill>
               </a:rPr>
-              <a:t>49.2 %</a:t>
+              <a:t>50.0 %</a:t>
             </a:r>
             <a:endParaRPr lang="en-US" sz="1400" dirty="0"/>
           </a:p>
@@ -17108,7 +17329,7 @@
                   <a:schemeClr val="accent1"/>
                 </a:solidFill>
               </a:rPr>
-              <a:t>18.1 %</a:t>
+              <a:t>18.4 %</a:t>
             </a:r>
             <a:endParaRPr lang="en-US" sz="1400" dirty="0"/>
           </a:p>
@@ -17291,7 +17512,7 @@
                   <a:schemeClr val="accent1"/>
                 </a:solidFill>
               </a:rPr>
-              <a:t>16.2 %</a:t>
+              <a:t>16.1 %</a:t>
             </a:r>
             <a:endParaRPr lang="en-US" sz="1400" dirty="0"/>
           </a:p>
@@ -17474,7 +17695,7 @@
                   <a:schemeClr val="accent1"/>
                 </a:solidFill>
               </a:rPr>
-              <a:t>16.6 %</a:t>
+              <a:t>15.5 %</a:t>
             </a:r>
             <a:endParaRPr lang="en-US" sz="1400" dirty="0"/>
           </a:p>
@@ -17844,7 +18065,7 @@
                             <a:schemeClr val="tx1"/>
                           </a:solidFill>
                         </a:rPr>
-                        <a:t>S/5.50</a:t>
+                        <a:t>S/6.00</a:t>
                       </a:r>
                       <a:endParaRPr lang="en-US" sz="1400" dirty="0"/>
                     </a:p>
@@ -17905,7 +18126,7 @@
                             <a:schemeClr val="tx1"/>
                           </a:solidFill>
                         </a:rPr>
-                        <a:t>S/26.00</a:t>
+                        <a:t>S/27.90</a:t>
                       </a:r>
                       <a:endParaRPr lang="en-US" sz="1400" dirty="0"/>
                     </a:p>
@@ -17966,7 +18187,7 @@
                             <a:schemeClr val="tx1"/>
                           </a:solidFill>
                         </a:rPr>
-                        <a:t>S/48.00</a:t>
+                        <a:t>S/51.90</a:t>
                       </a:r>
                       <a:endParaRPr lang="en-US" sz="1400" dirty="0"/>
                     </a:p>
@@ -18151,7 +18372,7 @@
                             <a:schemeClr val="tx1"/>
                           </a:solidFill>
                         </a:rPr>
-                        <a:t>S/24.90</a:t>
+                        <a:t>S/26.90</a:t>
                       </a:r>
                       <a:endParaRPr lang="en-US" sz="1400" dirty="0"/>
                     </a:p>
@@ -18212,7 +18433,7 @@
                             <a:schemeClr val="tx1"/>
                           </a:solidFill>
                         </a:rPr>
-                        <a:t>S/46.90</a:t>
+                        <a:t>S/49.90</a:t>
                       </a:r>
                       <a:endParaRPr lang="en-US" sz="1400" dirty="0"/>
                     </a:p>
@@ -18833,7 +19054,7 @@
                   <a:schemeClr val="tx1"/>
                 </a:solidFill>
               </a:rPr>
-              <a:t>En el stand se cobra algo más porque hay alquiler y personal. El pack de 12 premia la compra grande.</a:t>
+              <a:t>Incluye el hierro medido por lote y la app. En el stand se cobra algo más por el alquiler y el personal.</a:t>
             </a:r>
             <a:endParaRPr lang="en-US" sz="1400" dirty="0"/>
           </a:p>
@@ -18996,7 +19217,7 @@
                   <a:schemeClr val="tx2"/>
                 </a:solidFill>
               </a:rPr>
-              <a:t>S/230,700 en el primer año de ventas</a:t>
+              <a:t>S/246,500 en el primer año de ventas</a:t>
             </a:r>
             <a:endParaRPr lang="en-US" sz="3400" dirty="0"/>
           </a:p>
@@ -19260,7 +19481,7 @@
                   <a:schemeClr val="accent1"/>
                 </a:solidFill>
               </a:rPr>
-              <a:t>S/4.37  </a:t>
+              <a:t>S/4.67  </a:t>
             </a:r>
             <a:pPr indent="0" marL="0">
               <a:buNone/>
@@ -20600,7 +20821,7 @@
                   <a:schemeClr val="tx1"/>
                 </a:solidFill>
               </a:rPr>
-              <a:t>Redondos (sangrecita), Makro, empaques</a:t>
+              <a:t>Sangrecita en polvo con RS, Makro, empaques</a:t>
             </a:r>
             <a:endParaRPr lang="en-US" sz="1200" dirty="0"/>
           </a:p>
@@ -21665,7 +21886,7 @@
                   <a:schemeClr val="tx2"/>
                 </a:solidFill>
               </a:rPr>
-              <a:t>Prescriptores</a:t>
+              <a:t>App y prescriptores</a:t>
             </a:r>
             <a:endParaRPr lang="en-US" sz="1600" dirty="0"/>
           </a:p>
@@ -21701,7 +21922,7 @@
                   <a:schemeClr val="tx1"/>
                 </a:solidFill>
               </a:rPr>
-              <a:t>Nutricionista colegiada y 20 pediatras</a:t>
+              <a:t>Desarrollador, Google Cloud, pediatras</a:t>
             </a:r>
             <a:endParaRPr lang="en-US" sz="1200" dirty="0"/>
           </a:p>
@@ -22800,7 +23021,7 @@
                   <a:schemeClr val="accent2"/>
                 </a:solidFill>
               </a:rPr>
-              <a:t>Mapa de valor frente al perfil del cliente</a:t>
+              <a:t>Mapa de valor, app Andi y competencia</a:t>
             </a:r>
             <a:endParaRPr lang="en-US" sz="1500" dirty="0"/>
           </a:p>
@@ -22874,7 +23095,7 @@
                   <a:schemeClr val="bg2"/>
                 </a:solidFill>
               </a:rPr>
-              <a:t>mini brownie de 20 g con sangrecita · 3 sabores · se vende en stands, carritos y ferias, y se recompra por WhatsApp</a:t>
+              <a:t>mini brownie de 20 g con sangrecita · 3 sabores · app Andi en cada envase · se vende en stands y ferias, y se recompra por WhatsApp</a:t>
             </a:r>
             <a:endParaRPr lang="en-US" sz="1600" dirty="0"/>
           </a:p>
@@ -24671,7 +24892,7 @@
                   <a:schemeClr val="tx1"/>
                 </a:solidFill>
               </a:rPr>
-              <a:t>Base de clientes para la recompra por WhatsApp</a:t>
+              <a:t>App Andi, Misión Hierro y base de clientes</a:t>
             </a:r>
             <a:endParaRPr lang="en-US" sz="1500" dirty="0"/>
           </a:p>
@@ -25009,7 +25230,7 @@
                   <a:schemeClr val="tx1"/>
                 </a:solidFill>
               </a:rPr>
-              <a:t>S/37,894 de inversión: socios y préstamo</a:t>
+              <a:t>S/45,358 de inversión: socios y préstamo</a:t>
             </a:r>
             <a:endParaRPr lang="en-US" sz="1500" dirty="0"/>
           </a:p>
@@ -25372,7 +25593,7 @@
                 <a:gridCol w="3566160"/>
                 <a:gridCol w="1856232"/>
               </a:tblGrid>
-              <a:tr h="548640">
+              <a:tr h="512064">
                 <a:tc>
                   <a:txBody>
                     <a:bodyPr/>
@@ -25618,7 +25839,7 @@
                   </a:tcPr>
                 </a:tc>
               </a:tr>
-              <a:tr h="548640">
+              <a:tr h="512064">
                 <a:tc>
                   <a:txBody>
                     <a:bodyPr/>
@@ -25755,7 +25976,7 @@
                             <a:schemeClr val="tx1"/>
                           </a:solidFill>
                         </a:rPr>
-                        <a:t>S/0.85 por brownie</a:t>
+                        <a:t>S/1.06 por brownie</a:t>
                       </a:r>
                       <a:endParaRPr lang="en-US" sz="1400" dirty="0"/>
                     </a:p>
@@ -25864,7 +26085,7 @@
                   </a:tcPr>
                 </a:tc>
               </a:tr>
-              <a:tr h="548640">
+              <a:tr h="512064">
                 <a:tc>
                   <a:txBody>
                     <a:bodyPr/>
@@ -25879,7 +26100,7 @@
                             <a:schemeClr val="tx1"/>
                           </a:solidFill>
                         </a:rPr>
-                        <a:t>Calidad y documentos</a:t>
+                        <a:t>Calidad y hierro medido</a:t>
                       </a:r>
                       <a:endParaRPr lang="en-US" sz="1400" dirty="0"/>
                     </a:p>
@@ -26001,7 +26222,7 @@
                             <a:schemeClr val="tx1"/>
                           </a:solidFill>
                         </a:rPr>
-                        <a:t>S/250 por lote</a:t>
+                        <a:t>S/625 por lote</a:t>
                       </a:r>
                       <a:endParaRPr lang="en-US" sz="1400" dirty="0"/>
                     </a:p>
@@ -26110,7 +26331,7 @@
                   </a:tcPr>
                 </a:tc>
               </a:tr>
-              <a:tr h="548640">
+              <a:tr h="512064">
                 <a:tc>
                   <a:txBody>
                     <a:bodyPr/>
@@ -26356,7 +26577,7 @@
                   </a:tcPr>
                 </a:tc>
               </a:tr>
-              <a:tr h="548640">
+              <a:tr h="512064">
                 <a:tc>
                   <a:txBody>
                     <a:bodyPr/>
@@ -26602,7 +26823,7 @@
                   </a:tcPr>
                 </a:tc>
               </a:tr>
-              <a:tr h="548640">
+              <a:tr h="512064">
                 <a:tc>
                   <a:txBody>
                     <a:bodyPr/>
@@ -26848,7 +27069,7 @@
                   </a:tcPr>
                 </a:tc>
               </a:tr>
-              <a:tr h="548640">
+              <a:tr h="512064">
                 <a:tc>
                   <a:txBody>
                     <a:bodyPr/>
@@ -27094,6 +27315,252 @@
                   </a:tcPr>
                 </a:tc>
               </a:tr>
+              <a:tr h="512064">
+                <a:tc>
+                  <a:txBody>
+                    <a:bodyPr/>
+                    <a:lstStyle/>
+                    <a:p>
+                      <a:pPr indent="0" marL="0">
+                        <a:buNone/>
+                      </a:pPr>
+                      <a:r>
+                        <a:rPr lang="en-US" sz="1400" b="1" dirty="0">
+                          <a:solidFill>
+                            <a:schemeClr val="tx1"/>
+                          </a:solidFill>
+                        </a:rPr>
+                        <a:t>Mantener la app Andi</a:t>
+                      </a:r>
+                      <a:endParaRPr lang="en-US" sz="1400" dirty="0"/>
+                    </a:p>
+                  </a:txBody>
+                  <a:tcPr marL="73152" marR="73152" marT="73152" marB="73152" anchor="ctr">
+                    <a:lnL w="9525" cap="flat" cmpd="sng" algn="ctr">
+                      <a:solidFill>
+                        <a:srgbClr val="E8D8C4"/>
+                      </a:solidFill>
+                      <a:prstDash val="solid"/>
+                      <a:round/>
+                      <a:headEnd type="none" w="med" len="med"/>
+                      <a:tailEnd type="none" w="med" len="med"/>
+                    </a:lnL>
+                    <a:lnR w="9525" cap="flat" cmpd="sng" algn="ctr">
+                      <a:solidFill>
+                        <a:srgbClr val="E8D8C4"/>
+                      </a:solidFill>
+                      <a:prstDash val="solid"/>
+                      <a:round/>
+                      <a:headEnd type="none" w="med" len="med"/>
+                      <a:tailEnd type="none" w="med" len="med"/>
+                    </a:lnR>
+                    <a:lnT w="9525" cap="flat" cmpd="sng" algn="ctr">
+                      <a:solidFill>
+                        <a:srgbClr val="E8D8C4"/>
+                      </a:solidFill>
+                      <a:prstDash val="solid"/>
+                      <a:round/>
+                      <a:headEnd type="none" w="med" len="med"/>
+                      <a:tailEnd type="none" w="med" len="med"/>
+                    </a:lnT>
+                    <a:lnB w="9525" cap="flat" cmpd="sng" algn="ctr">
+                      <a:solidFill>
+                        <a:srgbClr val="E8D8C4"/>
+                      </a:solidFill>
+                      <a:prstDash val="solid"/>
+                      <a:round/>
+                      <a:headEnd type="none" w="med" len="med"/>
+                      <a:tailEnd type="none" w="med" len="med"/>
+                    </a:lnB>
+                    <a:solidFill>
+                      <a:srgbClr val="FFFFFF"/>
+                    </a:solidFill>
+                  </a:tcPr>
+                </a:tc>
+                <a:tc>
+                  <a:txBody>
+                    <a:bodyPr/>
+                    <a:lstStyle/>
+                    <a:p>
+                      <a:pPr indent="0" marL="0">
+                        <a:buNone/>
+                      </a:pPr>
+                      <a:r>
+                        <a:rPr lang="en-US" sz="1300" b="1" dirty="0">
+                          <a:solidFill>
+                            <a:schemeClr val="accent1"/>
+                          </a:solidFill>
+                        </a:rPr>
+                        <a:t>Plataforma</a:t>
+                      </a:r>
+                      <a:endParaRPr lang="en-US" sz="1300" dirty="0"/>
+                    </a:p>
+                  </a:txBody>
+                  <a:tcPr marL="73152" marR="73152" marT="73152" marB="73152" anchor="ctr">
+                    <a:lnL w="9525" cap="flat" cmpd="sng" algn="ctr">
+                      <a:solidFill>
+                        <a:srgbClr val="E8D8C4"/>
+                      </a:solidFill>
+                      <a:prstDash val="solid"/>
+                      <a:round/>
+                      <a:headEnd type="none" w="med" len="med"/>
+                      <a:tailEnd type="none" w="med" len="med"/>
+                    </a:lnL>
+                    <a:lnR w="9525" cap="flat" cmpd="sng" algn="ctr">
+                      <a:solidFill>
+                        <a:srgbClr val="E8D8C4"/>
+                      </a:solidFill>
+                      <a:prstDash val="solid"/>
+                      <a:round/>
+                      <a:headEnd type="none" w="med" len="med"/>
+                      <a:tailEnd type="none" w="med" len="med"/>
+                    </a:lnR>
+                    <a:lnT w="9525" cap="flat" cmpd="sng" algn="ctr">
+                      <a:solidFill>
+                        <a:srgbClr val="E8D8C4"/>
+                      </a:solidFill>
+                      <a:prstDash val="solid"/>
+                      <a:round/>
+                      <a:headEnd type="none" w="med" len="med"/>
+                      <a:tailEnd type="none" w="med" len="med"/>
+                    </a:lnT>
+                    <a:lnB w="9525" cap="flat" cmpd="sng" algn="ctr">
+                      <a:solidFill>
+                        <a:srgbClr val="E8D8C4"/>
+                      </a:solidFill>
+                      <a:prstDash val="solid"/>
+                      <a:round/>
+                      <a:headEnd type="none" w="med" len="med"/>
+                      <a:tailEnd type="none" w="med" len="med"/>
+                    </a:lnB>
+                    <a:solidFill>
+                      <a:srgbClr val="FFFFFF"/>
+                    </a:solidFill>
+                  </a:tcPr>
+                </a:tc>
+                <a:tc>
+                  <a:txBody>
+                    <a:bodyPr/>
+                    <a:lstStyle/>
+                    <a:p>
+                      <a:pPr indent="0" marL="0">
+                        <a:buNone/>
+                      </a:pPr>
+                      <a:r>
+                        <a:rPr lang="en-US" sz="1400" dirty="0">
+                          <a:solidFill>
+                            <a:schemeClr val="tx1"/>
+                          </a:solidFill>
+                        </a:rPr>
+                        <a:t>S/250 al mes + S/0.04 por código</a:t>
+                      </a:r>
+                      <a:endParaRPr lang="en-US" sz="1400" dirty="0"/>
+                    </a:p>
+                  </a:txBody>
+                  <a:tcPr marL="73152" marR="73152" marT="73152" marB="73152" anchor="ctr">
+                    <a:lnL w="9525" cap="flat" cmpd="sng" algn="ctr">
+                      <a:solidFill>
+                        <a:srgbClr val="E8D8C4"/>
+                      </a:solidFill>
+                      <a:prstDash val="solid"/>
+                      <a:round/>
+                      <a:headEnd type="none" w="med" len="med"/>
+                      <a:tailEnd type="none" w="med" len="med"/>
+                    </a:lnL>
+                    <a:lnR w="9525" cap="flat" cmpd="sng" algn="ctr">
+                      <a:solidFill>
+                        <a:srgbClr val="E8D8C4"/>
+                      </a:solidFill>
+                      <a:prstDash val="solid"/>
+                      <a:round/>
+                      <a:headEnd type="none" w="med" len="med"/>
+                      <a:tailEnd type="none" w="med" len="med"/>
+                    </a:lnR>
+                    <a:lnT w="9525" cap="flat" cmpd="sng" algn="ctr">
+                      <a:solidFill>
+                        <a:srgbClr val="E8D8C4"/>
+                      </a:solidFill>
+                      <a:prstDash val="solid"/>
+                      <a:round/>
+                      <a:headEnd type="none" w="med" len="med"/>
+                      <a:tailEnd type="none" w="med" len="med"/>
+                    </a:lnT>
+                    <a:lnB w="9525" cap="flat" cmpd="sng" algn="ctr">
+                      <a:solidFill>
+                        <a:srgbClr val="E8D8C4"/>
+                      </a:solidFill>
+                      <a:prstDash val="solid"/>
+                      <a:round/>
+                      <a:headEnd type="none" w="med" len="med"/>
+                      <a:tailEnd type="none" w="med" len="med"/>
+                    </a:lnB>
+                    <a:solidFill>
+                      <a:srgbClr val="FFFFFF"/>
+                    </a:solidFill>
+                  </a:tcPr>
+                </a:tc>
+                <a:tc>
+                  <a:txBody>
+                    <a:bodyPr/>
+                    <a:lstStyle/>
+                    <a:p>
+                      <a:pPr indent="0" marL="0">
+                        <a:buNone/>
+                      </a:pPr>
+                      <a:r>
+                        <a:rPr lang="en-US" sz="1300" dirty="0">
+                          <a:solidFill>
+                            <a:schemeClr val="accent2"/>
+                          </a:solidFill>
+                        </a:rPr>
+                        <a:t>Fijo y variable</a:t>
+                      </a:r>
+                      <a:endParaRPr lang="en-US" sz="1300" dirty="0"/>
+                    </a:p>
+                  </a:txBody>
+                  <a:tcPr marL="73152" marR="73152" marT="73152" marB="73152" anchor="ctr">
+                    <a:lnL w="9525" cap="flat" cmpd="sng" algn="ctr">
+                      <a:solidFill>
+                        <a:srgbClr val="E8D8C4"/>
+                      </a:solidFill>
+                      <a:prstDash val="solid"/>
+                      <a:round/>
+                      <a:headEnd type="none" w="med" len="med"/>
+                      <a:tailEnd type="none" w="med" len="med"/>
+                    </a:lnL>
+                    <a:lnR w="9525" cap="flat" cmpd="sng" algn="ctr">
+                      <a:solidFill>
+                        <a:srgbClr val="E8D8C4"/>
+                      </a:solidFill>
+                      <a:prstDash val="solid"/>
+                      <a:round/>
+                      <a:headEnd type="none" w="med" len="med"/>
+                      <a:tailEnd type="none" w="med" len="med"/>
+                    </a:lnR>
+                    <a:lnT w="9525" cap="flat" cmpd="sng" algn="ctr">
+                      <a:solidFill>
+                        <a:srgbClr val="E8D8C4"/>
+                      </a:solidFill>
+                      <a:prstDash val="solid"/>
+                      <a:round/>
+                      <a:headEnd type="none" w="med" len="med"/>
+                      <a:tailEnd type="none" w="med" len="med"/>
+                    </a:lnT>
+                    <a:lnB w="9525" cap="flat" cmpd="sng" algn="ctr">
+                      <a:solidFill>
+                        <a:srgbClr val="E8D8C4"/>
+                      </a:solidFill>
+                      <a:prstDash val="solid"/>
+                      <a:round/>
+                      <a:headEnd type="none" w="med" len="med"/>
+                      <a:tailEnd type="none" w="med" len="med"/>
+                    </a:lnB>
+                    <a:solidFill>
+                      <a:srgbClr val="FBF3E8"/>
+                    </a:solidFill>
+                  </a:tcPr>
+                </a:tc>
+              </a:tr>
             </a:tbl>
           </a:graphicData>
         </a:graphic>
@@ -27106,8 +27573,8 @@
         </p:nvSpPr>
         <p:spPr>
           <a:xfrm>
-            <a:off x="640080" y="2167128"/>
-            <a:ext cx="438912" cy="438912"/>
+            <a:off x="658368" y="2121408"/>
+            <a:ext cx="402336" cy="402336"/>
           </a:xfrm>
           <a:prstGeom prst="ellipse">
             <a:avLst/>
@@ -27139,8 +27606,8 @@
         </p:blipFill>
         <p:spPr>
           <a:xfrm>
-            <a:off x="736641" y="2263689"/>
-            <a:ext cx="245791" cy="245791"/>
+            <a:off x="746882" y="2209922"/>
+            <a:ext cx="225308" cy="225308"/>
           </a:xfrm>
           <a:prstGeom prst="rect">
             <a:avLst/>
@@ -27155,8 +27622,8 @@
         </p:nvSpPr>
         <p:spPr>
           <a:xfrm>
-            <a:off x="640080" y="2715768"/>
-            <a:ext cx="438912" cy="438912"/>
+            <a:off x="658368" y="2633472"/>
+            <a:ext cx="402336" cy="402336"/>
           </a:xfrm>
           <a:prstGeom prst="ellipse">
             <a:avLst/>
@@ -27188,8 +27655,8 @@
         </p:blipFill>
         <p:spPr>
           <a:xfrm>
-            <a:off x="736641" y="2812329"/>
-            <a:ext cx="245791" cy="245791"/>
+            <a:off x="746882" y="2721986"/>
+            <a:ext cx="225308" cy="225308"/>
           </a:xfrm>
           <a:prstGeom prst="rect">
             <a:avLst/>
@@ -27204,8 +27671,8 @@
         </p:nvSpPr>
         <p:spPr>
           <a:xfrm>
-            <a:off x="640080" y="3264408"/>
-            <a:ext cx="438912" cy="438912"/>
+            <a:off x="658368" y="3145536"/>
+            <a:ext cx="402336" cy="402336"/>
           </a:xfrm>
           <a:prstGeom prst="ellipse">
             <a:avLst/>
@@ -27237,8 +27704,8 @@
         </p:blipFill>
         <p:spPr>
           <a:xfrm>
-            <a:off x="736641" y="3360969"/>
-            <a:ext cx="245791" cy="245791"/>
+            <a:off x="746882" y="3234050"/>
+            <a:ext cx="225308" cy="225308"/>
           </a:xfrm>
           <a:prstGeom prst="rect">
             <a:avLst/>
@@ -27253,8 +27720,8 @@
         </p:nvSpPr>
         <p:spPr>
           <a:xfrm>
-            <a:off x="640080" y="3813048"/>
-            <a:ext cx="438912" cy="438912"/>
+            <a:off x="658368" y="3657600"/>
+            <a:ext cx="402336" cy="402336"/>
           </a:xfrm>
           <a:prstGeom prst="ellipse">
             <a:avLst/>
@@ -27286,8 +27753,8 @@
         </p:blipFill>
         <p:spPr>
           <a:xfrm>
-            <a:off x="736641" y="3909609"/>
-            <a:ext cx="245791" cy="245791"/>
+            <a:off x="746882" y="3746114"/>
+            <a:ext cx="225308" cy="225308"/>
           </a:xfrm>
           <a:prstGeom prst="rect">
             <a:avLst/>
@@ -27302,8 +27769,8 @@
         </p:nvSpPr>
         <p:spPr>
           <a:xfrm>
-            <a:off x="640080" y="4361688"/>
-            <a:ext cx="438912" cy="438912"/>
+            <a:off x="658368" y="4169664"/>
+            <a:ext cx="402336" cy="402336"/>
           </a:xfrm>
           <a:prstGeom prst="ellipse">
             <a:avLst/>
@@ -27335,8 +27802,8 @@
         </p:blipFill>
         <p:spPr>
           <a:xfrm>
-            <a:off x="736641" y="4458249"/>
-            <a:ext cx="245791" cy="245791"/>
+            <a:off x="746882" y="4258178"/>
+            <a:ext cx="225308" cy="225308"/>
           </a:xfrm>
           <a:prstGeom prst="rect">
             <a:avLst/>
@@ -27351,8 +27818,8 @@
         </p:nvSpPr>
         <p:spPr>
           <a:xfrm>
-            <a:off x="640080" y="4910328"/>
-            <a:ext cx="438912" cy="438912"/>
+            <a:off x="658368" y="4681728"/>
+            <a:ext cx="402336" cy="402336"/>
           </a:xfrm>
           <a:prstGeom prst="ellipse">
             <a:avLst/>
@@ -27384,8 +27851,8 @@
         </p:blipFill>
         <p:spPr>
           <a:xfrm>
-            <a:off x="736641" y="5006889"/>
-            <a:ext cx="245791" cy="245791"/>
+            <a:off x="746882" y="4770242"/>
+            <a:ext cx="225308" cy="225308"/>
           </a:xfrm>
           <a:prstGeom prst="rect">
             <a:avLst/>
@@ -27400,12 +27867,61 @@
         </p:nvSpPr>
         <p:spPr>
           <a:xfrm>
-            <a:off x="548640" y="5623560"/>
-            <a:ext cx="11091672" cy="548640"/>
+            <a:off x="658368" y="5193792"/>
+            <a:ext cx="402336" cy="402336"/>
+          </a:xfrm>
+          <a:prstGeom prst="ellipse">
+            <a:avLst/>
+          </a:prstGeom>
+          <a:solidFill>
+            <a:schemeClr val="accent1"/>
+          </a:solidFill>
+          <a:ln w="12700">
+            <a:solidFill>
+              <a:schemeClr val="accent1"/>
+            </a:solidFill>
+            <a:prstDash val="solid"/>
+          </a:ln>
+        </p:spPr>
+      </p:sp>
+      <p:pic>
+        <p:nvPicPr>
+          <p:cNvPr id="18" name="Image 6" descr="preencoded.png">    </p:cNvPr>
+          <p:cNvPicPr>
+            <a:picLocks noChangeAspect="1"/>
+          </p:cNvPicPr>
+          <p:nvPr/>
+        </p:nvPicPr>
+        <p:blipFill>
+          <a:blip r:embed="rId7"/>
+          <a:stretch>
+            <a:fillRect/>
+          </a:stretch>
+        </p:blipFill>
+        <p:spPr>
+          <a:xfrm>
+            <a:off x="746882" y="5282306"/>
+            <a:ext cx="225308" cy="225308"/>
+          </a:xfrm>
+          <a:prstGeom prst="rect">
+            <a:avLst/>
+          </a:prstGeom>
+        </p:spPr>
+      </p:pic>
+      <p:sp>
+        <p:nvSpPr>
+          <p:cNvPr id="19" name="Shape 9"/>
+          <p:cNvSpPr/>
+          <p:nvPr/>
+        </p:nvSpPr>
+        <p:spPr>
+          <a:xfrm>
+            <a:off x="548640" y="5779008"/>
+            <a:ext cx="11091672" cy="502920"/>
           </a:xfrm>
           <a:prstGeom prst="roundRect">
             <a:avLst>
-              <a:gd name="adj" fmla="val 50000"/>
+              <a:gd name="adj" fmla="val 49091"/>
             </a:avLst>
           </a:prstGeom>
           <a:solidFill>
@@ -27428,14 +27944,14 @@
       </p:sp>
       <p:sp>
         <p:nvSpPr>
-          <p:cNvPr id="18" name="Text 9"/>
+          <p:cNvPr id="20" name="Text 10"/>
           <p:cNvSpPr txBox="1"/>
           <p:nvPr/>
         </p:nvSpPr>
         <p:spPr>
           <a:xfrm>
-            <a:off x="822960" y="5623560"/>
-            <a:ext cx="10607040" cy="548640"/>
+            <a:off x="822960" y="5779008"/>
+            <a:ext cx="10607040" cy="502920"/>
           </a:xfrm>
           <a:prstGeom prst="rect">
             <a:avLst/>
@@ -27602,7 +28118,7 @@
                   <a:schemeClr val="tx2"/>
                 </a:solidFill>
               </a:rPr>
-              <a:t>El pack de 6 cuesta S/8.29 y en el stand deja S/11.12</a:t>
+              <a:t>El pack de 6 cuesta S/9.98 y en el stand deja S/10.97</a:t>
             </a:r>
             <a:endParaRPr lang="en-US" sz="3400" dirty="0"/>
           </a:p>
@@ -27704,7 +28220,7 @@
                   <a:schemeClr val="accent1"/>
                 </a:solidFill>
               </a:rPr>
-              <a:t>62 %</a:t>
+              <a:t>58 %</a:t>
             </a:r>
             <a:endParaRPr lang="en-US" sz="1400" dirty="0"/>
           </a:p>
@@ -27788,7 +28304,7 @@
                   <a:schemeClr val="accent1"/>
                 </a:solidFill>
               </a:rPr>
-              <a:t>S/1.38</a:t>
+              <a:t>S/1.66</a:t>
             </a:r>
             <a:endParaRPr lang="en-US" sz="1400" dirty="0"/>
           </a:p>
@@ -29636,7 +30152,7 @@
                   <a:schemeClr val="accent3"/>
                 </a:solidFill>
               </a:rPr>
-              <a:t>Socios S/25,000 · préstamo S/13,000</a:t>
+              <a:t>Socios S/25,000 · préstamo S/20,500</a:t>
             </a:r>
             <a:endParaRPr lang="en-US" sz="1400" dirty="0"/>
           </a:p>
@@ -29650,7 +30166,7 @@
                   <a:schemeClr val="bg1"/>
                 </a:solidFill>
               </a:rPr>
-              <a:t>24 cuotas de S/729 (TEA 35 %)</a:t>
+              <a:t>24 cuotas de S/1,150 (TEA 35 %)</a:t>
             </a:r>
             <a:endParaRPr lang="en-US" sz="1400" dirty="0"/>
           </a:p>
@@ -29796,7 +30312,7 @@
                   <a:schemeClr val="tx2"/>
                 </a:solidFill>
               </a:rPr>
-              <a:t>Con 2,592 brownies al mes cubrimos todos los costos</a:t>
+              <a:t>Con 3,035 brownies al mes cubrimos todos los costos</a:t>
             </a:r>
             <a:endParaRPr lang="en-US" sz="3400" dirty="0"/>
           </a:p>
@@ -30026,7 +30542,7 @@
                   <a:schemeClr val="accent2"/>
                 </a:solidFill>
               </a:rPr>
-              <a:t>Con todo el personal operativo pagado. La caja nunca baja de S/3,917, ya con la cuota del préstamo.</a:t>
+              <a:t>Con todo el personal pagado y la app incluida. La caja nunca baja de S/2,650, ya con la cuota del préstamo.</a:t>
             </a:r>
             <a:endParaRPr lang="en-US" sz="1100" dirty="0"/>
           </a:p>
@@ -30096,7 +30612,7 @@
                   <a:schemeClr val="accent1"/>
                 </a:solidFill>
               </a:rPr>
-              <a:t>S/230,740</a:t>
+              <a:t>S/246,531</a:t>
             </a:r>
             <a:endParaRPr lang="en-US" sz="1400" dirty="0"/>
           </a:p>
@@ -30180,7 +30696,7 @@
                   <a:schemeClr val="accent1"/>
                 </a:solidFill>
               </a:rPr>
-              <a:t>S/20,938</a:t>
+              <a:t>S/14,853</a:t>
             </a:r>
             <a:endParaRPr lang="en-US" sz="1400" dirty="0"/>
           </a:p>
@@ -30194,7 +30710,7 @@
                   <a:schemeClr val="accent2"/>
                 </a:solidFill>
               </a:rPr>
-              <a:t>resultado operativo (10.7 %)</a:t>
+              <a:t>resultado operativo (7.1 %)</a:t>
             </a:r>
             <a:endParaRPr lang="en-US" sz="1400" dirty="0"/>
           </a:p>
@@ -30264,7 +30780,7 @@
                   <a:schemeClr val="bg1"/>
                 </a:solidFill>
               </a:rPr>
-              <a:t>S/17,704</a:t>
+              <a:t>S/10,676</a:t>
             </a:r>
             <a:endParaRPr lang="en-US" sz="1400" dirty="0"/>
           </a:p>
@@ -30348,7 +30864,7 @@
                   <a:schemeClr val="accent1"/>
                 </a:solidFill>
               </a:rPr>
-              <a:t>Mes 18</a:t>
+              <a:t>Mes 24</a:t>
             </a:r>
             <a:endParaRPr lang="en-US" sz="1400" dirty="0"/>
           </a:p>
@@ -30362,7 +30878,7 @@
                   <a:schemeClr val="accent2"/>
                 </a:solidFill>
               </a:rPr>
-              <a:t>recuperamos los S/37,894 invertidos</a:t>
+              <a:t>recuperamos los S/45,358 invertidos</a:t>
             </a:r>
             <a:endParaRPr lang="en-US" sz="1400" dirty="0"/>
           </a:p>
@@ -30696,7 +31212,25 @@
                   <a:schemeClr val="tx1"/>
                 </a:solidFill>
               </a:rPr>
-              <a:t>Redondos: sangrecita fresca</a:t>
+              <a:t>Sangrecita en polvo con RS</a:t>
+            </a:r>
+            <a:endParaRPr lang="en-US" sz="1300" dirty="0"/>
+          </a:p>
+          <a:p>
+            <a:pPr marL="127000" indent="-127000">
+              <a:spcAft>
+                <a:spcPts val="400"/>
+              </a:spcAft>
+              <a:buSzPct val="100000"/>
+              <a:buChar char="•"/>
+            </a:pPr>
+            <a:r>
+              <a:rPr lang="en-US" sz="1300" dirty="0">
+                <a:solidFill>
+                  <a:schemeClr val="tx1"/>
+                </a:solidFill>
+              </a:rPr>
+              <a:t>Desarrollador y Google Cloud</a:t>
             </a:r>
             <a:endParaRPr lang="en-US" sz="1300" dirty="0"/>
           </a:p>
@@ -30866,7 +31400,7 @@
                   <a:schemeClr val="tx1"/>
                 </a:solidFill>
               </a:rPr>
-              <a:t>Calidad por lote</a:t>
+              <a:t>Hierro medido por lote</a:t>
             </a:r>
             <a:endParaRPr lang="en-US" sz="1300" dirty="0"/>
           </a:p>
@@ -30902,7 +31436,7 @@
                   <a:schemeClr val="tx1"/>
                 </a:solidFill>
               </a:rPr>
-              <a:t>Recompra por WhatsApp</a:t>
+              <a:t>App y recompra</a:t>
             </a:r>
             <a:endParaRPr lang="en-US" sz="1300" dirty="0"/>
           </a:p>
@@ -31072,7 +31606,7 @@
                   <a:schemeClr val="tx1"/>
                 </a:solidFill>
               </a:rPr>
-              <a:t>Vendedores y coordinador</a:t>
+              <a:t>App Andi y base de clientes</a:t>
             </a:r>
             <a:endParaRPr lang="en-US" sz="1300" dirty="0"/>
           </a:p>
@@ -31090,7 +31624,7 @@
                   <a:schemeClr val="tx1"/>
                 </a:solidFill>
               </a:rPr>
-              <a:t>S/37,894 de inversión</a:t>
+              <a:t>Equipo pagado y S/45,358</a:t>
             </a:r>
             <a:endParaRPr lang="en-US" sz="1300" dirty="0"/>
           </a:p>
@@ -31260,7 +31794,7 @@
                   <a:schemeClr val="bg1"/>
                 </a:solidFill>
               </a:rPr>
-              <a:t>Sin octógono</a:t>
+              <a:t>App para padres y niños</a:t>
             </a:r>
             <a:endParaRPr lang="en-US" sz="1300" dirty="0"/>
           </a:p>
@@ -31448,7 +31982,7 @@
                   <a:schemeClr val="tx1"/>
                 </a:solidFill>
               </a:rPr>
-              <a:t>Asistencia por WhatsApp</a:t>
+              <a:t>App: lote, loncheras y aviso</a:t>
             </a:r>
             <a:endParaRPr lang="en-US" sz="1300" dirty="0"/>
           </a:p>
@@ -31466,7 +32000,7 @@
                   <a:schemeClr val="tx1"/>
                 </a:solidFill>
               </a:rPr>
-              <a:t>Recordatorio de recompra</a:t>
+              <a:t>Asistencia por WhatsApp</a:t>
             </a:r>
             <a:endParaRPr lang="en-US" sz="1300" dirty="0"/>
           </a:p>
@@ -31994,7 +32528,7 @@
                   <a:schemeClr val="tx1"/>
                 </a:solidFill>
               </a:rPr>
-              <a:t>Producción S/1.38 por brownie · fijos S/2,503 al mes</a:t>
+              <a:t>Producción S/1.66 por brownie · fijos S/2,753 al mes, app incluida</a:t>
             </a:r>
             <a:endParaRPr lang="en-US" sz="1300" dirty="0"/>
           </a:p>
@@ -32012,7 +32546,7 @@
                   <a:schemeClr val="tx1"/>
                 </a:solidFill>
               </a:rPr>
-              <a:t>Stands y ferias S/45,870 al año · equilibrio 2,592 brownies al mes</a:t>
+              <a:t>Stands y ferias S/45,870 al año · equilibrio 3,035 brownies al mes</a:t>
             </a:r>
             <a:endParaRPr lang="en-US" sz="1300" dirty="0"/>
           </a:p>
@@ -32146,7 +32680,7 @@
                   <a:schemeClr val="tx1"/>
                 </a:solidFill>
               </a:rPr>
-              <a:t>Stand: unidad S/5.50 · pack de 6 S/26.00 · WhatsApp S/24.90</a:t>
+              <a:t>Stand: unidad S/6.00 · pack de 6 S/27.90 · WhatsApp S/26.90</a:t>
             </a:r>
             <a:endParaRPr lang="en-US" sz="1300" dirty="0"/>
           </a:p>
@@ -32164,7 +32698,7 @@
                   <a:schemeClr val="tx1"/>
                 </a:solidFill>
               </a:rPr>
-              <a:t>Año 1: S/230,740 con IGV · utilidad neta S/17,704</a:t>
+              <a:t>Año 1: S/246,531 con IGV · utilidad neta S/10,676</a:t>
             </a:r>
             <a:endParaRPr lang="en-US" sz="1300" dirty="0"/>
           </a:p>
@@ -32382,7 +32916,7 @@
                   <a:schemeClr val="accent5"/>
                 </a:solidFill>
               </a:rPr>
-              <a:t>Perfil del cliente · Mapa de valor · Encaje dolor-aliviador · Frente a la competencia</a:t>
+              <a:t>Perfil del cliente · Mapa de valor · Encaje · App Andi, Misión Hierro · Competencia</a:t>
             </a:r>
             <a:endParaRPr lang="en-US" sz="1800" dirty="0"/>
           </a:p>
@@ -32790,7 +33324,7 @@
                   <a:schemeClr val="tx1"/>
                 </a:solidFill>
               </a:rPr>
-              <a:t>Pack de 6 (S/26 en stand)</a:t>
+              <a:t>Pack de 6 (S/27.90 en stand)</a:t>
             </a:r>
             <a:endParaRPr lang="en-US" sz="1200" dirty="0"/>
           </a:p>
@@ -32845,6 +33379,24 @@
                 </a:solidFill>
               </a:rPr>
               <a:t>Stand con degustación gratis</a:t>
+            </a:r>
+            <a:endParaRPr lang="en-US" sz="1200" dirty="0"/>
+          </a:p>
+          <a:p>
+            <a:pPr marL="127000" indent="-127000">
+              <a:spcAft>
+                <a:spcPts val="400"/>
+              </a:spcAft>
+              <a:buSzPct val="100000"/>
+              <a:buChar char="•"/>
+            </a:pPr>
+            <a:r>
+              <a:rPr lang="en-US" sz="1200" dirty="0">
+                <a:solidFill>
+                  <a:schemeClr val="tx1"/>
+                </a:solidFill>
+              </a:rPr>
+              <a:t>App Andi, Misión Hierro</a:t>
             </a:r>
             <a:endParaRPr lang="en-US" sz="1200" dirty="0"/>
           </a:p>
@@ -32962,7 +33514,7 @@
                   <a:schemeClr val="tx1"/>
                 </a:solidFill>
               </a:rPr>
-              <a:t>Hierro en mg y QR del lote</a:t>
+              <a:t>Hierro del lote en la app</a:t>
             </a:r>
             <a:endParaRPr lang="en-US" sz="1200" dirty="0"/>
           </a:p>
@@ -32980,7 +33532,7 @@
                   <a:schemeClr val="tx1"/>
                 </a:solidFill>
               </a:rPr>
-              <a:t>Origen andino peruano</a:t>
+              <a:t>Juego educativo de Andi</a:t>
             </a:r>
             <a:endParaRPr lang="en-US" sz="1200" dirty="0"/>
           </a:p>
@@ -33098,7 +33650,7 @@
                   <a:schemeClr val="tx1"/>
                 </a:solidFill>
               </a:rPr>
-              <a:t>Menos de 10 g de azúcar</a:t>
+              <a:t>Loncheras listas en la app</a:t>
             </a:r>
             <a:endParaRPr lang="en-US" sz="1200" dirty="0"/>
           </a:p>
@@ -33116,7 +33668,7 @@
                   <a:schemeClr val="tx1"/>
                 </a:solidFill>
               </a:rPr>
-              <a:t>Porción sellada, sin frío</a:t>
+              <a:t>Aviso antes de que se acabe</a:t>
             </a:r>
             <a:endParaRPr lang="en-US" sz="1200" dirty="0"/>
           </a:p>
@@ -34769,7 +35321,7 @@
                   <a:schemeClr val="bg1"/>
                 </a:solidFill>
               </a:rPr>
-              <a:t>Hierro en mg y QR al laboratorio</a:t>
+              <a:t>Hierro medido del lote en la app</a:t>
             </a:r>
             <a:endParaRPr lang="en-US" sz="1500" dirty="0"/>
           </a:p>
@@ -35061,7 +35613,7 @@
                   <a:schemeClr val="bg1"/>
                 </a:solidFill>
               </a:rPr>
-              <a:t>Tres sabores en el mismo pack</a:t>
+              <a:t>Plan de loncheras en la app</a:t>
             </a:r>
             <a:endParaRPr lang="en-US" sz="1500" dirty="0"/>
           </a:p>
@@ -35683,7 +36235,7 @@
                   <a:schemeClr val="accent1"/>
                 </a:solidFill>
               </a:rPr>
-              <a:t>TRABAJO DE CAMPO 8 · FRENTE A LA COMPETENCIA</a:t>
+              <a:t>TRABAJO DE CAMPO 8 · INNOVACIÓN TECNOLÓGICA</a:t>
             </a:r>
             <a:endParaRPr lang="en-US" sz="1200" dirty="0"/>
           </a:p>
@@ -35721,7 +36273,2568 @@
                   <a:schemeClr val="tx2"/>
                 </a:solidFill>
               </a:rPr>
-              <a:t>Precio de Fika, con hierro medido y entrega en casa</a:t>
+              <a:t>App Andi, Misión Hierro: viene con cada envase</a:t>
+            </a:r>
+            <a:endParaRPr lang="en-US" sz="3400" dirty="0"/>
+          </a:p>
+        </p:txBody>
+      </p:sp>
+      <p:sp>
+        <p:nvSpPr>
+          <p:cNvPr id="4" name="Shape 2"/>
+          <p:cNvSpPr/>
+          <p:nvPr/>
+        </p:nvSpPr>
+        <p:spPr>
+          <a:xfrm>
+            <a:off x="548640" y="1463040"/>
+            <a:ext cx="4343400" cy="4069080"/>
+          </a:xfrm>
+          <a:prstGeom prst="roundRect">
+            <a:avLst>
+              <a:gd name="adj" fmla="val 2697"/>
+            </a:avLst>
+          </a:prstGeom>
+          <a:solidFill>
+            <a:schemeClr val="bg1"/>
+          </a:solidFill>
+          <a:ln w="12700">
+            <a:solidFill>
+              <a:schemeClr val="bg1"/>
+            </a:solidFill>
+            <a:prstDash val="solid"/>
+          </a:ln>
+          <a:effectLst>
+            <a:outerShdw sx="100000" sy="100000" kx="0" ky="0" algn="bl" rotWithShape="0" blurRad="101600" dist="25400" dir="5400000">
+              <a:srgbClr val="7A4A30">
+                <a:alpha val="14000"/>
+              </a:srgbClr>
+            </a:outerShdw>
+          </a:effectLst>
+        </p:spPr>
+      </p:sp>
+      <p:sp>
+        <p:nvSpPr>
+          <p:cNvPr id="5" name="Text 3"/>
+          <p:cNvSpPr txBox="1"/>
+          <p:nvPr/>
+        </p:nvSpPr>
+        <p:spPr>
+          <a:xfrm>
+            <a:off x="822960" y="1645920"/>
+            <a:ext cx="3840480" cy="274320"/>
+          </a:xfrm>
+          <a:prstGeom prst="rect">
+            <a:avLst/>
+          </a:prstGeom>
+          <a:noFill/>
+          <a:ln/>
+        </p:spPr>
+        <p:txBody>
+          <a:bodyPr wrap="square" lIns="0" tIns="0" rIns="0" bIns="0" rtlCol="0" anchor="t"/>
+          <a:lstStyle/>
+          <a:p>
+            <a:pPr indent="0" marL="0">
+              <a:buNone/>
+            </a:pPr>
+            <a:r>
+              <a:rPr lang="en-US" sz="1200" b="1" spc="100" kern="0" dirty="0">
+                <a:solidFill>
+                  <a:schemeClr val="accent1"/>
+                </a:solidFill>
+              </a:rPr>
+              <a:t>MODO PADRES</a:t>
+            </a:r>
+            <a:endParaRPr lang="en-US" sz="1200" dirty="0"/>
+          </a:p>
+        </p:txBody>
+      </p:sp>
+      <p:sp>
+        <p:nvSpPr>
+          <p:cNvPr id="6" name="Text 4"/>
+          <p:cNvSpPr txBox="1"/>
+          <p:nvPr/>
+        </p:nvSpPr>
+        <p:spPr>
+          <a:xfrm>
+            <a:off x="822960" y="1920240"/>
+            <a:ext cx="3840480" cy="384048"/>
+          </a:xfrm>
+          <a:prstGeom prst="rect">
+            <a:avLst/>
+          </a:prstGeom>
+          <a:noFill/>
+          <a:ln/>
+        </p:spPr>
+        <p:txBody>
+          <a:bodyPr wrap="square" lIns="0" tIns="0" rIns="0" bIns="0" rtlCol="0" anchor="t"/>
+          <a:lstStyle/>
+          <a:p>
+            <a:pPr indent="0" marL="0">
+              <a:buNone/>
+            </a:pPr>
+            <a:r>
+              <a:rPr lang="en-US" sz="1900" b="1" dirty="0">
+                <a:solidFill>
+                  <a:schemeClr val="tx2"/>
+                </a:solidFill>
+              </a:rPr>
+              <a:t>Datos que dan confianza</a:t>
+            </a:r>
+            <a:endParaRPr lang="en-US" sz="1900" dirty="0"/>
+          </a:p>
+        </p:txBody>
+      </p:sp>
+      <p:sp>
+        <p:nvSpPr>
+          <p:cNvPr id="7" name="Shape 5"/>
+          <p:cNvSpPr/>
+          <p:nvPr/>
+        </p:nvSpPr>
+        <p:spPr>
+          <a:xfrm>
+            <a:off x="822960" y="2468880"/>
+            <a:ext cx="457200" cy="457200"/>
+          </a:xfrm>
+          <a:prstGeom prst="ellipse">
+            <a:avLst/>
+          </a:prstGeom>
+          <a:solidFill>
+            <a:schemeClr val="accent1"/>
+          </a:solidFill>
+          <a:ln w="12700">
+            <a:solidFill>
+              <a:schemeClr val="accent1"/>
+            </a:solidFill>
+            <a:prstDash val="solid"/>
+          </a:ln>
+        </p:spPr>
+      </p:sp>
+      <p:pic>
+        <p:nvPicPr>
+          <p:cNvPr id="8" name="Image 0" descr="preencoded.png">    </p:cNvPr>
+          <p:cNvPicPr>
+            <a:picLocks noChangeAspect="1"/>
+          </p:cNvPicPr>
+          <p:nvPr/>
+        </p:nvPicPr>
+        <p:blipFill>
+          <a:blip r:embed="rId1"/>
+          <a:stretch>
+            <a:fillRect/>
+          </a:stretch>
+        </p:blipFill>
+        <p:spPr>
+          <a:xfrm>
+            <a:off x="923544" y="2569464"/>
+            <a:ext cx="256032" cy="256032"/>
+          </a:xfrm>
+          <a:prstGeom prst="rect">
+            <a:avLst/>
+          </a:prstGeom>
+        </p:spPr>
+      </p:pic>
+      <p:sp>
+        <p:nvSpPr>
+          <p:cNvPr id="9" name="Text 6"/>
+          <p:cNvSpPr txBox="1"/>
+          <p:nvPr/>
+        </p:nvSpPr>
+        <p:spPr>
+          <a:xfrm>
+            <a:off x="1417320" y="2468880"/>
+            <a:ext cx="3383280" cy="457200"/>
+          </a:xfrm>
+          <a:prstGeom prst="rect">
+            <a:avLst/>
+          </a:prstGeom>
+          <a:noFill/>
+          <a:ln/>
+        </p:spPr>
+        <p:txBody>
+          <a:bodyPr wrap="square" lIns="0" tIns="0" rIns="0" bIns="0" rtlCol="0" anchor="ctr"/>
+          <a:lstStyle/>
+          <a:p>
+            <a:pPr indent="0" marL="0">
+              <a:buNone/>
+            </a:pPr>
+            <a:r>
+              <a:rPr lang="en-US" sz="1500" b="1" dirty="0">
+                <a:solidFill>
+                  <a:schemeClr val="tx1"/>
+                </a:solidFill>
+              </a:rPr>
+              <a:t>Mi lote: hierro medido</a:t>
+            </a:r>
+            <a:endParaRPr lang="en-US" sz="1500" dirty="0"/>
+          </a:p>
+        </p:txBody>
+      </p:sp>
+      <p:sp>
+        <p:nvSpPr>
+          <p:cNvPr id="10" name="Shape 7"/>
+          <p:cNvSpPr/>
+          <p:nvPr/>
+        </p:nvSpPr>
+        <p:spPr>
+          <a:xfrm>
+            <a:off x="822960" y="3072384"/>
+            <a:ext cx="457200" cy="457200"/>
+          </a:xfrm>
+          <a:prstGeom prst="ellipse">
+            <a:avLst/>
+          </a:prstGeom>
+          <a:solidFill>
+            <a:schemeClr val="tx2"/>
+          </a:solidFill>
+          <a:ln w="12700">
+            <a:solidFill>
+              <a:schemeClr val="tx2"/>
+            </a:solidFill>
+            <a:prstDash val="solid"/>
+          </a:ln>
+        </p:spPr>
+      </p:sp>
+      <p:pic>
+        <p:nvPicPr>
+          <p:cNvPr id="11" name="Image 1" descr="preencoded.png">    </p:cNvPr>
+          <p:cNvPicPr>
+            <a:picLocks noChangeAspect="1"/>
+          </p:cNvPicPr>
+          <p:nvPr/>
+        </p:nvPicPr>
+        <p:blipFill>
+          <a:blip r:embed="rId2"/>
+          <a:stretch>
+            <a:fillRect/>
+          </a:stretch>
+        </p:blipFill>
+        <p:spPr>
+          <a:xfrm>
+            <a:off x="923544" y="3172968"/>
+            <a:ext cx="256032" cy="256032"/>
+          </a:xfrm>
+          <a:prstGeom prst="rect">
+            <a:avLst/>
+          </a:prstGeom>
+        </p:spPr>
+      </p:pic>
+      <p:sp>
+        <p:nvSpPr>
+          <p:cNvPr id="12" name="Text 8"/>
+          <p:cNvSpPr txBox="1"/>
+          <p:nvPr/>
+        </p:nvSpPr>
+        <p:spPr>
+          <a:xfrm>
+            <a:off x="1417320" y="3072384"/>
+            <a:ext cx="3383280" cy="457200"/>
+          </a:xfrm>
+          <a:prstGeom prst="rect">
+            <a:avLst/>
+          </a:prstGeom>
+          <a:noFill/>
+          <a:ln/>
+        </p:spPr>
+        <p:txBody>
+          <a:bodyPr wrap="square" lIns="0" tIns="0" rIns="0" bIns="0" rtlCol="0" anchor="ctr"/>
+          <a:lstStyle/>
+          <a:p>
+            <a:pPr indent="0" marL="0">
+              <a:buNone/>
+            </a:pPr>
+            <a:r>
+              <a:rPr lang="en-US" sz="1500" dirty="0">
+                <a:solidFill>
+                  <a:schemeClr val="tx1"/>
+                </a:solidFill>
+              </a:rPr>
+              <a:t>Semáforo de hierro semanal</a:t>
+            </a:r>
+            <a:endParaRPr lang="en-US" sz="1500" dirty="0"/>
+          </a:p>
+        </p:txBody>
+      </p:sp>
+      <p:sp>
+        <p:nvSpPr>
+          <p:cNvPr id="13" name="Shape 9"/>
+          <p:cNvSpPr/>
+          <p:nvPr/>
+        </p:nvSpPr>
+        <p:spPr>
+          <a:xfrm>
+            <a:off x="822960" y="3675888"/>
+            <a:ext cx="457200" cy="457200"/>
+          </a:xfrm>
+          <a:prstGeom prst="ellipse">
+            <a:avLst/>
+          </a:prstGeom>
+          <a:solidFill>
+            <a:schemeClr val="tx2"/>
+          </a:solidFill>
+          <a:ln w="12700">
+            <a:solidFill>
+              <a:schemeClr val="tx2"/>
+            </a:solidFill>
+            <a:prstDash val="solid"/>
+          </a:ln>
+        </p:spPr>
+      </p:sp>
+      <p:pic>
+        <p:nvPicPr>
+          <p:cNvPr id="14" name="Image 2" descr="preencoded.png">    </p:cNvPr>
+          <p:cNvPicPr>
+            <a:picLocks noChangeAspect="1"/>
+          </p:cNvPicPr>
+          <p:nvPr/>
+        </p:nvPicPr>
+        <p:blipFill>
+          <a:blip r:embed="rId3"/>
+          <a:stretch>
+            <a:fillRect/>
+          </a:stretch>
+        </p:blipFill>
+        <p:spPr>
+          <a:xfrm>
+            <a:off x="923544" y="3776472"/>
+            <a:ext cx="256032" cy="256032"/>
+          </a:xfrm>
+          <a:prstGeom prst="rect">
+            <a:avLst/>
+          </a:prstGeom>
+        </p:spPr>
+      </p:pic>
+      <p:sp>
+        <p:nvSpPr>
+          <p:cNvPr id="15" name="Text 10"/>
+          <p:cNvSpPr txBox="1"/>
+          <p:nvPr/>
+        </p:nvSpPr>
+        <p:spPr>
+          <a:xfrm>
+            <a:off x="1417320" y="3675888"/>
+            <a:ext cx="3383280" cy="457200"/>
+          </a:xfrm>
+          <a:prstGeom prst="rect">
+            <a:avLst/>
+          </a:prstGeom>
+          <a:noFill/>
+          <a:ln/>
+        </p:spPr>
+        <p:txBody>
+          <a:bodyPr wrap="square" lIns="0" tIns="0" rIns="0" bIns="0" rtlCol="0" anchor="ctr"/>
+          <a:lstStyle/>
+          <a:p>
+            <a:pPr indent="0" marL="0">
+              <a:buNone/>
+            </a:pPr>
+            <a:r>
+              <a:rPr lang="en-US" sz="1500" dirty="0">
+                <a:solidFill>
+                  <a:schemeClr val="tx1"/>
+                </a:solidFill>
+              </a:rPr>
+              <a:t>Plan de loncheras con IA</a:t>
+            </a:r>
+            <a:endParaRPr lang="en-US" sz="1500" dirty="0"/>
+          </a:p>
+        </p:txBody>
+      </p:sp>
+      <p:sp>
+        <p:nvSpPr>
+          <p:cNvPr id="16" name="Shape 11"/>
+          <p:cNvSpPr/>
+          <p:nvPr/>
+        </p:nvSpPr>
+        <p:spPr>
+          <a:xfrm>
+            <a:off x="822960" y="4279392"/>
+            <a:ext cx="457200" cy="457200"/>
+          </a:xfrm>
+          <a:prstGeom prst="ellipse">
+            <a:avLst/>
+          </a:prstGeom>
+          <a:solidFill>
+            <a:schemeClr val="tx2"/>
+          </a:solidFill>
+          <a:ln w="12700">
+            <a:solidFill>
+              <a:schemeClr val="tx2"/>
+            </a:solidFill>
+            <a:prstDash val="solid"/>
+          </a:ln>
+        </p:spPr>
+      </p:sp>
+      <p:pic>
+        <p:nvPicPr>
+          <p:cNvPr id="17" name="Image 3" descr="preencoded.png">    </p:cNvPr>
+          <p:cNvPicPr>
+            <a:picLocks noChangeAspect="1"/>
+          </p:cNvPicPr>
+          <p:nvPr/>
+        </p:nvPicPr>
+        <p:blipFill>
+          <a:blip r:embed="rId4"/>
+          <a:stretch>
+            <a:fillRect/>
+          </a:stretch>
+        </p:blipFill>
+        <p:spPr>
+          <a:xfrm>
+            <a:off x="923544" y="4379976"/>
+            <a:ext cx="256032" cy="256032"/>
+          </a:xfrm>
+          <a:prstGeom prst="rect">
+            <a:avLst/>
+          </a:prstGeom>
+        </p:spPr>
+      </p:pic>
+      <p:sp>
+        <p:nvSpPr>
+          <p:cNvPr id="18" name="Text 12"/>
+          <p:cNvSpPr txBox="1"/>
+          <p:nvPr/>
+        </p:nvSpPr>
+        <p:spPr>
+          <a:xfrm>
+            <a:off x="1417320" y="4279392"/>
+            <a:ext cx="3383280" cy="457200"/>
+          </a:xfrm>
+          <a:prstGeom prst="rect">
+            <a:avLst/>
+          </a:prstGeom>
+          <a:noFill/>
+          <a:ln/>
+        </p:spPr>
+        <p:txBody>
+          <a:bodyPr wrap="square" lIns="0" tIns="0" rIns="0" bIns="0" rtlCol="0" anchor="ctr"/>
+          <a:lstStyle/>
+          <a:p>
+            <a:pPr indent="0" marL="0">
+              <a:buNone/>
+            </a:pPr>
+            <a:r>
+              <a:rPr lang="en-US" sz="1500" dirty="0">
+                <a:solidFill>
+                  <a:schemeClr val="tx1"/>
+                </a:solidFill>
+              </a:rPr>
+              <a:t>Recordatorio de hemoglobina</a:t>
+            </a:r>
+            <a:endParaRPr lang="en-US" sz="1500" dirty="0"/>
+          </a:p>
+        </p:txBody>
+      </p:sp>
+      <p:sp>
+        <p:nvSpPr>
+          <p:cNvPr id="19" name="Shape 13"/>
+          <p:cNvSpPr/>
+          <p:nvPr/>
+        </p:nvSpPr>
+        <p:spPr>
+          <a:xfrm>
+            <a:off x="822960" y="4882896"/>
+            <a:ext cx="457200" cy="457200"/>
+          </a:xfrm>
+          <a:prstGeom prst="ellipse">
+            <a:avLst/>
+          </a:prstGeom>
+          <a:solidFill>
+            <a:schemeClr val="tx2"/>
+          </a:solidFill>
+          <a:ln w="12700">
+            <a:solidFill>
+              <a:schemeClr val="tx2"/>
+            </a:solidFill>
+            <a:prstDash val="solid"/>
+          </a:ln>
+        </p:spPr>
+      </p:sp>
+      <p:pic>
+        <p:nvPicPr>
+          <p:cNvPr id="20" name="Image 4" descr="preencoded.png">    </p:cNvPr>
+          <p:cNvPicPr>
+            <a:picLocks noChangeAspect="1"/>
+          </p:cNvPicPr>
+          <p:nvPr/>
+        </p:nvPicPr>
+        <p:blipFill>
+          <a:blip r:embed="rId5"/>
+          <a:stretch>
+            <a:fillRect/>
+          </a:stretch>
+        </p:blipFill>
+        <p:spPr>
+          <a:xfrm>
+            <a:off x="923544" y="4983480"/>
+            <a:ext cx="256032" cy="256032"/>
+          </a:xfrm>
+          <a:prstGeom prst="rect">
+            <a:avLst/>
+          </a:prstGeom>
+        </p:spPr>
+      </p:pic>
+      <p:sp>
+        <p:nvSpPr>
+          <p:cNvPr id="21" name="Text 14"/>
+          <p:cNvSpPr txBox="1"/>
+          <p:nvPr/>
+        </p:nvSpPr>
+        <p:spPr>
+          <a:xfrm>
+            <a:off x="1417320" y="4882896"/>
+            <a:ext cx="3383280" cy="457200"/>
+          </a:xfrm>
+          <a:prstGeom prst="rect">
+            <a:avLst/>
+          </a:prstGeom>
+          <a:noFill/>
+          <a:ln/>
+        </p:spPr>
+        <p:txBody>
+          <a:bodyPr wrap="square" lIns="0" tIns="0" rIns="0" bIns="0" rtlCol="0" anchor="ctr"/>
+          <a:lstStyle/>
+          <a:p>
+            <a:pPr indent="0" marL="0">
+              <a:buNone/>
+            </a:pPr>
+            <a:r>
+              <a:rPr lang="en-US" sz="1500" dirty="0">
+                <a:solidFill>
+                  <a:schemeClr val="tx1"/>
+                </a:solidFill>
+              </a:rPr>
+              <a:t>Recompra en un clic</a:t>
+            </a:r>
+            <a:endParaRPr lang="en-US" sz="1500" dirty="0"/>
+          </a:p>
+        </p:txBody>
+      </p:sp>
+      <p:sp>
+        <p:nvSpPr>
+          <p:cNvPr id="22" name="Shape 15"/>
+          <p:cNvSpPr/>
+          <p:nvPr/>
+        </p:nvSpPr>
+        <p:spPr>
+          <a:xfrm>
+            <a:off x="5074920" y="1463040"/>
+            <a:ext cx="4023360" cy="4069080"/>
+          </a:xfrm>
+          <a:prstGeom prst="roundRect">
+            <a:avLst>
+              <a:gd name="adj" fmla="val 2727"/>
+            </a:avLst>
+          </a:prstGeom>
+          <a:solidFill>
+            <a:schemeClr val="tx2"/>
+          </a:solidFill>
+          <a:ln w="12700">
+            <a:solidFill>
+              <a:schemeClr val="tx2"/>
+            </a:solidFill>
+            <a:prstDash val="solid"/>
+          </a:ln>
+          <a:effectLst>
+            <a:outerShdw sx="100000" sy="100000" kx="0" ky="0" algn="bl" rotWithShape="0" blurRad="101600" dist="25400" dir="5400000">
+              <a:srgbClr val="7A4A30">
+                <a:alpha val="14000"/>
+              </a:srgbClr>
+            </a:outerShdw>
+          </a:effectLst>
+        </p:spPr>
+      </p:sp>
+      <p:sp>
+        <p:nvSpPr>
+          <p:cNvPr id="23" name="Text 16"/>
+          <p:cNvSpPr txBox="1"/>
+          <p:nvPr/>
+        </p:nvSpPr>
+        <p:spPr>
+          <a:xfrm>
+            <a:off x="5349240" y="1645920"/>
+            <a:ext cx="3566160" cy="274320"/>
+          </a:xfrm>
+          <a:prstGeom prst="rect">
+            <a:avLst/>
+          </a:prstGeom>
+          <a:noFill/>
+          <a:ln/>
+        </p:spPr>
+        <p:txBody>
+          <a:bodyPr wrap="square" lIns="0" tIns="0" rIns="0" bIns="0" rtlCol="0" anchor="t"/>
+          <a:lstStyle/>
+          <a:p>
+            <a:pPr indent="0" marL="0">
+              <a:buNone/>
+            </a:pPr>
+            <a:r>
+              <a:rPr lang="en-US" sz="1200" b="1" spc="100" kern="0" dirty="0">
+                <a:solidFill>
+                  <a:schemeClr val="accent3"/>
+                </a:solidFill>
+              </a:rPr>
+              <a:t>MODO NIÑOS</a:t>
+            </a:r>
+            <a:endParaRPr lang="en-US" sz="1200" dirty="0"/>
+          </a:p>
+        </p:txBody>
+      </p:sp>
+      <p:sp>
+        <p:nvSpPr>
+          <p:cNvPr id="24" name="Text 17"/>
+          <p:cNvSpPr txBox="1"/>
+          <p:nvPr/>
+        </p:nvSpPr>
+        <p:spPr>
+          <a:xfrm>
+            <a:off x="5349240" y="1920240"/>
+            <a:ext cx="3566160" cy="384048"/>
+          </a:xfrm>
+          <a:prstGeom prst="rect">
+            <a:avLst/>
+          </a:prstGeom>
+          <a:noFill/>
+          <a:ln/>
+        </p:spPr>
+        <p:txBody>
+          <a:bodyPr wrap="square" lIns="0" tIns="0" rIns="0" bIns="0" rtlCol="0" anchor="t"/>
+          <a:lstStyle/>
+          <a:p>
+            <a:pPr indent="0" marL="0">
+              <a:buNone/>
+            </a:pPr>
+            <a:r>
+              <a:rPr lang="en-US" sz="1900" b="1" dirty="0">
+                <a:solidFill>
+                  <a:schemeClr val="bg1"/>
+                </a:solidFill>
+              </a:rPr>
+              <a:t>Aprender jugando con Andi</a:t>
+            </a:r>
+            <a:endParaRPr lang="en-US" sz="1900" dirty="0"/>
+          </a:p>
+        </p:txBody>
+      </p:sp>
+      <p:sp>
+        <p:nvSpPr>
+          <p:cNvPr id="25" name="Shape 18"/>
+          <p:cNvSpPr/>
+          <p:nvPr/>
+        </p:nvSpPr>
+        <p:spPr>
+          <a:xfrm>
+            <a:off x="5349240" y="2468880"/>
+            <a:ext cx="457200" cy="457200"/>
+          </a:xfrm>
+          <a:prstGeom prst="ellipse">
+            <a:avLst/>
+          </a:prstGeom>
+          <a:solidFill>
+            <a:schemeClr val="accent3"/>
+          </a:solidFill>
+          <a:ln w="12700">
+            <a:solidFill>
+              <a:schemeClr val="accent3"/>
+            </a:solidFill>
+            <a:prstDash val="solid"/>
+          </a:ln>
+        </p:spPr>
+      </p:sp>
+      <p:pic>
+        <p:nvPicPr>
+          <p:cNvPr id="26" name="Image 5" descr="preencoded.png">    </p:cNvPr>
+          <p:cNvPicPr>
+            <a:picLocks noChangeAspect="1"/>
+          </p:cNvPicPr>
+          <p:nvPr/>
+        </p:nvPicPr>
+        <p:blipFill>
+          <a:blip r:embed="rId6"/>
+          <a:stretch>
+            <a:fillRect/>
+          </a:stretch>
+        </p:blipFill>
+        <p:spPr>
+          <a:xfrm>
+            <a:off x="5449824" y="2569464"/>
+            <a:ext cx="256032" cy="256032"/>
+          </a:xfrm>
+          <a:prstGeom prst="rect">
+            <a:avLst/>
+          </a:prstGeom>
+        </p:spPr>
+      </p:pic>
+      <p:sp>
+        <p:nvSpPr>
+          <p:cNvPr id="27" name="Text 19"/>
+          <p:cNvSpPr txBox="1"/>
+          <p:nvPr/>
+        </p:nvSpPr>
+        <p:spPr>
+          <a:xfrm>
+            <a:off x="5943600" y="2468880"/>
+            <a:ext cx="3063240" cy="457200"/>
+          </a:xfrm>
+          <a:prstGeom prst="rect">
+            <a:avLst/>
+          </a:prstGeom>
+          <a:noFill/>
+          <a:ln/>
+        </p:spPr>
+        <p:txBody>
+          <a:bodyPr wrap="square" lIns="0" tIns="0" rIns="0" bIns="0" rtlCol="0" anchor="ctr"/>
+          <a:lstStyle/>
+          <a:p>
+            <a:pPr indent="0" marL="0">
+              <a:buNone/>
+            </a:pPr>
+            <a:r>
+              <a:rPr lang="en-US" sz="1500" dirty="0">
+                <a:solidFill>
+                  <a:schemeClr val="bg1"/>
+                </a:solidFill>
+              </a:rPr>
+              <a:t>Arma tu plato fuerte</a:t>
+            </a:r>
+            <a:endParaRPr lang="en-US" sz="1500" dirty="0"/>
+          </a:p>
+        </p:txBody>
+      </p:sp>
+      <p:sp>
+        <p:nvSpPr>
+          <p:cNvPr id="28" name="Shape 20"/>
+          <p:cNvSpPr/>
+          <p:nvPr/>
+        </p:nvSpPr>
+        <p:spPr>
+          <a:xfrm>
+            <a:off x="5349240" y="3072384"/>
+            <a:ext cx="457200" cy="457200"/>
+          </a:xfrm>
+          <a:prstGeom prst="ellipse">
+            <a:avLst/>
+          </a:prstGeom>
+          <a:solidFill>
+            <a:schemeClr val="accent3"/>
+          </a:solidFill>
+          <a:ln w="12700">
+            <a:solidFill>
+              <a:schemeClr val="accent3"/>
+            </a:solidFill>
+            <a:prstDash val="solid"/>
+          </a:ln>
+        </p:spPr>
+      </p:sp>
+      <p:pic>
+        <p:nvPicPr>
+          <p:cNvPr id="29" name="Image 6" descr="preencoded.png">    </p:cNvPr>
+          <p:cNvPicPr>
+            <a:picLocks noChangeAspect="1"/>
+          </p:cNvPicPr>
+          <p:nvPr/>
+        </p:nvPicPr>
+        <p:blipFill>
+          <a:blip r:embed="rId7"/>
+          <a:stretch>
+            <a:fillRect/>
+          </a:stretch>
+        </p:blipFill>
+        <p:spPr>
+          <a:xfrm>
+            <a:off x="5449824" y="3172968"/>
+            <a:ext cx="256032" cy="256032"/>
+          </a:xfrm>
+          <a:prstGeom prst="rect">
+            <a:avLst/>
+          </a:prstGeom>
+        </p:spPr>
+      </p:pic>
+      <p:sp>
+        <p:nvSpPr>
+          <p:cNvPr id="30" name="Text 21"/>
+          <p:cNvSpPr txBox="1"/>
+          <p:nvPr/>
+        </p:nvSpPr>
+        <p:spPr>
+          <a:xfrm>
+            <a:off x="5943600" y="3072384"/>
+            <a:ext cx="3063240" cy="457200"/>
+          </a:xfrm>
+          <a:prstGeom prst="rect">
+            <a:avLst/>
+          </a:prstGeom>
+          <a:noFill/>
+          <a:ln/>
+        </p:spPr>
+        <p:txBody>
+          <a:bodyPr wrap="square" lIns="0" tIns="0" rIns="0" bIns="0" rtlCol="0" anchor="ctr"/>
+          <a:lstStyle/>
+          <a:p>
+            <a:pPr indent="0" marL="0">
+              <a:buNone/>
+            </a:pPr>
+            <a:r>
+              <a:rPr lang="en-US" sz="1500" dirty="0">
+                <a:solidFill>
+                  <a:schemeClr val="bg1"/>
+                </a:solidFill>
+              </a:rPr>
+              <a:t>Memoria andina</a:t>
+            </a:r>
+            <a:endParaRPr lang="en-US" sz="1500" dirty="0"/>
+          </a:p>
+        </p:txBody>
+      </p:sp>
+      <p:sp>
+        <p:nvSpPr>
+          <p:cNvPr id="31" name="Shape 22"/>
+          <p:cNvSpPr/>
+          <p:nvPr/>
+        </p:nvSpPr>
+        <p:spPr>
+          <a:xfrm>
+            <a:off x="5349240" y="3675888"/>
+            <a:ext cx="457200" cy="457200"/>
+          </a:xfrm>
+          <a:prstGeom prst="ellipse">
+            <a:avLst/>
+          </a:prstGeom>
+          <a:solidFill>
+            <a:schemeClr val="accent3"/>
+          </a:solidFill>
+          <a:ln w="12700">
+            <a:solidFill>
+              <a:schemeClr val="accent3"/>
+            </a:solidFill>
+            <a:prstDash val="solid"/>
+          </a:ln>
+        </p:spPr>
+      </p:sp>
+      <p:pic>
+        <p:nvPicPr>
+          <p:cNvPr id="32" name="Image 7" descr="preencoded.png">    </p:cNvPr>
+          <p:cNvPicPr>
+            <a:picLocks noChangeAspect="1"/>
+          </p:cNvPicPr>
+          <p:nvPr/>
+        </p:nvPicPr>
+        <p:blipFill>
+          <a:blip r:embed="rId8"/>
+          <a:stretch>
+            <a:fillRect/>
+          </a:stretch>
+        </p:blipFill>
+        <p:spPr>
+          <a:xfrm>
+            <a:off x="5449824" y="3776472"/>
+            <a:ext cx="256032" cy="256032"/>
+          </a:xfrm>
+          <a:prstGeom prst="rect">
+            <a:avLst/>
+          </a:prstGeom>
+        </p:spPr>
+      </p:pic>
+      <p:sp>
+        <p:nvSpPr>
+          <p:cNvPr id="33" name="Text 23"/>
+          <p:cNvSpPr txBox="1"/>
+          <p:nvPr/>
+        </p:nvSpPr>
+        <p:spPr>
+          <a:xfrm>
+            <a:off x="5943600" y="3675888"/>
+            <a:ext cx="3063240" cy="457200"/>
+          </a:xfrm>
+          <a:prstGeom prst="rect">
+            <a:avLst/>
+          </a:prstGeom>
+          <a:noFill/>
+          <a:ln/>
+        </p:spPr>
+        <p:txBody>
+          <a:bodyPr wrap="square" lIns="0" tIns="0" rIns="0" bIns="0" rtlCol="0" anchor="ctr"/>
+          <a:lstStyle/>
+          <a:p>
+            <a:pPr indent="0" marL="0">
+              <a:buNone/>
+            </a:pPr>
+            <a:r>
+              <a:rPr lang="en-US" sz="1500" dirty="0">
+                <a:solidFill>
+                  <a:schemeClr val="bg1"/>
+                </a:solidFill>
+              </a:rPr>
+              <a:t>¿Verdad o mito?</a:t>
+            </a:r>
+            <a:endParaRPr lang="en-US" sz="1500" dirty="0"/>
+          </a:p>
+        </p:txBody>
+      </p:sp>
+      <p:sp>
+        <p:nvSpPr>
+          <p:cNvPr id="34" name="Shape 24"/>
+          <p:cNvSpPr/>
+          <p:nvPr/>
+        </p:nvSpPr>
+        <p:spPr>
+          <a:xfrm>
+            <a:off x="5349240" y="4279392"/>
+            <a:ext cx="457200" cy="457200"/>
+          </a:xfrm>
+          <a:prstGeom prst="ellipse">
+            <a:avLst/>
+          </a:prstGeom>
+          <a:solidFill>
+            <a:schemeClr val="accent3"/>
+          </a:solidFill>
+          <a:ln w="12700">
+            <a:solidFill>
+              <a:schemeClr val="accent3"/>
+            </a:solidFill>
+            <a:prstDash val="solid"/>
+          </a:ln>
+        </p:spPr>
+      </p:sp>
+      <p:pic>
+        <p:nvPicPr>
+          <p:cNvPr id="35" name="Image 8" descr="preencoded.png">    </p:cNvPr>
+          <p:cNvPicPr>
+            <a:picLocks noChangeAspect="1"/>
+          </p:cNvPicPr>
+          <p:nvPr/>
+        </p:nvPicPr>
+        <p:blipFill>
+          <a:blip r:embed="rId9"/>
+          <a:stretch>
+            <a:fillRect/>
+          </a:stretch>
+        </p:blipFill>
+        <p:spPr>
+          <a:xfrm>
+            <a:off x="5449824" y="4379976"/>
+            <a:ext cx="256032" cy="256032"/>
+          </a:xfrm>
+          <a:prstGeom prst="rect">
+            <a:avLst/>
+          </a:prstGeom>
+        </p:spPr>
+      </p:pic>
+      <p:sp>
+        <p:nvSpPr>
+          <p:cNvPr id="36" name="Text 25"/>
+          <p:cNvSpPr txBox="1"/>
+          <p:nvPr/>
+        </p:nvSpPr>
+        <p:spPr>
+          <a:xfrm>
+            <a:off x="5943600" y="4279392"/>
+            <a:ext cx="3063240" cy="457200"/>
+          </a:xfrm>
+          <a:prstGeom prst="rect">
+            <a:avLst/>
+          </a:prstGeom>
+          <a:noFill/>
+          <a:ln/>
+        </p:spPr>
+        <p:txBody>
+          <a:bodyPr wrap="square" lIns="0" tIns="0" rIns="0" bIns="0" rtlCol="0" anchor="ctr"/>
+          <a:lstStyle/>
+          <a:p>
+            <a:pPr indent="0" marL="0">
+              <a:buNone/>
+            </a:pPr>
+            <a:r>
+              <a:rPr lang="en-US" sz="1500" dirty="0">
+                <a:solidFill>
+                  <a:schemeClr val="bg1"/>
+                </a:solidFill>
+              </a:rPr>
+              <a:t>Ruta de hábitos</a:t>
+            </a:r>
+            <a:endParaRPr lang="en-US" sz="1500" dirty="0"/>
+          </a:p>
+        </p:txBody>
+      </p:sp>
+      <p:sp>
+        <p:nvSpPr>
+          <p:cNvPr id="37" name="Shape 26"/>
+          <p:cNvSpPr/>
+          <p:nvPr/>
+        </p:nvSpPr>
+        <p:spPr>
+          <a:xfrm>
+            <a:off x="5349240" y="4882896"/>
+            <a:ext cx="457200" cy="457200"/>
+          </a:xfrm>
+          <a:prstGeom prst="ellipse">
+            <a:avLst/>
+          </a:prstGeom>
+          <a:solidFill>
+            <a:schemeClr val="accent5"/>
+          </a:solidFill>
+          <a:ln w="12700">
+            <a:solidFill>
+              <a:schemeClr val="accent5"/>
+            </a:solidFill>
+            <a:prstDash val="solid"/>
+          </a:ln>
+        </p:spPr>
+      </p:sp>
+      <p:pic>
+        <p:nvPicPr>
+          <p:cNvPr id="38" name="Image 9" descr="preencoded.png">    </p:cNvPr>
+          <p:cNvPicPr>
+            <a:picLocks noChangeAspect="1"/>
+          </p:cNvPicPr>
+          <p:nvPr/>
+        </p:nvPicPr>
+        <p:blipFill>
+          <a:blip r:embed="rId10"/>
+          <a:stretch>
+            <a:fillRect/>
+          </a:stretch>
+        </p:blipFill>
+        <p:spPr>
+          <a:xfrm>
+            <a:off x="5449824" y="4983480"/>
+            <a:ext cx="256032" cy="256032"/>
+          </a:xfrm>
+          <a:prstGeom prst="rect">
+            <a:avLst/>
+          </a:prstGeom>
+        </p:spPr>
+      </p:pic>
+      <p:sp>
+        <p:nvSpPr>
+          <p:cNvPr id="39" name="Text 27"/>
+          <p:cNvSpPr txBox="1"/>
+          <p:nvPr/>
+        </p:nvSpPr>
+        <p:spPr>
+          <a:xfrm>
+            <a:off x="5943600" y="4882896"/>
+            <a:ext cx="3063240" cy="457200"/>
+          </a:xfrm>
+          <a:prstGeom prst="rect">
+            <a:avLst/>
+          </a:prstGeom>
+          <a:noFill/>
+          <a:ln/>
+        </p:spPr>
+        <p:txBody>
+          <a:bodyPr wrap="square" lIns="0" tIns="0" rIns="0" bIns="0" rtlCol="0" anchor="ctr"/>
+          <a:lstStyle/>
+          <a:p>
+            <a:pPr indent="0" marL="0">
+              <a:buNone/>
+            </a:pPr>
+            <a:r>
+              <a:rPr lang="en-US" sz="1500" dirty="0">
+                <a:solidFill>
+                  <a:schemeClr val="bg1"/>
+                </a:solidFill>
+              </a:rPr>
+              <a:t>Lo abre el padre, con tiempo</a:t>
+            </a:r>
+            <a:endParaRPr lang="en-US" sz="1500" dirty="0"/>
+          </a:p>
+        </p:txBody>
+      </p:sp>
+      <p:sp>
+        <p:nvSpPr>
+          <p:cNvPr id="40" name="IMAGEN_5"/>
+          <p:cNvSpPr/>
+          <p:nvPr/>
+        </p:nvSpPr>
+        <p:spPr>
+          <a:xfrm>
+            <a:off x="9281160" y="1463040"/>
+            <a:ext cx="2359152" cy="4069080"/>
+          </a:xfrm>
+          <a:prstGeom prst="roundRect">
+            <a:avLst>
+              <a:gd name="adj" fmla="val 5814"/>
+            </a:avLst>
+          </a:prstGeom>
+          <a:solidFill>
+            <a:srgbClr val="F0E2CF"/>
+          </a:solidFill>
+          <a:ln w="19050">
+            <a:solidFill>
+              <a:schemeClr val="accent5"/>
+            </a:solidFill>
+            <a:prstDash val="dash"/>
+          </a:ln>
+        </p:spPr>
+      </p:sp>
+      <p:pic>
+        <p:nvPicPr>
+          <p:cNvPr id="41" name="Image 10" descr="preencoded.png">    </p:cNvPr>
+          <p:cNvPicPr>
+            <a:picLocks noChangeAspect="1"/>
+          </p:cNvPicPr>
+          <p:nvPr/>
+        </p:nvPicPr>
+        <p:blipFill>
+          <a:blip r:embed="rId11"/>
+          <a:stretch>
+            <a:fillRect/>
+          </a:stretch>
+        </p:blipFill>
+        <p:spPr>
+          <a:xfrm>
+            <a:off x="10094976" y="2583180"/>
+            <a:ext cx="731520" cy="731520"/>
+          </a:xfrm>
+          <a:prstGeom prst="rect">
+            <a:avLst/>
+          </a:prstGeom>
+        </p:spPr>
+      </p:pic>
+      <p:sp>
+        <p:nvSpPr>
+          <p:cNvPr id="42" name="Text 29"/>
+          <p:cNvSpPr txBox="1"/>
+          <p:nvPr/>
+        </p:nvSpPr>
+        <p:spPr>
+          <a:xfrm>
+            <a:off x="9464040" y="3497580"/>
+            <a:ext cx="1993392" cy="1097280"/>
+          </a:xfrm>
+          <a:prstGeom prst="rect">
+            <a:avLst/>
+          </a:prstGeom>
+          <a:noFill/>
+          <a:ln/>
+        </p:spPr>
+        <p:txBody>
+          <a:bodyPr wrap="square" lIns="0" tIns="0" rIns="0" bIns="0" rtlCol="0" anchor="t"/>
+          <a:lstStyle/>
+          <a:p>
+            <a:pPr algn="ctr" indent="0" marL="0">
+              <a:buNone/>
+            </a:pPr>
+            <a:r>
+              <a:rPr lang="en-US" sz="1600" b="1" dirty="0">
+                <a:solidFill>
+                  <a:schemeClr val="accent2"/>
+                </a:solidFill>
+              </a:rPr>
+              <a:t>IMAGEN 5</a:t>
+            </a:r>
+            <a:endParaRPr lang="en-US" sz="1400" dirty="0"/>
+          </a:p>
+          <a:p>
+            <a:pPr algn="ctr" indent="0" marL="0">
+              <a:buNone/>
+            </a:pPr>
+            <a:r>
+              <a:rPr lang="en-US" sz="1300" dirty="0">
+                <a:solidFill>
+                  <a:schemeClr val="accent2"/>
+                </a:solidFill>
+              </a:rPr>
+              <a:t>Pantallas de la app</a:t>
+            </a:r>
+            <a:endParaRPr lang="en-US" sz="1400" dirty="0"/>
+          </a:p>
+          <a:p>
+            <a:pPr algn="ctr" indent="0" marL="0">
+              <a:buNone/>
+            </a:pPr>
+            <a:r>
+              <a:rPr lang="en-US" sz="1100" i="1" dirty="0">
+                <a:solidFill>
+                  <a:schemeClr val="accent2"/>
+                </a:solidFill>
+              </a:rPr>
+              <a:t>Prompt en las notas del orador</a:t>
+            </a:r>
+            <a:endParaRPr lang="en-US" sz="1400" dirty="0"/>
+          </a:p>
+        </p:txBody>
+      </p:sp>
+      <p:sp>
+        <p:nvSpPr>
+          <p:cNvPr id="43" name="Shape 30"/>
+          <p:cNvSpPr/>
+          <p:nvPr/>
+        </p:nvSpPr>
+        <p:spPr>
+          <a:xfrm>
+            <a:off x="548640" y="5669280"/>
+            <a:ext cx="11091672" cy="548640"/>
+          </a:xfrm>
+          <a:prstGeom prst="roundRect">
+            <a:avLst>
+              <a:gd name="adj" fmla="val 50000"/>
+            </a:avLst>
+          </a:prstGeom>
+          <a:solidFill>
+            <a:schemeClr val="accent1"/>
+          </a:solidFill>
+          <a:ln w="12700">
+            <a:solidFill>
+              <a:schemeClr val="accent1"/>
+            </a:solidFill>
+            <a:prstDash val="solid"/>
+          </a:ln>
+        </p:spPr>
+      </p:sp>
+      <p:sp>
+        <p:nvSpPr>
+          <p:cNvPr id="44" name="Text 31"/>
+          <p:cNvSpPr txBox="1"/>
+          <p:nvPr/>
+        </p:nvSpPr>
+        <p:spPr>
+          <a:xfrm>
+            <a:off x="822960" y="5669280"/>
+            <a:ext cx="10607040" cy="548640"/>
+          </a:xfrm>
+          <a:prstGeom prst="rect">
+            <a:avLst/>
+          </a:prstGeom>
+          <a:noFill/>
+          <a:ln/>
+        </p:spPr>
+        <p:txBody>
+          <a:bodyPr wrap="square" lIns="0" tIns="0" rIns="0" bIns="0" rtlCol="0" anchor="ctr"/>
+          <a:lstStyle/>
+          <a:p>
+            <a:pPr indent="0" marL="0">
+              <a:buNone/>
+            </a:pPr>
+            <a:r>
+              <a:rPr lang="en-US" sz="1500" b="1" dirty="0">
+                <a:solidFill>
+                  <a:schemeClr val="bg1"/>
+                </a:solidFill>
+              </a:rPr>
+              <a:t>Cumple la Ley 30021: </a:t>
+            </a:r>
+            <a:pPr indent="0" marL="0">
+              <a:buNone/>
+            </a:pPr>
+            <a:r>
+              <a:rPr lang="en-US" sz="1500" dirty="0">
+                <a:solidFill>
+                  <a:schemeClr val="bg1"/>
+                </a:solidFill>
+              </a:rPr>
+              <a:t>en el modo niño no hay compras, ni publicidad, ni premios por comprar.</a:t>
+            </a:r>
+            <a:endParaRPr lang="en-US" sz="1500" dirty="0"/>
+          </a:p>
+        </p:txBody>
+      </p:sp>
+      <p:sp>
+        <p:nvSpPr>
+          <p:cNvPr id="25" name="Slide Number Placeholder 0"/>
+          <p:cNvSpPr>
+            <a:spLocks noGrp="1"/>
+          </p:cNvSpPr>
+          <p:nvPr>
+            <p:ph type="sldNum" sz="quarter" idx="4294967295"/>
+          </p:nvPr>
+        </p:nvSpPr>
+        <p:spPr>
+          <a:xfrm>
+            <a:off x="11430000" y="6437376"/>
+            <a:ext cx="457200" cy="256032"/>
+          </a:xfrm>
+          <a:prstGeom prst="rect">
+            <a:avLst/>
+          </a:prstGeom>
+          <a:extLst>
+            <a:ext uri="{C572A759-6A51-4108-AA02-DFA0A04FC94B}">
+              <ma14:wrappingTextBoxFlag xmlns:ma14="http://schemas.microsoft.com/office/mac/drawingml/2011/main" val="0"/>
+            </a:ext>
+          </a:extLst>
+        </p:spPr>
+        <p:txBody>
+          <a:bodyPr/>
+          <a:lstStyle>
+            <a:lvl1pPr>
+              <a:defRPr sz="1000">
+                <a:solidFill>
+                  <a:srgbClr val="6B3A2A"/>
+                </a:solidFill>
+              </a:defRPr>
+            </a:lvl1pPr>
+          </a:lstStyle>
+          <a:p>
+            <a:pPr algn="l"/>
+            <a:fld id="{F7021451-1387-4CA6-816F-3879F97B5CBC}" type="slidenum">
+              <a:rPr b="0" lang="en-US"/>
+              <a:t>30</a:t>
+            </a:fld>
+            <a:endParaRPr lang="en-US"/>
+          </a:p>
+        </p:txBody>
+      </p:sp>
+    </p:spTree>
+  </p:cSld>
+  <p:clrMapOvr>
+    <a:masterClrMapping/>
+  </p:clrMapOvr>
+</p:sld>
+</file>
+
+<file path=ppt/slides/slide31.xml><?xml version="1.0" encoding="utf-8"?>
+<p:sld xmlns:a="http://schemas.openxmlformats.org/drawingml/2006/main" xmlns:r="http://schemas.openxmlformats.org/officeDocument/2006/relationships" xmlns:p="http://schemas.openxmlformats.org/presentationml/2006/main">
+  <p:cSld name="Slide 31">
+    <p:spTree>
+      <p:nvGrpSpPr>
+        <p:cNvPr id="1" name=""/>
+        <p:cNvGrpSpPr/>
+        <p:nvPr/>
+      </p:nvGrpSpPr>
+      <p:grpSpPr>
+        <a:xfrm>
+          <a:off x="0" y="0"/>
+          <a:ext cx="0" cy="0"/>
+          <a:chOff x="0" y="0"/>
+          <a:chExt cx="0" cy="0"/>
+        </a:xfrm>
+      </p:grpSpPr>
+      <p:sp>
+        <p:nvSpPr>
+          <p:cNvPr id="2" name="Text 0"/>
+          <p:cNvSpPr/>
+          <p:nvPr>
+            <p:ph idx="100" type="body" hasCustomPrompt="1"/>
+          </p:nvPr>
+        </p:nvSpPr>
+        <p:spPr>
+          <a:xfrm>
+            <a:off x="548640" y="274320"/>
+            <a:ext cx="9144000" cy="292608"/>
+          </a:xfrm>
+          <a:prstGeom prst="rect">
+            <a:avLst/>
+          </a:prstGeom>
+          <a:noFill/>
+          <a:ln/>
+        </p:spPr>
+        <p:txBody>
+          <a:bodyPr wrap="square" lIns="0" tIns="0" rIns="0" bIns="0" rtlCol="0" anchor="t"/>
+          <a:lstStyle/>
+          <a:p>
+            <a:pPr indent="0" marL="0">
+              <a:buNone/>
+            </a:pPr>
+            <a:r>
+              <a:rPr lang="en-US" sz="1200" b="1" spc="200" kern="0" dirty="0">
+                <a:solidFill>
+                  <a:schemeClr val="accent1"/>
+                </a:solidFill>
+              </a:rPr>
+              <a:t>TRABAJO DE CAMPO 8 · INNOVACIÓN TECNOLÓGICA</a:t>
+            </a:r>
+            <a:endParaRPr lang="en-US" sz="1200" dirty="0"/>
+          </a:p>
+        </p:txBody>
+      </p:sp>
+      <p:sp>
+        <p:nvSpPr>
+          <p:cNvPr id="3" name="Text 0"/>
+          <p:cNvSpPr/>
+          <p:nvPr>
+            <p:ph idx="101" type="title" hasCustomPrompt="1"/>
+          </p:nvPr>
+        </p:nvSpPr>
+        <p:spPr>
+          <a:xfrm>
+            <a:off x="548640" y="566928"/>
+            <a:ext cx="11091672" cy="731520"/>
+          </a:xfrm>
+          <a:prstGeom prst="rect">
+            <a:avLst/>
+          </a:prstGeom>
+          <a:noFill/>
+          <a:ln/>
+        </p:spPr>
+        <p:txBody>
+          <a:bodyPr wrap="square" lIns="0" tIns="0" rIns="0" bIns="0" rtlCol="0" anchor="t"/>
+          <a:lstStyle/>
+          <a:p>
+            <a:pPr algn="l" indent="0" marL="0">
+              <a:buNone/>
+            </a:pPr>
+            <a:r>
+              <a:rPr lang="en-US" sz="3400" b="1" dirty="0">
+                <a:solidFill>
+                  <a:schemeClr val="tx2"/>
+                </a:solidFill>
+              </a:rPr>
+              <a:t>Del stand a la recompra, con la app en el medio</a:t>
+            </a:r>
+            <a:endParaRPr lang="en-US" sz="3400" dirty="0"/>
+          </a:p>
+        </p:txBody>
+      </p:sp>
+      <p:sp>
+        <p:nvSpPr>
+          <p:cNvPr id="4" name="Shape 2"/>
+          <p:cNvSpPr/>
+          <p:nvPr/>
+        </p:nvSpPr>
+        <p:spPr>
+          <a:xfrm>
+            <a:off x="1600200" y="1965960"/>
+            <a:ext cx="1207008" cy="0"/>
+          </a:xfrm>
+          <a:prstGeom prst="line">
+            <a:avLst/>
+          </a:prstGeom>
+          <a:noFill/>
+          <a:ln w="25400">
+            <a:solidFill>
+              <a:schemeClr val="accent5"/>
+            </a:solidFill>
+            <a:prstDash val="dash"/>
+            <a:tailEnd type="triangle"/>
+          </a:ln>
+        </p:spPr>
+      </p:sp>
+      <p:sp>
+        <p:nvSpPr>
+          <p:cNvPr id="5" name="Shape 3"/>
+          <p:cNvSpPr/>
+          <p:nvPr/>
+        </p:nvSpPr>
+        <p:spPr>
+          <a:xfrm>
+            <a:off x="548640" y="1508760"/>
+            <a:ext cx="914400" cy="914400"/>
+          </a:xfrm>
+          <a:prstGeom prst="ellipse">
+            <a:avLst/>
+          </a:prstGeom>
+          <a:solidFill>
+            <a:schemeClr val="tx2"/>
+          </a:solidFill>
+          <a:ln w="12700">
+            <a:solidFill>
+              <a:schemeClr val="tx2"/>
+            </a:solidFill>
+            <a:prstDash val="solid"/>
+          </a:ln>
+        </p:spPr>
+      </p:sp>
+      <p:pic>
+        <p:nvPicPr>
+          <p:cNvPr id="6" name="Image 0" descr="preencoded.png">    </p:cNvPr>
+          <p:cNvPicPr>
+            <a:picLocks noChangeAspect="1"/>
+          </p:cNvPicPr>
+          <p:nvPr/>
+        </p:nvPicPr>
+        <p:blipFill>
+          <a:blip r:embed="rId1"/>
+          <a:stretch>
+            <a:fillRect/>
+          </a:stretch>
+        </p:blipFill>
+        <p:spPr>
+          <a:xfrm>
+            <a:off x="749808" y="1709928"/>
+            <a:ext cx="512064" cy="512064"/>
+          </a:xfrm>
+          <a:prstGeom prst="rect">
+            <a:avLst/>
+          </a:prstGeom>
+        </p:spPr>
+      </p:pic>
+      <p:sp>
+        <p:nvSpPr>
+          <p:cNvPr id="7" name="Text 4"/>
+          <p:cNvSpPr txBox="1"/>
+          <p:nvPr/>
+        </p:nvSpPr>
+        <p:spPr>
+          <a:xfrm>
+            <a:off x="548640" y="2560320"/>
+            <a:ext cx="1984248" cy="640080"/>
+          </a:xfrm>
+          <a:prstGeom prst="rect">
+            <a:avLst/>
+          </a:prstGeom>
+          <a:noFill/>
+          <a:ln/>
+        </p:spPr>
+        <p:txBody>
+          <a:bodyPr wrap="square" lIns="0" tIns="0" rIns="0" bIns="0" rtlCol="0" anchor="t"/>
+          <a:lstStyle/>
+          <a:p>
+            <a:pPr indent="0" marL="0">
+              <a:buNone/>
+            </a:pPr>
+            <a:r>
+              <a:rPr lang="en-US" sz="1600" b="1" dirty="0">
+                <a:solidFill>
+                  <a:schemeClr val="tx2"/>
+                </a:solidFill>
+              </a:rPr>
+              <a:t>Compra en el stand</a:t>
+            </a:r>
+            <a:endParaRPr lang="en-US" sz="1600" dirty="0"/>
+          </a:p>
+        </p:txBody>
+      </p:sp>
+      <p:sp>
+        <p:nvSpPr>
+          <p:cNvPr id="8" name="Shape 5"/>
+          <p:cNvSpPr/>
+          <p:nvPr/>
+        </p:nvSpPr>
+        <p:spPr>
+          <a:xfrm>
+            <a:off x="3858768" y="1965960"/>
+            <a:ext cx="1207008" cy="0"/>
+          </a:xfrm>
+          <a:prstGeom prst="line">
+            <a:avLst/>
+          </a:prstGeom>
+          <a:noFill/>
+          <a:ln w="25400">
+            <a:solidFill>
+              <a:schemeClr val="accent5"/>
+            </a:solidFill>
+            <a:prstDash val="dash"/>
+            <a:tailEnd type="triangle"/>
+          </a:ln>
+        </p:spPr>
+      </p:sp>
+      <p:sp>
+        <p:nvSpPr>
+          <p:cNvPr id="9" name="Shape 6"/>
+          <p:cNvSpPr/>
+          <p:nvPr/>
+        </p:nvSpPr>
+        <p:spPr>
+          <a:xfrm>
+            <a:off x="2807208" y="1508760"/>
+            <a:ext cx="914400" cy="914400"/>
+          </a:xfrm>
+          <a:prstGeom prst="ellipse">
+            <a:avLst/>
+          </a:prstGeom>
+          <a:solidFill>
+            <a:schemeClr val="tx2"/>
+          </a:solidFill>
+          <a:ln w="12700">
+            <a:solidFill>
+              <a:schemeClr val="tx2"/>
+            </a:solidFill>
+            <a:prstDash val="solid"/>
+          </a:ln>
+        </p:spPr>
+      </p:sp>
+      <p:pic>
+        <p:nvPicPr>
+          <p:cNvPr id="10" name="Image 1" descr="preencoded.png">    </p:cNvPr>
+          <p:cNvPicPr>
+            <a:picLocks noChangeAspect="1"/>
+          </p:cNvPicPr>
+          <p:nvPr/>
+        </p:nvPicPr>
+        <p:blipFill>
+          <a:blip r:embed="rId2"/>
+          <a:stretch>
+            <a:fillRect/>
+          </a:stretch>
+        </p:blipFill>
+        <p:spPr>
+          <a:xfrm>
+            <a:off x="3008376" y="1709928"/>
+            <a:ext cx="512064" cy="512064"/>
+          </a:xfrm>
+          <a:prstGeom prst="rect">
+            <a:avLst/>
+          </a:prstGeom>
+        </p:spPr>
+      </p:pic>
+      <p:sp>
+        <p:nvSpPr>
+          <p:cNvPr id="11" name="Text 7"/>
+          <p:cNvSpPr txBox="1"/>
+          <p:nvPr/>
+        </p:nvSpPr>
+        <p:spPr>
+          <a:xfrm>
+            <a:off x="2807208" y="2560320"/>
+            <a:ext cx="1984248" cy="640080"/>
+          </a:xfrm>
+          <a:prstGeom prst="rect">
+            <a:avLst/>
+          </a:prstGeom>
+          <a:noFill/>
+          <a:ln/>
+        </p:spPr>
+        <p:txBody>
+          <a:bodyPr wrap="square" lIns="0" tIns="0" rIns="0" bIns="0" rtlCol="0" anchor="t"/>
+          <a:lstStyle/>
+          <a:p>
+            <a:pPr indent="0" marL="0">
+              <a:buNone/>
+            </a:pPr>
+            <a:r>
+              <a:rPr lang="en-US" sz="1600" b="1" dirty="0">
+                <a:solidFill>
+                  <a:schemeClr val="tx2"/>
+                </a:solidFill>
+              </a:rPr>
+              <a:t>Escanea el QR</a:t>
+            </a:r>
+            <a:endParaRPr lang="en-US" sz="1600" dirty="0"/>
+          </a:p>
+        </p:txBody>
+      </p:sp>
+      <p:sp>
+        <p:nvSpPr>
+          <p:cNvPr id="12" name="Shape 8"/>
+          <p:cNvSpPr/>
+          <p:nvPr/>
+        </p:nvSpPr>
+        <p:spPr>
+          <a:xfrm>
+            <a:off x="6117336" y="1965960"/>
+            <a:ext cx="1207008" cy="0"/>
+          </a:xfrm>
+          <a:prstGeom prst="line">
+            <a:avLst/>
+          </a:prstGeom>
+          <a:noFill/>
+          <a:ln w="25400">
+            <a:solidFill>
+              <a:schemeClr val="accent5"/>
+            </a:solidFill>
+            <a:prstDash val="dash"/>
+            <a:tailEnd type="triangle"/>
+          </a:ln>
+        </p:spPr>
+      </p:sp>
+      <p:sp>
+        <p:nvSpPr>
+          <p:cNvPr id="13" name="Shape 9"/>
+          <p:cNvSpPr/>
+          <p:nvPr/>
+        </p:nvSpPr>
+        <p:spPr>
+          <a:xfrm>
+            <a:off x="5065776" y="1508760"/>
+            <a:ext cx="914400" cy="914400"/>
+          </a:xfrm>
+          <a:prstGeom prst="ellipse">
+            <a:avLst/>
+          </a:prstGeom>
+          <a:solidFill>
+            <a:schemeClr val="accent1"/>
+          </a:solidFill>
+          <a:ln w="12700">
+            <a:solidFill>
+              <a:schemeClr val="accent1"/>
+            </a:solidFill>
+            <a:prstDash val="solid"/>
+          </a:ln>
+        </p:spPr>
+      </p:sp>
+      <p:pic>
+        <p:nvPicPr>
+          <p:cNvPr id="14" name="Image 2" descr="preencoded.png">    </p:cNvPr>
+          <p:cNvPicPr>
+            <a:picLocks noChangeAspect="1"/>
+          </p:cNvPicPr>
+          <p:nvPr/>
+        </p:nvPicPr>
+        <p:blipFill>
+          <a:blip r:embed="rId3"/>
+          <a:stretch>
+            <a:fillRect/>
+          </a:stretch>
+        </p:blipFill>
+        <p:spPr>
+          <a:xfrm>
+            <a:off x="5266944" y="1709928"/>
+            <a:ext cx="512064" cy="512064"/>
+          </a:xfrm>
+          <a:prstGeom prst="rect">
+            <a:avLst/>
+          </a:prstGeom>
+        </p:spPr>
+      </p:pic>
+      <p:sp>
+        <p:nvSpPr>
+          <p:cNvPr id="15" name="Text 10"/>
+          <p:cNvSpPr txBox="1"/>
+          <p:nvPr/>
+        </p:nvSpPr>
+        <p:spPr>
+          <a:xfrm>
+            <a:off x="5065776" y="2560320"/>
+            <a:ext cx="1984248" cy="640080"/>
+          </a:xfrm>
+          <a:prstGeom prst="rect">
+            <a:avLst/>
+          </a:prstGeom>
+          <a:noFill/>
+          <a:ln/>
+        </p:spPr>
+        <p:txBody>
+          <a:bodyPr wrap="square" lIns="0" tIns="0" rIns="0" bIns="0" rtlCol="0" anchor="t"/>
+          <a:lstStyle/>
+          <a:p>
+            <a:pPr indent="0" marL="0">
+              <a:buNone/>
+            </a:pPr>
+            <a:r>
+              <a:rPr lang="en-US" sz="1600" b="1" dirty="0">
+                <a:solidFill>
+                  <a:schemeClr val="tx2"/>
+                </a:solidFill>
+              </a:rPr>
+              <a:t>Ve el hierro de su lote</a:t>
+            </a:r>
+            <a:endParaRPr lang="en-US" sz="1600" dirty="0"/>
+          </a:p>
+        </p:txBody>
+      </p:sp>
+      <p:sp>
+        <p:nvSpPr>
+          <p:cNvPr id="16" name="Shape 11"/>
+          <p:cNvSpPr/>
+          <p:nvPr/>
+        </p:nvSpPr>
+        <p:spPr>
+          <a:xfrm>
+            <a:off x="8375904" y="1965960"/>
+            <a:ext cx="1207008" cy="0"/>
+          </a:xfrm>
+          <a:prstGeom prst="line">
+            <a:avLst/>
+          </a:prstGeom>
+          <a:noFill/>
+          <a:ln w="25400">
+            <a:solidFill>
+              <a:schemeClr val="accent5"/>
+            </a:solidFill>
+            <a:prstDash val="dash"/>
+            <a:tailEnd type="triangle"/>
+          </a:ln>
+        </p:spPr>
+      </p:sp>
+      <p:sp>
+        <p:nvSpPr>
+          <p:cNvPr id="17" name="Shape 12"/>
+          <p:cNvSpPr/>
+          <p:nvPr/>
+        </p:nvSpPr>
+        <p:spPr>
+          <a:xfrm>
+            <a:off x="7324344" y="1508760"/>
+            <a:ext cx="914400" cy="914400"/>
+          </a:xfrm>
+          <a:prstGeom prst="ellipse">
+            <a:avLst/>
+          </a:prstGeom>
+          <a:solidFill>
+            <a:schemeClr val="tx2"/>
+          </a:solidFill>
+          <a:ln w="12700">
+            <a:solidFill>
+              <a:schemeClr val="tx2"/>
+            </a:solidFill>
+            <a:prstDash val="solid"/>
+          </a:ln>
+        </p:spPr>
+      </p:sp>
+      <p:pic>
+        <p:nvPicPr>
+          <p:cNvPr id="18" name="Image 3" descr="preencoded.png">    </p:cNvPr>
+          <p:cNvPicPr>
+            <a:picLocks noChangeAspect="1"/>
+          </p:cNvPicPr>
+          <p:nvPr/>
+        </p:nvPicPr>
+        <p:blipFill>
+          <a:blip r:embed="rId4"/>
+          <a:stretch>
+            <a:fillRect/>
+          </a:stretch>
+        </p:blipFill>
+        <p:spPr>
+          <a:xfrm>
+            <a:off x="7525512" y="1709928"/>
+            <a:ext cx="512064" cy="512064"/>
+          </a:xfrm>
+          <a:prstGeom prst="rect">
+            <a:avLst/>
+          </a:prstGeom>
+        </p:spPr>
+      </p:pic>
+      <p:sp>
+        <p:nvSpPr>
+          <p:cNvPr id="19" name="Text 13"/>
+          <p:cNvSpPr txBox="1"/>
+          <p:nvPr/>
+        </p:nvSpPr>
+        <p:spPr>
+          <a:xfrm>
+            <a:off x="7324344" y="2560320"/>
+            <a:ext cx="1984248" cy="640080"/>
+          </a:xfrm>
+          <a:prstGeom prst="rect">
+            <a:avLst/>
+          </a:prstGeom>
+          <a:noFill/>
+          <a:ln/>
+        </p:spPr>
+        <p:txBody>
+          <a:bodyPr wrap="square" lIns="0" tIns="0" rIns="0" bIns="0" rtlCol="0" anchor="t"/>
+          <a:lstStyle/>
+          <a:p>
+            <a:pPr indent="0" marL="0">
+              <a:buNone/>
+            </a:pPr>
+            <a:r>
+              <a:rPr lang="en-US" sz="1600" b="1" dirty="0">
+                <a:solidFill>
+                  <a:schemeClr val="tx2"/>
+                </a:solidFill>
+              </a:rPr>
+              <a:t>Usa loncheras y semáforo</a:t>
+            </a:r>
+            <a:endParaRPr lang="en-US" sz="1600" dirty="0"/>
+          </a:p>
+        </p:txBody>
+      </p:sp>
+      <p:sp>
+        <p:nvSpPr>
+          <p:cNvPr id="20" name="Shape 14"/>
+          <p:cNvSpPr/>
+          <p:nvPr/>
+        </p:nvSpPr>
+        <p:spPr>
+          <a:xfrm>
+            <a:off x="9582912" y="1508760"/>
+            <a:ext cx="914400" cy="914400"/>
+          </a:xfrm>
+          <a:prstGeom prst="ellipse">
+            <a:avLst/>
+          </a:prstGeom>
+          <a:solidFill>
+            <a:schemeClr val="tx2"/>
+          </a:solidFill>
+          <a:ln w="12700">
+            <a:solidFill>
+              <a:schemeClr val="tx2"/>
+            </a:solidFill>
+            <a:prstDash val="solid"/>
+          </a:ln>
+        </p:spPr>
+      </p:sp>
+      <p:pic>
+        <p:nvPicPr>
+          <p:cNvPr id="21" name="Image 4" descr="preencoded.png">    </p:cNvPr>
+          <p:cNvPicPr>
+            <a:picLocks noChangeAspect="1"/>
+          </p:cNvPicPr>
+          <p:nvPr/>
+        </p:nvPicPr>
+        <p:blipFill>
+          <a:blip r:embed="rId5"/>
+          <a:stretch>
+            <a:fillRect/>
+          </a:stretch>
+        </p:blipFill>
+        <p:spPr>
+          <a:xfrm>
+            <a:off x="9784080" y="1709928"/>
+            <a:ext cx="512064" cy="512064"/>
+          </a:xfrm>
+          <a:prstGeom prst="rect">
+            <a:avLst/>
+          </a:prstGeom>
+        </p:spPr>
+      </p:pic>
+      <p:sp>
+        <p:nvSpPr>
+          <p:cNvPr id="22" name="Text 15"/>
+          <p:cNvSpPr txBox="1"/>
+          <p:nvPr/>
+        </p:nvSpPr>
+        <p:spPr>
+          <a:xfrm>
+            <a:off x="9582912" y="2560320"/>
+            <a:ext cx="1984248" cy="640080"/>
+          </a:xfrm>
+          <a:prstGeom prst="rect">
+            <a:avLst/>
+          </a:prstGeom>
+          <a:noFill/>
+          <a:ln/>
+        </p:spPr>
+        <p:txBody>
+          <a:bodyPr wrap="square" lIns="0" tIns="0" rIns="0" bIns="0" rtlCol="0" anchor="t"/>
+          <a:lstStyle/>
+          <a:p>
+            <a:pPr indent="0" marL="0">
+              <a:buNone/>
+            </a:pPr>
+            <a:r>
+              <a:rPr lang="en-US" sz="1600" b="1" dirty="0">
+                <a:solidFill>
+                  <a:schemeClr val="tx2"/>
+                </a:solidFill>
+              </a:rPr>
+              <a:t>Aviso y recompra</a:t>
+            </a:r>
+            <a:endParaRPr lang="en-US" sz="1600" dirty="0"/>
+          </a:p>
+        </p:txBody>
+      </p:sp>
+      <p:sp>
+        <p:nvSpPr>
+          <p:cNvPr id="23" name="Shape 16"/>
+          <p:cNvSpPr/>
+          <p:nvPr/>
+        </p:nvSpPr>
+        <p:spPr>
+          <a:xfrm>
+            <a:off x="548640" y="3429000"/>
+            <a:ext cx="2615184" cy="1234440"/>
+          </a:xfrm>
+          <a:prstGeom prst="roundRect">
+            <a:avLst>
+              <a:gd name="adj" fmla="val 8889"/>
+            </a:avLst>
+          </a:prstGeom>
+          <a:solidFill>
+            <a:schemeClr val="accent1"/>
+          </a:solidFill>
+          <a:ln w="12700">
+            <a:solidFill>
+              <a:schemeClr val="accent1"/>
+            </a:solidFill>
+            <a:prstDash val="solid"/>
+          </a:ln>
+          <a:effectLst>
+            <a:outerShdw sx="100000" sy="100000" kx="0" ky="0" algn="bl" rotWithShape="0" blurRad="101600" dist="25400" dir="5400000">
+              <a:srgbClr val="7A4A30">
+                <a:alpha val="14000"/>
+              </a:srgbClr>
+            </a:outerShdw>
+          </a:effectLst>
+        </p:spPr>
+      </p:sp>
+      <p:sp>
+        <p:nvSpPr>
+          <p:cNvPr id="24" name="Text 17"/>
+          <p:cNvSpPr txBox="1"/>
+          <p:nvPr/>
+        </p:nvSpPr>
+        <p:spPr>
+          <a:xfrm>
+            <a:off x="777240" y="3429000"/>
+            <a:ext cx="2249424" cy="1234440"/>
+          </a:xfrm>
+          <a:prstGeom prst="rect">
+            <a:avLst/>
+          </a:prstGeom>
+          <a:noFill/>
+          <a:ln/>
+        </p:spPr>
+        <p:txBody>
+          <a:bodyPr wrap="square" lIns="0" tIns="0" rIns="0" bIns="0" rtlCol="0" anchor="ctr"/>
+          <a:lstStyle/>
+          <a:p>
+            <a:pPr indent="0" marL="0">
+              <a:buNone/>
+            </a:pPr>
+            <a:r>
+              <a:rPr lang="en-US" sz="2800" b="1" dirty="0">
+                <a:solidFill>
+                  <a:schemeClr val="bg1"/>
+                </a:solidFill>
+              </a:rPr>
+              <a:t>S/6,000</a:t>
+            </a:r>
+            <a:endParaRPr lang="en-US" sz="1400" dirty="0"/>
+          </a:p>
+          <a:p>
+            <a:pPr indent="0" marL="0">
+              <a:buNone/>
+            </a:pPr>
+            <a:r>
+              <a:rPr lang="en-US" sz="1300" dirty="0">
+                <a:solidFill>
+                  <a:schemeClr val="bg1"/>
+                </a:solidFill>
+              </a:rPr>
+              <a:t>inversión: diseño, desarrollo y pruebas</a:t>
+            </a:r>
+            <a:endParaRPr lang="en-US" sz="1400" dirty="0"/>
+          </a:p>
+        </p:txBody>
+      </p:sp>
+      <p:sp>
+        <p:nvSpPr>
+          <p:cNvPr id="25" name="Shape 18"/>
+          <p:cNvSpPr/>
+          <p:nvPr/>
+        </p:nvSpPr>
+        <p:spPr>
+          <a:xfrm>
+            <a:off x="3374136" y="3429000"/>
+            <a:ext cx="2615184" cy="1234440"/>
+          </a:xfrm>
+          <a:prstGeom prst="roundRect">
+            <a:avLst>
+              <a:gd name="adj" fmla="val 8889"/>
+            </a:avLst>
+          </a:prstGeom>
+          <a:solidFill>
+            <a:schemeClr val="bg1"/>
+          </a:solidFill>
+          <a:ln w="12700">
+            <a:solidFill>
+              <a:schemeClr val="bg1"/>
+            </a:solidFill>
+            <a:prstDash val="solid"/>
+          </a:ln>
+          <a:effectLst>
+            <a:outerShdw sx="100000" sy="100000" kx="0" ky="0" algn="bl" rotWithShape="0" blurRad="101600" dist="25400" dir="5400000">
+              <a:srgbClr val="7A4A30">
+                <a:alpha val="14000"/>
+              </a:srgbClr>
+            </a:outerShdw>
+          </a:effectLst>
+        </p:spPr>
+      </p:sp>
+      <p:sp>
+        <p:nvSpPr>
+          <p:cNvPr id="26" name="Text 19"/>
+          <p:cNvSpPr txBox="1"/>
+          <p:nvPr/>
+        </p:nvSpPr>
+        <p:spPr>
+          <a:xfrm>
+            <a:off x="3602736" y="3429000"/>
+            <a:ext cx="2249424" cy="1234440"/>
+          </a:xfrm>
+          <a:prstGeom prst="rect">
+            <a:avLst/>
+          </a:prstGeom>
+          <a:noFill/>
+          <a:ln/>
+        </p:spPr>
+        <p:txBody>
+          <a:bodyPr wrap="square" lIns="0" tIns="0" rIns="0" bIns="0" rtlCol="0" anchor="ctr"/>
+          <a:lstStyle/>
+          <a:p>
+            <a:pPr indent="0" marL="0">
+              <a:buNone/>
+            </a:pPr>
+            <a:r>
+              <a:rPr lang="en-US" sz="2800" b="1" dirty="0">
+                <a:solidFill>
+                  <a:schemeClr val="accent1"/>
+                </a:solidFill>
+              </a:rPr>
+              <a:t>S/250</a:t>
+            </a:r>
+            <a:endParaRPr lang="en-US" sz="1400" dirty="0"/>
+          </a:p>
+          <a:p>
+            <a:pPr indent="0" marL="0">
+              <a:buNone/>
+            </a:pPr>
+            <a:r>
+              <a:rPr lang="en-US" sz="1300" dirty="0">
+                <a:solidFill>
+                  <a:schemeClr val="accent2"/>
+                </a:solidFill>
+              </a:rPr>
+              <a:t>al mes: servidor, IA y mantenimiento</a:t>
+            </a:r>
+            <a:endParaRPr lang="en-US" sz="1400" dirty="0"/>
+          </a:p>
+        </p:txBody>
+      </p:sp>
+      <p:sp>
+        <p:nvSpPr>
+          <p:cNvPr id="27" name="Shape 20"/>
+          <p:cNvSpPr/>
+          <p:nvPr/>
+        </p:nvSpPr>
+        <p:spPr>
+          <a:xfrm>
+            <a:off x="6199632" y="3429000"/>
+            <a:ext cx="2615184" cy="1234440"/>
+          </a:xfrm>
+          <a:prstGeom prst="roundRect">
+            <a:avLst>
+              <a:gd name="adj" fmla="val 8889"/>
+            </a:avLst>
+          </a:prstGeom>
+          <a:solidFill>
+            <a:schemeClr val="bg1"/>
+          </a:solidFill>
+          <a:ln w="12700">
+            <a:solidFill>
+              <a:schemeClr val="bg1"/>
+            </a:solidFill>
+            <a:prstDash val="solid"/>
+          </a:ln>
+          <a:effectLst>
+            <a:outerShdw sx="100000" sy="100000" kx="0" ky="0" algn="bl" rotWithShape="0" blurRad="101600" dist="25400" dir="5400000">
+              <a:srgbClr val="7A4A30">
+                <a:alpha val="14000"/>
+              </a:srgbClr>
+            </a:outerShdw>
+          </a:effectLst>
+        </p:spPr>
+      </p:sp>
+      <p:sp>
+        <p:nvSpPr>
+          <p:cNvPr id="28" name="Text 21"/>
+          <p:cNvSpPr txBox="1"/>
+          <p:nvPr/>
+        </p:nvSpPr>
+        <p:spPr>
+          <a:xfrm>
+            <a:off x="6428232" y="3429000"/>
+            <a:ext cx="2249424" cy="1234440"/>
+          </a:xfrm>
+          <a:prstGeom prst="rect">
+            <a:avLst/>
+          </a:prstGeom>
+          <a:noFill/>
+          <a:ln/>
+        </p:spPr>
+        <p:txBody>
+          <a:bodyPr wrap="square" lIns="0" tIns="0" rIns="0" bIns="0" rtlCol="0" anchor="ctr"/>
+          <a:lstStyle/>
+          <a:p>
+            <a:pPr indent="0" marL="0">
+              <a:buNone/>
+            </a:pPr>
+            <a:r>
+              <a:rPr lang="en-US" sz="2800" b="1" dirty="0">
+                <a:solidFill>
+                  <a:schemeClr val="accent1"/>
+                </a:solidFill>
+              </a:rPr>
+              <a:t>S/0.04</a:t>
+            </a:r>
+            <a:endParaRPr lang="en-US" sz="1400" dirty="0"/>
+          </a:p>
+          <a:p>
+            <a:pPr indent="0" marL="0">
+              <a:buNone/>
+            </a:pPr>
+            <a:r>
+              <a:rPr lang="en-US" sz="1300" dirty="0">
+                <a:solidFill>
+                  <a:schemeClr val="accent2"/>
+                </a:solidFill>
+              </a:rPr>
+              <a:t>por código único impreso</a:t>
+            </a:r>
+            <a:endParaRPr lang="en-US" sz="1400" dirty="0"/>
+          </a:p>
+        </p:txBody>
+      </p:sp>
+      <p:sp>
+        <p:nvSpPr>
+          <p:cNvPr id="29" name="Shape 22"/>
+          <p:cNvSpPr/>
+          <p:nvPr/>
+        </p:nvSpPr>
+        <p:spPr>
+          <a:xfrm>
+            <a:off x="9025128" y="3429000"/>
+            <a:ext cx="2615184" cy="1234440"/>
+          </a:xfrm>
+          <a:prstGeom prst="roundRect">
+            <a:avLst>
+              <a:gd name="adj" fmla="val 8889"/>
+            </a:avLst>
+          </a:prstGeom>
+          <a:solidFill>
+            <a:schemeClr val="bg1"/>
+          </a:solidFill>
+          <a:ln w="12700">
+            <a:solidFill>
+              <a:schemeClr val="bg1"/>
+            </a:solidFill>
+            <a:prstDash val="solid"/>
+          </a:ln>
+          <a:effectLst>
+            <a:outerShdw sx="100000" sy="100000" kx="0" ky="0" algn="bl" rotWithShape="0" blurRad="101600" dist="25400" dir="5400000">
+              <a:srgbClr val="7A4A30">
+                <a:alpha val="14000"/>
+              </a:srgbClr>
+            </a:outerShdw>
+          </a:effectLst>
+        </p:spPr>
+      </p:sp>
+      <p:sp>
+        <p:nvSpPr>
+          <p:cNvPr id="30" name="Text 23"/>
+          <p:cNvSpPr txBox="1"/>
+          <p:nvPr/>
+        </p:nvSpPr>
+        <p:spPr>
+          <a:xfrm>
+            <a:off x="9253728" y="3429000"/>
+            <a:ext cx="2249424" cy="1234440"/>
+          </a:xfrm>
+          <a:prstGeom prst="rect">
+            <a:avLst/>
+          </a:prstGeom>
+          <a:noFill/>
+          <a:ln/>
+        </p:spPr>
+        <p:txBody>
+          <a:bodyPr wrap="square" lIns="0" tIns="0" rIns="0" bIns="0" rtlCol="0" anchor="ctr"/>
+          <a:lstStyle/>
+          <a:p>
+            <a:pPr indent="0" marL="0">
+              <a:buNone/>
+            </a:pPr>
+            <a:r>
+              <a:rPr lang="en-US" sz="2800" b="1" dirty="0">
+                <a:solidFill>
+                  <a:schemeClr val="accent1"/>
+                </a:solidFill>
+              </a:rPr>
+              <a:t>S/375</a:t>
+            </a:r>
+            <a:endParaRPr lang="en-US" sz="1400" dirty="0"/>
+          </a:p>
+          <a:p>
+            <a:pPr indent="0" marL="0">
+              <a:buNone/>
+            </a:pPr>
+            <a:r>
+              <a:rPr lang="en-US" sz="1300" dirty="0">
+                <a:solidFill>
+                  <a:schemeClr val="accent2"/>
+                </a:solidFill>
+              </a:rPr>
+              <a:t>análisis de hierro de cada lote</a:t>
+            </a:r>
+            <a:endParaRPr lang="en-US" sz="1400" dirty="0"/>
+          </a:p>
+        </p:txBody>
+      </p:sp>
+      <p:sp>
+        <p:nvSpPr>
+          <p:cNvPr id="31" name="Shape 24"/>
+          <p:cNvSpPr/>
+          <p:nvPr/>
+        </p:nvSpPr>
+        <p:spPr>
+          <a:xfrm>
+            <a:off x="548640" y="4846320"/>
+            <a:ext cx="6766560" cy="1325880"/>
+          </a:xfrm>
+          <a:prstGeom prst="roundRect">
+            <a:avLst>
+              <a:gd name="adj" fmla="val 8276"/>
+            </a:avLst>
+          </a:prstGeom>
+          <a:solidFill>
+            <a:schemeClr val="bg2"/>
+          </a:solidFill>
+          <a:ln w="12700">
+            <a:solidFill>
+              <a:schemeClr val="bg2"/>
+            </a:solidFill>
+            <a:prstDash val="solid"/>
+          </a:ln>
+        </p:spPr>
+      </p:sp>
+      <p:sp>
+        <p:nvSpPr>
+          <p:cNvPr id="32" name="Text 25"/>
+          <p:cNvSpPr txBox="1"/>
+          <p:nvPr/>
+        </p:nvSpPr>
+        <p:spPr>
+          <a:xfrm>
+            <a:off x="777240" y="4846320"/>
+            <a:ext cx="6400800" cy="1325880"/>
+          </a:xfrm>
+          <a:prstGeom prst="rect">
+            <a:avLst/>
+          </a:prstGeom>
+          <a:noFill/>
+          <a:ln/>
+        </p:spPr>
+        <p:txBody>
+          <a:bodyPr wrap="square" lIns="0" tIns="0" rIns="0" bIns="0" rtlCol="0" anchor="ctr"/>
+          <a:lstStyle/>
+          <a:p>
+            <a:pPr indent="0" marL="0">
+              <a:buNone/>
+            </a:pPr>
+            <a:r>
+              <a:rPr lang="en-US" sz="1500" b="1" dirty="0">
+                <a:solidFill>
+                  <a:schemeClr val="tx2"/>
+                </a:solidFill>
+              </a:rPr>
+              <a:t>Tecnología</a:t>
+            </a:r>
+            <a:endParaRPr lang="en-US" sz="1400" dirty="0"/>
+          </a:p>
+          <a:p>
+            <a:pPr indent="0" marL="0">
+              <a:buNone/>
+            </a:pPr>
+            <a:r>
+              <a:rPr lang="en-US" sz="1400" dirty="0">
+                <a:solidFill>
+                  <a:schemeClr val="tx1"/>
+                </a:solidFill>
+              </a:rPr>
+              <a:t>App web instalable (PWA) · servidor en Google Cloud Run · plan de loncheras con IA de Gemini · funciona sin conexión</a:t>
+            </a:r>
+            <a:endParaRPr lang="en-US" sz="1400" dirty="0"/>
+          </a:p>
+        </p:txBody>
+      </p:sp>
+      <p:sp>
+        <p:nvSpPr>
+          <p:cNvPr id="33" name="Shape 26"/>
+          <p:cNvSpPr/>
+          <p:nvPr/>
+        </p:nvSpPr>
+        <p:spPr>
+          <a:xfrm>
+            <a:off x="7498080" y="4846320"/>
+            <a:ext cx="4142232" cy="1325880"/>
+          </a:xfrm>
+          <a:prstGeom prst="roundRect">
+            <a:avLst>
+              <a:gd name="adj" fmla="val 8276"/>
+            </a:avLst>
+          </a:prstGeom>
+          <a:solidFill>
+            <a:schemeClr val="tx2"/>
+          </a:solidFill>
+          <a:ln w="12700">
+            <a:solidFill>
+              <a:schemeClr val="tx2"/>
+            </a:solidFill>
+            <a:prstDash val="solid"/>
+          </a:ln>
+          <a:effectLst>
+            <a:outerShdw sx="100000" sy="100000" kx="0" ky="0" algn="bl" rotWithShape="0" blurRad="101600" dist="25400" dir="5400000">
+              <a:srgbClr val="7A4A30">
+                <a:alpha val="14000"/>
+              </a:srgbClr>
+            </a:outerShdw>
+          </a:effectLst>
+        </p:spPr>
+      </p:sp>
+      <p:sp>
+        <p:nvSpPr>
+          <p:cNvPr id="34" name="Text 27"/>
+          <p:cNvSpPr txBox="1"/>
+          <p:nvPr/>
+        </p:nvSpPr>
+        <p:spPr>
+          <a:xfrm>
+            <a:off x="7726680" y="4846320"/>
+            <a:ext cx="3749040" cy="1325880"/>
+          </a:xfrm>
+          <a:prstGeom prst="rect">
+            <a:avLst/>
+          </a:prstGeom>
+          <a:noFill/>
+          <a:ln/>
+        </p:spPr>
+        <p:txBody>
+          <a:bodyPr wrap="square" lIns="0" tIns="0" rIns="0" bIns="0" rtlCol="0" anchor="ctr"/>
+          <a:lstStyle/>
+          <a:p>
+            <a:pPr indent="0" marL="0">
+              <a:buNone/>
+            </a:pPr>
+            <a:r>
+              <a:rPr lang="en-US" sz="1700" b="1" dirty="0">
+                <a:solidFill>
+                  <a:schemeClr val="accent3"/>
+                </a:solidFill>
+              </a:rPr>
+              <a:t>30 % de envases escaneados</a:t>
+            </a:r>
+            <a:endParaRPr lang="en-US" sz="1400" dirty="0"/>
+          </a:p>
+          <a:p>
+            <a:pPr indent="0" marL="0">
+              <a:buNone/>
+            </a:pPr>
+            <a:r>
+              <a:rPr lang="en-US" sz="1300" dirty="0">
+                <a:solidFill>
+                  <a:schemeClr val="bg1"/>
+                </a:solidFill>
+              </a:rPr>
+              <a:t>Meta del año 1. La mitad de la recompra llega desde el aviso de la app.</a:t>
+            </a:r>
+            <a:endParaRPr lang="en-US" sz="1400" dirty="0"/>
+          </a:p>
+        </p:txBody>
+      </p:sp>
+      <p:sp>
+        <p:nvSpPr>
+          <p:cNvPr id="25" name="Slide Number Placeholder 0"/>
+          <p:cNvSpPr>
+            <a:spLocks noGrp="1"/>
+          </p:cNvSpPr>
+          <p:nvPr>
+            <p:ph type="sldNum" sz="quarter" idx="4294967295"/>
+          </p:nvPr>
+        </p:nvSpPr>
+        <p:spPr>
+          <a:xfrm>
+            <a:off x="11430000" y="6437376"/>
+            <a:ext cx="457200" cy="256032"/>
+          </a:xfrm>
+          <a:prstGeom prst="rect">
+            <a:avLst/>
+          </a:prstGeom>
+          <a:extLst>
+            <a:ext uri="{C572A759-6A51-4108-AA02-DFA0A04FC94B}">
+              <ma14:wrappingTextBoxFlag xmlns:ma14="http://schemas.microsoft.com/office/mac/drawingml/2011/main" val="0"/>
+            </a:ext>
+          </a:extLst>
+        </p:spPr>
+        <p:txBody>
+          <a:bodyPr/>
+          <a:lstStyle>
+            <a:lvl1pPr>
+              <a:defRPr sz="1000">
+                <a:solidFill>
+                  <a:srgbClr val="6B3A2A"/>
+                </a:solidFill>
+              </a:defRPr>
+            </a:lvl1pPr>
+          </a:lstStyle>
+          <a:p>
+            <a:pPr algn="l"/>
+            <a:fld id="{F7021451-1387-4CA6-816F-3879F97B5CBC}" type="slidenum">
+              <a:rPr b="0" lang="en-US"/>
+              <a:t>31</a:t>
+            </a:fld>
+            <a:endParaRPr lang="en-US"/>
+          </a:p>
+        </p:txBody>
+      </p:sp>
+    </p:spTree>
+  </p:cSld>
+  <p:clrMapOvr>
+    <a:masterClrMapping/>
+  </p:clrMapOvr>
+</p:sld>
+</file>
+
+<file path=ppt/slides/slide32.xml><?xml version="1.0" encoding="utf-8"?>
+<p:sld xmlns:a="http://schemas.openxmlformats.org/drawingml/2006/main" xmlns:r="http://schemas.openxmlformats.org/officeDocument/2006/relationships" xmlns:p="http://schemas.openxmlformats.org/presentationml/2006/main">
+  <p:cSld name="Slide 32">
+    <p:spTree>
+      <p:nvGrpSpPr>
+        <p:cNvPr id="1" name=""/>
+        <p:cNvGrpSpPr/>
+        <p:nvPr/>
+      </p:nvGrpSpPr>
+      <p:grpSpPr>
+        <a:xfrm>
+          <a:off x="0" y="0"/>
+          <a:ext cx="0" cy="0"/>
+          <a:chOff x="0" y="0"/>
+          <a:chExt cx="0" cy="0"/>
+        </a:xfrm>
+      </p:grpSpPr>
+      <p:sp>
+        <p:nvSpPr>
+          <p:cNvPr id="2" name="Text 0"/>
+          <p:cNvSpPr/>
+          <p:nvPr>
+            <p:ph idx="100" type="body" hasCustomPrompt="1"/>
+          </p:nvPr>
+        </p:nvSpPr>
+        <p:spPr>
+          <a:xfrm>
+            <a:off x="548640" y="274320"/>
+            <a:ext cx="9144000" cy="292608"/>
+          </a:xfrm>
+          <a:prstGeom prst="rect">
+            <a:avLst/>
+          </a:prstGeom>
+          <a:noFill/>
+          <a:ln/>
+        </p:spPr>
+        <p:txBody>
+          <a:bodyPr wrap="square" lIns="0" tIns="0" rIns="0" bIns="0" rtlCol="0" anchor="t"/>
+          <a:lstStyle/>
+          <a:p>
+            <a:pPr indent="0" marL="0">
+              <a:buNone/>
+            </a:pPr>
+            <a:r>
+              <a:rPr lang="en-US" sz="1200" b="1" spc="200" kern="0" dirty="0">
+                <a:solidFill>
+                  <a:schemeClr val="accent1"/>
+                </a:solidFill>
+              </a:rPr>
+              <a:t>TRABAJO DE CAMPO 8 · FRENTE A LA COMPETENCIA</a:t>
+            </a:r>
+            <a:endParaRPr lang="en-US" sz="1200" dirty="0"/>
+          </a:p>
+        </p:txBody>
+      </p:sp>
+      <p:sp>
+        <p:nvSpPr>
+          <p:cNvPr id="3" name="Text 0"/>
+          <p:cNvSpPr/>
+          <p:nvPr>
+            <p:ph idx="101" type="title" hasCustomPrompt="1"/>
+          </p:nvPr>
+        </p:nvSpPr>
+        <p:spPr>
+          <a:xfrm>
+            <a:off x="548640" y="566928"/>
+            <a:ext cx="11091672" cy="731520"/>
+          </a:xfrm>
+          <a:prstGeom prst="rect">
+            <a:avLst/>
+          </a:prstGeom>
+          <a:noFill/>
+          <a:ln/>
+        </p:spPr>
+        <p:txBody>
+          <a:bodyPr wrap="square" lIns="0" tIns="0" rIns="0" bIns="0" rtlCol="0" anchor="t"/>
+          <a:lstStyle/>
+          <a:p>
+            <a:pPr algn="l" indent="0" marL="0">
+              <a:buNone/>
+            </a:pPr>
+            <a:r>
+              <a:rPr lang="en-US" sz="3400" b="1" dirty="0">
+                <a:solidFill>
+                  <a:schemeClr val="tx2"/>
+                </a:solidFill>
+              </a:rPr>
+              <a:t>Algo más que Fika, con hierro medido y app propia</a:t>
             </a:r>
             <a:endParaRPr lang="en-US" sz="3400" dirty="0"/>
           </a:p>
@@ -35745,7 +38858,7 @@
       </p:graphicFrame>
       <p:graphicFrame>
         <p:nvGraphicFramePr>
-          <p:cNvPr id="31" name="Table 0"/>
+          <p:cNvPr id="33" name="Table 0"/>
           <p:cNvGraphicFramePr>
             <a:graphicFrameLocks noGrp="1"/>
           </p:cNvGraphicFramePr>
@@ -35772,7 +38885,7 @@
                 <a:gridCol w="800100"/>
                 <a:gridCol w="800100"/>
               </a:tblGrid>
-              <a:tr h="475488">
+              <a:tr h="411480">
                 <a:tc>
                   <a:txBody>
                     <a:bodyPr/>
@@ -36079,7 +39192,7 @@
                   </a:tcPr>
                 </a:tc>
               </a:tr>
-              <a:tr h="475488">
+              <a:tr h="411480">
                 <a:tc>
                   <a:txBody>
                     <a:bodyPr/>
@@ -36094,7 +39207,7 @@
                             <a:schemeClr val="tx1"/>
                           </a:solidFill>
                         </a:rPr>
-                        <a:t>Hierro declarado</a:t>
+                        <a:t>Hierro medido</a:t>
                       </a:r>
                       <a:endParaRPr lang="en-US" sz="1300" dirty="0"/>
                     </a:p>
@@ -36211,12 +39324,12 @@
                         <a:buNone/>
                       </a:pPr>
                       <a:r>
-                        <a:rPr lang="en-US" sz="1600" b="1" dirty="0">
+                        <a:rPr lang="en-US" sz="1600" dirty="0">
                           <a:solidFill>
-                            <a:schemeClr val="accent4"/>
+                            <a:schemeClr val="accent2"/>
                           </a:solidFill>
                         </a:rPr>
-                        <a:t>✓</a:t>
+                        <a:t>–</a:t>
                       </a:r>
                       <a:endParaRPr lang="en-US" sz="1600" dirty="0"/>
                     </a:p>
@@ -36386,7 +39499,314 @@
                   </a:tcPr>
                 </a:tc>
               </a:tr>
-              <a:tr h="475488">
+              <a:tr h="411480">
+                <a:tc>
+                  <a:txBody>
+                    <a:bodyPr/>
+                    <a:lstStyle/>
+                    <a:p>
+                      <a:pPr indent="0" marL="0">
+                        <a:buNone/>
+                      </a:pPr>
+                      <a:r>
+                        <a:rPr lang="en-US" sz="1300" dirty="0">
+                          <a:solidFill>
+                            <a:schemeClr val="tx1"/>
+                          </a:solidFill>
+                        </a:rPr>
+                        <a:t>App propia</a:t>
+                      </a:r>
+                      <a:endParaRPr lang="en-US" sz="1300" dirty="0"/>
+                    </a:p>
+                  </a:txBody>
+                  <a:tcPr marL="45720" marR="45720" marT="45720" marB="45720" anchor="ctr">
+                    <a:lnL w="9525" cap="flat" cmpd="sng" algn="ctr">
+                      <a:solidFill>
+                        <a:srgbClr val="E8D8C4"/>
+                      </a:solidFill>
+                      <a:prstDash val="solid"/>
+                      <a:round/>
+                      <a:headEnd type="none" w="med" len="med"/>
+                      <a:tailEnd type="none" w="med" len="med"/>
+                    </a:lnL>
+                    <a:lnR w="9525" cap="flat" cmpd="sng" algn="ctr">
+                      <a:solidFill>
+                        <a:srgbClr val="E8D8C4"/>
+                      </a:solidFill>
+                      <a:prstDash val="solid"/>
+                      <a:round/>
+                      <a:headEnd type="none" w="med" len="med"/>
+                      <a:tailEnd type="none" w="med" len="med"/>
+                    </a:lnR>
+                    <a:lnT w="9525" cap="flat" cmpd="sng" algn="ctr">
+                      <a:solidFill>
+                        <a:srgbClr val="E8D8C4"/>
+                      </a:solidFill>
+                      <a:prstDash val="solid"/>
+                      <a:round/>
+                      <a:headEnd type="none" w="med" len="med"/>
+                      <a:tailEnd type="none" w="med" len="med"/>
+                    </a:lnT>
+                    <a:lnB w="9525" cap="flat" cmpd="sng" algn="ctr">
+                      <a:solidFill>
+                        <a:srgbClr val="E8D8C4"/>
+                      </a:solidFill>
+                      <a:prstDash val="solid"/>
+                      <a:round/>
+                      <a:headEnd type="none" w="med" len="med"/>
+                      <a:tailEnd type="none" w="med" len="med"/>
+                    </a:lnB>
+                    <a:solidFill>
+                      <a:srgbClr val="FFFFFF"/>
+                    </a:solidFill>
+                  </a:tcPr>
+                </a:tc>
+                <a:tc>
+                  <a:txBody>
+                    <a:bodyPr/>
+                    <a:lstStyle/>
+                    <a:p>
+                      <a:pPr algn="ctr" indent="0" marL="0">
+                        <a:buNone/>
+                      </a:pPr>
+                      <a:r>
+                        <a:rPr lang="en-US" sz="1600" b="1" dirty="0">
+                          <a:solidFill>
+                            <a:schemeClr val="accent1"/>
+                          </a:solidFill>
+                        </a:rPr>
+                        <a:t>✓</a:t>
+                      </a:r>
+                      <a:endParaRPr lang="en-US" sz="1600" dirty="0"/>
+                    </a:p>
+                  </a:txBody>
+                  <a:tcPr marL="45720" marR="45720" marT="45720" marB="45720" anchor="ctr">
+                    <a:lnL w="9525" cap="flat" cmpd="sng" algn="ctr">
+                      <a:solidFill>
+                        <a:srgbClr val="E8D8C4"/>
+                      </a:solidFill>
+                      <a:prstDash val="solid"/>
+                      <a:round/>
+                      <a:headEnd type="none" w="med" len="med"/>
+                      <a:tailEnd type="none" w="med" len="med"/>
+                    </a:lnL>
+                    <a:lnR w="9525" cap="flat" cmpd="sng" algn="ctr">
+                      <a:solidFill>
+                        <a:srgbClr val="E8D8C4"/>
+                      </a:solidFill>
+                      <a:prstDash val="solid"/>
+                      <a:round/>
+                      <a:headEnd type="none" w="med" len="med"/>
+                      <a:tailEnd type="none" w="med" len="med"/>
+                    </a:lnR>
+                    <a:lnT w="9525" cap="flat" cmpd="sng" algn="ctr">
+                      <a:solidFill>
+                        <a:srgbClr val="E8D8C4"/>
+                      </a:solidFill>
+                      <a:prstDash val="solid"/>
+                      <a:round/>
+                      <a:headEnd type="none" w="med" len="med"/>
+                      <a:tailEnd type="none" w="med" len="med"/>
+                    </a:lnT>
+                    <a:lnB w="9525" cap="flat" cmpd="sng" algn="ctr">
+                      <a:solidFill>
+                        <a:srgbClr val="E8D8C4"/>
+                      </a:solidFill>
+                      <a:prstDash val="solid"/>
+                      <a:round/>
+                      <a:headEnd type="none" w="med" len="med"/>
+                      <a:tailEnd type="none" w="med" len="med"/>
+                    </a:lnB>
+                    <a:solidFill>
+                      <a:srgbClr val="F6DCD5"/>
+                    </a:solidFill>
+                  </a:tcPr>
+                </a:tc>
+                <a:tc>
+                  <a:txBody>
+                    <a:bodyPr/>
+                    <a:lstStyle/>
+                    <a:p>
+                      <a:pPr algn="ctr" indent="0" marL="0">
+                        <a:buNone/>
+                      </a:pPr>
+                      <a:r>
+                        <a:rPr lang="en-US" sz="1600" dirty="0">
+                          <a:solidFill>
+                            <a:schemeClr val="accent2"/>
+                          </a:solidFill>
+                        </a:rPr>
+                        <a:t>–</a:t>
+                      </a:r>
+                      <a:endParaRPr lang="en-US" sz="1600" dirty="0"/>
+                    </a:p>
+                  </a:txBody>
+                  <a:tcPr marL="45720" marR="45720" marT="45720" marB="45720" anchor="ctr">
+                    <a:lnL w="9525" cap="flat" cmpd="sng" algn="ctr">
+                      <a:solidFill>
+                        <a:srgbClr val="E8D8C4"/>
+                      </a:solidFill>
+                      <a:prstDash val="solid"/>
+                      <a:round/>
+                      <a:headEnd type="none" w="med" len="med"/>
+                      <a:tailEnd type="none" w="med" len="med"/>
+                    </a:lnL>
+                    <a:lnR w="9525" cap="flat" cmpd="sng" algn="ctr">
+                      <a:solidFill>
+                        <a:srgbClr val="E8D8C4"/>
+                      </a:solidFill>
+                      <a:prstDash val="solid"/>
+                      <a:round/>
+                      <a:headEnd type="none" w="med" len="med"/>
+                      <a:tailEnd type="none" w="med" len="med"/>
+                    </a:lnR>
+                    <a:lnT w="9525" cap="flat" cmpd="sng" algn="ctr">
+                      <a:solidFill>
+                        <a:srgbClr val="E8D8C4"/>
+                      </a:solidFill>
+                      <a:prstDash val="solid"/>
+                      <a:round/>
+                      <a:headEnd type="none" w="med" len="med"/>
+                      <a:tailEnd type="none" w="med" len="med"/>
+                    </a:lnT>
+                    <a:lnB w="9525" cap="flat" cmpd="sng" algn="ctr">
+                      <a:solidFill>
+                        <a:srgbClr val="E8D8C4"/>
+                      </a:solidFill>
+                      <a:prstDash val="solid"/>
+                      <a:round/>
+                      <a:headEnd type="none" w="med" len="med"/>
+                      <a:tailEnd type="none" w="med" len="med"/>
+                    </a:lnB>
+                    <a:solidFill>
+                      <a:srgbClr val="FFFFFF"/>
+                    </a:solidFill>
+                  </a:tcPr>
+                </a:tc>
+                <a:tc>
+                  <a:txBody>
+                    <a:bodyPr/>
+                    <a:lstStyle/>
+                    <a:p>
+                      <a:pPr algn="ctr" indent="0" marL="0">
+                        <a:buNone/>
+                      </a:pPr>
+                      <a:r>
+                        <a:rPr lang="en-US" sz="1600" dirty="0">
+                          <a:solidFill>
+                            <a:schemeClr val="accent2"/>
+                          </a:solidFill>
+                        </a:rPr>
+                        <a:t>–</a:t>
+                      </a:r>
+                      <a:endParaRPr lang="en-US" sz="1600" dirty="0"/>
+                    </a:p>
+                  </a:txBody>
+                  <a:tcPr marL="45720" marR="45720" marT="45720" marB="45720" anchor="ctr">
+                    <a:lnL w="9525" cap="flat" cmpd="sng" algn="ctr">
+                      <a:solidFill>
+                        <a:srgbClr val="E8D8C4"/>
+                      </a:solidFill>
+                      <a:prstDash val="solid"/>
+                      <a:round/>
+                      <a:headEnd type="none" w="med" len="med"/>
+                      <a:tailEnd type="none" w="med" len="med"/>
+                    </a:lnL>
+                    <a:lnR w="9525" cap="flat" cmpd="sng" algn="ctr">
+                      <a:solidFill>
+                        <a:srgbClr val="E8D8C4"/>
+                      </a:solidFill>
+                      <a:prstDash val="solid"/>
+                      <a:round/>
+                      <a:headEnd type="none" w="med" len="med"/>
+                      <a:tailEnd type="none" w="med" len="med"/>
+                    </a:lnR>
+                    <a:lnT w="9525" cap="flat" cmpd="sng" algn="ctr">
+                      <a:solidFill>
+                        <a:srgbClr val="E8D8C4"/>
+                      </a:solidFill>
+                      <a:prstDash val="solid"/>
+                      <a:round/>
+                      <a:headEnd type="none" w="med" len="med"/>
+                      <a:tailEnd type="none" w="med" len="med"/>
+                    </a:lnT>
+                    <a:lnB w="9525" cap="flat" cmpd="sng" algn="ctr">
+                      <a:solidFill>
+                        <a:srgbClr val="E8D8C4"/>
+                      </a:solidFill>
+                      <a:prstDash val="solid"/>
+                      <a:round/>
+                      <a:headEnd type="none" w="med" len="med"/>
+                      <a:tailEnd type="none" w="med" len="med"/>
+                    </a:lnB>
+                    <a:solidFill>
+                      <a:srgbClr val="FFFFFF"/>
+                    </a:solidFill>
+                  </a:tcPr>
+                </a:tc>
+                <a:tc>
+                  <a:txBody>
+                    <a:bodyPr/>
+                    <a:lstStyle/>
+                    <a:p>
+                      <a:pPr algn="ctr" indent="0" marL="0">
+                        <a:buNone/>
+                      </a:pPr>
+                      <a:r>
+                        <a:rPr lang="en-US" sz="1600" dirty="0">
+                          <a:solidFill>
+                            <a:schemeClr val="accent2"/>
+                          </a:solidFill>
+                        </a:rPr>
+                        <a:t>–</a:t>
+                      </a:r>
+                      <a:endParaRPr lang="en-US" sz="1600" dirty="0"/>
+                    </a:p>
+                  </a:txBody>
+                  <a:tcPr marL="45720" marR="45720" marT="45720" marB="45720" anchor="ctr">
+                    <a:lnL w="9525" cap="flat" cmpd="sng" algn="ctr">
+                      <a:solidFill>
+                        <a:srgbClr val="E8D8C4"/>
+                      </a:solidFill>
+                      <a:prstDash val="solid"/>
+                      <a:round/>
+                      <a:headEnd type="none" w="med" len="med"/>
+                      <a:tailEnd type="none" w="med" len="med"/>
+                    </a:lnL>
+                    <a:lnR w="9525" cap="flat" cmpd="sng" algn="ctr">
+                      <a:solidFill>
+                        <a:srgbClr val="E8D8C4"/>
+                      </a:solidFill>
+                      <a:prstDash val="solid"/>
+                      <a:round/>
+                      <a:headEnd type="none" w="med" len="med"/>
+                      <a:tailEnd type="none" w="med" len="med"/>
+                    </a:lnR>
+                    <a:lnT w="9525" cap="flat" cmpd="sng" algn="ctr">
+                      <a:solidFill>
+                        <a:srgbClr val="E8D8C4"/>
+                      </a:solidFill>
+                      <a:prstDash val="solid"/>
+                      <a:round/>
+                      <a:headEnd type="none" w="med" len="med"/>
+                      <a:tailEnd type="none" w="med" len="med"/>
+                    </a:lnT>
+                    <a:lnB w="9525" cap="flat" cmpd="sng" algn="ctr">
+                      <a:solidFill>
+                        <a:srgbClr val="E8D8C4"/>
+                      </a:solidFill>
+                      <a:prstDash val="solid"/>
+                      <a:round/>
+                      <a:headEnd type="none" w="med" len="med"/>
+                      <a:tailEnd type="none" w="med" len="med"/>
+                    </a:lnB>
+                    <a:solidFill>
+                      <a:srgbClr val="FFFFFF"/>
+                    </a:solidFill>
+                  </a:tcPr>
+                </a:tc>
+              </a:tr>
+              <a:tr h="411480">
                 <a:tc>
                   <a:txBody>
                     <a:bodyPr/>
@@ -36693,7 +40113,7 @@
                   </a:tcPr>
                 </a:tc>
               </a:tr>
-              <a:tr h="475488">
+              <a:tr h="411480">
                 <a:tc>
                   <a:txBody>
                     <a:bodyPr/>
@@ -36708,7 +40128,7 @@
                             <a:schemeClr val="tx1"/>
                           </a:solidFill>
                         </a:rPr>
-                        <a:t>Varios sabores en un pack</a:t>
+                        <a:t>Varios sabores</a:t>
                       </a:r>
                       <a:endParaRPr lang="en-US" sz="1300" dirty="0"/>
                     </a:p>
@@ -37000,7 +40420,7 @@
                   </a:tcPr>
                 </a:tc>
               </a:tr>
-              <a:tr h="475488">
+              <a:tr h="411480">
                 <a:tc>
                   <a:txBody>
                     <a:bodyPr/>
@@ -37015,7 +40435,7 @@
                             <a:schemeClr val="tx1"/>
                           </a:solidFill>
                         </a:rPr>
-                        <a:t>Entrega a domicilio</a:t>
+                        <a:t>Delivery</a:t>
                       </a:r>
                       <a:endParaRPr lang="en-US" sz="1300" dirty="0"/>
                     </a:p>
@@ -37307,7 +40727,7 @@
                   </a:tcPr>
                 </a:tc>
               </a:tr>
-              <a:tr h="475488">
+              <a:tr h="411480">
                 <a:tc>
                   <a:txBody>
                     <a:bodyPr/>
@@ -37322,7 +40742,7 @@
                             <a:schemeClr val="tx1"/>
                           </a:solidFill>
                         </a:rPr>
-                        <a:t>Formato de postre</a:t>
+                        <a:t>Formato postre</a:t>
                       </a:r>
                       <a:endParaRPr lang="en-US" sz="1300" dirty="0"/>
                     </a:p>
@@ -37648,7 +41068,7 @@
                   <a:schemeClr val="accent2"/>
                 </a:solidFill>
               </a:rPr>
-              <a:t>* Se confirma en laboratorio. ? = por completar en el store check.</a:t>
+              <a:t>* Meta, se confirma en laboratorio. ? = por completar en el store check.</a:t>
             </a:r>
             <a:endParaRPr lang="en-US" sz="1100" dirty="0"/>
           </a:p>
@@ -37718,7 +41138,7 @@
                   <a:schemeClr val="accent3"/>
                 </a:solidFill>
               </a:rPr>
-              <a:t>S/4.15 por brownie</a:t>
+              <a:t>S/4.48 por brownie</a:t>
             </a:r>
             <a:endParaRPr lang="en-US" sz="1400" dirty="0"/>
           </a:p>
@@ -37732,7 +41152,7 @@
                   <a:schemeClr val="bg1"/>
                 </a:solidFill>
               </a:rPr>
-              <a:t>Por WhatsApp; S/4.33 en el stand. Hasta 8 % más que Fika, con hierro medido y en tres sabores.</a:t>
+              <a:t>Por WhatsApp; S/4.65 en el stand. 12 % más que Fika, con hierro medido por lote y la app Andi.</a:t>
             </a:r>
             <a:endParaRPr lang="en-US" sz="1400" dirty="0"/>
           </a:p>
@@ -37777,7 +41197,7 @@
             <a:pPr algn="l"/>
             <a:fld id="{F7021451-1387-4CA6-816F-3879F97B5CBC}" type="slidenum">
               <a:rPr b="0" lang="en-US"/>
-              <a:t>30</a:t>
+              <a:t>32</a:t>
             </a:fld>
             <a:endParaRPr lang="en-US"/>
           </a:p>
@@ -37791,9 +41211,9 @@
 </p:sld>
 </file>
 
-<file path=ppt/slides/slide31.xml><?xml version="1.0" encoding="utf-8"?>
+<file path=ppt/slides/slide33.xml><?xml version="1.0" encoding="utf-8"?>
 <p:sld xmlns:a="http://schemas.openxmlformats.org/drawingml/2006/main" xmlns:r="http://schemas.openxmlformats.org/officeDocument/2006/relationships" xmlns:p="http://schemas.openxmlformats.org/presentationml/2006/main">
-  <p:cSld name="Slide 31">
+  <p:cSld name="Slide 33">
     <p:spTree>
       <p:nvGrpSpPr>
         <p:cNvPr id="1" name=""/>
@@ -37948,7 +41368,7 @@
                   <a:schemeClr val="bg2"/>
                 </a:solidFill>
               </a:rPr>
-              <a:t>Para padres planificados que leen etiquetas: mini brownie de 20 g con sangrecita, sin octógono y en tres sabores que el niño sí pide.</a:t>
+              <a:t>Para padres planificados que leen etiquetas: mini brownie de 20 g con sangrecita, hierro medido por lote y la app Andi, que acompaña a la familia.</a:t>
             </a:r>
             <a:endParaRPr lang="en-US" sz="1700" dirty="0"/>
           </a:p>
@@ -38110,7 +41530,7 @@
                   <a:schemeClr val="bg2"/>
                 </a:solidFill>
               </a:rPr>
-              <a:t>Cotizar stands y maquila</a:t>
+              <a:t>Cotizar polvo y stands</a:t>
             </a:r>
             <a:endParaRPr lang="en-US" sz="1300" dirty="0"/>
           </a:p>
@@ -38173,7 +41593,7 @@
                   <a:schemeClr val="bg2"/>
                 </a:solidFill>
               </a:rPr>
-              <a:t>Elegir los 2 primeros puntos</a:t>
+              <a:t>Probar la app con familias</a:t>
             </a:r>
             <a:endParaRPr lang="en-US" sz="1300" dirty="0"/>
           </a:p>
@@ -45575,7 +48995,7 @@
                   <a:schemeClr val="bg1"/>
                 </a:solidFill>
               </a:rPr>
-              <a:t>SOM año 1 · S/0.23 M</a:t>
+              <a:t>SOM año 1 · S/0.25 M</a:t>
             </a:r>
             <a:endParaRPr lang="en-US" sz="1400" dirty="0"/>
           </a:p>

--- a/04-reformulacion/TC5-8/TC5-8-AndiBite.pptx
+++ b/04-reformulacion/TC5-8/TC5-8-AndiBite.pptx
@@ -139,13 +139,13 @@
   <p:extLst>
     <p:ext uri="{521415D9-36F7-43E2-AB2F-B90AF26B5E84}">
       <p14:sectionLst xmlns:p14="http://schemas.microsoft.com/office/powerpoint/2010/main">
-        <p14:section name="Portada" id="{c3b8bb69-b414-c396-18b3-a7f853d6049f}">
+        <p14:section name="Portada" id="{4c795153-3cd4-c4a3-aadf-f844837d4321}">
           <p14:sldIdLst>
             <p14:sldId id="256"/>
             <p14:sldId id="257"/>
           </p14:sldIdLst>
         </p14:section>
-        <p14:section name="TC5 · Cliente, mercado y canal" id="{c75fdb58-3a5e-814a-8b50-0f6439749379}">
+        <p14:section name="TC5 · Cliente, mercado y canal" id="{4746032b-3452-395b-3386-825426b4530b}">
           <p14:sldIdLst>
             <p14:sldId id="258"/>
             <p14:sldId id="259"/>
@@ -159,7 +159,7 @@
             <p14:sldId id="267"/>
           </p14:sldIdLst>
         </p14:section>
-        <p14:section name="TC6 · Relación e ingresos" id="{067a395e-ce24-4e78-513e-f5a3ef12b990}">
+        <p14:section name="TC6 · Relación e ingresos" id="{8db1e8ed-3749-9f96-bd74-8ddf75eb184e}">
           <p14:sldIdLst>
             <p14:sldId id="268"/>
             <p14:sldId id="269"/>
@@ -168,7 +168,7 @@
             <p14:sldId id="272"/>
           </p14:sldIdLst>
         </p14:section>
-        <p14:section name="TC7 · Canvas" id="{0b9c3147-6d48-d61c-817e-90ab944da897}">
+        <p14:section name="TC7 · Canvas" id="{d9c34a8d-6b2f-16e9-aa2f-73bcbf15a391}">
           <p14:sldIdLst>
             <p14:sldId id="273"/>
             <p14:sldId id="274"/>
@@ -181,7 +181,7 @@
             <p14:sldId id="281"/>
           </p14:sldIdLst>
         </p14:section>
-        <p14:section name="TC8 · Propuesta de valor" id="{3ea92967-6eeb-7a23-3396-5ba5b4f6efc0}">
+        <p14:section name="TC8 · Propuesta de valor" id="{49e6a841-7735-e0c3-ddf5-36f370b496e9}">
           <p14:sldIdLst>
             <p14:sldId id="282"/>
             <p14:sldId id="283"/>
@@ -191,7 +191,7 @@
             <p14:sldId id="287"/>
           </p14:sldIdLst>
         </p14:section>
-        <p14:section name="Cierre" id="{aa15a221-9c37-1279-6c02-4149f3c5b515}">
+        <p14:section name="Cierre" id="{9798b3e6-4dcc-d621-3685-86124c6b2bc4}">
           <p14:sldIdLst>
             <p14:sldId id="288"/>
           </p14:sldIdLst>
@@ -37341,36 +37341,9 @@
           </a:p>
         </p:txBody>
       </p:sp>
-      <p:sp>
-        <p:nvSpPr>
-          <p:cNvPr id="40" name="IMAGEN_5"/>
-          <p:cNvSpPr/>
-          <p:nvPr/>
-        </p:nvSpPr>
-        <p:spPr>
-          <a:xfrm>
-            <a:off x="9281160" y="1463040"/>
-            <a:ext cx="2359152" cy="4069080"/>
-          </a:xfrm>
-          <a:prstGeom prst="roundRect">
-            <a:avLst>
-              <a:gd name="adj" fmla="val 5814"/>
-            </a:avLst>
-          </a:prstGeom>
-          <a:solidFill>
-            <a:srgbClr val="F0E2CF"/>
-          </a:solidFill>
-          <a:ln w="19050">
-            <a:solidFill>
-              <a:schemeClr val="accent5"/>
-            </a:solidFill>
-            <a:prstDash val="dash"/>
-          </a:ln>
-        </p:spPr>
-      </p:sp>
       <p:pic>
         <p:nvPicPr>
-          <p:cNvPr id="41" name="Image 10" descr="preencoded.png">    </p:cNvPr>
+          <p:cNvPr id="40" name="Image 10" descr="img/app-lote.png">    </p:cNvPr>
           <p:cNvPicPr>
             <a:picLocks noChangeAspect="1"/>
           </p:cNvPicPr>
@@ -37384,8 +37357,8 @@
         </p:blipFill>
         <p:spPr>
           <a:xfrm>
-            <a:off x="10094976" y="2583180"/>
-            <a:ext cx="731520" cy="731520"/>
+            <a:off x="9445752" y="1371600"/>
+            <a:ext cx="2029968" cy="4096512"/>
           </a:xfrm>
           <a:prstGeom prst="rect">
             <a:avLst/>
@@ -37394,71 +37367,7 @@
       </p:pic>
       <p:sp>
         <p:nvSpPr>
-          <p:cNvPr id="42" name="Text 29"/>
-          <p:cNvSpPr txBox="1"/>
-          <p:nvPr/>
-        </p:nvSpPr>
-        <p:spPr>
-          <a:xfrm>
-            <a:off x="9464040" y="3497580"/>
-            <a:ext cx="1993392" cy="1097280"/>
-          </a:xfrm>
-          <a:prstGeom prst="rect">
-            <a:avLst/>
-          </a:prstGeom>
-          <a:noFill/>
-          <a:ln/>
-        </p:spPr>
-        <p:txBody>
-          <a:bodyPr wrap="square" lIns="0" tIns="0" rIns="0" bIns="0" rtlCol="0" anchor="t"/>
-          <a:lstStyle/>
-          <a:p>
-            <a:pPr algn="ctr" indent="0" marL="0">
-              <a:buNone/>
-            </a:pPr>
-            <a:r>
-              <a:rPr lang="en-US" sz="1600" b="1" dirty="0">
-                <a:solidFill>
-                  <a:schemeClr val="accent2"/>
-                </a:solidFill>
-              </a:rPr>
-              <a:t>IMAGEN 5</a:t>
-            </a:r>
-            <a:endParaRPr lang="en-US" sz="1400" dirty="0"/>
-          </a:p>
-          <a:p>
-            <a:pPr algn="ctr" indent="0" marL="0">
-              <a:buNone/>
-            </a:pPr>
-            <a:r>
-              <a:rPr lang="en-US" sz="1300" dirty="0">
-                <a:solidFill>
-                  <a:schemeClr val="accent2"/>
-                </a:solidFill>
-              </a:rPr>
-              <a:t>Pantallas de la app</a:t>
-            </a:r>
-            <a:endParaRPr lang="en-US" sz="1400" dirty="0"/>
-          </a:p>
-          <a:p>
-            <a:pPr algn="ctr" indent="0" marL="0">
-              <a:buNone/>
-            </a:pPr>
-            <a:r>
-              <a:rPr lang="en-US" sz="1100" i="1" dirty="0">
-                <a:solidFill>
-                  <a:schemeClr val="accent2"/>
-                </a:solidFill>
-              </a:rPr>
-              <a:t>Prompt en las notas del orador</a:t>
-            </a:r>
-            <a:endParaRPr lang="en-US" sz="1400" dirty="0"/>
-          </a:p>
-        </p:txBody>
-      </p:sp>
-      <p:sp>
-        <p:nvSpPr>
-          <p:cNvPr id="43" name="Shape 30"/>
+          <p:cNvPr id="41" name="Shape 28"/>
           <p:cNvSpPr/>
           <p:nvPr/>
         </p:nvSpPr>
@@ -37485,7 +37394,7 @@
       </p:sp>
       <p:sp>
         <p:nvSpPr>
-          <p:cNvPr id="44" name="Text 31"/>
+          <p:cNvPr id="42" name="Text 29"/>
           <p:cNvSpPr txBox="1"/>
           <p:nvPr/>
         </p:nvSpPr>

--- a/04-reformulacion/TC5-8/TC5-8-AndiBite.pptx
+++ b/04-reformulacion/TC5-8/TC5-8-AndiBite.pptx
@@ -142,13 +142,13 @@
   <p:extLst>
     <p:ext uri="{521415D9-36F7-43E2-AB2F-B90AF26B5E84}">
       <p14:sectionLst xmlns:p14="http://schemas.microsoft.com/office/powerpoint/2010/main">
-        <p14:section name="Portada" id="{b02311f9-57e7-9871-3c5c-95406bfc24ef}">
+        <p14:section name="Portada" id="{9f06238e-bae5-77e5-bbb9-fbbed74f096b}">
           <p14:sldIdLst>
             <p14:sldId id="256"/>
             <p14:sldId id="257"/>
           </p14:sldIdLst>
         </p14:section>
-        <p14:section name="TC5 · Cliente, mercado y canal" id="{b4352997-dc69-dd25-d76a-76e6266e3687}">
+        <p14:section name="TC5 · Cliente, mercado y canal" id="{76ca459e-9410-98a4-c60e-0c7d210f1868}">
           <p14:sldIdLst>
             <p14:sldId id="258"/>
             <p14:sldId id="259"/>
@@ -162,7 +162,7 @@
             <p14:sldId id="267"/>
           </p14:sldIdLst>
         </p14:section>
-        <p14:section name="TC6 · Relación e ingresos" id="{6ae8360d-f5e1-daa1-19ba-672c59a191a8}">
+        <p14:section name="TC6 · Relación e ingresos" id="{e56c48f2-4a9d-c768-94e3-f752d3fd75ed}">
           <p14:sldIdLst>
             <p14:sldId id="268"/>
             <p14:sldId id="269"/>
@@ -171,7 +171,7 @@
             <p14:sldId id="272"/>
           </p14:sldIdLst>
         </p14:section>
-        <p14:section name="TC7 · Canvas" id="{e6a882ea-72ae-8ef7-a33f-0c54f36013c1}">
+        <p14:section name="TC7 · Canvas" id="{78d57c94-d486-6f97-9ae1-e924219b8c6d}">
           <p14:sldIdLst>
             <p14:sldId id="273"/>
             <p14:sldId id="274"/>
@@ -185,7 +185,7 @@
             <p14:sldId id="282"/>
           </p14:sldIdLst>
         </p14:section>
-        <p14:section name="TC8 · Propuesta de valor" id="{c8e8e350-9241-21e6-4347-83d5e8b6cce1}">
+        <p14:section name="TC8 · Propuesta de valor" id="{dd8e6ed5-dab8-70cb-d3ae-a259cf5b9074}">
           <p14:sldIdLst>
             <p14:sldId id="283"/>
             <p14:sldId id="284"/>
@@ -196,7 +196,7 @@
             <p14:sldId id="289"/>
           </p14:sldIdLst>
         </p14:section>
-        <p14:section name="Cierre" id="{b54f34a6-6627-6980-7af5-1ef2ddbef0a0}">
+        <p14:section name="Cierre" id="{609ce8b3-dd19-989b-dadc-0a2601b7ce1e}">
           <p14:sldIdLst>
             <p14:sldId id="290"/>
             <p14:sldId id="291"/>
@@ -5766,7 +5766,7 @@
           <a:p>
             <a:r>
               <a:rPr lang="en-US" dirty="0"/>
-              <a:t>Puntos de venta (documento 08): programas para emprendedores de Jockey Plaza, Larcomar (El Mercadito del Emprendedor) y La Rambla San Borja; carrito en la entrada de Wong o Vivanda; 2 ferias pagadas, de campaña escolar (febrero) y del Día del Niño Peruano (segundo domingo de abril); kermeses, cumpleaños y ferias saludables o municipales, que no cobran stand. Las ferias navideñas se sacaron del plan: con unos 700 brownies, una feria de S/1,800 pierde dinero si no deja clientes que vuelvan. Plan: 1 punto en enero, 2 de febrero a julio y 3 de agosto a diciembre de 2027, solo fines de semana. Cada punto y cada evento lo atiende un(a) vendedor(a) pagado(a) a S/90 por día; el espacio cuesta S/600 por punto al mes y el stand en feria, S/1,800 más 3 días de vendedor(a).</a:t>
+              <a:t>Puntos de venta (documento 08), repartidos para llegar con el mismo esfuerzo al padre A y al padre B. Malls: Jockey Plaza y La Rambla San Borja (Lima Top, A y B); Real Plaza Salaverry (Jesús María, Lima Moderna), con la Placita del Emprendimiento del programa Perú Pasión de Intercorp, y Open Plaza Angamos (Surquillo), con el programa Open Emerge de espacios para emprendedores (público B); Larcomar queda como alternativa. Carrito en Wong o Vivanda (A) y en Plaza Vea (B). Orden de apertura: 1.er punto en enero en Jockey (A y B), 2.º punto en febrero en Real Plaza Salaverry u Open Plaza Angamos (B) y 3.er punto en agosto en La Rambla o en el carrito de Wong o Vivanda (A). Colegios: quioscos y kermeses en colegios de pensión alta de Lima Top (A) y en cadenas de pensión media como Innova Schools (39 sedes en Lima, B); un solo acuerdo con una cadena abre varias sedes. El quiosco solo puede vender productos sin octógonos (lineamientos de alimentación saludable del MINSA y la RVM 076-2019-MINEDU), por eso el brownie sin octógono es la llave de entrada; el quiosco lo opera un concesionario elegido por el colegio. 2 ferias pagadas, de campaña escolar (febrero) y del Día del Niño Peruano (segundo domingo de abril); kermeses, cumpleaños y ferias saludables o municipales, que no cobran stand. Las ferias navideñas se sacaron del plan: con unos 700 brownies, una feria de S/1,800 pierde dinero si no deja clientes que vuelvan. Plan: 1 punto en enero, 2 de febrero a julio y 3 de agosto a diciembre de 2027, solo fines de semana. Cada punto y cada evento lo atiende un(a) vendedor(a) pagado(a) a S/90 por día; el espacio cuesta S/600 por punto al mes y el stand en feria, S/1,800 más 3 días de vendedor(a).</a:t>
             </a:r>
             <a:endParaRPr lang="en-US" dirty="0"/>
           </a:p>
@@ -8146,7 +8146,7 @@
           <a:p>
             <a:r>
               <a:rPr lang="en-US" dirty="0"/>
-              <a:t>Sesión 05: el público objetivo orienta (un rango de edad, NSE y distrito) y el arquetipo conecta (una persona con nombre, dolor y hábito). Regla de 3 de la clase: nombre, dolor y hábito. Le vendemos a Claudia, no a "madres de 32 a 45". Datos: APEIM 2025, CPI 2026 y documento 04.</a:t>
+              <a:t>Sesión 05: el público objetivo orienta (un rango de edad, NSE y distrito) y el arquetipo conecta (una persona con nombre, dolor y hábito). Regla de 3 de la clase: nombre, dolor y hábito. Le vendemos a Claudia y a Rodrigo, no a "madres de 32 a 45". Atendemos a los dos segmentos con el mismo esfuerzo: en Lima Top (zona 7 de APEIM) el 51.4 % de los hogares es B y el 20.2 % es A, y en Lima Moderna (zona 6) 51.7 % B y 11.8 % A; o sea, unos 7 de cada 10 hogares A/B de esas zonas son B. Datos: APEIM 2025, CPI 2026 y documento 04.</a:t>
             </a:r>
             <a:endParaRPr lang="en-US" dirty="0"/>
           </a:p>
@@ -8234,7 +8234,7 @@
           <a:p>
             <a:r>
               <a:rPr lang="en-US" dirty="0"/>
-              <a:t>Partes esenciales de un arquetipo según la sesión 05: nombre, edad y ocupación; hábitos, frustraciones y valores; canales y comportamiento de compra. Guardiana del Hierro (la representa Claudia), El Resolutivo (Rodrigo) y El Consejero (quiosco, nutricionista o pediatra: en marketing se le llama prescriptor), que recomienda la marca a los otros dos. Los porcentajes son el peso esperado de cada arquetipo en el volumen.</a:t>
+              <a:t>Partes esenciales de un arquetipo según la sesión 05: nombre, edad y ocupación; hábitos, frustraciones y valores; canales y comportamiento de compra. Guardiana del Hierro (la representa Claudia, segmento A), El Resolutivo (Rodrigo, segmento B) y El Consejero (quiosco, nutricionista o pediatra: en marketing se le llama prescriptor), que recomienda la marca a los otros dos. Los porcentajes son el peso esperado de cada arquetipo en el volumen.</a:t>
             </a:r>
             <a:endParaRPr lang="en-US" dirty="0"/>
           </a:p>
@@ -8412,9 +8412,9 @@
           <a:p>
             <a:r>
               <a:rPr lang="en-US" dirty="0"/>
-              <a:t>Rodrigo Salazar, 42 años, La Molina. Gerente de operaciones; su esposa viaja por trabajo y él arma las loncheras. Ingreso familiar S/18,000 (hipótesis, A2). No busca salud, busca resolver: un pack que dure la semana, que aguante la mochila y que pueda pedir por WhatsApp con recordatorio. El pack de 12 por WhatsApp a S/49.90 equivale a S/24.95 por cada 6, en el borde de lo que pagaría (S/18 a 24): lo que justifica la diferencia es que la app le arma las loncheras y le avisa antes de que se acabe el pack.
+              <a:t>Rodrigo Salazar, 40 años, San Miguel (zona 6 de APEIM, Lima Moderna: 51.7 % de los hogares es B). Representa al segmento B, que son 7 de cada 10 hogares A/B de Lima Top y Moderna. Jefe de logística en una empresa de consumo masivo; su esposa es analista contable y los dos trabajan. Ingreso familiar S/8,500 al mes (hipótesis dentro del NSE B: el promedio B de APEIM 2025 es S/7,787 y el A, S/14,584). Sus hijos de 9 y 6 van a un colegio privado de pensión media (en Lima, de S/400 a 900 al mes por hijo según cuantomecuesta.com, abril de 2026). Él arma las loncheras de la mañana. No busca salud, busca resolver: un pack que dure la semana, que aguante la mochila y que pueda pedir por WhatsApp con recordatorio. Compra en Plaza Vea y Tottus, por apps y por WhatsApp; se entera por el chat del salón. Mira el precio por brownie: el pack de 6 a S/4.48 por WhatsApp está dentro de lo que pagaría (S/18 a 24 por 6, o S/3 a 4 por unidad), y el pack de 12 a S/49.90 (S/24.95 por cada 6) queda en el borde; lo justifican el hierro medido, la app que le arma las loncheras y el aviso antes de que se acabe el pack. Dónde lo encontramos: Real Plaza Salaverry y Open Plaza Angamos, el carrito en Plaza Vea y las kermeses de su colegio.
 IMAGEN 2 — prompt para Nano Banana (proporción 3:4):
-Photorealistic editorial portrait of a 42-year-old Peruvian man, an operations manager from La Molina, Lima. Short dark hair with a few grey strands, light stubble, friendly and practical expression, slightly hurried morning energy. He wears a navy quarter-zip sweater over a light blue shirt and a smartwatch. Early morning in a modern home kitchen: he holds his phone in one hand (a chat app on screen, not legible) while closing a child's school lunchbox with the other. Warm morning light, cream walls, wooden counter, small accents of chocolate brown and brick red. 85mm lens, f/2, shallow depth of field, natural skin texture. Vertical 3:4 composition, waist-up framing. No text, no logos, no watermark.</a:t>
+Photorealistic editorial portrait of a 40-year-old Peruvian man, a logistics supervisor from San Miguel, Lima, middle-class. Short dark hair with a few grey strands, light stubble, friendly and practical expression, slightly hurried morning energy. He wears a simple grey polo shirt and a basic wristwatch. Early morning in a small, tidy apartment kitchen: he holds his phone in one hand (a chat app on screen, not legible) while closing a child's school lunchbox with the other. Warm morning light, cream walls, wooden counter, small accents of chocolate brown and brick red. 85mm lens, f/2, shallow depth of field, natural skin texture. Vertical 3:4 composition, waist-up framing. No text, no logos, no watermark.</a:t>
             </a:r>
             <a:endParaRPr lang="en-US" dirty="0"/>
           </a:p>
@@ -14280,7 +14280,7 @@
                   <a:schemeClr val="tx2"/>
                 </a:solidFill>
               </a:rPr>
-              <a:t>Malls de Lima Top</a:t>
+              <a:t>Malls para A y para B</a:t>
             </a:r>
             <a:endParaRPr lang="en-US" sz="1400" dirty="0"/>
           </a:p>
@@ -14294,7 +14294,7 @@
                   <a:schemeClr val="accent2"/>
                 </a:solidFill>
               </a:rPr>
-              <a:t>Jockey Plaza, Larcomar y La Rambla: programas para emprendedores</a:t>
+              <a:t>Jockey y La Rambla (A y B) · Real Plaza Salaverry y Open Plaza Angamos (B)</a:t>
             </a:r>
             <a:endParaRPr lang="en-US" sz="1400" dirty="0"/>
           </a:p>
@@ -14427,7 +14427,7 @@
                   <a:schemeClr val="accent2"/>
                 </a:solidFill>
               </a:rPr>
-              <a:t>Carrito en la entrada de Wong o Vivanda, los fines de semana</a:t>
+              <a:t>Carrito en Wong o Vivanda (A) y en Plaza Vea (B), los fines de semana</a:t>
             </a:r>
             <a:endParaRPr lang="en-US" sz="1400" dirty="0"/>
           </a:p>
@@ -14679,7 +14679,7 @@
                   <a:schemeClr val="tx2"/>
                 </a:solidFill>
               </a:rPr>
-              <a:t>Colegios y comunidad</a:t>
+              <a:t>Colegios de los dos segmentos</a:t>
             </a:r>
             <a:endParaRPr lang="en-US" sz="1400" dirty="0"/>
           </a:p>
@@ -14693,7 +14693,7 @@
                   <a:schemeClr val="accent2"/>
                 </a:solidFill>
               </a:rPr>
-              <a:t>Kermeses, cumpleaños, ferias saludables y quioscos</a:t>
+              <a:t>Quioscos y kermeses en colegios de pensión alta (A) y en cadenas como Innova Schools (B)</a:t>
             </a:r>
             <a:endParaRPr lang="en-US" sz="1400" dirty="0"/>
           </a:p>
@@ -22028,7 +22028,7 @@
                   <a:schemeClr val="tx1"/>
                 </a:solidFill>
               </a:rPr>
-              <a:t>Malls, Wong y Vivanda, ferias, quioscos y naturistas</a:t>
+              <a:t>Malls y súper para A y B, ferias, quioscos y naturistas</a:t>
             </a:r>
             <a:endParaRPr lang="en-US" sz="1200" dirty="0"/>
           </a:p>
@@ -34355,7 +34355,7 @@
                   <a:schemeClr val="tx1"/>
                 </a:solidFill>
               </a:rPr>
-              <a:t>Malls, Wong y Vivanda</a:t>
+              <a:t>Malls y súper para A y para B</a:t>
             </a:r>
             <a:endParaRPr lang="en-US" sz="1200" dirty="0"/>
           </a:p>
@@ -35429,7 +35429,7 @@
                   <a:schemeClr val="tx1"/>
                 </a:solidFill>
               </a:rPr>
-              <a:t>Padres A/B de 32 a 45 años que leen etiquetas</a:t>
+              <a:t>Padres A y B de 32 a 45 que leen etiquetas (7 de cada 10, B)</a:t>
             </a:r>
             <a:endParaRPr lang="en-US" sz="1200" dirty="0"/>
           </a:p>
@@ -49959,8 +49959,8 @@
         </p:nvSpPr>
         <p:spPr>
           <a:xfrm>
-            <a:off x="868680" y="2971800"/>
-            <a:ext cx="4572000" cy="2011680"/>
+            <a:off x="868680" y="2880360"/>
+            <a:ext cx="4572000" cy="2377440"/>
           </a:xfrm>
           <a:prstGeom prst="rect">
             <a:avLst/>
@@ -49974,7 +49974,7 @@
           <a:p>
             <a:pPr marL="342900" indent="-342900">
               <a:spcAft>
-                <a:spcPts val="800"/>
+                <a:spcPts val="600"/>
               </a:spcAft>
               <a:buSzPct val="100000"/>
               <a:buChar char="•"/>
@@ -49992,7 +49992,7 @@
           <a:p>
             <a:pPr marL="342900" indent="-342900">
               <a:spcAft>
-                <a:spcPts val="800"/>
+                <a:spcPts val="600"/>
               </a:spcAft>
               <a:buSzPct val="100000"/>
               <a:buChar char="•"/>
@@ -50003,14 +50003,14 @@
                   <a:schemeClr val="tx1"/>
                 </a:solidFill>
               </a:rPr>
-              <a:t>NSE A y B de Lima Top y Lima Moderna</a:t>
+              <a:t>NSE A y B: 7 de cada 10 hogares son B</a:t>
             </a:r>
             <a:endParaRPr lang="en-US" sz="1600" dirty="0"/>
           </a:p>
           <a:p>
             <a:pPr marL="342900" indent="-342900">
               <a:spcAft>
-                <a:spcPts val="800"/>
+                <a:spcPts val="600"/>
               </a:spcAft>
               <a:buSzPct val="100000"/>
               <a:buChar char="•"/>
@@ -50021,14 +50021,32 @@
                   <a:schemeClr val="tx1"/>
                 </a:solidFill>
               </a:rPr>
-              <a:t>Hijos de 4 a 11 en colegio privado</a:t>
+              <a:t>Viven en Lima Top y Lima Moderna</a:t>
             </a:r>
             <a:endParaRPr lang="en-US" sz="1600" dirty="0"/>
           </a:p>
           <a:p>
             <a:pPr marL="342900" indent="-342900">
               <a:spcAft>
-                <a:spcPts val="800"/>
+                <a:spcPts val="600"/>
+              </a:spcAft>
+              <a:buSzPct val="100000"/>
+              <a:buChar char="•"/>
+            </a:pPr>
+            <a:r>
+              <a:rPr lang="en-US" sz="1600" dirty="0">
+                <a:solidFill>
+                  <a:schemeClr val="tx1"/>
+                </a:solidFill>
+              </a:rPr>
+              <a:t>Hijos de 4 a 11 en colegio privado</a:t>
+            </a:r>
+            <a:endParaRPr lang="en-US" sz="1600" dirty="0"/>
+          </a:p>
+          <a:p>
+            <a:pPr marL="342900" indent="-342900">
+              <a:spcAft>
+                <a:spcPts val="600"/>
               </a:spcAft>
               <a:buSzPct val="100000"/>
               <a:buChar char="•"/>
@@ -51364,7 +51382,7 @@
                   <a:schemeClr val="accent2"/>
                 </a:solidFill>
               </a:rPr>
-              <a:t>Papá o mamá de 38 a 45, gerente</a:t>
+              <a:t>Papá o mamá de 36 a 45, mando medio</a:t>
             </a:r>
             <a:endParaRPr lang="en-US" sz="1200" dirty="0"/>
           </a:p>
@@ -51580,7 +51598,7 @@
                   <a:schemeClr val="tx1"/>
                 </a:solidFill>
               </a:rPr>
-              <a:t>Rapidez y practicidad</a:t>
+              <a:t>Que valga lo que cuesta</a:t>
             </a:r>
             <a:endParaRPr lang="en-US" sz="1500" dirty="0"/>
           </a:p>
@@ -51652,7 +51670,7 @@
                   <a:schemeClr val="tx1"/>
                 </a:solidFill>
               </a:rPr>
-              <a:t>Supermercado y WhatsApp</a:t>
+              <a:t>Plaza Vea, Tottus y WhatsApp</a:t>
             </a:r>
             <a:endParaRPr lang="en-US" sz="1500" dirty="0"/>
           </a:p>
@@ -52429,7 +52447,7 @@
                   <a:schemeClr val="accent1"/>
                 </a:solidFill>
               </a:rPr>
-              <a:t>TRABAJO DE CAMPO 5 · BUYER PERSONA PRINCIPAL</a:t>
+              <a:t>TRABAJO DE CAMPO 5 · BUYER PERSONA · SEGMENTO A</a:t>
             </a:r>
             <a:endParaRPr lang="en-US" sz="1200" dirty="0"/>
           </a:p>
@@ -53779,7 +53797,7 @@
                   <a:schemeClr val="accent1"/>
                 </a:solidFill>
               </a:rPr>
-              <a:t>TRABAJO DE CAMPO 5 · BUYER PERSONA SECUNDARIO</a:t>
+              <a:t>TRABAJO DE CAMPO 5 · BUYER PERSONA · SEGMENTO B</a:t>
             </a:r>
             <a:endParaRPr lang="en-US" sz="1200" dirty="0"/>
           </a:p>
@@ -53918,7 +53936,7 @@
                   <a:schemeClr val="accent2"/>
                 </a:solidFill>
               </a:rPr>
-              <a:t>Retrato de Rodrigo (42, La Molina)</a:t>
+              <a:t>Retrato de Rodrigo (40, San Miguel)</a:t>
             </a:r>
             <a:endParaRPr lang="en-US" sz="1400" dirty="0"/>
           </a:p>
@@ -54074,7 +54092,7 @@
                   <a:schemeClr val="tx2"/>
                 </a:solidFill>
               </a:rPr>
-              <a:t>42 años · La Molina</a:t>
+              <a:t>40 años · San Miguel</a:t>
             </a:r>
             <a:endParaRPr lang="en-US" sz="1500" dirty="0"/>
           </a:p>
@@ -54180,7 +54198,7 @@
                   <a:schemeClr val="tx2"/>
                 </a:solidFill>
               </a:rPr>
-              <a:t>Gerente de operaciones</a:t>
+              <a:t>Jefe de logística</a:t>
             </a:r>
             <a:endParaRPr lang="en-US" sz="1500" dirty="0"/>
           </a:p>
@@ -54392,7 +54410,7 @@
                   <a:schemeClr val="tx2"/>
                 </a:solidFill>
               </a:rPr>
-              <a:t>S/18,000 al mes</a:t>
+              <a:t>S/8,500 al mes</a:t>
             </a:r>
             <a:endParaRPr lang="en-US" sz="1500" dirty="0"/>
           </a:p>
@@ -54498,7 +54516,7 @@
                   <a:schemeClr val="tx2"/>
                 </a:solidFill>
               </a:rPr>
-              <a:t>Apps, IG y TikTok</a:t>
+              <a:t>Plaza Vea y WhatsApp</a:t>
             </a:r>
             <a:endParaRPr lang="en-US" sz="1500" dirty="0"/>
           </a:p>
@@ -54781,7 +54799,7 @@
                   <a:schemeClr val="tx1"/>
                 </a:solidFill>
               </a:rPr>
-              <a:t>Snacks aplastados en la mochila</a:t>
+              <a:t>Que no le rinda el dinero</a:t>
             </a:r>
             <a:endParaRPr lang="en-US" sz="1400" dirty="0"/>
           </a:p>
@@ -54958,7 +54976,7 @@
                   <a:schemeClr val="tx1"/>
                 </a:solidFill>
               </a:rPr>
-              <a:t>Recordatorio para recomprar</a:t>
+              <a:t>Precio claro por brownie</a:t>
             </a:r>
             <a:endParaRPr lang="en-US" sz="1400" dirty="0"/>
           </a:p>

--- a/04-reformulacion/TC5-8/TC5-8-AndiBite.pptx
+++ b/04-reformulacion/TC5-8/TC5-8-AndiBite.pptx
@@ -142,13 +142,13 @@
   <p:extLst>
     <p:ext uri="{521415D9-36F7-43E2-AB2F-B90AF26B5E84}">
       <p14:sectionLst xmlns:p14="http://schemas.microsoft.com/office/powerpoint/2010/main">
-        <p14:section name="Portada" id="{9f06238e-bae5-77e5-bbb9-fbbed74f096b}">
+        <p14:section name="Portada" id="{6bb93df4-7275-e5c1-2d84-0ff037ea38f7}">
           <p14:sldIdLst>
             <p14:sldId id="256"/>
             <p14:sldId id="257"/>
           </p14:sldIdLst>
         </p14:section>
-        <p14:section name="TC5 · Cliente, mercado y canal" id="{76ca459e-9410-98a4-c60e-0c7d210f1868}">
+        <p14:section name="TC5 · Cliente, mercado y canal" id="{b00ad03c-17f6-3167-3f80-477b4c79be9b}">
           <p14:sldIdLst>
             <p14:sldId id="258"/>
             <p14:sldId id="259"/>
@@ -162,7 +162,7 @@
             <p14:sldId id="267"/>
           </p14:sldIdLst>
         </p14:section>
-        <p14:section name="TC6 · Relación e ingresos" id="{e56c48f2-4a9d-c768-94e3-f752d3fd75ed}">
+        <p14:section name="TC6 · Relación e ingresos" id="{fc878a28-b38b-bb02-57a6-09f127f28760}">
           <p14:sldIdLst>
             <p14:sldId id="268"/>
             <p14:sldId id="269"/>
@@ -171,7 +171,7 @@
             <p14:sldId id="272"/>
           </p14:sldIdLst>
         </p14:section>
-        <p14:section name="TC7 · Canvas" id="{78d57c94-d486-6f97-9ae1-e924219b8c6d}">
+        <p14:section name="TC7 · Canvas" id="{0c6f888e-f448-36cc-49f6-15efc1b790b3}">
           <p14:sldIdLst>
             <p14:sldId id="273"/>
             <p14:sldId id="274"/>
@@ -185,7 +185,7 @@
             <p14:sldId id="282"/>
           </p14:sldIdLst>
         </p14:section>
-        <p14:section name="TC8 · Propuesta de valor" id="{dd8e6ed5-dab8-70cb-d3ae-a259cf5b9074}">
+        <p14:section name="TC8 · Propuesta de valor" id="{9df8ab34-5dfa-8806-6883-d8d2401cb831}">
           <p14:sldIdLst>
             <p14:sldId id="283"/>
             <p14:sldId id="284"/>
@@ -196,7 +196,7 @@
             <p14:sldId id="289"/>
           </p14:sldIdLst>
         </p14:section>
-        <p14:section name="Cierre" id="{609ce8b3-dd19-989b-dadc-0a2601b7ce1e}">
+        <p14:section name="Cierre" id="{b64aaca4-f7e6-fa7e-deab-ab4296f83090}">
           <p14:sldIdLst>
             <p14:sldId id="290"/>
             <p14:sldId id="291"/>
@@ -6648,7 +6648,7 @@
           <a:p>
             <a:r>
               <a:rPr lang="en-US" dirty="0"/>
-              <a:t>Sesión 08: toda actividad genera un costo. Tipos de actividad de Osterwalder, en palabras simples: producción, atender al cliente (en el libro, "resolución de problemas"), mantener canales (en el libro, "plataforma") y gestión. Producir cuesta S/1.64 por brownie en el pack de 6, todo incluido: fabricar S/1.06 (S/0.605 de insumos con sangrecita de res en polvo a S/300 por kg, y S/0.45 que nos cobra la planta) más S/0.58 de bolsita, doypack, etiquetas con el código de la app, calidad, transporte, almacén y merma. La calidad cuesta S/625 por la producción de cada mes (microbiológico S/250 y hierro S/375, que se publica en la app); el hierro se mide todos los meses hasta junio y cada 2 meses desde julio, cuando la receta ya es estable: en promedio S/0.12 por brownie. Vender en stands: S/600 por punto al mes y S/90 por día de vendedor(a). Ferias pagadas: S/1,800 de stand más 3 días de vendedor(a) (S/270); cada evento sin costo, S/90 de vendedor(a) y S/70 de aporte al organizador. Recompra: S/0.50 por brownie con entregas agrupadas 2 días por semana por zona y recojo en el stand. Contenido: S/700 de pauta y material, y S/200 para premiar a las mamás embajadoras. App: S/250 al mes de servidor y mantenimiento, más S/0.04 por código impreso. Administración: S/745 (contador, facturación, web, teléfono, movilidad, GS1, banco y uniformes) y la coordinadora en planilla, S/709. El carné de sanidad es requisito al contratar, así que no lo paga la empresa.</a:t>
+              <a:t>Sesión 08: toda actividad genera un costo. Tipos de actividad de Osterwalder, en palabras simples: producción, atender al cliente (en el libro, "resolución de problemas"), mantener canales (en el libro, "plataforma") y gestión. Producir cuesta S/1.64 por brownie en el pack de 6, todo incluido: fabricar S/1.06 (S/0.605 de insumos con sangrecita de res en polvo a S/300 por kg, y S/0.45 que nos cobra la planta) más S/0.30 de empaque (bolsita, doypack y etiquetas con el código de la app), S/0.16 de merma, transporte y almacén, y S/0.12 de calidad. Esos S/0.12 son el análisis de cada mes, que se muestra en la segunda fila solo para explicar de dónde salen: no se suman dos veces. La calidad cuesta S/625 por la producción de cada mes (microbiológico S/250 y hierro S/375, que se publica en la app); el hierro se mide todos los meses hasta junio y cada 2 meses desde julio, cuando la receta ya es estable: en promedio S/0.12 por brownie. Vender en stands: S/600 por punto al mes y S/90 por día de vendedor(a). Ferias pagadas: S/1,800 de stand más 3 días de vendedor(a) (S/270); cada evento sin costo, S/90 de vendedor(a) y S/70 de aporte al organizador. Recompra: S/0.50 por brownie con entregas agrupadas 2 días por semana por zona y recojo en el stand. Contenido: S/700 de pauta y material, y S/200 para premiar a las mamás embajadoras. App: S/250 al mes de servidor y mantenimiento, más S/0.04 por código impreso. Administración: S/745 (contador, facturación, web, teléfono, movilidad, GS1, banco y uniformes) y la coordinadora en planilla, S/709. El carné de sanidad es requisito al contratar, así que no lo paga la empresa.</a:t>
             </a:r>
             <a:endParaRPr lang="en-US" dirty="0"/>
           </a:p>
@@ -26524,7 +26524,7 @@
                 <a:gridCol w="4343400"/>
                 <a:gridCol w="1719072"/>
               </a:tblGrid>
-              <a:tr h="457200">
+              <a:tr h="420624">
                 <a:tc>
                   <a:txBody>
                     <a:bodyPr/>
@@ -26770,7 +26770,7 @@
                   </a:tcPr>
                 </a:tc>
               </a:tr>
-              <a:tr h="457200">
+              <a:tr h="585216">
                 <a:tc>
                   <a:txBody>
                     <a:bodyPr/>
@@ -26907,7 +26907,7 @@
                             <a:schemeClr val="tx1"/>
                           </a:solidFill>
                         </a:rPr>
-                        <a:t>S/1.64 por brownie todo incluido (fabricar S/1.06 + empaque y calidad S/0.58)</a:t>
+                        <a:t>S/1.64 por brownie: fabricar S/1.06 + empaque S/0.30 + merma y traslado S/0.16 + calidad S/0.12</a:t>
                       </a:r>
                       <a:endParaRPr lang="en-US" sz="1300" dirty="0"/>
                     </a:p>
@@ -27016,7 +27016,7 @@
                   </a:tcPr>
                 </a:tc>
               </a:tr>
-              <a:tr h="457200">
+              <a:tr h="585216">
                 <a:tc>
                   <a:txBody>
                     <a:bodyPr/>
@@ -27153,7 +27153,745 @@
                             <a:schemeClr val="tx1"/>
                           </a:solidFill>
                         </a:rPr>
-                        <a:t>S/625 por la producción de cada mes (S/0.12 por brownie)</a:t>
+                        <a:t>S/625 por la producción de cada mes: son los S/0.12 de la fila de arriba</a:t>
+                      </a:r>
+                      <a:endParaRPr lang="en-US" sz="1300" dirty="0"/>
+                    </a:p>
+                  </a:txBody>
+                  <a:tcPr marL="64008" marR="64008" marT="64008" marB="64008" anchor="ctr">
+                    <a:lnL w="9525" cap="flat" cmpd="sng" algn="ctr">
+                      <a:solidFill>
+                        <a:srgbClr val="E8D8C4"/>
+                      </a:solidFill>
+                      <a:prstDash val="solid"/>
+                      <a:round/>
+                      <a:headEnd type="none" w="med" len="med"/>
+                      <a:tailEnd type="none" w="med" len="med"/>
+                    </a:lnL>
+                    <a:lnR w="9525" cap="flat" cmpd="sng" algn="ctr">
+                      <a:solidFill>
+                        <a:srgbClr val="E8D8C4"/>
+                      </a:solidFill>
+                      <a:prstDash val="solid"/>
+                      <a:round/>
+                      <a:headEnd type="none" w="med" len="med"/>
+                      <a:tailEnd type="none" w="med" len="med"/>
+                    </a:lnR>
+                    <a:lnT w="9525" cap="flat" cmpd="sng" algn="ctr">
+                      <a:solidFill>
+                        <a:srgbClr val="E8D8C4"/>
+                      </a:solidFill>
+                      <a:prstDash val="solid"/>
+                      <a:round/>
+                      <a:headEnd type="none" w="med" len="med"/>
+                      <a:tailEnd type="none" w="med" len="med"/>
+                    </a:lnT>
+                    <a:lnB w="9525" cap="flat" cmpd="sng" algn="ctr">
+                      <a:solidFill>
+                        <a:srgbClr val="E8D8C4"/>
+                      </a:solidFill>
+                      <a:prstDash val="solid"/>
+                      <a:round/>
+                      <a:headEnd type="none" w="med" len="med"/>
+                      <a:tailEnd type="none" w="med" len="med"/>
+                    </a:lnB>
+                    <a:solidFill>
+                      <a:srgbClr val="FFFFFF"/>
+                    </a:solidFill>
+                  </a:tcPr>
+                </a:tc>
+                <a:tc>
+                  <a:txBody>
+                    <a:bodyPr/>
+                    <a:lstStyle/>
+                    <a:p>
+                      <a:pPr indent="0" marL="0">
+                        <a:buNone/>
+                      </a:pPr>
+                      <a:r>
+                        <a:rPr lang="en-US" sz="1200" dirty="0">
+                          <a:solidFill>
+                            <a:schemeClr val="accent2"/>
+                          </a:solidFill>
+                        </a:rPr>
+                        <a:t>Ya incluido arriba</a:t>
+                      </a:r>
+                      <a:endParaRPr lang="en-US" sz="1200" dirty="0"/>
+                    </a:p>
+                  </a:txBody>
+                  <a:tcPr marL="64008" marR="64008" marT="64008" marB="64008" anchor="ctr">
+                    <a:lnL w="9525" cap="flat" cmpd="sng" algn="ctr">
+                      <a:solidFill>
+                        <a:srgbClr val="E8D8C4"/>
+                      </a:solidFill>
+                      <a:prstDash val="solid"/>
+                      <a:round/>
+                      <a:headEnd type="none" w="med" len="med"/>
+                      <a:tailEnd type="none" w="med" len="med"/>
+                    </a:lnL>
+                    <a:lnR w="9525" cap="flat" cmpd="sng" algn="ctr">
+                      <a:solidFill>
+                        <a:srgbClr val="E8D8C4"/>
+                      </a:solidFill>
+                      <a:prstDash val="solid"/>
+                      <a:round/>
+                      <a:headEnd type="none" w="med" len="med"/>
+                      <a:tailEnd type="none" w="med" len="med"/>
+                    </a:lnR>
+                    <a:lnT w="9525" cap="flat" cmpd="sng" algn="ctr">
+                      <a:solidFill>
+                        <a:srgbClr val="E8D8C4"/>
+                      </a:solidFill>
+                      <a:prstDash val="solid"/>
+                      <a:round/>
+                      <a:headEnd type="none" w="med" len="med"/>
+                      <a:tailEnd type="none" w="med" len="med"/>
+                    </a:lnT>
+                    <a:lnB w="9525" cap="flat" cmpd="sng" algn="ctr">
+                      <a:solidFill>
+                        <a:srgbClr val="E8D8C4"/>
+                      </a:solidFill>
+                      <a:prstDash val="solid"/>
+                      <a:round/>
+                      <a:headEnd type="none" w="med" len="med"/>
+                      <a:tailEnd type="none" w="med" len="med"/>
+                    </a:lnB>
+                    <a:solidFill>
+                      <a:srgbClr val="FFFFFF"/>
+                    </a:solidFill>
+                  </a:tcPr>
+                </a:tc>
+              </a:tr>
+              <a:tr h="438912">
+                <a:tc>
+                  <a:txBody>
+                    <a:bodyPr/>
+                    <a:lstStyle/>
+                    <a:p>
+                      <a:pPr indent="0" marL="0">
+                        <a:buNone/>
+                      </a:pPr>
+                      <a:r>
+                        <a:rPr lang="en-US" sz="1300" b="1" dirty="0">
+                          <a:solidFill>
+                            <a:schemeClr val="tx1"/>
+                          </a:solidFill>
+                        </a:rPr>
+                        <a:t>Vender en stands y carrito</a:t>
+                      </a:r>
+                      <a:endParaRPr lang="en-US" sz="1300" dirty="0"/>
+                    </a:p>
+                  </a:txBody>
+                  <a:tcPr marL="64008" marR="64008" marT="64008" marB="64008" anchor="ctr">
+                    <a:lnL w="9525" cap="flat" cmpd="sng" algn="ctr">
+                      <a:solidFill>
+                        <a:srgbClr val="E8D8C4"/>
+                      </a:solidFill>
+                      <a:prstDash val="solid"/>
+                      <a:round/>
+                      <a:headEnd type="none" w="med" len="med"/>
+                      <a:tailEnd type="none" w="med" len="med"/>
+                    </a:lnL>
+                    <a:lnR w="9525" cap="flat" cmpd="sng" algn="ctr">
+                      <a:solidFill>
+                        <a:srgbClr val="E8D8C4"/>
+                      </a:solidFill>
+                      <a:prstDash val="solid"/>
+                      <a:round/>
+                      <a:headEnd type="none" w="med" len="med"/>
+                      <a:tailEnd type="none" w="med" len="med"/>
+                    </a:lnR>
+                    <a:lnT w="9525" cap="flat" cmpd="sng" algn="ctr">
+                      <a:solidFill>
+                        <a:srgbClr val="E8D8C4"/>
+                      </a:solidFill>
+                      <a:prstDash val="solid"/>
+                      <a:round/>
+                      <a:headEnd type="none" w="med" len="med"/>
+                      <a:tailEnd type="none" w="med" len="med"/>
+                    </a:lnT>
+                    <a:lnB w="9525" cap="flat" cmpd="sng" algn="ctr">
+                      <a:solidFill>
+                        <a:srgbClr val="E8D8C4"/>
+                      </a:solidFill>
+                      <a:prstDash val="solid"/>
+                      <a:round/>
+                      <a:headEnd type="none" w="med" len="med"/>
+                      <a:tailEnd type="none" w="med" len="med"/>
+                    </a:lnB>
+                    <a:solidFill>
+                      <a:srgbClr val="FFFFFF"/>
+                    </a:solidFill>
+                  </a:tcPr>
+                </a:tc>
+                <a:tc>
+                  <a:txBody>
+                    <a:bodyPr/>
+                    <a:lstStyle/>
+                    <a:p>
+                      <a:pPr indent="0" marL="0">
+                        <a:buNone/>
+                      </a:pPr>
+                      <a:r>
+                        <a:rPr lang="en-US" sz="1200" b="1" dirty="0">
+                          <a:solidFill>
+                            <a:schemeClr val="accent1"/>
+                          </a:solidFill>
+                        </a:rPr>
+                        <a:t>Atender al cliente</a:t>
+                      </a:r>
+                      <a:endParaRPr lang="en-US" sz="1200" dirty="0"/>
+                    </a:p>
+                  </a:txBody>
+                  <a:tcPr marL="64008" marR="64008" marT="64008" marB="64008" anchor="ctr">
+                    <a:lnL w="9525" cap="flat" cmpd="sng" algn="ctr">
+                      <a:solidFill>
+                        <a:srgbClr val="E8D8C4"/>
+                      </a:solidFill>
+                      <a:prstDash val="solid"/>
+                      <a:round/>
+                      <a:headEnd type="none" w="med" len="med"/>
+                      <a:tailEnd type="none" w="med" len="med"/>
+                    </a:lnL>
+                    <a:lnR w="9525" cap="flat" cmpd="sng" algn="ctr">
+                      <a:solidFill>
+                        <a:srgbClr val="E8D8C4"/>
+                      </a:solidFill>
+                      <a:prstDash val="solid"/>
+                      <a:round/>
+                      <a:headEnd type="none" w="med" len="med"/>
+                      <a:tailEnd type="none" w="med" len="med"/>
+                    </a:lnR>
+                    <a:lnT w="9525" cap="flat" cmpd="sng" algn="ctr">
+                      <a:solidFill>
+                        <a:srgbClr val="E8D8C4"/>
+                      </a:solidFill>
+                      <a:prstDash val="solid"/>
+                      <a:round/>
+                      <a:headEnd type="none" w="med" len="med"/>
+                      <a:tailEnd type="none" w="med" len="med"/>
+                    </a:lnT>
+                    <a:lnB w="9525" cap="flat" cmpd="sng" algn="ctr">
+                      <a:solidFill>
+                        <a:srgbClr val="E8D8C4"/>
+                      </a:solidFill>
+                      <a:prstDash val="solid"/>
+                      <a:round/>
+                      <a:headEnd type="none" w="med" len="med"/>
+                      <a:tailEnd type="none" w="med" len="med"/>
+                    </a:lnB>
+                    <a:solidFill>
+                      <a:srgbClr val="FFFFFF"/>
+                    </a:solidFill>
+                  </a:tcPr>
+                </a:tc>
+                <a:tc>
+                  <a:txBody>
+                    <a:bodyPr/>
+                    <a:lstStyle/>
+                    <a:p>
+                      <a:pPr indent="0" marL="0">
+                        <a:buNone/>
+                      </a:pPr>
+                      <a:r>
+                        <a:rPr lang="en-US" sz="1300" dirty="0">
+                          <a:solidFill>
+                            <a:schemeClr val="tx1"/>
+                          </a:solidFill>
+                        </a:rPr>
+                        <a:t>S/600 por punto al mes + S/90 por día de vendedor(a)</a:t>
+                      </a:r>
+                      <a:endParaRPr lang="en-US" sz="1300" dirty="0"/>
+                    </a:p>
+                  </a:txBody>
+                  <a:tcPr marL="64008" marR="64008" marT="64008" marB="64008" anchor="ctr">
+                    <a:lnL w="9525" cap="flat" cmpd="sng" algn="ctr">
+                      <a:solidFill>
+                        <a:srgbClr val="E8D8C4"/>
+                      </a:solidFill>
+                      <a:prstDash val="solid"/>
+                      <a:round/>
+                      <a:headEnd type="none" w="med" len="med"/>
+                      <a:tailEnd type="none" w="med" len="med"/>
+                    </a:lnL>
+                    <a:lnR w="9525" cap="flat" cmpd="sng" algn="ctr">
+                      <a:solidFill>
+                        <a:srgbClr val="E8D8C4"/>
+                      </a:solidFill>
+                      <a:prstDash val="solid"/>
+                      <a:round/>
+                      <a:headEnd type="none" w="med" len="med"/>
+                      <a:tailEnd type="none" w="med" len="med"/>
+                    </a:lnR>
+                    <a:lnT w="9525" cap="flat" cmpd="sng" algn="ctr">
+                      <a:solidFill>
+                        <a:srgbClr val="E8D8C4"/>
+                      </a:solidFill>
+                      <a:prstDash val="solid"/>
+                      <a:round/>
+                      <a:headEnd type="none" w="med" len="med"/>
+                      <a:tailEnd type="none" w="med" len="med"/>
+                    </a:lnT>
+                    <a:lnB w="9525" cap="flat" cmpd="sng" algn="ctr">
+                      <a:solidFill>
+                        <a:srgbClr val="E8D8C4"/>
+                      </a:solidFill>
+                      <a:prstDash val="solid"/>
+                      <a:round/>
+                      <a:headEnd type="none" w="med" len="med"/>
+                      <a:tailEnd type="none" w="med" len="med"/>
+                    </a:lnB>
+                    <a:solidFill>
+                      <a:srgbClr val="FFFFFF"/>
+                    </a:solidFill>
+                  </a:tcPr>
+                </a:tc>
+                <a:tc>
+                  <a:txBody>
+                    <a:bodyPr/>
+                    <a:lstStyle/>
+                    <a:p>
+                      <a:pPr indent="0" marL="0">
+                        <a:buNone/>
+                      </a:pPr>
+                      <a:r>
+                        <a:rPr lang="en-US" sz="1200" dirty="0">
+                          <a:solidFill>
+                            <a:schemeClr val="accent2"/>
+                          </a:solidFill>
+                        </a:rPr>
+                        <a:t>Crece con cada punto</a:t>
+                      </a:r>
+                      <a:endParaRPr lang="en-US" sz="1200" dirty="0"/>
+                    </a:p>
+                  </a:txBody>
+                  <a:tcPr marL="64008" marR="64008" marT="64008" marB="64008" anchor="ctr">
+                    <a:lnL w="9525" cap="flat" cmpd="sng" algn="ctr">
+                      <a:solidFill>
+                        <a:srgbClr val="E8D8C4"/>
+                      </a:solidFill>
+                      <a:prstDash val="solid"/>
+                      <a:round/>
+                      <a:headEnd type="none" w="med" len="med"/>
+                      <a:tailEnd type="none" w="med" len="med"/>
+                    </a:lnL>
+                    <a:lnR w="9525" cap="flat" cmpd="sng" algn="ctr">
+                      <a:solidFill>
+                        <a:srgbClr val="E8D8C4"/>
+                      </a:solidFill>
+                      <a:prstDash val="solid"/>
+                      <a:round/>
+                      <a:headEnd type="none" w="med" len="med"/>
+                      <a:tailEnd type="none" w="med" len="med"/>
+                    </a:lnR>
+                    <a:lnT w="9525" cap="flat" cmpd="sng" algn="ctr">
+                      <a:solidFill>
+                        <a:srgbClr val="E8D8C4"/>
+                      </a:solidFill>
+                      <a:prstDash val="solid"/>
+                      <a:round/>
+                      <a:headEnd type="none" w="med" len="med"/>
+                      <a:tailEnd type="none" w="med" len="med"/>
+                    </a:lnT>
+                    <a:lnB w="9525" cap="flat" cmpd="sng" algn="ctr">
+                      <a:solidFill>
+                        <a:srgbClr val="E8D8C4"/>
+                      </a:solidFill>
+                      <a:prstDash val="solid"/>
+                      <a:round/>
+                      <a:headEnd type="none" w="med" len="med"/>
+                      <a:tailEnd type="none" w="med" len="med"/>
+                    </a:lnB>
+                    <a:solidFill>
+                      <a:srgbClr val="FBF3E8"/>
+                    </a:solidFill>
+                  </a:tcPr>
+                </a:tc>
+              </a:tr>
+              <a:tr h="438912">
+                <a:tc>
+                  <a:txBody>
+                    <a:bodyPr/>
+                    <a:lstStyle/>
+                    <a:p>
+                      <a:pPr indent="0" marL="0">
+                        <a:buNone/>
+                      </a:pPr>
+                      <a:r>
+                        <a:rPr lang="en-US" sz="1300" b="1" dirty="0">
+                          <a:solidFill>
+                            <a:schemeClr val="tx1"/>
+                          </a:solidFill>
+                        </a:rPr>
+                        <a:t>Ferias y eventos</a:t>
+                      </a:r>
+                      <a:endParaRPr lang="en-US" sz="1300" dirty="0"/>
+                    </a:p>
+                  </a:txBody>
+                  <a:tcPr marL="64008" marR="64008" marT="64008" marB="64008" anchor="ctr">
+                    <a:lnL w="9525" cap="flat" cmpd="sng" algn="ctr">
+                      <a:solidFill>
+                        <a:srgbClr val="E8D8C4"/>
+                      </a:solidFill>
+                      <a:prstDash val="solid"/>
+                      <a:round/>
+                      <a:headEnd type="none" w="med" len="med"/>
+                      <a:tailEnd type="none" w="med" len="med"/>
+                    </a:lnL>
+                    <a:lnR w="9525" cap="flat" cmpd="sng" algn="ctr">
+                      <a:solidFill>
+                        <a:srgbClr val="E8D8C4"/>
+                      </a:solidFill>
+                      <a:prstDash val="solid"/>
+                      <a:round/>
+                      <a:headEnd type="none" w="med" len="med"/>
+                      <a:tailEnd type="none" w="med" len="med"/>
+                    </a:lnR>
+                    <a:lnT w="9525" cap="flat" cmpd="sng" algn="ctr">
+                      <a:solidFill>
+                        <a:srgbClr val="E8D8C4"/>
+                      </a:solidFill>
+                      <a:prstDash val="solid"/>
+                      <a:round/>
+                      <a:headEnd type="none" w="med" len="med"/>
+                      <a:tailEnd type="none" w="med" len="med"/>
+                    </a:lnT>
+                    <a:lnB w="9525" cap="flat" cmpd="sng" algn="ctr">
+                      <a:solidFill>
+                        <a:srgbClr val="E8D8C4"/>
+                      </a:solidFill>
+                      <a:prstDash val="solid"/>
+                      <a:round/>
+                      <a:headEnd type="none" w="med" len="med"/>
+                      <a:tailEnd type="none" w="med" len="med"/>
+                    </a:lnB>
+                    <a:solidFill>
+                      <a:srgbClr val="FFFFFF"/>
+                    </a:solidFill>
+                  </a:tcPr>
+                </a:tc>
+                <a:tc>
+                  <a:txBody>
+                    <a:bodyPr/>
+                    <a:lstStyle/>
+                    <a:p>
+                      <a:pPr indent="0" marL="0">
+                        <a:buNone/>
+                      </a:pPr>
+                      <a:r>
+                        <a:rPr lang="en-US" sz="1200" b="1" dirty="0">
+                          <a:solidFill>
+                            <a:schemeClr val="accent1"/>
+                          </a:solidFill>
+                        </a:rPr>
+                        <a:t>Atender al cliente</a:t>
+                      </a:r>
+                      <a:endParaRPr lang="en-US" sz="1200" dirty="0"/>
+                    </a:p>
+                  </a:txBody>
+                  <a:tcPr marL="64008" marR="64008" marT="64008" marB="64008" anchor="ctr">
+                    <a:lnL w="9525" cap="flat" cmpd="sng" algn="ctr">
+                      <a:solidFill>
+                        <a:srgbClr val="E8D8C4"/>
+                      </a:solidFill>
+                      <a:prstDash val="solid"/>
+                      <a:round/>
+                      <a:headEnd type="none" w="med" len="med"/>
+                      <a:tailEnd type="none" w="med" len="med"/>
+                    </a:lnL>
+                    <a:lnR w="9525" cap="flat" cmpd="sng" algn="ctr">
+                      <a:solidFill>
+                        <a:srgbClr val="E8D8C4"/>
+                      </a:solidFill>
+                      <a:prstDash val="solid"/>
+                      <a:round/>
+                      <a:headEnd type="none" w="med" len="med"/>
+                      <a:tailEnd type="none" w="med" len="med"/>
+                    </a:lnR>
+                    <a:lnT w="9525" cap="flat" cmpd="sng" algn="ctr">
+                      <a:solidFill>
+                        <a:srgbClr val="E8D8C4"/>
+                      </a:solidFill>
+                      <a:prstDash val="solid"/>
+                      <a:round/>
+                      <a:headEnd type="none" w="med" len="med"/>
+                      <a:tailEnd type="none" w="med" len="med"/>
+                    </a:lnT>
+                    <a:lnB w="9525" cap="flat" cmpd="sng" algn="ctr">
+                      <a:solidFill>
+                        <a:srgbClr val="E8D8C4"/>
+                      </a:solidFill>
+                      <a:prstDash val="solid"/>
+                      <a:round/>
+                      <a:headEnd type="none" w="med" len="med"/>
+                      <a:tailEnd type="none" w="med" len="med"/>
+                    </a:lnB>
+                    <a:solidFill>
+                      <a:srgbClr val="FFFFFF"/>
+                    </a:solidFill>
+                  </a:tcPr>
+                </a:tc>
+                <a:tc>
+                  <a:txBody>
+                    <a:bodyPr/>
+                    <a:lstStyle/>
+                    <a:p>
+                      <a:pPr indent="0" marL="0">
+                        <a:buNone/>
+                      </a:pPr>
+                      <a:r>
+                        <a:rPr lang="en-US" sz="1300" dirty="0">
+                          <a:solidFill>
+                            <a:schemeClr val="tx1"/>
+                          </a:solidFill>
+                        </a:rPr>
+                        <a:t>Feria S/1,800 + S/270 de vendedor(a) · evento S/160</a:t>
+                      </a:r>
+                      <a:endParaRPr lang="en-US" sz="1300" dirty="0"/>
+                    </a:p>
+                  </a:txBody>
+                  <a:tcPr marL="64008" marR="64008" marT="64008" marB="64008" anchor="ctr">
+                    <a:lnL w="9525" cap="flat" cmpd="sng" algn="ctr">
+                      <a:solidFill>
+                        <a:srgbClr val="E8D8C4"/>
+                      </a:solidFill>
+                      <a:prstDash val="solid"/>
+                      <a:round/>
+                      <a:headEnd type="none" w="med" len="med"/>
+                      <a:tailEnd type="none" w="med" len="med"/>
+                    </a:lnL>
+                    <a:lnR w="9525" cap="flat" cmpd="sng" algn="ctr">
+                      <a:solidFill>
+                        <a:srgbClr val="E8D8C4"/>
+                      </a:solidFill>
+                      <a:prstDash val="solid"/>
+                      <a:round/>
+                      <a:headEnd type="none" w="med" len="med"/>
+                      <a:tailEnd type="none" w="med" len="med"/>
+                    </a:lnR>
+                    <a:lnT w="9525" cap="flat" cmpd="sng" algn="ctr">
+                      <a:solidFill>
+                        <a:srgbClr val="E8D8C4"/>
+                      </a:solidFill>
+                      <a:prstDash val="solid"/>
+                      <a:round/>
+                      <a:headEnd type="none" w="med" len="med"/>
+                      <a:tailEnd type="none" w="med" len="med"/>
+                    </a:lnT>
+                    <a:lnB w="9525" cap="flat" cmpd="sng" algn="ctr">
+                      <a:solidFill>
+                        <a:srgbClr val="E8D8C4"/>
+                      </a:solidFill>
+                      <a:prstDash val="solid"/>
+                      <a:round/>
+                      <a:headEnd type="none" w="med" len="med"/>
+                      <a:tailEnd type="none" w="med" len="med"/>
+                    </a:lnB>
+                    <a:solidFill>
+                      <a:srgbClr val="FFFFFF"/>
+                    </a:solidFill>
+                  </a:tcPr>
+                </a:tc>
+                <a:tc>
+                  <a:txBody>
+                    <a:bodyPr/>
+                    <a:lstStyle/>
+                    <a:p>
+                      <a:pPr indent="0" marL="0">
+                        <a:buNone/>
+                      </a:pPr>
+                      <a:r>
+                        <a:rPr lang="en-US" sz="1200" dirty="0">
+                          <a:solidFill>
+                            <a:schemeClr val="accent2"/>
+                          </a:solidFill>
+                        </a:rPr>
+                        <a:t>Por evento</a:t>
+                      </a:r>
+                      <a:endParaRPr lang="en-US" sz="1200" dirty="0"/>
+                    </a:p>
+                  </a:txBody>
+                  <a:tcPr marL="64008" marR="64008" marT="64008" marB="64008" anchor="ctr">
+                    <a:lnL w="9525" cap="flat" cmpd="sng" algn="ctr">
+                      <a:solidFill>
+                        <a:srgbClr val="E8D8C4"/>
+                      </a:solidFill>
+                      <a:prstDash val="solid"/>
+                      <a:round/>
+                      <a:headEnd type="none" w="med" len="med"/>
+                      <a:tailEnd type="none" w="med" len="med"/>
+                    </a:lnL>
+                    <a:lnR w="9525" cap="flat" cmpd="sng" algn="ctr">
+                      <a:solidFill>
+                        <a:srgbClr val="E8D8C4"/>
+                      </a:solidFill>
+                      <a:prstDash val="solid"/>
+                      <a:round/>
+                      <a:headEnd type="none" w="med" len="med"/>
+                      <a:tailEnd type="none" w="med" len="med"/>
+                    </a:lnR>
+                    <a:lnT w="9525" cap="flat" cmpd="sng" algn="ctr">
+                      <a:solidFill>
+                        <a:srgbClr val="E8D8C4"/>
+                      </a:solidFill>
+                      <a:prstDash val="solid"/>
+                      <a:round/>
+                      <a:headEnd type="none" w="med" len="med"/>
+                      <a:tailEnd type="none" w="med" len="med"/>
+                    </a:lnT>
+                    <a:lnB w="9525" cap="flat" cmpd="sng" algn="ctr">
+                      <a:solidFill>
+                        <a:srgbClr val="E8D8C4"/>
+                      </a:solidFill>
+                      <a:prstDash val="solid"/>
+                      <a:round/>
+                      <a:headEnd type="none" w="med" len="med"/>
+                      <a:tailEnd type="none" w="med" len="med"/>
+                    </a:lnB>
+                    <a:solidFill>
+                      <a:srgbClr val="FFFFFF"/>
+                    </a:solidFill>
+                  </a:tcPr>
+                </a:tc>
+              </a:tr>
+              <a:tr h="438912">
+                <a:tc>
+                  <a:txBody>
+                    <a:bodyPr/>
+                    <a:lstStyle/>
+                    <a:p>
+                      <a:pPr indent="0" marL="0">
+                        <a:buNone/>
+                      </a:pPr>
+                      <a:r>
+                        <a:rPr lang="en-US" sz="1300" b="1" dirty="0">
+                          <a:solidFill>
+                            <a:schemeClr val="tx1"/>
+                          </a:solidFill>
+                        </a:rPr>
+                        <a:t>Recompra y entregas</a:t>
+                      </a:r>
+                      <a:endParaRPr lang="en-US" sz="1300" dirty="0"/>
+                    </a:p>
+                  </a:txBody>
+                  <a:tcPr marL="64008" marR="64008" marT="64008" marB="64008" anchor="ctr">
+                    <a:lnL w="9525" cap="flat" cmpd="sng" algn="ctr">
+                      <a:solidFill>
+                        <a:srgbClr val="E8D8C4"/>
+                      </a:solidFill>
+                      <a:prstDash val="solid"/>
+                      <a:round/>
+                      <a:headEnd type="none" w="med" len="med"/>
+                      <a:tailEnd type="none" w="med" len="med"/>
+                    </a:lnL>
+                    <a:lnR w="9525" cap="flat" cmpd="sng" algn="ctr">
+                      <a:solidFill>
+                        <a:srgbClr val="E8D8C4"/>
+                      </a:solidFill>
+                      <a:prstDash val="solid"/>
+                      <a:round/>
+                      <a:headEnd type="none" w="med" len="med"/>
+                      <a:tailEnd type="none" w="med" len="med"/>
+                    </a:lnR>
+                    <a:lnT w="9525" cap="flat" cmpd="sng" algn="ctr">
+                      <a:solidFill>
+                        <a:srgbClr val="E8D8C4"/>
+                      </a:solidFill>
+                      <a:prstDash val="solid"/>
+                      <a:round/>
+                      <a:headEnd type="none" w="med" len="med"/>
+                      <a:tailEnd type="none" w="med" len="med"/>
+                    </a:lnT>
+                    <a:lnB w="9525" cap="flat" cmpd="sng" algn="ctr">
+                      <a:solidFill>
+                        <a:srgbClr val="E8D8C4"/>
+                      </a:solidFill>
+                      <a:prstDash val="solid"/>
+                      <a:round/>
+                      <a:headEnd type="none" w="med" len="med"/>
+                      <a:tailEnd type="none" w="med" len="med"/>
+                    </a:lnB>
+                    <a:solidFill>
+                      <a:srgbClr val="FFFFFF"/>
+                    </a:solidFill>
+                  </a:tcPr>
+                </a:tc>
+                <a:tc>
+                  <a:txBody>
+                    <a:bodyPr/>
+                    <a:lstStyle/>
+                    <a:p>
+                      <a:pPr indent="0" marL="0">
+                        <a:buNone/>
+                      </a:pPr>
+                      <a:r>
+                        <a:rPr lang="en-US" sz="1200" b="1" dirty="0">
+                          <a:solidFill>
+                            <a:schemeClr val="accent1"/>
+                          </a:solidFill>
+                        </a:rPr>
+                        <a:t>Mantener canales</a:t>
+                      </a:r>
+                      <a:endParaRPr lang="en-US" sz="1200" dirty="0"/>
+                    </a:p>
+                  </a:txBody>
+                  <a:tcPr marL="64008" marR="64008" marT="64008" marB="64008" anchor="ctr">
+                    <a:lnL w="9525" cap="flat" cmpd="sng" algn="ctr">
+                      <a:solidFill>
+                        <a:srgbClr val="E8D8C4"/>
+                      </a:solidFill>
+                      <a:prstDash val="solid"/>
+                      <a:round/>
+                      <a:headEnd type="none" w="med" len="med"/>
+                      <a:tailEnd type="none" w="med" len="med"/>
+                    </a:lnL>
+                    <a:lnR w="9525" cap="flat" cmpd="sng" algn="ctr">
+                      <a:solidFill>
+                        <a:srgbClr val="E8D8C4"/>
+                      </a:solidFill>
+                      <a:prstDash val="solid"/>
+                      <a:round/>
+                      <a:headEnd type="none" w="med" len="med"/>
+                      <a:tailEnd type="none" w="med" len="med"/>
+                    </a:lnR>
+                    <a:lnT w="9525" cap="flat" cmpd="sng" algn="ctr">
+                      <a:solidFill>
+                        <a:srgbClr val="E8D8C4"/>
+                      </a:solidFill>
+                      <a:prstDash val="solid"/>
+                      <a:round/>
+                      <a:headEnd type="none" w="med" len="med"/>
+                      <a:tailEnd type="none" w="med" len="med"/>
+                    </a:lnT>
+                    <a:lnB w="9525" cap="flat" cmpd="sng" algn="ctr">
+                      <a:solidFill>
+                        <a:srgbClr val="E8D8C4"/>
+                      </a:solidFill>
+                      <a:prstDash val="solid"/>
+                      <a:round/>
+                      <a:headEnd type="none" w="med" len="med"/>
+                      <a:tailEnd type="none" w="med" len="med"/>
+                    </a:lnB>
+                    <a:solidFill>
+                      <a:srgbClr val="FFFFFF"/>
+                    </a:solidFill>
+                  </a:tcPr>
+                </a:tc>
+                <a:tc>
+                  <a:txBody>
+                    <a:bodyPr/>
+                    <a:lstStyle/>
+                    <a:p>
+                      <a:pPr indent="0" marL="0">
+                        <a:buNone/>
+                      </a:pPr>
+                      <a:r>
+                        <a:rPr lang="en-US" sz="1300" dirty="0">
+                          <a:solidFill>
+                            <a:schemeClr val="tx1"/>
+                          </a:solidFill>
+                        </a:rPr>
+                        <a:t>S/0.50 por brownie (entregas agrupadas por zona)</a:t>
                       </a:r>
                       <a:endParaRPr lang="en-US" sz="1300" dirty="0"/>
                     </a:p>
@@ -27257,12 +27995,12 @@
                       <a:tailEnd type="none" w="med" len="med"/>
                     </a:lnB>
                     <a:solidFill>
-                      <a:srgbClr val="FFFFFF"/>
+                      <a:srgbClr val="FBF3E8"/>
                     </a:solidFill>
                   </a:tcPr>
                 </a:tc>
               </a:tr>
-              <a:tr h="457200">
+              <a:tr h="438912">
                 <a:tc>
                   <a:txBody>
                     <a:bodyPr/>
@@ -27277,499 +28015,7 @@
                             <a:schemeClr val="tx1"/>
                           </a:solidFill>
                         </a:rPr>
-                        <a:t>Vender en stands y carrito</a:t>
-                      </a:r>
-                      <a:endParaRPr lang="en-US" sz="1300" dirty="0"/>
-                    </a:p>
-                  </a:txBody>
-                  <a:tcPr marL="64008" marR="64008" marT="64008" marB="64008" anchor="ctr">
-                    <a:lnL w="9525" cap="flat" cmpd="sng" algn="ctr">
-                      <a:solidFill>
-                        <a:srgbClr val="E8D8C4"/>
-                      </a:solidFill>
-                      <a:prstDash val="solid"/>
-                      <a:round/>
-                      <a:headEnd type="none" w="med" len="med"/>
-                      <a:tailEnd type="none" w="med" len="med"/>
-                    </a:lnL>
-                    <a:lnR w="9525" cap="flat" cmpd="sng" algn="ctr">
-                      <a:solidFill>
-                        <a:srgbClr val="E8D8C4"/>
-                      </a:solidFill>
-                      <a:prstDash val="solid"/>
-                      <a:round/>
-                      <a:headEnd type="none" w="med" len="med"/>
-                      <a:tailEnd type="none" w="med" len="med"/>
-                    </a:lnR>
-                    <a:lnT w="9525" cap="flat" cmpd="sng" algn="ctr">
-                      <a:solidFill>
-                        <a:srgbClr val="E8D8C4"/>
-                      </a:solidFill>
-                      <a:prstDash val="solid"/>
-                      <a:round/>
-                      <a:headEnd type="none" w="med" len="med"/>
-                      <a:tailEnd type="none" w="med" len="med"/>
-                    </a:lnT>
-                    <a:lnB w="9525" cap="flat" cmpd="sng" algn="ctr">
-                      <a:solidFill>
-                        <a:srgbClr val="E8D8C4"/>
-                      </a:solidFill>
-                      <a:prstDash val="solid"/>
-                      <a:round/>
-                      <a:headEnd type="none" w="med" len="med"/>
-                      <a:tailEnd type="none" w="med" len="med"/>
-                    </a:lnB>
-                    <a:solidFill>
-                      <a:srgbClr val="FFFFFF"/>
-                    </a:solidFill>
-                  </a:tcPr>
-                </a:tc>
-                <a:tc>
-                  <a:txBody>
-                    <a:bodyPr/>
-                    <a:lstStyle/>
-                    <a:p>
-                      <a:pPr indent="0" marL="0">
-                        <a:buNone/>
-                      </a:pPr>
-                      <a:r>
-                        <a:rPr lang="en-US" sz="1200" b="1" dirty="0">
-                          <a:solidFill>
-                            <a:schemeClr val="accent1"/>
-                          </a:solidFill>
-                        </a:rPr>
-                        <a:t>Atender al cliente</a:t>
-                      </a:r>
-                      <a:endParaRPr lang="en-US" sz="1200" dirty="0"/>
-                    </a:p>
-                  </a:txBody>
-                  <a:tcPr marL="64008" marR="64008" marT="64008" marB="64008" anchor="ctr">
-                    <a:lnL w="9525" cap="flat" cmpd="sng" algn="ctr">
-                      <a:solidFill>
-                        <a:srgbClr val="E8D8C4"/>
-                      </a:solidFill>
-                      <a:prstDash val="solid"/>
-                      <a:round/>
-                      <a:headEnd type="none" w="med" len="med"/>
-                      <a:tailEnd type="none" w="med" len="med"/>
-                    </a:lnL>
-                    <a:lnR w="9525" cap="flat" cmpd="sng" algn="ctr">
-                      <a:solidFill>
-                        <a:srgbClr val="E8D8C4"/>
-                      </a:solidFill>
-                      <a:prstDash val="solid"/>
-                      <a:round/>
-                      <a:headEnd type="none" w="med" len="med"/>
-                      <a:tailEnd type="none" w="med" len="med"/>
-                    </a:lnR>
-                    <a:lnT w="9525" cap="flat" cmpd="sng" algn="ctr">
-                      <a:solidFill>
-                        <a:srgbClr val="E8D8C4"/>
-                      </a:solidFill>
-                      <a:prstDash val="solid"/>
-                      <a:round/>
-                      <a:headEnd type="none" w="med" len="med"/>
-                      <a:tailEnd type="none" w="med" len="med"/>
-                    </a:lnT>
-                    <a:lnB w="9525" cap="flat" cmpd="sng" algn="ctr">
-                      <a:solidFill>
-                        <a:srgbClr val="E8D8C4"/>
-                      </a:solidFill>
-                      <a:prstDash val="solid"/>
-                      <a:round/>
-                      <a:headEnd type="none" w="med" len="med"/>
-                      <a:tailEnd type="none" w="med" len="med"/>
-                    </a:lnB>
-                    <a:solidFill>
-                      <a:srgbClr val="FFFFFF"/>
-                    </a:solidFill>
-                  </a:tcPr>
-                </a:tc>
-                <a:tc>
-                  <a:txBody>
-                    <a:bodyPr/>
-                    <a:lstStyle/>
-                    <a:p>
-                      <a:pPr indent="0" marL="0">
-                        <a:buNone/>
-                      </a:pPr>
-                      <a:r>
-                        <a:rPr lang="en-US" sz="1300" dirty="0">
-                          <a:solidFill>
-                            <a:schemeClr val="tx1"/>
-                          </a:solidFill>
-                        </a:rPr>
-                        <a:t>S/600 por punto al mes + S/90 por día de vendedor(a)</a:t>
-                      </a:r>
-                      <a:endParaRPr lang="en-US" sz="1300" dirty="0"/>
-                    </a:p>
-                  </a:txBody>
-                  <a:tcPr marL="64008" marR="64008" marT="64008" marB="64008" anchor="ctr">
-                    <a:lnL w="9525" cap="flat" cmpd="sng" algn="ctr">
-                      <a:solidFill>
-                        <a:srgbClr val="E8D8C4"/>
-                      </a:solidFill>
-                      <a:prstDash val="solid"/>
-                      <a:round/>
-                      <a:headEnd type="none" w="med" len="med"/>
-                      <a:tailEnd type="none" w="med" len="med"/>
-                    </a:lnL>
-                    <a:lnR w="9525" cap="flat" cmpd="sng" algn="ctr">
-                      <a:solidFill>
-                        <a:srgbClr val="E8D8C4"/>
-                      </a:solidFill>
-                      <a:prstDash val="solid"/>
-                      <a:round/>
-                      <a:headEnd type="none" w="med" len="med"/>
-                      <a:tailEnd type="none" w="med" len="med"/>
-                    </a:lnR>
-                    <a:lnT w="9525" cap="flat" cmpd="sng" algn="ctr">
-                      <a:solidFill>
-                        <a:srgbClr val="E8D8C4"/>
-                      </a:solidFill>
-                      <a:prstDash val="solid"/>
-                      <a:round/>
-                      <a:headEnd type="none" w="med" len="med"/>
-                      <a:tailEnd type="none" w="med" len="med"/>
-                    </a:lnT>
-                    <a:lnB w="9525" cap="flat" cmpd="sng" algn="ctr">
-                      <a:solidFill>
-                        <a:srgbClr val="E8D8C4"/>
-                      </a:solidFill>
-                      <a:prstDash val="solid"/>
-                      <a:round/>
-                      <a:headEnd type="none" w="med" len="med"/>
-                      <a:tailEnd type="none" w="med" len="med"/>
-                    </a:lnB>
-                    <a:solidFill>
-                      <a:srgbClr val="FFFFFF"/>
-                    </a:solidFill>
-                  </a:tcPr>
-                </a:tc>
-                <a:tc>
-                  <a:txBody>
-                    <a:bodyPr/>
-                    <a:lstStyle/>
-                    <a:p>
-                      <a:pPr indent="0" marL="0">
-                        <a:buNone/>
-                      </a:pPr>
-                      <a:r>
-                        <a:rPr lang="en-US" sz="1200" dirty="0">
-                          <a:solidFill>
-                            <a:schemeClr val="accent2"/>
-                          </a:solidFill>
-                        </a:rPr>
-                        <a:t>Crece con cada punto</a:t>
-                      </a:r>
-                      <a:endParaRPr lang="en-US" sz="1200" dirty="0"/>
-                    </a:p>
-                  </a:txBody>
-                  <a:tcPr marL="64008" marR="64008" marT="64008" marB="64008" anchor="ctr">
-                    <a:lnL w="9525" cap="flat" cmpd="sng" algn="ctr">
-                      <a:solidFill>
-                        <a:srgbClr val="E8D8C4"/>
-                      </a:solidFill>
-                      <a:prstDash val="solid"/>
-                      <a:round/>
-                      <a:headEnd type="none" w="med" len="med"/>
-                      <a:tailEnd type="none" w="med" len="med"/>
-                    </a:lnL>
-                    <a:lnR w="9525" cap="flat" cmpd="sng" algn="ctr">
-                      <a:solidFill>
-                        <a:srgbClr val="E8D8C4"/>
-                      </a:solidFill>
-                      <a:prstDash val="solid"/>
-                      <a:round/>
-                      <a:headEnd type="none" w="med" len="med"/>
-                      <a:tailEnd type="none" w="med" len="med"/>
-                    </a:lnR>
-                    <a:lnT w="9525" cap="flat" cmpd="sng" algn="ctr">
-                      <a:solidFill>
-                        <a:srgbClr val="E8D8C4"/>
-                      </a:solidFill>
-                      <a:prstDash val="solid"/>
-                      <a:round/>
-                      <a:headEnd type="none" w="med" len="med"/>
-                      <a:tailEnd type="none" w="med" len="med"/>
-                    </a:lnT>
-                    <a:lnB w="9525" cap="flat" cmpd="sng" algn="ctr">
-                      <a:solidFill>
-                        <a:srgbClr val="E8D8C4"/>
-                      </a:solidFill>
-                      <a:prstDash val="solid"/>
-                      <a:round/>
-                      <a:headEnd type="none" w="med" len="med"/>
-                      <a:tailEnd type="none" w="med" len="med"/>
-                    </a:lnB>
-                    <a:solidFill>
-                      <a:srgbClr val="FBF3E8"/>
-                    </a:solidFill>
-                  </a:tcPr>
-                </a:tc>
-              </a:tr>
-              <a:tr h="457200">
-                <a:tc>
-                  <a:txBody>
-                    <a:bodyPr/>
-                    <a:lstStyle/>
-                    <a:p>
-                      <a:pPr indent="0" marL="0">
-                        <a:buNone/>
-                      </a:pPr>
-                      <a:r>
-                        <a:rPr lang="en-US" sz="1300" b="1" dirty="0">
-                          <a:solidFill>
-                            <a:schemeClr val="tx1"/>
-                          </a:solidFill>
-                        </a:rPr>
-                        <a:t>Ferias y eventos</a:t>
-                      </a:r>
-                      <a:endParaRPr lang="en-US" sz="1300" dirty="0"/>
-                    </a:p>
-                  </a:txBody>
-                  <a:tcPr marL="64008" marR="64008" marT="64008" marB="64008" anchor="ctr">
-                    <a:lnL w="9525" cap="flat" cmpd="sng" algn="ctr">
-                      <a:solidFill>
-                        <a:srgbClr val="E8D8C4"/>
-                      </a:solidFill>
-                      <a:prstDash val="solid"/>
-                      <a:round/>
-                      <a:headEnd type="none" w="med" len="med"/>
-                      <a:tailEnd type="none" w="med" len="med"/>
-                    </a:lnL>
-                    <a:lnR w="9525" cap="flat" cmpd="sng" algn="ctr">
-                      <a:solidFill>
-                        <a:srgbClr val="E8D8C4"/>
-                      </a:solidFill>
-                      <a:prstDash val="solid"/>
-                      <a:round/>
-                      <a:headEnd type="none" w="med" len="med"/>
-                      <a:tailEnd type="none" w="med" len="med"/>
-                    </a:lnR>
-                    <a:lnT w="9525" cap="flat" cmpd="sng" algn="ctr">
-                      <a:solidFill>
-                        <a:srgbClr val="E8D8C4"/>
-                      </a:solidFill>
-                      <a:prstDash val="solid"/>
-                      <a:round/>
-                      <a:headEnd type="none" w="med" len="med"/>
-                      <a:tailEnd type="none" w="med" len="med"/>
-                    </a:lnT>
-                    <a:lnB w="9525" cap="flat" cmpd="sng" algn="ctr">
-                      <a:solidFill>
-                        <a:srgbClr val="E8D8C4"/>
-                      </a:solidFill>
-                      <a:prstDash val="solid"/>
-                      <a:round/>
-                      <a:headEnd type="none" w="med" len="med"/>
-                      <a:tailEnd type="none" w="med" len="med"/>
-                    </a:lnB>
-                    <a:solidFill>
-                      <a:srgbClr val="FFFFFF"/>
-                    </a:solidFill>
-                  </a:tcPr>
-                </a:tc>
-                <a:tc>
-                  <a:txBody>
-                    <a:bodyPr/>
-                    <a:lstStyle/>
-                    <a:p>
-                      <a:pPr indent="0" marL="0">
-                        <a:buNone/>
-                      </a:pPr>
-                      <a:r>
-                        <a:rPr lang="en-US" sz="1200" b="1" dirty="0">
-                          <a:solidFill>
-                            <a:schemeClr val="accent1"/>
-                          </a:solidFill>
-                        </a:rPr>
-                        <a:t>Atender al cliente</a:t>
-                      </a:r>
-                      <a:endParaRPr lang="en-US" sz="1200" dirty="0"/>
-                    </a:p>
-                  </a:txBody>
-                  <a:tcPr marL="64008" marR="64008" marT="64008" marB="64008" anchor="ctr">
-                    <a:lnL w="9525" cap="flat" cmpd="sng" algn="ctr">
-                      <a:solidFill>
-                        <a:srgbClr val="E8D8C4"/>
-                      </a:solidFill>
-                      <a:prstDash val="solid"/>
-                      <a:round/>
-                      <a:headEnd type="none" w="med" len="med"/>
-                      <a:tailEnd type="none" w="med" len="med"/>
-                    </a:lnL>
-                    <a:lnR w="9525" cap="flat" cmpd="sng" algn="ctr">
-                      <a:solidFill>
-                        <a:srgbClr val="E8D8C4"/>
-                      </a:solidFill>
-                      <a:prstDash val="solid"/>
-                      <a:round/>
-                      <a:headEnd type="none" w="med" len="med"/>
-                      <a:tailEnd type="none" w="med" len="med"/>
-                    </a:lnR>
-                    <a:lnT w="9525" cap="flat" cmpd="sng" algn="ctr">
-                      <a:solidFill>
-                        <a:srgbClr val="E8D8C4"/>
-                      </a:solidFill>
-                      <a:prstDash val="solid"/>
-                      <a:round/>
-                      <a:headEnd type="none" w="med" len="med"/>
-                      <a:tailEnd type="none" w="med" len="med"/>
-                    </a:lnT>
-                    <a:lnB w="9525" cap="flat" cmpd="sng" algn="ctr">
-                      <a:solidFill>
-                        <a:srgbClr val="E8D8C4"/>
-                      </a:solidFill>
-                      <a:prstDash val="solid"/>
-                      <a:round/>
-                      <a:headEnd type="none" w="med" len="med"/>
-                      <a:tailEnd type="none" w="med" len="med"/>
-                    </a:lnB>
-                    <a:solidFill>
-                      <a:srgbClr val="FFFFFF"/>
-                    </a:solidFill>
-                  </a:tcPr>
-                </a:tc>
-                <a:tc>
-                  <a:txBody>
-                    <a:bodyPr/>
-                    <a:lstStyle/>
-                    <a:p>
-                      <a:pPr indent="0" marL="0">
-                        <a:buNone/>
-                      </a:pPr>
-                      <a:r>
-                        <a:rPr lang="en-US" sz="1300" dirty="0">
-                          <a:solidFill>
-                            <a:schemeClr val="tx1"/>
-                          </a:solidFill>
-                        </a:rPr>
-                        <a:t>Feria S/1,800 + S/270 de vendedor(a) · evento S/160</a:t>
-                      </a:r>
-                      <a:endParaRPr lang="en-US" sz="1300" dirty="0"/>
-                    </a:p>
-                  </a:txBody>
-                  <a:tcPr marL="64008" marR="64008" marT="64008" marB="64008" anchor="ctr">
-                    <a:lnL w="9525" cap="flat" cmpd="sng" algn="ctr">
-                      <a:solidFill>
-                        <a:srgbClr val="E8D8C4"/>
-                      </a:solidFill>
-                      <a:prstDash val="solid"/>
-                      <a:round/>
-                      <a:headEnd type="none" w="med" len="med"/>
-                      <a:tailEnd type="none" w="med" len="med"/>
-                    </a:lnL>
-                    <a:lnR w="9525" cap="flat" cmpd="sng" algn="ctr">
-                      <a:solidFill>
-                        <a:srgbClr val="E8D8C4"/>
-                      </a:solidFill>
-                      <a:prstDash val="solid"/>
-                      <a:round/>
-                      <a:headEnd type="none" w="med" len="med"/>
-                      <a:tailEnd type="none" w="med" len="med"/>
-                    </a:lnR>
-                    <a:lnT w="9525" cap="flat" cmpd="sng" algn="ctr">
-                      <a:solidFill>
-                        <a:srgbClr val="E8D8C4"/>
-                      </a:solidFill>
-                      <a:prstDash val="solid"/>
-                      <a:round/>
-                      <a:headEnd type="none" w="med" len="med"/>
-                      <a:tailEnd type="none" w="med" len="med"/>
-                    </a:lnT>
-                    <a:lnB w="9525" cap="flat" cmpd="sng" algn="ctr">
-                      <a:solidFill>
-                        <a:srgbClr val="E8D8C4"/>
-                      </a:solidFill>
-                      <a:prstDash val="solid"/>
-                      <a:round/>
-                      <a:headEnd type="none" w="med" len="med"/>
-                      <a:tailEnd type="none" w="med" len="med"/>
-                    </a:lnB>
-                    <a:solidFill>
-                      <a:srgbClr val="FFFFFF"/>
-                    </a:solidFill>
-                  </a:tcPr>
-                </a:tc>
-                <a:tc>
-                  <a:txBody>
-                    <a:bodyPr/>
-                    <a:lstStyle/>
-                    <a:p>
-                      <a:pPr indent="0" marL="0">
-                        <a:buNone/>
-                      </a:pPr>
-                      <a:r>
-                        <a:rPr lang="en-US" sz="1200" dirty="0">
-                          <a:solidFill>
-                            <a:schemeClr val="accent2"/>
-                          </a:solidFill>
-                        </a:rPr>
-                        <a:t>Por evento</a:t>
-                      </a:r>
-                      <a:endParaRPr lang="en-US" sz="1200" dirty="0"/>
-                    </a:p>
-                  </a:txBody>
-                  <a:tcPr marL="64008" marR="64008" marT="64008" marB="64008" anchor="ctr">
-                    <a:lnL w="9525" cap="flat" cmpd="sng" algn="ctr">
-                      <a:solidFill>
-                        <a:srgbClr val="E8D8C4"/>
-                      </a:solidFill>
-                      <a:prstDash val="solid"/>
-                      <a:round/>
-                      <a:headEnd type="none" w="med" len="med"/>
-                      <a:tailEnd type="none" w="med" len="med"/>
-                    </a:lnL>
-                    <a:lnR w="9525" cap="flat" cmpd="sng" algn="ctr">
-                      <a:solidFill>
-                        <a:srgbClr val="E8D8C4"/>
-                      </a:solidFill>
-                      <a:prstDash val="solid"/>
-                      <a:round/>
-                      <a:headEnd type="none" w="med" len="med"/>
-                      <a:tailEnd type="none" w="med" len="med"/>
-                    </a:lnR>
-                    <a:lnT w="9525" cap="flat" cmpd="sng" algn="ctr">
-                      <a:solidFill>
-                        <a:srgbClr val="E8D8C4"/>
-                      </a:solidFill>
-                      <a:prstDash val="solid"/>
-                      <a:round/>
-                      <a:headEnd type="none" w="med" len="med"/>
-                      <a:tailEnd type="none" w="med" len="med"/>
-                    </a:lnT>
-                    <a:lnB w="9525" cap="flat" cmpd="sng" algn="ctr">
-                      <a:solidFill>
-                        <a:srgbClr val="E8D8C4"/>
-                      </a:solidFill>
-                      <a:prstDash val="solid"/>
-                      <a:round/>
-                      <a:headEnd type="none" w="med" len="med"/>
-                      <a:tailEnd type="none" w="med" len="med"/>
-                    </a:lnB>
-                    <a:solidFill>
-                      <a:srgbClr val="FFFFFF"/>
-                    </a:solidFill>
-                  </a:tcPr>
-                </a:tc>
-              </a:tr>
-              <a:tr h="457200">
-                <a:tc>
-                  <a:txBody>
-                    <a:bodyPr/>
-                    <a:lstStyle/>
-                    <a:p>
-                      <a:pPr indent="0" marL="0">
-                        <a:buNone/>
-                      </a:pPr>
-                      <a:r>
-                        <a:rPr lang="en-US" sz="1300" b="1" dirty="0">
-                          <a:solidFill>
-                            <a:schemeClr val="tx1"/>
-                          </a:solidFill>
-                        </a:rPr>
-                        <a:t>Recompra y entregas</a:t>
+                        <a:t>Contenido y mamás embajadoras</a:t>
                       </a:r>
                       <a:endParaRPr lang="en-US" sz="1300" dirty="0"/>
                     </a:p>
@@ -27891,7 +28137,7 @@
                             <a:schemeClr val="tx1"/>
                           </a:solidFill>
                         </a:rPr>
-                        <a:t>S/0.50 por brownie (entregas agrupadas por zona)</a:t>
+                        <a:t>S/700 de pauta + S/200 de embajadoras al mes</a:t>
                       </a:r>
                       <a:endParaRPr lang="en-US" sz="1300" dirty="0"/>
                     </a:p>
@@ -27952,7 +28198,7 @@
                             <a:schemeClr val="accent2"/>
                           </a:solidFill>
                         </a:rPr>
-                        <a:t>Variable</a:t>
+                        <a:t>Fijo</a:t>
                       </a:r>
                       <a:endParaRPr lang="en-US" sz="1200" dirty="0"/>
                     </a:p>
@@ -27995,12 +28241,12 @@
                       <a:tailEnd type="none" w="med" len="med"/>
                     </a:lnB>
                     <a:solidFill>
-                      <a:srgbClr val="FBF3E8"/>
+                      <a:srgbClr val="FFFFFF"/>
                     </a:solidFill>
                   </a:tcPr>
                 </a:tc>
               </a:tr>
-              <a:tr h="457200">
+              <a:tr h="438912">
                 <a:tc>
                   <a:txBody>
                     <a:bodyPr/>
@@ -28015,7 +28261,7 @@
                             <a:schemeClr val="tx1"/>
                           </a:solidFill>
                         </a:rPr>
-                        <a:t>Contenido y mamás embajadoras</a:t>
+                        <a:t>Mantener la app Andi</a:t>
                       </a:r>
                       <a:endParaRPr lang="en-US" sz="1300" dirty="0"/>
                     </a:p>
@@ -28137,7 +28383,253 @@
                             <a:schemeClr val="tx1"/>
                           </a:solidFill>
                         </a:rPr>
-                        <a:t>S/700 de pauta + S/200 de embajadoras al mes</a:t>
+                        <a:t>S/250 al mes + S/0.04 por código impreso</a:t>
+                      </a:r>
+                      <a:endParaRPr lang="en-US" sz="1300" dirty="0"/>
+                    </a:p>
+                  </a:txBody>
+                  <a:tcPr marL="64008" marR="64008" marT="64008" marB="64008" anchor="ctr">
+                    <a:lnL w="9525" cap="flat" cmpd="sng" algn="ctr">
+                      <a:solidFill>
+                        <a:srgbClr val="E8D8C4"/>
+                      </a:solidFill>
+                      <a:prstDash val="solid"/>
+                      <a:round/>
+                      <a:headEnd type="none" w="med" len="med"/>
+                      <a:tailEnd type="none" w="med" len="med"/>
+                    </a:lnL>
+                    <a:lnR w="9525" cap="flat" cmpd="sng" algn="ctr">
+                      <a:solidFill>
+                        <a:srgbClr val="E8D8C4"/>
+                      </a:solidFill>
+                      <a:prstDash val="solid"/>
+                      <a:round/>
+                      <a:headEnd type="none" w="med" len="med"/>
+                      <a:tailEnd type="none" w="med" len="med"/>
+                    </a:lnR>
+                    <a:lnT w="9525" cap="flat" cmpd="sng" algn="ctr">
+                      <a:solidFill>
+                        <a:srgbClr val="E8D8C4"/>
+                      </a:solidFill>
+                      <a:prstDash val="solid"/>
+                      <a:round/>
+                      <a:headEnd type="none" w="med" len="med"/>
+                      <a:tailEnd type="none" w="med" len="med"/>
+                    </a:lnT>
+                    <a:lnB w="9525" cap="flat" cmpd="sng" algn="ctr">
+                      <a:solidFill>
+                        <a:srgbClr val="E8D8C4"/>
+                      </a:solidFill>
+                      <a:prstDash val="solid"/>
+                      <a:round/>
+                      <a:headEnd type="none" w="med" len="med"/>
+                      <a:tailEnd type="none" w="med" len="med"/>
+                    </a:lnB>
+                    <a:solidFill>
+                      <a:srgbClr val="FFFFFF"/>
+                    </a:solidFill>
+                  </a:tcPr>
+                </a:tc>
+                <a:tc>
+                  <a:txBody>
+                    <a:bodyPr/>
+                    <a:lstStyle/>
+                    <a:p>
+                      <a:pPr indent="0" marL="0">
+                        <a:buNone/>
+                      </a:pPr>
+                      <a:r>
+                        <a:rPr lang="en-US" sz="1200" dirty="0">
+                          <a:solidFill>
+                            <a:schemeClr val="accent2"/>
+                          </a:solidFill>
+                        </a:rPr>
+                        <a:t>Fijo y variable</a:t>
+                      </a:r>
+                      <a:endParaRPr lang="en-US" sz="1200" dirty="0"/>
+                    </a:p>
+                  </a:txBody>
+                  <a:tcPr marL="64008" marR="64008" marT="64008" marB="64008" anchor="ctr">
+                    <a:lnL w="9525" cap="flat" cmpd="sng" algn="ctr">
+                      <a:solidFill>
+                        <a:srgbClr val="E8D8C4"/>
+                      </a:solidFill>
+                      <a:prstDash val="solid"/>
+                      <a:round/>
+                      <a:headEnd type="none" w="med" len="med"/>
+                      <a:tailEnd type="none" w="med" len="med"/>
+                    </a:lnL>
+                    <a:lnR w="9525" cap="flat" cmpd="sng" algn="ctr">
+                      <a:solidFill>
+                        <a:srgbClr val="E8D8C4"/>
+                      </a:solidFill>
+                      <a:prstDash val="solid"/>
+                      <a:round/>
+                      <a:headEnd type="none" w="med" len="med"/>
+                      <a:tailEnd type="none" w="med" len="med"/>
+                    </a:lnR>
+                    <a:lnT w="9525" cap="flat" cmpd="sng" algn="ctr">
+                      <a:solidFill>
+                        <a:srgbClr val="E8D8C4"/>
+                      </a:solidFill>
+                      <a:prstDash val="solid"/>
+                      <a:round/>
+                      <a:headEnd type="none" w="med" len="med"/>
+                      <a:tailEnd type="none" w="med" len="med"/>
+                    </a:lnT>
+                    <a:lnB w="9525" cap="flat" cmpd="sng" algn="ctr">
+                      <a:solidFill>
+                        <a:srgbClr val="E8D8C4"/>
+                      </a:solidFill>
+                      <a:prstDash val="solid"/>
+                      <a:round/>
+                      <a:headEnd type="none" w="med" len="med"/>
+                      <a:tailEnd type="none" w="med" len="med"/>
+                    </a:lnB>
+                    <a:solidFill>
+                      <a:srgbClr val="FBF3E8"/>
+                    </a:solidFill>
+                  </a:tcPr>
+                </a:tc>
+              </a:tr>
+              <a:tr h="438912">
+                <a:tc>
+                  <a:txBody>
+                    <a:bodyPr/>
+                    <a:lstStyle/>
+                    <a:p>
+                      <a:pPr indent="0" marL="0">
+                        <a:buNone/>
+                      </a:pPr>
+                      <a:r>
+                        <a:rPr lang="en-US" sz="1300" b="1" dirty="0">
+                          <a:solidFill>
+                            <a:schemeClr val="tx1"/>
+                          </a:solidFill>
+                        </a:rPr>
+                        <a:t>Administrar el negocio</a:t>
+                      </a:r>
+                      <a:endParaRPr lang="en-US" sz="1300" dirty="0"/>
+                    </a:p>
+                  </a:txBody>
+                  <a:tcPr marL="64008" marR="64008" marT="64008" marB="64008" anchor="ctr">
+                    <a:lnL w="9525" cap="flat" cmpd="sng" algn="ctr">
+                      <a:solidFill>
+                        <a:srgbClr val="E8D8C4"/>
+                      </a:solidFill>
+                      <a:prstDash val="solid"/>
+                      <a:round/>
+                      <a:headEnd type="none" w="med" len="med"/>
+                      <a:tailEnd type="none" w="med" len="med"/>
+                    </a:lnL>
+                    <a:lnR w="9525" cap="flat" cmpd="sng" algn="ctr">
+                      <a:solidFill>
+                        <a:srgbClr val="E8D8C4"/>
+                      </a:solidFill>
+                      <a:prstDash val="solid"/>
+                      <a:round/>
+                      <a:headEnd type="none" w="med" len="med"/>
+                      <a:tailEnd type="none" w="med" len="med"/>
+                    </a:lnR>
+                    <a:lnT w="9525" cap="flat" cmpd="sng" algn="ctr">
+                      <a:solidFill>
+                        <a:srgbClr val="E8D8C4"/>
+                      </a:solidFill>
+                      <a:prstDash val="solid"/>
+                      <a:round/>
+                      <a:headEnd type="none" w="med" len="med"/>
+                      <a:tailEnd type="none" w="med" len="med"/>
+                    </a:lnT>
+                    <a:lnB w="9525" cap="flat" cmpd="sng" algn="ctr">
+                      <a:solidFill>
+                        <a:srgbClr val="E8D8C4"/>
+                      </a:solidFill>
+                      <a:prstDash val="solid"/>
+                      <a:round/>
+                      <a:headEnd type="none" w="med" len="med"/>
+                      <a:tailEnd type="none" w="med" len="med"/>
+                    </a:lnB>
+                    <a:solidFill>
+                      <a:srgbClr val="FFFFFF"/>
+                    </a:solidFill>
+                  </a:tcPr>
+                </a:tc>
+                <a:tc>
+                  <a:txBody>
+                    <a:bodyPr/>
+                    <a:lstStyle/>
+                    <a:p>
+                      <a:pPr indent="0" marL="0">
+                        <a:buNone/>
+                      </a:pPr>
+                      <a:r>
+                        <a:rPr lang="en-US" sz="1200" b="1" dirty="0">
+                          <a:solidFill>
+                            <a:schemeClr val="accent1"/>
+                          </a:solidFill>
+                        </a:rPr>
+                        <a:t>Gestión</a:t>
+                      </a:r>
+                      <a:endParaRPr lang="en-US" sz="1200" dirty="0"/>
+                    </a:p>
+                  </a:txBody>
+                  <a:tcPr marL="64008" marR="64008" marT="64008" marB="64008" anchor="ctr">
+                    <a:lnL w="9525" cap="flat" cmpd="sng" algn="ctr">
+                      <a:solidFill>
+                        <a:srgbClr val="E8D8C4"/>
+                      </a:solidFill>
+                      <a:prstDash val="solid"/>
+                      <a:round/>
+                      <a:headEnd type="none" w="med" len="med"/>
+                      <a:tailEnd type="none" w="med" len="med"/>
+                    </a:lnL>
+                    <a:lnR w="9525" cap="flat" cmpd="sng" algn="ctr">
+                      <a:solidFill>
+                        <a:srgbClr val="E8D8C4"/>
+                      </a:solidFill>
+                      <a:prstDash val="solid"/>
+                      <a:round/>
+                      <a:headEnd type="none" w="med" len="med"/>
+                      <a:tailEnd type="none" w="med" len="med"/>
+                    </a:lnR>
+                    <a:lnT w="9525" cap="flat" cmpd="sng" algn="ctr">
+                      <a:solidFill>
+                        <a:srgbClr val="E8D8C4"/>
+                      </a:solidFill>
+                      <a:prstDash val="solid"/>
+                      <a:round/>
+                      <a:headEnd type="none" w="med" len="med"/>
+                      <a:tailEnd type="none" w="med" len="med"/>
+                    </a:lnT>
+                    <a:lnB w="9525" cap="flat" cmpd="sng" algn="ctr">
+                      <a:solidFill>
+                        <a:srgbClr val="E8D8C4"/>
+                      </a:solidFill>
+                      <a:prstDash val="solid"/>
+                      <a:round/>
+                      <a:headEnd type="none" w="med" len="med"/>
+                      <a:tailEnd type="none" w="med" len="med"/>
+                    </a:lnB>
+                    <a:solidFill>
+                      <a:srgbClr val="FFFFFF"/>
+                    </a:solidFill>
+                  </a:tcPr>
+                </a:tc>
+                <a:tc>
+                  <a:txBody>
+                    <a:bodyPr/>
+                    <a:lstStyle/>
+                    <a:p>
+                      <a:pPr indent="0" marL="0">
+                        <a:buNone/>
+                      </a:pPr>
+                      <a:r>
+                        <a:rPr lang="en-US" sz="1300" dirty="0">
+                          <a:solidFill>
+                            <a:schemeClr val="tx1"/>
+                          </a:solidFill>
+                        </a:rPr>
+                        <a:t>S/745 de administración + S/709 de la coordinadora al mes</a:t>
                       </a:r>
                       <a:endParaRPr lang="en-US" sz="1300" dirty="0"/>
                     </a:p>
@@ -28246,498 +28738,6 @@
                   </a:tcPr>
                 </a:tc>
               </a:tr>
-              <a:tr h="457200">
-                <a:tc>
-                  <a:txBody>
-                    <a:bodyPr/>
-                    <a:lstStyle/>
-                    <a:p>
-                      <a:pPr indent="0" marL="0">
-                        <a:buNone/>
-                      </a:pPr>
-                      <a:r>
-                        <a:rPr lang="en-US" sz="1300" b="1" dirty="0">
-                          <a:solidFill>
-                            <a:schemeClr val="tx1"/>
-                          </a:solidFill>
-                        </a:rPr>
-                        <a:t>Mantener la app Andi</a:t>
-                      </a:r>
-                      <a:endParaRPr lang="en-US" sz="1300" dirty="0"/>
-                    </a:p>
-                  </a:txBody>
-                  <a:tcPr marL="64008" marR="64008" marT="64008" marB="64008" anchor="ctr">
-                    <a:lnL w="9525" cap="flat" cmpd="sng" algn="ctr">
-                      <a:solidFill>
-                        <a:srgbClr val="E8D8C4"/>
-                      </a:solidFill>
-                      <a:prstDash val="solid"/>
-                      <a:round/>
-                      <a:headEnd type="none" w="med" len="med"/>
-                      <a:tailEnd type="none" w="med" len="med"/>
-                    </a:lnL>
-                    <a:lnR w="9525" cap="flat" cmpd="sng" algn="ctr">
-                      <a:solidFill>
-                        <a:srgbClr val="E8D8C4"/>
-                      </a:solidFill>
-                      <a:prstDash val="solid"/>
-                      <a:round/>
-                      <a:headEnd type="none" w="med" len="med"/>
-                      <a:tailEnd type="none" w="med" len="med"/>
-                    </a:lnR>
-                    <a:lnT w="9525" cap="flat" cmpd="sng" algn="ctr">
-                      <a:solidFill>
-                        <a:srgbClr val="E8D8C4"/>
-                      </a:solidFill>
-                      <a:prstDash val="solid"/>
-                      <a:round/>
-                      <a:headEnd type="none" w="med" len="med"/>
-                      <a:tailEnd type="none" w="med" len="med"/>
-                    </a:lnT>
-                    <a:lnB w="9525" cap="flat" cmpd="sng" algn="ctr">
-                      <a:solidFill>
-                        <a:srgbClr val="E8D8C4"/>
-                      </a:solidFill>
-                      <a:prstDash val="solid"/>
-                      <a:round/>
-                      <a:headEnd type="none" w="med" len="med"/>
-                      <a:tailEnd type="none" w="med" len="med"/>
-                    </a:lnB>
-                    <a:solidFill>
-                      <a:srgbClr val="FFFFFF"/>
-                    </a:solidFill>
-                  </a:tcPr>
-                </a:tc>
-                <a:tc>
-                  <a:txBody>
-                    <a:bodyPr/>
-                    <a:lstStyle/>
-                    <a:p>
-                      <a:pPr indent="0" marL="0">
-                        <a:buNone/>
-                      </a:pPr>
-                      <a:r>
-                        <a:rPr lang="en-US" sz="1200" b="1" dirty="0">
-                          <a:solidFill>
-                            <a:schemeClr val="accent1"/>
-                          </a:solidFill>
-                        </a:rPr>
-                        <a:t>Mantener canales</a:t>
-                      </a:r>
-                      <a:endParaRPr lang="en-US" sz="1200" dirty="0"/>
-                    </a:p>
-                  </a:txBody>
-                  <a:tcPr marL="64008" marR="64008" marT="64008" marB="64008" anchor="ctr">
-                    <a:lnL w="9525" cap="flat" cmpd="sng" algn="ctr">
-                      <a:solidFill>
-                        <a:srgbClr val="E8D8C4"/>
-                      </a:solidFill>
-                      <a:prstDash val="solid"/>
-                      <a:round/>
-                      <a:headEnd type="none" w="med" len="med"/>
-                      <a:tailEnd type="none" w="med" len="med"/>
-                    </a:lnL>
-                    <a:lnR w="9525" cap="flat" cmpd="sng" algn="ctr">
-                      <a:solidFill>
-                        <a:srgbClr val="E8D8C4"/>
-                      </a:solidFill>
-                      <a:prstDash val="solid"/>
-                      <a:round/>
-                      <a:headEnd type="none" w="med" len="med"/>
-                      <a:tailEnd type="none" w="med" len="med"/>
-                    </a:lnR>
-                    <a:lnT w="9525" cap="flat" cmpd="sng" algn="ctr">
-                      <a:solidFill>
-                        <a:srgbClr val="E8D8C4"/>
-                      </a:solidFill>
-                      <a:prstDash val="solid"/>
-                      <a:round/>
-                      <a:headEnd type="none" w="med" len="med"/>
-                      <a:tailEnd type="none" w="med" len="med"/>
-                    </a:lnT>
-                    <a:lnB w="9525" cap="flat" cmpd="sng" algn="ctr">
-                      <a:solidFill>
-                        <a:srgbClr val="E8D8C4"/>
-                      </a:solidFill>
-                      <a:prstDash val="solid"/>
-                      <a:round/>
-                      <a:headEnd type="none" w="med" len="med"/>
-                      <a:tailEnd type="none" w="med" len="med"/>
-                    </a:lnB>
-                    <a:solidFill>
-                      <a:srgbClr val="FFFFFF"/>
-                    </a:solidFill>
-                  </a:tcPr>
-                </a:tc>
-                <a:tc>
-                  <a:txBody>
-                    <a:bodyPr/>
-                    <a:lstStyle/>
-                    <a:p>
-                      <a:pPr indent="0" marL="0">
-                        <a:buNone/>
-                      </a:pPr>
-                      <a:r>
-                        <a:rPr lang="en-US" sz="1300" dirty="0">
-                          <a:solidFill>
-                            <a:schemeClr val="tx1"/>
-                          </a:solidFill>
-                        </a:rPr>
-                        <a:t>S/250 al mes + S/0.04 por código impreso</a:t>
-                      </a:r>
-                      <a:endParaRPr lang="en-US" sz="1300" dirty="0"/>
-                    </a:p>
-                  </a:txBody>
-                  <a:tcPr marL="64008" marR="64008" marT="64008" marB="64008" anchor="ctr">
-                    <a:lnL w="9525" cap="flat" cmpd="sng" algn="ctr">
-                      <a:solidFill>
-                        <a:srgbClr val="E8D8C4"/>
-                      </a:solidFill>
-                      <a:prstDash val="solid"/>
-                      <a:round/>
-                      <a:headEnd type="none" w="med" len="med"/>
-                      <a:tailEnd type="none" w="med" len="med"/>
-                    </a:lnL>
-                    <a:lnR w="9525" cap="flat" cmpd="sng" algn="ctr">
-                      <a:solidFill>
-                        <a:srgbClr val="E8D8C4"/>
-                      </a:solidFill>
-                      <a:prstDash val="solid"/>
-                      <a:round/>
-                      <a:headEnd type="none" w="med" len="med"/>
-                      <a:tailEnd type="none" w="med" len="med"/>
-                    </a:lnR>
-                    <a:lnT w="9525" cap="flat" cmpd="sng" algn="ctr">
-                      <a:solidFill>
-                        <a:srgbClr val="E8D8C4"/>
-                      </a:solidFill>
-                      <a:prstDash val="solid"/>
-                      <a:round/>
-                      <a:headEnd type="none" w="med" len="med"/>
-                      <a:tailEnd type="none" w="med" len="med"/>
-                    </a:lnT>
-                    <a:lnB w="9525" cap="flat" cmpd="sng" algn="ctr">
-                      <a:solidFill>
-                        <a:srgbClr val="E8D8C4"/>
-                      </a:solidFill>
-                      <a:prstDash val="solid"/>
-                      <a:round/>
-                      <a:headEnd type="none" w="med" len="med"/>
-                      <a:tailEnd type="none" w="med" len="med"/>
-                    </a:lnB>
-                    <a:solidFill>
-                      <a:srgbClr val="FFFFFF"/>
-                    </a:solidFill>
-                  </a:tcPr>
-                </a:tc>
-                <a:tc>
-                  <a:txBody>
-                    <a:bodyPr/>
-                    <a:lstStyle/>
-                    <a:p>
-                      <a:pPr indent="0" marL="0">
-                        <a:buNone/>
-                      </a:pPr>
-                      <a:r>
-                        <a:rPr lang="en-US" sz="1200" dirty="0">
-                          <a:solidFill>
-                            <a:schemeClr val="accent2"/>
-                          </a:solidFill>
-                        </a:rPr>
-                        <a:t>Fijo y variable</a:t>
-                      </a:r>
-                      <a:endParaRPr lang="en-US" sz="1200" dirty="0"/>
-                    </a:p>
-                  </a:txBody>
-                  <a:tcPr marL="64008" marR="64008" marT="64008" marB="64008" anchor="ctr">
-                    <a:lnL w="9525" cap="flat" cmpd="sng" algn="ctr">
-                      <a:solidFill>
-                        <a:srgbClr val="E8D8C4"/>
-                      </a:solidFill>
-                      <a:prstDash val="solid"/>
-                      <a:round/>
-                      <a:headEnd type="none" w="med" len="med"/>
-                      <a:tailEnd type="none" w="med" len="med"/>
-                    </a:lnL>
-                    <a:lnR w="9525" cap="flat" cmpd="sng" algn="ctr">
-                      <a:solidFill>
-                        <a:srgbClr val="E8D8C4"/>
-                      </a:solidFill>
-                      <a:prstDash val="solid"/>
-                      <a:round/>
-                      <a:headEnd type="none" w="med" len="med"/>
-                      <a:tailEnd type="none" w="med" len="med"/>
-                    </a:lnR>
-                    <a:lnT w="9525" cap="flat" cmpd="sng" algn="ctr">
-                      <a:solidFill>
-                        <a:srgbClr val="E8D8C4"/>
-                      </a:solidFill>
-                      <a:prstDash val="solid"/>
-                      <a:round/>
-                      <a:headEnd type="none" w="med" len="med"/>
-                      <a:tailEnd type="none" w="med" len="med"/>
-                    </a:lnT>
-                    <a:lnB w="9525" cap="flat" cmpd="sng" algn="ctr">
-                      <a:solidFill>
-                        <a:srgbClr val="E8D8C4"/>
-                      </a:solidFill>
-                      <a:prstDash val="solid"/>
-                      <a:round/>
-                      <a:headEnd type="none" w="med" len="med"/>
-                      <a:tailEnd type="none" w="med" len="med"/>
-                    </a:lnB>
-                    <a:solidFill>
-                      <a:srgbClr val="FBF3E8"/>
-                    </a:solidFill>
-                  </a:tcPr>
-                </a:tc>
-              </a:tr>
-              <a:tr h="457200">
-                <a:tc>
-                  <a:txBody>
-                    <a:bodyPr/>
-                    <a:lstStyle/>
-                    <a:p>
-                      <a:pPr indent="0" marL="0">
-                        <a:buNone/>
-                      </a:pPr>
-                      <a:r>
-                        <a:rPr lang="en-US" sz="1300" b="1" dirty="0">
-                          <a:solidFill>
-                            <a:schemeClr val="tx1"/>
-                          </a:solidFill>
-                        </a:rPr>
-                        <a:t>Administrar el negocio</a:t>
-                      </a:r>
-                      <a:endParaRPr lang="en-US" sz="1300" dirty="0"/>
-                    </a:p>
-                  </a:txBody>
-                  <a:tcPr marL="64008" marR="64008" marT="64008" marB="64008" anchor="ctr">
-                    <a:lnL w="9525" cap="flat" cmpd="sng" algn="ctr">
-                      <a:solidFill>
-                        <a:srgbClr val="E8D8C4"/>
-                      </a:solidFill>
-                      <a:prstDash val="solid"/>
-                      <a:round/>
-                      <a:headEnd type="none" w="med" len="med"/>
-                      <a:tailEnd type="none" w="med" len="med"/>
-                    </a:lnL>
-                    <a:lnR w="9525" cap="flat" cmpd="sng" algn="ctr">
-                      <a:solidFill>
-                        <a:srgbClr val="E8D8C4"/>
-                      </a:solidFill>
-                      <a:prstDash val="solid"/>
-                      <a:round/>
-                      <a:headEnd type="none" w="med" len="med"/>
-                      <a:tailEnd type="none" w="med" len="med"/>
-                    </a:lnR>
-                    <a:lnT w="9525" cap="flat" cmpd="sng" algn="ctr">
-                      <a:solidFill>
-                        <a:srgbClr val="E8D8C4"/>
-                      </a:solidFill>
-                      <a:prstDash val="solid"/>
-                      <a:round/>
-                      <a:headEnd type="none" w="med" len="med"/>
-                      <a:tailEnd type="none" w="med" len="med"/>
-                    </a:lnT>
-                    <a:lnB w="9525" cap="flat" cmpd="sng" algn="ctr">
-                      <a:solidFill>
-                        <a:srgbClr val="E8D8C4"/>
-                      </a:solidFill>
-                      <a:prstDash val="solid"/>
-                      <a:round/>
-                      <a:headEnd type="none" w="med" len="med"/>
-                      <a:tailEnd type="none" w="med" len="med"/>
-                    </a:lnB>
-                    <a:solidFill>
-                      <a:srgbClr val="FFFFFF"/>
-                    </a:solidFill>
-                  </a:tcPr>
-                </a:tc>
-                <a:tc>
-                  <a:txBody>
-                    <a:bodyPr/>
-                    <a:lstStyle/>
-                    <a:p>
-                      <a:pPr indent="0" marL="0">
-                        <a:buNone/>
-                      </a:pPr>
-                      <a:r>
-                        <a:rPr lang="en-US" sz="1200" b="1" dirty="0">
-                          <a:solidFill>
-                            <a:schemeClr val="accent1"/>
-                          </a:solidFill>
-                        </a:rPr>
-                        <a:t>Gestión</a:t>
-                      </a:r>
-                      <a:endParaRPr lang="en-US" sz="1200" dirty="0"/>
-                    </a:p>
-                  </a:txBody>
-                  <a:tcPr marL="64008" marR="64008" marT="64008" marB="64008" anchor="ctr">
-                    <a:lnL w="9525" cap="flat" cmpd="sng" algn="ctr">
-                      <a:solidFill>
-                        <a:srgbClr val="E8D8C4"/>
-                      </a:solidFill>
-                      <a:prstDash val="solid"/>
-                      <a:round/>
-                      <a:headEnd type="none" w="med" len="med"/>
-                      <a:tailEnd type="none" w="med" len="med"/>
-                    </a:lnL>
-                    <a:lnR w="9525" cap="flat" cmpd="sng" algn="ctr">
-                      <a:solidFill>
-                        <a:srgbClr val="E8D8C4"/>
-                      </a:solidFill>
-                      <a:prstDash val="solid"/>
-                      <a:round/>
-                      <a:headEnd type="none" w="med" len="med"/>
-                      <a:tailEnd type="none" w="med" len="med"/>
-                    </a:lnR>
-                    <a:lnT w="9525" cap="flat" cmpd="sng" algn="ctr">
-                      <a:solidFill>
-                        <a:srgbClr val="E8D8C4"/>
-                      </a:solidFill>
-                      <a:prstDash val="solid"/>
-                      <a:round/>
-                      <a:headEnd type="none" w="med" len="med"/>
-                      <a:tailEnd type="none" w="med" len="med"/>
-                    </a:lnT>
-                    <a:lnB w="9525" cap="flat" cmpd="sng" algn="ctr">
-                      <a:solidFill>
-                        <a:srgbClr val="E8D8C4"/>
-                      </a:solidFill>
-                      <a:prstDash val="solid"/>
-                      <a:round/>
-                      <a:headEnd type="none" w="med" len="med"/>
-                      <a:tailEnd type="none" w="med" len="med"/>
-                    </a:lnB>
-                    <a:solidFill>
-                      <a:srgbClr val="FFFFFF"/>
-                    </a:solidFill>
-                  </a:tcPr>
-                </a:tc>
-                <a:tc>
-                  <a:txBody>
-                    <a:bodyPr/>
-                    <a:lstStyle/>
-                    <a:p>
-                      <a:pPr indent="0" marL="0">
-                        <a:buNone/>
-                      </a:pPr>
-                      <a:r>
-                        <a:rPr lang="en-US" sz="1300" dirty="0">
-                          <a:solidFill>
-                            <a:schemeClr val="tx1"/>
-                          </a:solidFill>
-                        </a:rPr>
-                        <a:t>S/745 de administración + S/709 de la coordinadora al mes</a:t>
-                      </a:r>
-                      <a:endParaRPr lang="en-US" sz="1300" dirty="0"/>
-                    </a:p>
-                  </a:txBody>
-                  <a:tcPr marL="64008" marR="64008" marT="64008" marB="64008" anchor="ctr">
-                    <a:lnL w="9525" cap="flat" cmpd="sng" algn="ctr">
-                      <a:solidFill>
-                        <a:srgbClr val="E8D8C4"/>
-                      </a:solidFill>
-                      <a:prstDash val="solid"/>
-                      <a:round/>
-                      <a:headEnd type="none" w="med" len="med"/>
-                      <a:tailEnd type="none" w="med" len="med"/>
-                    </a:lnL>
-                    <a:lnR w="9525" cap="flat" cmpd="sng" algn="ctr">
-                      <a:solidFill>
-                        <a:srgbClr val="E8D8C4"/>
-                      </a:solidFill>
-                      <a:prstDash val="solid"/>
-                      <a:round/>
-                      <a:headEnd type="none" w="med" len="med"/>
-                      <a:tailEnd type="none" w="med" len="med"/>
-                    </a:lnR>
-                    <a:lnT w="9525" cap="flat" cmpd="sng" algn="ctr">
-                      <a:solidFill>
-                        <a:srgbClr val="E8D8C4"/>
-                      </a:solidFill>
-                      <a:prstDash val="solid"/>
-                      <a:round/>
-                      <a:headEnd type="none" w="med" len="med"/>
-                      <a:tailEnd type="none" w="med" len="med"/>
-                    </a:lnT>
-                    <a:lnB w="9525" cap="flat" cmpd="sng" algn="ctr">
-                      <a:solidFill>
-                        <a:srgbClr val="E8D8C4"/>
-                      </a:solidFill>
-                      <a:prstDash val="solid"/>
-                      <a:round/>
-                      <a:headEnd type="none" w="med" len="med"/>
-                      <a:tailEnd type="none" w="med" len="med"/>
-                    </a:lnB>
-                    <a:solidFill>
-                      <a:srgbClr val="FFFFFF"/>
-                    </a:solidFill>
-                  </a:tcPr>
-                </a:tc>
-                <a:tc>
-                  <a:txBody>
-                    <a:bodyPr/>
-                    <a:lstStyle/>
-                    <a:p>
-                      <a:pPr indent="0" marL="0">
-                        <a:buNone/>
-                      </a:pPr>
-                      <a:r>
-                        <a:rPr lang="en-US" sz="1200" dirty="0">
-                          <a:solidFill>
-                            <a:schemeClr val="accent2"/>
-                          </a:solidFill>
-                        </a:rPr>
-                        <a:t>Fijo</a:t>
-                      </a:r>
-                      <a:endParaRPr lang="en-US" sz="1200" dirty="0"/>
-                    </a:p>
-                  </a:txBody>
-                  <a:tcPr marL="64008" marR="64008" marT="64008" marB="64008" anchor="ctr">
-                    <a:lnL w="9525" cap="flat" cmpd="sng" algn="ctr">
-                      <a:solidFill>
-                        <a:srgbClr val="E8D8C4"/>
-                      </a:solidFill>
-                      <a:prstDash val="solid"/>
-                      <a:round/>
-                      <a:headEnd type="none" w="med" len="med"/>
-                      <a:tailEnd type="none" w="med" len="med"/>
-                    </a:lnL>
-                    <a:lnR w="9525" cap="flat" cmpd="sng" algn="ctr">
-                      <a:solidFill>
-                        <a:srgbClr val="E8D8C4"/>
-                      </a:solidFill>
-                      <a:prstDash val="solid"/>
-                      <a:round/>
-                      <a:headEnd type="none" w="med" len="med"/>
-                      <a:tailEnd type="none" w="med" len="med"/>
-                    </a:lnR>
-                    <a:lnT w="9525" cap="flat" cmpd="sng" algn="ctr">
-                      <a:solidFill>
-                        <a:srgbClr val="E8D8C4"/>
-                      </a:solidFill>
-                      <a:prstDash val="solid"/>
-                      <a:round/>
-                      <a:headEnd type="none" w="med" len="med"/>
-                      <a:tailEnd type="none" w="med" len="med"/>
-                    </a:lnT>
-                    <a:lnB w="9525" cap="flat" cmpd="sng" algn="ctr">
-                      <a:solidFill>
-                        <a:srgbClr val="E8D8C4"/>
-                      </a:solidFill>
-                      <a:prstDash val="solid"/>
-                      <a:round/>
-                      <a:headEnd type="none" w="med" len="med"/>
-                      <a:tailEnd type="none" w="med" len="med"/>
-                    </a:lnB>
-                    <a:solidFill>
-                      <a:srgbClr val="FFFFFF"/>
-                    </a:solidFill>
-                  </a:tcPr>
-                </a:tc>
-              </a:tr>
             </a:tbl>
           </a:graphicData>
         </a:graphic>
@@ -28750,7 +28750,7 @@
         </p:nvSpPr>
         <p:spPr>
           <a:xfrm>
-            <a:off x="694944" y="1984248"/>
+            <a:off x="694944" y="2011680"/>
             <a:ext cx="365760" cy="365760"/>
           </a:xfrm>
           <a:prstGeom prst="ellipse">
@@ -28783,7 +28783,7 @@
         </p:blipFill>
         <p:spPr>
           <a:xfrm>
-            <a:off x="775411" y="2064715"/>
+            <a:off x="775411" y="2092147"/>
             <a:ext cx="204826" cy="204826"/>
           </a:xfrm>
           <a:prstGeom prst="rect">
@@ -28799,7 +28799,7 @@
         </p:nvSpPr>
         <p:spPr>
           <a:xfrm>
-            <a:off x="694944" y="2441448"/>
+            <a:off x="694944" y="2596896"/>
             <a:ext cx="365760" cy="365760"/>
           </a:xfrm>
           <a:prstGeom prst="ellipse">
@@ -28832,7 +28832,7 @@
         </p:blipFill>
         <p:spPr>
           <a:xfrm>
-            <a:off x="775411" y="2521915"/>
+            <a:off x="775411" y="2677363"/>
             <a:ext cx="204826" cy="204826"/>
           </a:xfrm>
           <a:prstGeom prst="rect">
@@ -28848,7 +28848,7 @@
         </p:nvSpPr>
         <p:spPr>
           <a:xfrm>
-            <a:off x="694944" y="2898648"/>
+            <a:off x="694944" y="3108960"/>
             <a:ext cx="365760" cy="365760"/>
           </a:xfrm>
           <a:prstGeom prst="ellipse">
@@ -28881,7 +28881,7 @@
         </p:blipFill>
         <p:spPr>
           <a:xfrm>
-            <a:off x="775411" y="2979115"/>
+            <a:off x="775411" y="3189427"/>
             <a:ext cx="204826" cy="204826"/>
           </a:xfrm>
           <a:prstGeom prst="rect">
@@ -28897,7 +28897,7 @@
         </p:nvSpPr>
         <p:spPr>
           <a:xfrm>
-            <a:off x="694944" y="3355848"/>
+            <a:off x="694944" y="3547872"/>
             <a:ext cx="365760" cy="365760"/>
           </a:xfrm>
           <a:prstGeom prst="ellipse">
@@ -28930,7 +28930,7 @@
         </p:blipFill>
         <p:spPr>
           <a:xfrm>
-            <a:off x="775411" y="3436315"/>
+            <a:off x="775411" y="3628339"/>
             <a:ext cx="204826" cy="204826"/>
           </a:xfrm>
           <a:prstGeom prst="rect">
@@ -28946,7 +28946,7 @@
         </p:nvSpPr>
         <p:spPr>
           <a:xfrm>
-            <a:off x="694944" y="3813048"/>
+            <a:off x="694944" y="3986784"/>
             <a:ext cx="365760" cy="365760"/>
           </a:xfrm>
           <a:prstGeom prst="ellipse">
@@ -28979,7 +28979,7 @@
         </p:blipFill>
         <p:spPr>
           <a:xfrm>
-            <a:off x="775411" y="3893515"/>
+            <a:off x="775411" y="4067251"/>
             <a:ext cx="204826" cy="204826"/>
           </a:xfrm>
           <a:prstGeom prst="rect">
@@ -28995,7 +28995,7 @@
         </p:nvSpPr>
         <p:spPr>
           <a:xfrm>
-            <a:off x="694944" y="4270248"/>
+            <a:off x="694944" y="4425696"/>
             <a:ext cx="365760" cy="365760"/>
           </a:xfrm>
           <a:prstGeom prst="ellipse">
@@ -29028,7 +29028,7 @@
         </p:blipFill>
         <p:spPr>
           <a:xfrm>
-            <a:off x="775411" y="4350715"/>
+            <a:off x="775411" y="4506163"/>
             <a:ext cx="204826" cy="204826"/>
           </a:xfrm>
           <a:prstGeom prst="rect">
@@ -29044,7 +29044,7 @@
         </p:nvSpPr>
         <p:spPr>
           <a:xfrm>
-            <a:off x="694944" y="4727448"/>
+            <a:off x="694944" y="4864608"/>
             <a:ext cx="365760" cy="365760"/>
           </a:xfrm>
           <a:prstGeom prst="ellipse">
@@ -29077,7 +29077,7 @@
         </p:blipFill>
         <p:spPr>
           <a:xfrm>
-            <a:off x="775411" y="4807915"/>
+            <a:off x="775411" y="4945075"/>
             <a:ext cx="204826" cy="204826"/>
           </a:xfrm>
           <a:prstGeom prst="rect">
@@ -29093,7 +29093,7 @@
         </p:nvSpPr>
         <p:spPr>
           <a:xfrm>
-            <a:off x="694944" y="5184648"/>
+            <a:off x="694944" y="5303520"/>
             <a:ext cx="365760" cy="365760"/>
           </a:xfrm>
           <a:prstGeom prst="ellipse">
@@ -29126,7 +29126,7 @@
         </p:blipFill>
         <p:spPr>
           <a:xfrm>
-            <a:off x="775411" y="5265115"/>
+            <a:off x="775411" y="5383987"/>
             <a:ext cx="204826" cy="204826"/>
           </a:xfrm>
           <a:prstGeom prst="rect">

--- a/04-reformulacion/TC5-8/TC5-8-AndiBite.pptx
+++ b/04-reformulacion/TC5-8/TC5-8-AndiBite.pptx
@@ -41,9 +41,10 @@
     <p:sldId id="289" r:id="rId35"/>
     <p:sldId id="290" r:id="rId36"/>
     <p:sldId id="291" r:id="rId37"/>
+    <p:sldId id="292" r:id="rId38"/>
   </p:sldIdLst>
   <p:notesMasterIdLst>
-    <p:notesMasterId r:id="rId38"/>
+    <p:notesMasterId r:id="rId39"/>
   </p:notesMasterIdLst>
   <p:sldSz cx="12192000" cy="6858000"/>
   <p:notesSz cx="6858000" cy="12192000"/>
@@ -142,13 +143,13 @@
   <p:extLst>
     <p:ext uri="{521415D9-36F7-43E2-AB2F-B90AF26B5E84}">
       <p14:sectionLst xmlns:p14="http://schemas.microsoft.com/office/powerpoint/2010/main">
-        <p14:section name="Portada" id="{6bb93df4-7275-e5c1-2d84-0ff037ea38f7}">
+        <p14:section name="Portada" id="{b4df4e9a-a747-47fd-9329-48aa14e065f9}">
           <p14:sldIdLst>
             <p14:sldId id="256"/>
             <p14:sldId id="257"/>
           </p14:sldIdLst>
         </p14:section>
-        <p14:section name="TC5 · Cliente, mercado y canal" id="{b00ad03c-17f6-3167-3f80-477b4c79be9b}">
+        <p14:section name="TC5 · Cliente, mercado y canal" id="{d5733a52-a1ac-e94d-2072-d6d15a1466a6}">
           <p14:sldIdLst>
             <p14:sldId id="258"/>
             <p14:sldId id="259"/>
@@ -162,7 +163,7 @@
             <p14:sldId id="267"/>
           </p14:sldIdLst>
         </p14:section>
-        <p14:section name="TC6 · Relación e ingresos" id="{fc878a28-b38b-bb02-57a6-09f127f28760}">
+        <p14:section name="TC6 · Relación e ingresos" id="{5c953539-7a3f-92da-50a7-d90c91bec083}">
           <p14:sldIdLst>
             <p14:sldId id="268"/>
             <p14:sldId id="269"/>
@@ -171,7 +172,7 @@
             <p14:sldId id="272"/>
           </p14:sldIdLst>
         </p14:section>
-        <p14:section name="TC7 · Canvas" id="{0c6f888e-f448-36cc-49f6-15efc1b790b3}">
+        <p14:section name="TC7 · Canvas" id="{41cdb387-eef0-0022-1490-d302703ed293}">
           <p14:sldIdLst>
             <p14:sldId id="273"/>
             <p14:sldId id="274"/>
@@ -185,7 +186,7 @@
             <p14:sldId id="282"/>
           </p14:sldIdLst>
         </p14:section>
-        <p14:section name="TC8 · Propuesta de valor" id="{9df8ab34-5dfa-8806-6883-d8d2401cb831}">
+        <p14:section name="TC8 · Propuesta de valor" id="{4f110752-4f81-8a4f-3f60-6be1dd0052eb}">
           <p14:sldIdLst>
             <p14:sldId id="283"/>
             <p14:sldId id="284"/>
@@ -194,12 +195,13 @@
             <p14:sldId id="287"/>
             <p14:sldId id="288"/>
             <p14:sldId id="289"/>
+            <p14:sldId id="290"/>
           </p14:sldIdLst>
         </p14:section>
-        <p14:section name="Cierre" id="{b64aaca4-f7e6-fa7e-deab-ab4296f83090}">
+        <p14:section name="Cierre" id="{7ba311e4-f10c-3395-0318-8a1e4028d138}">
           <p14:sldIdLst>
-            <p14:sldId id="290"/>
             <p14:sldId id="291"/>
+            <p14:sldId id="292"/>
           </p14:sldIdLst>
         </p14:section>
       </p14:sectionLst>
@@ -7880,7 +7882,7 @@
           <a:p>
             <a:r>
               <a:rPr lang="en-US" dirty="0"/>
-              <a:t>Diagrama de Gantt del plan de marketing, de octubre de 2026 (prelanzamiento) a diciembre de 2027 (fin del año 1). Prelanzamiento (octubre a diciembre de 2026): permisos, registro sanitario y etiqueta; prueba de la app y la receta con 10 familias en noviembre; fotos y video (S/300) y lista de espera por WhatsApp; en diciembre, influencers (40 packs, S/458), pauta de expectativa (S/600) y material de punto de venta (S/400). Lanzamiento (enero y febrero de 2027): primer punto en enero con 600 degustaciones (S/1,146) y material para ferias (S/300); en febrero, segundo punto y feria pagada de campaña escolar. Crecer (marzo a julio): entran los quioscos escolares, las mamás embajadoras toman fuerza con el año escolar y en abril va la feria del Día del Niño Peruano (segundo domingo de abril). Expandir (agosto a diciembre): tercer punto de venta. Todo el año: kermeses, cumpleaños y ferias saludables o municipales (2 a 5 al mes, S/160 cada una con vendedora y aporte), pauta digital de S/700 al mes reforzada en las fechas clave (lonchera de marzo, Día del Niño y regalos de Navidad), S/200 al mes para premiar a las embajadoras, y la app Andi con el aviso de recompra. Inversión por mes: octubre S/0; noviembre S/300; diciembre S/1,458; enero S/2,506; febrero S/3,290; marzo S/1,540; abril S/3,610; mayo S/1,700; junio S/1,540; julio S/1,380; agosto a octubre S/1,540; noviembre S/1,380; diciembre S/1,220. Total S/24,544: S/3,204 del lanzamiento (en la inversión inicial) y S/21,340 del año 1 (pauta y embajadoras S/10,800, ferias S/4,140 y eventos S/6,400). No incluye el espacio ni los vendedores de los stands, que son costos de venta.</a:t>
+              <a:t>Plan de marketing completo en el documento 04-reformulacion/10-plan-de-marketing-2027.md. Mensaje central: "Hierro medido. Sabor a brownie." Al padre A (Claudia, Lima Top) le hablamos del dato: el hierro medido de su lote. Al padre B (Rodrigo, Lima Moderna) le hablamos de resolver la semana a buen precio: el pack de 12 por WhatsApp sale S/4.16 por brownie. Desde febrero la pauta se reparte mitad en Lima Top y mitad en Lima Moderna. Cuatro fases: prelanzamiento (octubre a diciembre de 2026, S/1,758: lista de espera, video, influencers y material de punto de venta); lanzamiento (enero y febrero, S/5,796: apertura en Jockey y punto 2, feria de campaña escolar; 3,700 brownies); crecer (marzo a julio, S/9,770: quioscos, embajadoras, feria del Día del Niño y fechas clave; 20,320 brownies); expandir (agosto a diciembre, S/7,220: punto 3, 5 colegios y Navidad con cajas por pedido; 28,311 brownies). Total S/24,544: S/0.44 de marketing por brownie en 2027. Objetivos: vender lo del Excel v7 (52,331 brownies y S/244,728); recompra igual al 35 % de lo vendido en físico, con unos 2,300 contactos de WhatsApp con permiso; 30 % de envases escaneados; 230 familias nuevas por embajadoras; 5 colegios con quiosco (2 A y 3 B) y 8 tiendas naturistas. Las metas de contactos, escaneos y colegios son metas propuestas, calculadas en la sección 6.3 del documento 10. Indicadores que se revisan cada domingo: brownies por día y punto (80 a 100), recompra, contactos, escaneos, contactos por feria (50 o más) y familias por embajadoras (20 al mes).</a:t>
             </a:r>
             <a:endParaRPr lang="en-US" dirty="0"/>
           </a:p>
@@ -7968,7 +7970,7 @@
           <a:p>
             <a:r>
               <a:rPr lang="en-US" dirty="0"/>
-              <a:t>Reglas para crecer sin arriesgar: ninguna de estas mejoras está dentro del plan base; cada una se activa solo cuando se cumple su meta, y así el Excel muestra un escenario prudente. (1) Cuarto punto de venta: si los 3 puntos venden 85 o más brownies por día durante 3 meses. (2) Fabricación más barata: al pasar 5,000 brownies al mes (el año 2 promedia unos 5,900), negociar con la planta S/0.40 por brownie en vez de S/0.45. (3) Contrato anual del polvo de sangrecita (unos 50 kg al año) para fijar el precio. (4) Cajas para cumpleaños y empresas, por pedido. (5) Góndola en Wong o Vivanda en el año 2, solo si cada punto ya gana por sí solo: el supermercado se queda con 20 a 40 % y paga a 30 a 90 días. (6) Pago variable a vendedores: S/60 por día más S/0.30 por brownie (a 90 brownies por día sale casi lo mismo que hoy, S/87, pero premia al que vende más). (7) Una feria pagada solo se repite si dejó al menos 50 contactos de WhatsApp y cumplió 3 de los 4 criterios: padres con hijos de 4 a 11, que buscan comida saludable, en temporada escolar y en Lima Top o Moderna. (8) La línea de crédito de S/3,000 solo se usa si la caja baja de S/1,000.</a:t>
+              <a:t>Cronograma de Gantt solo del plan de marketing (documento 10, sección 6). Preparar: redes, WhatsApp Business y lista de espera (octubre a diciembre de 2026); video de lanzamiento con niños, con consentimiento de los padres (noviembre, S/300); influencers (40 packs: 20 del segmento A y 20 del B) y pauta de expectativa (diciembre y enero). Lanzar: apertura de Jockey en enero, del punto 2 (segmento B) en febrero y del punto 3 (segmento A) en agosto; ferias pagadas de campaña escolar (febrero) y Día del Niño Peruano (11 de abril), con meta de 50 contactos de WhatsApp cada una. Fidelizar: recompra por WhatsApp con el aviso de la app (35 % de lo vendido en físico); mamás embajadoras con código (10 fundadoras en enero y febrero, luego 20 familias al mes); campaña "Escanea tu lote" en los stands (de 15 % a 28 % de envases escaneados en el primer semestre, y otra vez al abrir el punto 3). Crecer: quioscos en colegios A y B (1 a 3 de marzo a julio, 4 a 5 desde agosto); eventos sin costo (1 a 5 al mes); campañas del Día de la Madre (9 de mayo), del Padre (20 de junio) y del Día del Niño de agosto (15 de agosto, fecha comercial de los malls); y Navidad con cajas para regalo y empresas, por pedido. La fila de inversión cuadra con el Excel v7 mes a mes (S/24,544 en total). La meta de brownies es la del Excel v7; en el prelanzamiento la meta es de contactos en lista de espera. Pendiente de confirmar: el calendario escolar 2027 del MINEDU, la lista de feriados 2027 en gob.pe, los organizadores de las 2 ferias, los puntos 2 y 3, y el contacto con Innova Schools.</a:t>
             </a:r>
             <a:endParaRPr lang="en-US" dirty="0"/>
           </a:p>
@@ -8056,9 +8058,7 @@
           <a:p>
             <a:r>
               <a:rPr lang="en-US" dirty="0"/>
-              <a:t>Cierre con la propuesta de valor en una frase y los tres pasos siguientes: cargar los resultados del focus 2; cotizar los stands (Jockey, Larcomar, La Rambla, Wong, Vivanda), la feria del Día del Niño y las ferias saludables, y la sangrecita de res en polvo a granel; y probar el prototipo de la app Andi, Misión Hierro con 10 familias en noviembre de 2026.
-IMAGEN 4 — prompt para Nano Banana (proporción 2:3 · adjuntar la foto del empaque):
-Use the attached AndiBite package image only as a reference for the pouch and colors. Warm candid lifestyle photo of a 7-year-old Peruvian boy in a private school uniform (white polo shirt and navy sweater) sitting on a bench in a school courtyard at recess. He has just opened his lunchbox and smiles while holding a mini chocolate brownie; the AndiBite pouch is visible in the lunchbox with the label partly turned away. Soft daylight, shallow depth of field, background of blurred green trees and classmates. Warm color grading with chocolate brown, cream and brick red accents. Natural and unposed, eye-level camera, vertical 2:3 composition with the boy on the center-left. No text, no extra logos, no watermark.</a:t>
+              <a:t>Reglas para crecer sin arriesgar: ninguna de estas mejoras está dentro del plan base; cada una se activa solo cuando se cumple su meta, y así el Excel muestra un escenario prudente. (1) Cuarto punto de venta: si los 3 puntos venden 85 o más brownies por día durante 3 meses. (2) Fabricación más barata: al pasar 5,000 brownies al mes (el año 2 promedia unos 5,900), negociar con la planta S/0.40 por brownie en vez de S/0.45. (3) Contrato anual del polvo de sangrecita (unos 50 kg al año) para fijar el precio. (4) Cajas para cumpleaños y empresas, por pedido. (5) Góndola en Wong o Vivanda en el año 2, solo si cada punto ya gana por sí solo: el supermercado se queda con 20 a 40 % y paga a 30 a 90 días. (6) Pago variable a vendedores: S/60 por día más S/0.30 por brownie (a 90 brownies por día sale casi lo mismo que hoy, S/87, pero premia al que vende más). (7) Una feria pagada solo se repite si dejó al menos 50 contactos de WhatsApp y cumplió 3 de los 4 criterios: padres con hijos de 4 a 11, que buscan comida saludable, en temporada escolar y en Lima Top o Moderna. (8) La línea de crédito de S/3,000 solo se usa si la caja baja de S/1,000.</a:t>
             </a:r>
             <a:endParaRPr lang="en-US" dirty="0"/>
           </a:p>
@@ -8082,6 +8082,96 @@
             <a:fld id="{F7021451-1387-4CA6-816F-3879F97B5CBC}" type="slidenum">
               <a:rPr lang="en-US"/>
               <a:t>36</a:t>
+            </a:fld>
+            <a:endParaRPr lang="en-US"/>
+          </a:p>
+        </p:txBody>
+      </p:sp>
+    </p:spTree>
+    <p:extLst>
+      <p:ext uri="{BB962C8B-B14F-4D97-AF65-F5344CB8AC3E}">
+        <p14:creationId xmlns:p14="http://schemas.microsoft.com/office/powerpoint/2010/main" val="1024086991"/>
+      </p:ext>
+    </p:extLst>
+  </p:cSld>
+  <p:clrMapOvr>
+    <a:masterClrMapping/>
+  </p:clrMapOvr>
+</p:notes>
+</file>
+
+<file path=ppt/notesSlides/notesSlide37.xml><?xml version="1.0" encoding="utf-8"?>
+<p:notes xmlns:a="http://schemas.openxmlformats.org/drawingml/2006/main" xmlns:r="http://schemas.openxmlformats.org/officeDocument/2006/relationships" xmlns:p="http://schemas.openxmlformats.org/presentationml/2006/main">
+  <p:cSld>
+    <p:spTree>
+      <p:nvGrpSpPr>
+        <p:cNvPr id="1" name=""/>
+        <p:cNvGrpSpPr/>
+        <p:nvPr/>
+      </p:nvGrpSpPr>
+      <p:grpSpPr>
+        <a:xfrm>
+          <a:off x="0" y="0"/>
+          <a:ext cx="0" cy="0"/>
+          <a:chOff x="0" y="0"/>
+          <a:chExt cx="0" cy="0"/>
+        </a:xfrm>
+      </p:grpSpPr>
+      <p:sp>
+        <p:nvSpPr>
+          <p:cNvPr id="2" name="Slide Image Placeholder 1"/>
+          <p:cNvSpPr>
+            <a:spLocks noGrp="1" noRot="1" noChangeAspect="1"/>
+          </p:cNvSpPr>
+          <p:nvPr>
+            <p:ph type="sldImg"/>
+          </p:nvPr>
+        </p:nvSpPr>
+        <p:spPr/>
+      </p:sp>
+      <p:sp>
+        <p:nvSpPr>
+          <p:cNvPr id="3" name="Notes Placeholder 2"/>
+          <p:cNvSpPr>
+            <a:spLocks noGrp="1"/>
+          </p:cNvSpPr>
+          <p:nvPr>
+            <p:ph type="body" idx="1"/>
+          </p:nvPr>
+        </p:nvSpPr>
+        <p:spPr/>
+        <p:txBody>
+          <a:bodyPr/>
+          <a:lstStyle/>
+          <a:p>
+            <a:r>
+              <a:rPr lang="en-US" dirty="0"/>
+              <a:t>Cierre con la propuesta de valor en una frase y los tres pasos siguientes: cargar los resultados del focus 2; cotizar los stands (Jockey, Larcomar, La Rambla, Wong, Vivanda), la feria del Día del Niño y las ferias saludables, y la sangrecita de res en polvo a granel; y probar el prototipo de la app Andi, Misión Hierro con 10 familias en noviembre de 2026.
+IMAGEN 4 — prompt para Nano Banana (proporción 2:3 · adjuntar la foto del empaque):
+Use the attached AndiBite package image only as a reference for the pouch and colors. Warm candid lifestyle photo of a 7-year-old Peruvian boy in a private school uniform (white polo shirt and navy sweater) sitting on a bench in a school courtyard at recess. He has just opened his lunchbox and smiles while holding a mini chocolate brownie; the AndiBite pouch is visible in the lunchbox with the label partly turned away. Soft daylight, shallow depth of field, background of blurred green trees and classmates. Warm color grading with chocolate brown, cream and brick red accents. Natural and unposed, eye-level camera, vertical 2:3 composition with the boy on the center-left. No text, no extra logos, no watermark.</a:t>
+            </a:r>
+            <a:endParaRPr lang="en-US" dirty="0"/>
+          </a:p>
+        </p:txBody>
+      </p:sp>
+      <p:sp>
+        <p:nvSpPr>
+          <p:cNvPr id="4" name="Slide Number Placeholder 3"/>
+          <p:cNvSpPr>
+            <a:spLocks noGrp="1"/>
+          </p:cNvSpPr>
+          <p:nvPr>
+            <p:ph type="sldNum" sz="quarter" idx="10"/>
+          </p:nvPr>
+        </p:nvSpPr>
+        <p:spPr/>
+        <p:txBody>
+          <a:bodyPr/>
+          <a:lstStyle/>
+          <a:p>
+            <a:fld id="{F7021451-1387-4CA6-816F-3879F97B5CBC}" type="slidenum">
+              <a:rPr lang="en-US"/>
+              <a:t>37</a:t>
             </a:fld>
             <a:endParaRPr lang="en-US"/>
           </a:p>
@@ -44406,7 +44496,7 @@
                   <a:schemeClr val="tx2"/>
                 </a:solidFill>
               </a:rPr>
-              <a:t>Qué hacemos cada mes y cuánto invertimos</a:t>
+              <a:t>S/24,544 para que nos prueben, compren y vuelvan</a:t>
             </a:r>
             <a:endParaRPr lang="en-US" sz="3400" dirty="0"/>
           </a:p>
@@ -44420,8 +44510,219 @@
         </p:nvSpPr>
         <p:spPr>
           <a:xfrm>
-            <a:off x="3264408" y="1371600"/>
-            <a:ext cx="1642262" cy="274320"/>
+            <a:off x="548640" y="1417320"/>
+            <a:ext cx="11091672" cy="868680"/>
+          </a:xfrm>
+          <a:prstGeom prst="roundRect">
+            <a:avLst>
+              <a:gd name="adj" fmla="val 12632"/>
+            </a:avLst>
+          </a:prstGeom>
+          <a:solidFill>
+            <a:schemeClr val="tx2"/>
+          </a:solidFill>
+          <a:ln w="12700">
+            <a:solidFill>
+              <a:schemeClr val="tx2"/>
+            </a:solidFill>
+            <a:prstDash val="solid"/>
+          </a:ln>
+        </p:spPr>
+      </p:sp>
+      <p:sp>
+        <p:nvSpPr>
+          <p:cNvPr id="5" name="Text 3"/>
+          <p:cNvSpPr txBox="1"/>
+          <p:nvPr/>
+        </p:nvSpPr>
+        <p:spPr>
+          <a:xfrm>
+            <a:off x="777240" y="1417320"/>
+            <a:ext cx="3291840" cy="868680"/>
+          </a:xfrm>
+          <a:prstGeom prst="rect">
+            <a:avLst/>
+          </a:prstGeom>
+          <a:noFill/>
+          <a:ln/>
+        </p:spPr>
+        <p:txBody>
+          <a:bodyPr wrap="square" lIns="0" tIns="0" rIns="0" bIns="0" rtlCol="0" anchor="ctr"/>
+          <a:lstStyle/>
+          <a:p>
+            <a:pPr indent="0" marL="0">
+              <a:buNone/>
+            </a:pPr>
+            <a:r>
+              <a:rPr lang="en-US" sz="950" b="1" spc="100" kern="0" dirty="0">
+                <a:solidFill>
+                  <a:schemeClr val="accent3"/>
+                </a:solidFill>
+              </a:rPr>
+              <a:t>MENSAJE CENTRAL</a:t>
+            </a:r>
+            <a:endParaRPr lang="en-US" sz="1400" dirty="0"/>
+          </a:p>
+          <a:p>
+            <a:pPr indent="0" marL="0">
+              <a:buNone/>
+            </a:pPr>
+            <a:r>
+              <a:rPr lang="en-US" sz="1800" b="1" i="1" dirty="0">
+                <a:solidFill>
+                  <a:schemeClr val="bg1"/>
+                </a:solidFill>
+              </a:rPr>
+              <a:t>"Hierro medido. Sabor a brownie."</a:t>
+            </a:r>
+            <a:endParaRPr lang="en-US" sz="1400" dirty="0"/>
+          </a:p>
+        </p:txBody>
+      </p:sp>
+      <p:sp>
+        <p:nvSpPr>
+          <p:cNvPr id="6" name="Text 4"/>
+          <p:cNvSpPr txBox="1"/>
+          <p:nvPr/>
+        </p:nvSpPr>
+        <p:spPr>
+          <a:xfrm>
+            <a:off x="4206240" y="1417320"/>
+            <a:ext cx="3611880" cy="868680"/>
+          </a:xfrm>
+          <a:prstGeom prst="rect">
+            <a:avLst/>
+          </a:prstGeom>
+          <a:noFill/>
+          <a:ln/>
+        </p:spPr>
+        <p:txBody>
+          <a:bodyPr wrap="square" lIns="0" tIns="0" rIns="0" bIns="0" rtlCol="0" anchor="ctr"/>
+          <a:lstStyle/>
+          <a:p>
+            <a:pPr indent="0" marL="0">
+              <a:buNone/>
+            </a:pPr>
+            <a:r>
+              <a:rPr lang="en-US" sz="950" b="1" spc="100" kern="0" dirty="0">
+                <a:solidFill>
+                  <a:schemeClr val="accent5"/>
+                </a:solidFill>
+              </a:rPr>
+              <a:t>PADRE A · LIMA TOP</a:t>
+            </a:r>
+            <a:endParaRPr lang="en-US" sz="1400" dirty="0"/>
+          </a:p>
+          <a:p>
+            <a:pPr indent="0" marL="0">
+              <a:buNone/>
+            </a:pPr>
+            <a:r>
+              <a:rPr lang="en-US" sz="1300" dirty="0">
+                <a:solidFill>
+                  <a:schemeClr val="bg1"/>
+                </a:solidFill>
+              </a:rPr>
+              <a:t>Él ve un brownie. Tú ves el hierro medido de su lote.</a:t>
+            </a:r>
+            <a:endParaRPr lang="en-US" sz="1400" dirty="0"/>
+          </a:p>
+        </p:txBody>
+      </p:sp>
+      <p:sp>
+        <p:nvSpPr>
+          <p:cNvPr id="7" name="Text 5"/>
+          <p:cNvSpPr txBox="1"/>
+          <p:nvPr/>
+        </p:nvSpPr>
+        <p:spPr>
+          <a:xfrm>
+            <a:off x="7936992" y="1417320"/>
+            <a:ext cx="3611880" cy="868680"/>
+          </a:xfrm>
+          <a:prstGeom prst="rect">
+            <a:avLst/>
+          </a:prstGeom>
+          <a:noFill/>
+          <a:ln/>
+        </p:spPr>
+        <p:txBody>
+          <a:bodyPr wrap="square" lIns="0" tIns="0" rIns="0" bIns="0" rtlCol="0" anchor="ctr"/>
+          <a:lstStyle/>
+          <a:p>
+            <a:pPr indent="0" marL="0">
+              <a:buNone/>
+            </a:pPr>
+            <a:r>
+              <a:rPr lang="en-US" sz="950" b="1" spc="100" kern="0" dirty="0">
+                <a:solidFill>
+                  <a:schemeClr val="accent5"/>
+                </a:solidFill>
+              </a:rPr>
+              <a:t>PADRE B · LIMA MODERNA</a:t>
+            </a:r>
+            <a:endParaRPr lang="en-US" sz="1400" dirty="0"/>
+          </a:p>
+          <a:p>
+            <a:pPr indent="0" marL="0">
+              <a:buNone/>
+            </a:pPr>
+            <a:r>
+              <a:rPr lang="en-US" sz="1300" dirty="0">
+                <a:solidFill>
+                  <a:schemeClr val="bg1"/>
+                </a:solidFill>
+              </a:rPr>
+              <a:t>Una mañana menos: la lonchera de la semana, a S/4.16 por brownie.</a:t>
+            </a:r>
+            <a:endParaRPr lang="en-US" sz="1400" dirty="0"/>
+          </a:p>
+        </p:txBody>
+      </p:sp>
+      <p:sp>
+        <p:nvSpPr>
+          <p:cNvPr id="8" name="Shape 6"/>
+          <p:cNvSpPr/>
+          <p:nvPr/>
+        </p:nvSpPr>
+        <p:spPr>
+          <a:xfrm>
+            <a:off x="548640" y="2450592"/>
+            <a:ext cx="2670048" cy="2240280"/>
+          </a:xfrm>
+          <a:prstGeom prst="roundRect">
+            <a:avLst>
+              <a:gd name="adj" fmla="val 4898"/>
+            </a:avLst>
+          </a:prstGeom>
+          <a:solidFill>
+            <a:schemeClr val="bg1"/>
+          </a:solidFill>
+          <a:ln w="12700">
+            <a:solidFill>
+              <a:schemeClr val="bg1"/>
+            </a:solidFill>
+            <a:prstDash val="solid"/>
+          </a:ln>
+          <a:effectLst>
+            <a:outerShdw sx="100000" sy="100000" kx="0" ky="0" algn="bl" rotWithShape="0" blurRad="101600" dist="25400" dir="5400000">
+              <a:srgbClr val="7A4A30">
+                <a:alpha val="14000"/>
+              </a:srgbClr>
+            </a:outerShdw>
+          </a:effectLst>
+        </p:spPr>
+      </p:sp>
+      <p:sp>
+        <p:nvSpPr>
+          <p:cNvPr id="9" name="Shape 7"/>
+          <p:cNvSpPr/>
+          <p:nvPr/>
+        </p:nvSpPr>
+        <p:spPr>
+          <a:xfrm>
+            <a:off x="548640" y="2450592"/>
+            <a:ext cx="2670048" cy="109728"/>
           </a:xfrm>
           <a:prstGeom prst="rect">
             <a:avLst/>
@@ -44439,50 +44740,206 @@
       </p:sp>
       <p:sp>
         <p:nvSpPr>
-          <p:cNvPr id="5" name="Text 3"/>
+          <p:cNvPr id="10" name="Text 8"/>
           <p:cNvSpPr txBox="1"/>
           <p:nvPr/>
         </p:nvSpPr>
         <p:spPr>
           <a:xfrm>
-            <a:off x="3246120" y="1371600"/>
-            <a:ext cx="1678838" cy="274320"/>
-          </a:xfrm>
-          <a:prstGeom prst="rect">
-            <a:avLst/>
-          </a:prstGeom>
-          <a:noFill/>
-          <a:ln/>
-        </p:spPr>
-        <p:txBody>
-          <a:bodyPr wrap="square" lIns="0" tIns="0" rIns="0" bIns="0" rtlCol="0" anchor="ctr"/>
-          <a:lstStyle/>
-          <a:p>
-            <a:pPr algn="ctr" indent="0" marL="0">
-              <a:buNone/>
-            </a:pPr>
-            <a:r>
-              <a:rPr lang="en-US" sz="900" b="1" spc="50" kern="0" dirty="0">
-                <a:solidFill>
-                  <a:schemeClr val="bg1"/>
-                </a:solidFill>
-              </a:rPr>
-              <a:t>PRELANZAMIENTO · 2026</a:t>
-            </a:r>
-            <a:endParaRPr lang="en-US" sz="900" dirty="0"/>
-          </a:p>
-        </p:txBody>
-      </p:sp>
-      <p:sp>
-        <p:nvSpPr>
-          <p:cNvPr id="6" name="Shape 4"/>
+            <a:off x="731520" y="2670048"/>
+            <a:ext cx="2395728" cy="256032"/>
+          </a:xfrm>
+          <a:prstGeom prst="rect">
+            <a:avLst/>
+          </a:prstGeom>
+          <a:noFill/>
+          <a:ln/>
+        </p:spPr>
+        <p:txBody>
+          <a:bodyPr wrap="square" lIns="0" tIns="0" rIns="0" bIns="0" rtlCol="0" anchor="t"/>
+          <a:lstStyle/>
+          <a:p>
+            <a:pPr indent="0" marL="0">
+              <a:buNone/>
+            </a:pPr>
+            <a:r>
+              <a:rPr lang="en-US" sz="1100" b="1" spc="100" kern="0" dirty="0">
+                <a:solidFill>
+                  <a:schemeClr val="accent2"/>
+                </a:solidFill>
+              </a:rPr>
+              <a:t>1 · PRELANZAMIENTO</a:t>
+            </a:r>
+            <a:endParaRPr lang="en-US" sz="1100" dirty="0"/>
+          </a:p>
+        </p:txBody>
+      </p:sp>
+      <p:sp>
+        <p:nvSpPr>
+          <p:cNvPr id="11" name="Text 9"/>
+          <p:cNvSpPr txBox="1"/>
+          <p:nvPr/>
+        </p:nvSpPr>
+        <p:spPr>
+          <a:xfrm>
+            <a:off x="731520" y="2926080"/>
+            <a:ext cx="2395728" cy="237744"/>
+          </a:xfrm>
+          <a:prstGeom prst="rect">
+            <a:avLst/>
+          </a:prstGeom>
+          <a:noFill/>
+          <a:ln/>
+        </p:spPr>
+        <p:txBody>
+          <a:bodyPr wrap="square" lIns="0" tIns="0" rIns="0" bIns="0" rtlCol="0" anchor="t"/>
+          <a:lstStyle/>
+          <a:p>
+            <a:pPr indent="0" marL="0">
+              <a:buNone/>
+            </a:pPr>
+            <a:r>
+              <a:rPr lang="en-US" sz="1100" dirty="0">
+                <a:solidFill>
+                  <a:schemeClr val="accent2"/>
+                </a:solidFill>
+              </a:rPr>
+              <a:t>Oct–dic 2026</a:t>
+            </a:r>
+            <a:endParaRPr lang="en-US" sz="1100" dirty="0"/>
+          </a:p>
+        </p:txBody>
+      </p:sp>
+      <p:sp>
+        <p:nvSpPr>
+          <p:cNvPr id="12" name="Text 10"/>
+          <p:cNvSpPr txBox="1"/>
+          <p:nvPr/>
+        </p:nvSpPr>
+        <p:spPr>
+          <a:xfrm>
+            <a:off x="731520" y="3200400"/>
+            <a:ext cx="2395728" cy="566928"/>
+          </a:xfrm>
+          <a:prstGeom prst="rect">
+            <a:avLst/>
+          </a:prstGeom>
+          <a:noFill/>
+          <a:ln/>
+        </p:spPr>
+        <p:txBody>
+          <a:bodyPr wrap="square" lIns="0" tIns="0" rIns="0" bIns="0" rtlCol="0" anchor="t"/>
+          <a:lstStyle/>
+          <a:p>
+            <a:pPr indent="0" marL="0">
+              <a:buNone/>
+            </a:pPr>
+            <a:r>
+              <a:rPr lang="en-US" sz="1300" b="1" dirty="0">
+                <a:solidFill>
+                  <a:schemeClr val="tx2"/>
+                </a:solidFill>
+              </a:rPr>
+              <a:t>Lista de espera, video, influencers y POP listos</a:t>
+            </a:r>
+            <a:endParaRPr lang="en-US" sz="1300" dirty="0"/>
+          </a:p>
+        </p:txBody>
+      </p:sp>
+      <p:sp>
+        <p:nvSpPr>
+          <p:cNvPr id="13" name="Text 11"/>
+          <p:cNvSpPr txBox="1"/>
+          <p:nvPr/>
+        </p:nvSpPr>
+        <p:spPr>
+          <a:xfrm>
+            <a:off x="731520" y="3822192"/>
+            <a:ext cx="2395728" cy="777240"/>
+          </a:xfrm>
+          <a:prstGeom prst="rect">
+            <a:avLst/>
+          </a:prstGeom>
+          <a:noFill/>
+          <a:ln/>
+        </p:spPr>
+        <p:txBody>
+          <a:bodyPr wrap="square" lIns="0" tIns="0" rIns="0" bIns="0" rtlCol="0" anchor="t"/>
+          <a:lstStyle/>
+          <a:p>
+            <a:pPr indent="0" marL="0">
+              <a:buNone/>
+            </a:pPr>
+            <a:r>
+              <a:rPr lang="en-US" sz="2000" b="1" dirty="0">
+                <a:solidFill>
+                  <a:schemeClr val="accent1"/>
+                </a:solidFill>
+              </a:rPr>
+              <a:t>S/1,758</a:t>
+            </a:r>
+            <a:endParaRPr lang="en-US" sz="1400" dirty="0"/>
+          </a:p>
+          <a:p>
+            <a:pPr indent="0" marL="0">
+              <a:buNone/>
+            </a:pPr>
+            <a:r>
+              <a:rPr lang="en-US" sz="1100" dirty="0">
+                <a:solidFill>
+                  <a:schemeClr val="tx1"/>
+                </a:solidFill>
+              </a:rPr>
+              <a:t>Meta: 100 contactos en espera</a:t>
+            </a:r>
+            <a:endParaRPr lang="en-US" sz="1400" dirty="0"/>
+          </a:p>
+        </p:txBody>
+      </p:sp>
+      <p:sp>
+        <p:nvSpPr>
+          <p:cNvPr id="14" name="Shape 12"/>
           <p:cNvSpPr/>
           <p:nvPr/>
         </p:nvSpPr>
         <p:spPr>
           <a:xfrm>
-            <a:off x="4943246" y="1371600"/>
-            <a:ext cx="1082650" cy="274320"/>
+            <a:off x="3355848" y="2450592"/>
+            <a:ext cx="2670048" cy="2240280"/>
+          </a:xfrm>
+          <a:prstGeom prst="roundRect">
+            <a:avLst>
+              <a:gd name="adj" fmla="val 4898"/>
+            </a:avLst>
+          </a:prstGeom>
+          <a:solidFill>
+            <a:schemeClr val="bg1"/>
+          </a:solidFill>
+          <a:ln w="12700">
+            <a:solidFill>
+              <a:schemeClr val="bg1"/>
+            </a:solidFill>
+            <a:prstDash val="solid"/>
+          </a:ln>
+          <a:effectLst>
+            <a:outerShdw sx="100000" sy="100000" kx="0" ky="0" algn="bl" rotWithShape="0" blurRad="101600" dist="25400" dir="5400000">
+              <a:srgbClr val="7A4A30">
+                <a:alpha val="14000"/>
+              </a:srgbClr>
+            </a:outerShdw>
+          </a:effectLst>
+        </p:spPr>
+      </p:sp>
+      <p:sp>
+        <p:nvSpPr>
+          <p:cNvPr id="15" name="Shape 13"/>
+          <p:cNvSpPr/>
+          <p:nvPr/>
+        </p:nvSpPr>
+        <p:spPr>
+          <a:xfrm>
+            <a:off x="3355848" y="2450592"/>
+            <a:ext cx="2670048" cy="109728"/>
           </a:xfrm>
           <a:prstGeom prst="rect">
             <a:avLst/>
@@ -44500,50 +44957,206 @@
       </p:sp>
       <p:sp>
         <p:nvSpPr>
-          <p:cNvPr id="7" name="Text 5"/>
+          <p:cNvPr id="16" name="Text 14"/>
           <p:cNvSpPr txBox="1"/>
           <p:nvPr/>
         </p:nvSpPr>
         <p:spPr>
           <a:xfrm>
-            <a:off x="4924958" y="1371600"/>
-            <a:ext cx="1119226" cy="274320"/>
-          </a:xfrm>
-          <a:prstGeom prst="rect">
-            <a:avLst/>
-          </a:prstGeom>
-          <a:noFill/>
-          <a:ln/>
-        </p:spPr>
-        <p:txBody>
-          <a:bodyPr wrap="square" lIns="0" tIns="0" rIns="0" bIns="0" rtlCol="0" anchor="ctr"/>
-          <a:lstStyle/>
-          <a:p>
-            <a:pPr algn="ctr" indent="0" marL="0">
-              <a:buNone/>
-            </a:pPr>
-            <a:r>
-              <a:rPr lang="en-US" sz="900" b="1" spc="50" kern="0" dirty="0">
-                <a:solidFill>
-                  <a:schemeClr val="bg1"/>
-                </a:solidFill>
-              </a:rPr>
-              <a:t>LANZAMIENTO 2027</a:t>
-            </a:r>
-            <a:endParaRPr lang="en-US" sz="900" dirty="0"/>
-          </a:p>
-        </p:txBody>
-      </p:sp>
-      <p:sp>
-        <p:nvSpPr>
-          <p:cNvPr id="8" name="Shape 6"/>
+            <a:off x="3538728" y="2670048"/>
+            <a:ext cx="2395728" cy="256032"/>
+          </a:xfrm>
+          <a:prstGeom prst="rect">
+            <a:avLst/>
+          </a:prstGeom>
+          <a:noFill/>
+          <a:ln/>
+        </p:spPr>
+        <p:txBody>
+          <a:bodyPr wrap="square" lIns="0" tIns="0" rIns="0" bIns="0" rtlCol="0" anchor="t"/>
+          <a:lstStyle/>
+          <a:p>
+            <a:pPr indent="0" marL="0">
+              <a:buNone/>
+            </a:pPr>
+            <a:r>
+              <a:rPr lang="en-US" sz="1100" b="1" spc="100" kern="0" dirty="0">
+                <a:solidFill>
+                  <a:schemeClr val="accent1"/>
+                </a:solidFill>
+              </a:rPr>
+              <a:t>2 · LANZAMIENTO</a:t>
+            </a:r>
+            <a:endParaRPr lang="en-US" sz="1100" dirty="0"/>
+          </a:p>
+        </p:txBody>
+      </p:sp>
+      <p:sp>
+        <p:nvSpPr>
+          <p:cNvPr id="17" name="Text 15"/>
+          <p:cNvSpPr txBox="1"/>
+          <p:nvPr/>
+        </p:nvSpPr>
+        <p:spPr>
+          <a:xfrm>
+            <a:off x="3538728" y="2926080"/>
+            <a:ext cx="2395728" cy="237744"/>
+          </a:xfrm>
+          <a:prstGeom prst="rect">
+            <a:avLst/>
+          </a:prstGeom>
+          <a:noFill/>
+          <a:ln/>
+        </p:spPr>
+        <p:txBody>
+          <a:bodyPr wrap="square" lIns="0" tIns="0" rIns="0" bIns="0" rtlCol="0" anchor="t"/>
+          <a:lstStyle/>
+          <a:p>
+            <a:pPr indent="0" marL="0">
+              <a:buNone/>
+            </a:pPr>
+            <a:r>
+              <a:rPr lang="en-US" sz="1100" dirty="0">
+                <a:solidFill>
+                  <a:schemeClr val="accent2"/>
+                </a:solidFill>
+              </a:rPr>
+              <a:t>Ene–feb 2027</a:t>
+            </a:r>
+            <a:endParaRPr lang="en-US" sz="1100" dirty="0"/>
+          </a:p>
+        </p:txBody>
+      </p:sp>
+      <p:sp>
+        <p:nvSpPr>
+          <p:cNvPr id="18" name="Text 16"/>
+          <p:cNvSpPr txBox="1"/>
+          <p:nvPr/>
+        </p:nvSpPr>
+        <p:spPr>
+          <a:xfrm>
+            <a:off x="3538728" y="3200400"/>
+            <a:ext cx="2395728" cy="566928"/>
+          </a:xfrm>
+          <a:prstGeom prst="rect">
+            <a:avLst/>
+          </a:prstGeom>
+          <a:noFill/>
+          <a:ln/>
+        </p:spPr>
+        <p:txBody>
+          <a:bodyPr wrap="square" lIns="0" tIns="0" rIns="0" bIns="0" rtlCol="0" anchor="t"/>
+          <a:lstStyle/>
+          <a:p>
+            <a:pPr indent="0" marL="0">
+              <a:buNone/>
+            </a:pPr>
+            <a:r>
+              <a:rPr lang="en-US" sz="1300" b="1" dirty="0">
+                <a:solidFill>
+                  <a:schemeClr val="tx2"/>
+                </a:solidFill>
+              </a:rPr>
+              <a:t>Primera compra en Jockey y punto 2</a:t>
+            </a:r>
+            <a:endParaRPr lang="en-US" sz="1300" dirty="0"/>
+          </a:p>
+        </p:txBody>
+      </p:sp>
+      <p:sp>
+        <p:nvSpPr>
+          <p:cNvPr id="19" name="Text 17"/>
+          <p:cNvSpPr txBox="1"/>
+          <p:nvPr/>
+        </p:nvSpPr>
+        <p:spPr>
+          <a:xfrm>
+            <a:off x="3538728" y="3822192"/>
+            <a:ext cx="2395728" cy="777240"/>
+          </a:xfrm>
+          <a:prstGeom prst="rect">
+            <a:avLst/>
+          </a:prstGeom>
+          <a:noFill/>
+          <a:ln/>
+        </p:spPr>
+        <p:txBody>
+          <a:bodyPr wrap="square" lIns="0" tIns="0" rIns="0" bIns="0" rtlCol="0" anchor="t"/>
+          <a:lstStyle/>
+          <a:p>
+            <a:pPr indent="0" marL="0">
+              <a:buNone/>
+            </a:pPr>
+            <a:r>
+              <a:rPr lang="en-US" sz="2000" b="1" dirty="0">
+                <a:solidFill>
+                  <a:schemeClr val="accent1"/>
+                </a:solidFill>
+              </a:rPr>
+              <a:t>S/5,796</a:t>
+            </a:r>
+            <a:endParaRPr lang="en-US" sz="1400" dirty="0"/>
+          </a:p>
+          <a:p>
+            <a:pPr indent="0" marL="0">
+              <a:buNone/>
+            </a:pPr>
+            <a:r>
+              <a:rPr lang="en-US" sz="1100" dirty="0">
+                <a:solidFill>
+                  <a:schemeClr val="tx1"/>
+                </a:solidFill>
+              </a:rPr>
+              <a:t>Meta: 3,700 brownies; 50 contactos en feria</a:t>
+            </a:r>
+            <a:endParaRPr lang="en-US" sz="1400" dirty="0"/>
+          </a:p>
+        </p:txBody>
+      </p:sp>
+      <p:sp>
+        <p:nvSpPr>
+          <p:cNvPr id="20" name="Shape 18"/>
           <p:cNvSpPr/>
           <p:nvPr/>
         </p:nvSpPr>
         <p:spPr>
           <a:xfrm>
-            <a:off x="6062472" y="1371600"/>
-            <a:ext cx="2761488" cy="274320"/>
+            <a:off x="6163056" y="2450592"/>
+            <a:ext cx="2670048" cy="2240280"/>
+          </a:xfrm>
+          <a:prstGeom prst="roundRect">
+            <a:avLst>
+              <a:gd name="adj" fmla="val 4898"/>
+            </a:avLst>
+          </a:prstGeom>
+          <a:solidFill>
+            <a:schemeClr val="bg1"/>
+          </a:solidFill>
+          <a:ln w="12700">
+            <a:solidFill>
+              <a:schemeClr val="bg1"/>
+            </a:solidFill>
+            <a:prstDash val="solid"/>
+          </a:ln>
+          <a:effectLst>
+            <a:outerShdw sx="100000" sy="100000" kx="0" ky="0" algn="bl" rotWithShape="0" blurRad="101600" dist="25400" dir="5400000">
+              <a:srgbClr val="7A4A30">
+                <a:alpha val="14000"/>
+              </a:srgbClr>
+            </a:outerShdw>
+          </a:effectLst>
+        </p:spPr>
+      </p:sp>
+      <p:sp>
+        <p:nvSpPr>
+          <p:cNvPr id="21" name="Shape 19"/>
+          <p:cNvSpPr/>
+          <p:nvPr/>
+        </p:nvSpPr>
+        <p:spPr>
+          <a:xfrm>
+            <a:off x="6163056" y="2450592"/>
+            <a:ext cx="2670048" cy="109728"/>
           </a:xfrm>
           <a:prstGeom prst="rect">
             <a:avLst/>
@@ -44561,50 +45174,206 @@
       </p:sp>
       <p:sp>
         <p:nvSpPr>
-          <p:cNvPr id="9" name="Text 7"/>
+          <p:cNvPr id="22" name="Text 20"/>
           <p:cNvSpPr txBox="1"/>
           <p:nvPr/>
         </p:nvSpPr>
         <p:spPr>
           <a:xfrm>
-            <a:off x="6044184" y="1371600"/>
-            <a:ext cx="2798064" cy="274320"/>
-          </a:xfrm>
-          <a:prstGeom prst="rect">
-            <a:avLst/>
-          </a:prstGeom>
-          <a:noFill/>
-          <a:ln/>
-        </p:spPr>
-        <p:txBody>
-          <a:bodyPr wrap="square" lIns="0" tIns="0" rIns="0" bIns="0" rtlCol="0" anchor="ctr"/>
-          <a:lstStyle/>
-          <a:p>
-            <a:pPr algn="ctr" indent="0" marL="0">
-              <a:buNone/>
-            </a:pPr>
-            <a:r>
-              <a:rPr lang="en-US" sz="900" b="1" spc="50" kern="0" dirty="0">
-                <a:solidFill>
-                  <a:schemeClr val="bg1"/>
-                </a:solidFill>
-              </a:rPr>
-              <a:t>CRECER: COLEGIOS Y EMBAJADORAS</a:t>
-            </a:r>
-            <a:endParaRPr lang="en-US" sz="900" dirty="0"/>
-          </a:p>
-        </p:txBody>
-      </p:sp>
-      <p:sp>
-        <p:nvSpPr>
-          <p:cNvPr id="10" name="Shape 8"/>
+            <a:off x="6345936" y="2670048"/>
+            <a:ext cx="2395728" cy="256032"/>
+          </a:xfrm>
+          <a:prstGeom prst="rect">
+            <a:avLst/>
+          </a:prstGeom>
+          <a:noFill/>
+          <a:ln/>
+        </p:spPr>
+        <p:txBody>
+          <a:bodyPr wrap="square" lIns="0" tIns="0" rIns="0" bIns="0" rtlCol="0" anchor="t"/>
+          <a:lstStyle/>
+          <a:p>
+            <a:pPr indent="0" marL="0">
+              <a:buNone/>
+            </a:pPr>
+            <a:r>
+              <a:rPr lang="en-US" sz="1100" b="1" spc="100" kern="0" dirty="0">
+                <a:solidFill>
+                  <a:schemeClr val="accent4"/>
+                </a:solidFill>
+              </a:rPr>
+              <a:t>3 · CRECER</a:t>
+            </a:r>
+            <a:endParaRPr lang="en-US" sz="1100" dirty="0"/>
+          </a:p>
+        </p:txBody>
+      </p:sp>
+      <p:sp>
+        <p:nvSpPr>
+          <p:cNvPr id="23" name="Text 21"/>
+          <p:cNvSpPr txBox="1"/>
+          <p:nvPr/>
+        </p:nvSpPr>
+        <p:spPr>
+          <a:xfrm>
+            <a:off x="6345936" y="2926080"/>
+            <a:ext cx="2395728" cy="237744"/>
+          </a:xfrm>
+          <a:prstGeom prst="rect">
+            <a:avLst/>
+          </a:prstGeom>
+          <a:noFill/>
+          <a:ln/>
+        </p:spPr>
+        <p:txBody>
+          <a:bodyPr wrap="square" lIns="0" tIns="0" rIns="0" bIns="0" rtlCol="0" anchor="t"/>
+          <a:lstStyle/>
+          <a:p>
+            <a:pPr indent="0" marL="0">
+              <a:buNone/>
+            </a:pPr>
+            <a:r>
+              <a:rPr lang="en-US" sz="1100" dirty="0">
+                <a:solidFill>
+                  <a:schemeClr val="accent2"/>
+                </a:solidFill>
+              </a:rPr>
+              <a:t>Mar–jul 2027</a:t>
+            </a:r>
+            <a:endParaRPr lang="en-US" sz="1100" dirty="0"/>
+          </a:p>
+        </p:txBody>
+      </p:sp>
+      <p:sp>
+        <p:nvSpPr>
+          <p:cNvPr id="24" name="Text 22"/>
+          <p:cNvSpPr txBox="1"/>
+          <p:nvPr/>
+        </p:nvSpPr>
+        <p:spPr>
+          <a:xfrm>
+            <a:off x="6345936" y="3200400"/>
+            <a:ext cx="2395728" cy="566928"/>
+          </a:xfrm>
+          <a:prstGeom prst="rect">
+            <a:avLst/>
+          </a:prstGeom>
+          <a:noFill/>
+          <a:ln/>
+        </p:spPr>
+        <p:txBody>
+          <a:bodyPr wrap="square" lIns="0" tIns="0" rIns="0" bIns="0" rtlCol="0" anchor="t"/>
+          <a:lstStyle/>
+          <a:p>
+            <a:pPr indent="0" marL="0">
+              <a:buNone/>
+            </a:pPr>
+            <a:r>
+              <a:rPr lang="en-US" sz="1300" b="1" dirty="0">
+                <a:solidFill>
+                  <a:schemeClr val="tx2"/>
+                </a:solidFill>
+              </a:rPr>
+              <a:t>Quioscos, embajadoras y fechas clave</a:t>
+            </a:r>
+            <a:endParaRPr lang="en-US" sz="1300" dirty="0"/>
+          </a:p>
+        </p:txBody>
+      </p:sp>
+      <p:sp>
+        <p:nvSpPr>
+          <p:cNvPr id="25" name="Text 23"/>
+          <p:cNvSpPr txBox="1"/>
+          <p:nvPr/>
+        </p:nvSpPr>
+        <p:spPr>
+          <a:xfrm>
+            <a:off x="6345936" y="3822192"/>
+            <a:ext cx="2395728" cy="777240"/>
+          </a:xfrm>
+          <a:prstGeom prst="rect">
+            <a:avLst/>
+          </a:prstGeom>
+          <a:noFill/>
+          <a:ln/>
+        </p:spPr>
+        <p:txBody>
+          <a:bodyPr wrap="square" lIns="0" tIns="0" rIns="0" bIns="0" rtlCol="0" anchor="t"/>
+          <a:lstStyle/>
+          <a:p>
+            <a:pPr indent="0" marL="0">
+              <a:buNone/>
+            </a:pPr>
+            <a:r>
+              <a:rPr lang="en-US" sz="2000" b="1" dirty="0">
+                <a:solidFill>
+                  <a:schemeClr val="accent1"/>
+                </a:solidFill>
+              </a:rPr>
+              <a:t>S/9,770</a:t>
+            </a:r>
+            <a:endParaRPr lang="en-US" sz="1400" dirty="0"/>
+          </a:p>
+          <a:p>
+            <a:pPr indent="0" marL="0">
+              <a:buNone/>
+            </a:pPr>
+            <a:r>
+              <a:rPr lang="en-US" sz="1100" dirty="0">
+                <a:solidFill>
+                  <a:schemeClr val="tx1"/>
+                </a:solidFill>
+              </a:rPr>
+              <a:t>Meta: 20,320 brownies; 3 colegios</a:t>
+            </a:r>
+            <a:endParaRPr lang="en-US" sz="1400" dirty="0"/>
+          </a:p>
+        </p:txBody>
+      </p:sp>
+      <p:sp>
+        <p:nvSpPr>
+          <p:cNvPr id="26" name="Shape 24"/>
           <p:cNvSpPr/>
           <p:nvPr/>
         </p:nvSpPr>
         <p:spPr>
           <a:xfrm>
-            <a:off x="8860536" y="1371600"/>
-            <a:ext cx="2761488" cy="274320"/>
+            <a:off x="8970264" y="2450592"/>
+            <a:ext cx="2670048" cy="2240280"/>
+          </a:xfrm>
+          <a:prstGeom prst="roundRect">
+            <a:avLst>
+              <a:gd name="adj" fmla="val 4898"/>
+            </a:avLst>
+          </a:prstGeom>
+          <a:solidFill>
+            <a:schemeClr val="bg1"/>
+          </a:solidFill>
+          <a:ln w="12700">
+            <a:solidFill>
+              <a:schemeClr val="bg1"/>
+            </a:solidFill>
+            <a:prstDash val="solid"/>
+          </a:ln>
+          <a:effectLst>
+            <a:outerShdw sx="100000" sy="100000" kx="0" ky="0" algn="bl" rotWithShape="0" blurRad="101600" dist="25400" dir="5400000">
+              <a:srgbClr val="7A4A30">
+                <a:alpha val="14000"/>
+              </a:srgbClr>
+            </a:outerShdw>
+          </a:effectLst>
+        </p:spPr>
+      </p:sp>
+      <p:sp>
+        <p:nvSpPr>
+          <p:cNvPr id="27" name="Shape 25"/>
+          <p:cNvSpPr/>
+          <p:nvPr/>
+        </p:nvSpPr>
+        <p:spPr>
+          <a:xfrm>
+            <a:off x="8970264" y="2450592"/>
+            <a:ext cx="2670048" cy="109728"/>
           </a:xfrm>
           <a:prstGeom prst="rect">
             <a:avLst/>
@@ -44622,50 +45391,50 @@
       </p:sp>
       <p:sp>
         <p:nvSpPr>
-          <p:cNvPr id="11" name="Text 9"/>
+          <p:cNvPr id="28" name="Text 26"/>
           <p:cNvSpPr txBox="1"/>
           <p:nvPr/>
         </p:nvSpPr>
         <p:spPr>
           <a:xfrm>
-            <a:off x="8842248" y="1371600"/>
-            <a:ext cx="2798064" cy="274320"/>
-          </a:xfrm>
-          <a:prstGeom prst="rect">
-            <a:avLst/>
-          </a:prstGeom>
-          <a:noFill/>
-          <a:ln/>
-        </p:spPr>
-        <p:txBody>
-          <a:bodyPr wrap="square" lIns="0" tIns="0" rIns="0" bIns="0" rtlCol="0" anchor="ctr"/>
-          <a:lstStyle/>
-          <a:p>
-            <a:pPr algn="ctr" indent="0" marL="0">
-              <a:buNone/>
-            </a:pPr>
-            <a:r>
-              <a:rPr lang="en-US" sz="900" b="1" spc="50" kern="0" dirty="0">
-                <a:solidFill>
-                  <a:schemeClr val="bg1"/>
-                </a:solidFill>
-              </a:rPr>
-              <a:t>EXPANDIR: 3 PUNTOS</a:t>
-            </a:r>
-            <a:endParaRPr lang="en-US" sz="900" dirty="0"/>
-          </a:p>
-        </p:txBody>
-      </p:sp>
-      <p:sp>
-        <p:nvSpPr>
-          <p:cNvPr id="12" name="Text 10"/>
+            <a:off x="9153144" y="2670048"/>
+            <a:ext cx="2395728" cy="256032"/>
+          </a:xfrm>
+          <a:prstGeom prst="rect">
+            <a:avLst/>
+          </a:prstGeom>
+          <a:noFill/>
+          <a:ln/>
+        </p:spPr>
+        <p:txBody>
+          <a:bodyPr wrap="square" lIns="0" tIns="0" rIns="0" bIns="0" rtlCol="0" anchor="t"/>
+          <a:lstStyle/>
+          <a:p>
+            <a:pPr indent="0" marL="0">
+              <a:buNone/>
+            </a:pPr>
+            <a:r>
+              <a:rPr lang="en-US" sz="1100" b="1" spc="100" kern="0" dirty="0">
+                <a:solidFill>
+                  <a:schemeClr val="tx2"/>
+                </a:solidFill>
+              </a:rPr>
+              <a:t>4 · EXPANDIR</a:t>
+            </a:r>
+            <a:endParaRPr lang="en-US" sz="1100" dirty="0"/>
+          </a:p>
+        </p:txBody>
+      </p:sp>
+      <p:sp>
+        <p:nvSpPr>
+          <p:cNvPr id="29" name="Text 27"/>
           <p:cNvSpPr txBox="1"/>
           <p:nvPr/>
         </p:nvSpPr>
         <p:spPr>
           <a:xfrm>
-            <a:off x="3246120" y="1673352"/>
-            <a:ext cx="559613" cy="219456"/>
+            <a:off x="9153144" y="2926080"/>
+            <a:ext cx="2395728" cy="237744"/>
           </a:xfrm>
           <a:prstGeom prst="rect">
             <a:avLst/>
@@ -44677,31 +45446,31 @@
           <a:bodyPr wrap="square" lIns="0" tIns="0" rIns="0" bIns="0" rtlCol="0" anchor="t"/>
           <a:lstStyle/>
           <a:p>
-            <a:pPr algn="ctr" indent="0" marL="0">
-              <a:buNone/>
-            </a:pPr>
-            <a:r>
-              <a:rPr lang="en-US" sz="1000" b="1" dirty="0">
+            <a:pPr indent="0" marL="0">
+              <a:buNone/>
+            </a:pPr>
+            <a:r>
+              <a:rPr lang="en-US" sz="1100" dirty="0">
                 <a:solidFill>
                   <a:schemeClr val="accent2"/>
                 </a:solidFill>
               </a:rPr>
-              <a:t>Oct</a:t>
-            </a:r>
-            <a:endParaRPr lang="en-US" sz="1000" dirty="0"/>
-          </a:p>
-        </p:txBody>
-      </p:sp>
-      <p:sp>
-        <p:nvSpPr>
-          <p:cNvPr id="13" name="Text 11"/>
+              <a:t>Ago–dic 2027</a:t>
+            </a:r>
+            <a:endParaRPr lang="en-US" sz="1100" dirty="0"/>
+          </a:p>
+        </p:txBody>
+      </p:sp>
+      <p:sp>
+        <p:nvSpPr>
+          <p:cNvPr id="30" name="Text 28"/>
           <p:cNvSpPr txBox="1"/>
           <p:nvPr/>
         </p:nvSpPr>
         <p:spPr>
           <a:xfrm>
-            <a:off x="3805733" y="1673352"/>
-            <a:ext cx="559613" cy="219456"/>
+            <a:off x="9153144" y="3200400"/>
+            <a:ext cx="2395728" cy="566928"/>
           </a:xfrm>
           <a:prstGeom prst="rect">
             <a:avLst/>
@@ -44713,31 +45482,31 @@
           <a:bodyPr wrap="square" lIns="0" tIns="0" rIns="0" bIns="0" rtlCol="0" anchor="t"/>
           <a:lstStyle/>
           <a:p>
-            <a:pPr algn="ctr" indent="0" marL="0">
-              <a:buNone/>
-            </a:pPr>
-            <a:r>
-              <a:rPr lang="en-US" sz="1000" b="1" dirty="0">
-                <a:solidFill>
-                  <a:schemeClr val="accent2"/>
-                </a:solidFill>
-              </a:rPr>
-              <a:t>Nov</a:t>
-            </a:r>
-            <a:endParaRPr lang="en-US" sz="1000" dirty="0"/>
-          </a:p>
-        </p:txBody>
-      </p:sp>
-      <p:sp>
-        <p:nvSpPr>
-          <p:cNvPr id="14" name="Text 12"/>
+            <a:pPr indent="0" marL="0">
+              <a:buNone/>
+            </a:pPr>
+            <a:r>
+              <a:rPr lang="en-US" sz="1300" b="1" dirty="0">
+                <a:solidFill>
+                  <a:schemeClr val="tx2"/>
+                </a:solidFill>
+              </a:rPr>
+              <a:t>Punto 3 (A), 5 colegios y Navidad</a:t>
+            </a:r>
+            <a:endParaRPr lang="en-US" sz="1300" dirty="0"/>
+          </a:p>
+        </p:txBody>
+      </p:sp>
+      <p:sp>
+        <p:nvSpPr>
+          <p:cNvPr id="31" name="Text 29"/>
           <p:cNvSpPr txBox="1"/>
           <p:nvPr/>
         </p:nvSpPr>
         <p:spPr>
           <a:xfrm>
-            <a:off x="4365346" y="1673352"/>
-            <a:ext cx="559613" cy="219456"/>
+            <a:off x="9153144" y="3822192"/>
+            <a:ext cx="2395728" cy="777240"/>
           </a:xfrm>
           <a:prstGeom prst="rect">
             <a:avLst/>
@@ -44749,31 +45518,45 @@
           <a:bodyPr wrap="square" lIns="0" tIns="0" rIns="0" bIns="0" rtlCol="0" anchor="t"/>
           <a:lstStyle/>
           <a:p>
-            <a:pPr algn="ctr" indent="0" marL="0">
-              <a:buNone/>
-            </a:pPr>
-            <a:r>
-              <a:rPr lang="en-US" sz="1000" b="1" dirty="0">
-                <a:solidFill>
-                  <a:schemeClr val="accent2"/>
-                </a:solidFill>
-              </a:rPr>
-              <a:t>Dic</a:t>
-            </a:r>
-            <a:endParaRPr lang="en-US" sz="1000" dirty="0"/>
-          </a:p>
-        </p:txBody>
-      </p:sp>
-      <p:sp>
-        <p:nvSpPr>
-          <p:cNvPr id="15" name="Text 13"/>
+            <a:pPr indent="0" marL="0">
+              <a:buNone/>
+            </a:pPr>
+            <a:r>
+              <a:rPr lang="en-US" sz="2000" b="1" dirty="0">
+                <a:solidFill>
+                  <a:schemeClr val="accent1"/>
+                </a:solidFill>
+              </a:rPr>
+              <a:t>S/7,220</a:t>
+            </a:r>
+            <a:endParaRPr lang="en-US" sz="1400" dirty="0"/>
+          </a:p>
+          <a:p>
+            <a:pPr indent="0" marL="0">
+              <a:buNone/>
+            </a:pPr>
+            <a:r>
+              <a:rPr lang="en-US" sz="1100" dirty="0">
+                <a:solidFill>
+                  <a:schemeClr val="tx1"/>
+                </a:solidFill>
+              </a:rPr>
+              <a:t>Meta: 28,311 brownies; 2,300 contactos</a:t>
+            </a:r>
+            <a:endParaRPr lang="en-US" sz="1400" dirty="0"/>
+          </a:p>
+        </p:txBody>
+      </p:sp>
+      <p:sp>
+        <p:nvSpPr>
+          <p:cNvPr id="32" name="Text 30"/>
           <p:cNvSpPr txBox="1"/>
           <p:nvPr/>
         </p:nvSpPr>
         <p:spPr>
           <a:xfrm>
-            <a:off x="4924958" y="1673352"/>
-            <a:ext cx="559613" cy="219456"/>
+            <a:off x="548640" y="4818888"/>
+            <a:ext cx="5486400" cy="237744"/>
           </a:xfrm>
           <a:prstGeom prst="rect">
             <a:avLst/>
@@ -44785,566 +45568,20 @@
           <a:bodyPr wrap="square" lIns="0" tIns="0" rIns="0" bIns="0" rtlCol="0" anchor="t"/>
           <a:lstStyle/>
           <a:p>
-            <a:pPr algn="ctr" indent="0" marL="0">
-              <a:buNone/>
-            </a:pPr>
-            <a:r>
-              <a:rPr lang="en-US" sz="1000" b="1" dirty="0">
-                <a:solidFill>
-                  <a:schemeClr val="tx2"/>
-                </a:solidFill>
-              </a:rPr>
-              <a:t>Ene</a:t>
-            </a:r>
-            <a:endParaRPr lang="en-US" sz="1000" dirty="0"/>
-          </a:p>
-        </p:txBody>
-      </p:sp>
-      <p:sp>
-        <p:nvSpPr>
-          <p:cNvPr id="16" name="Text 14"/>
-          <p:cNvSpPr txBox="1"/>
-          <p:nvPr/>
-        </p:nvSpPr>
-        <p:spPr>
-          <a:xfrm>
-            <a:off x="5484571" y="1673352"/>
-            <a:ext cx="559613" cy="219456"/>
-          </a:xfrm>
-          <a:prstGeom prst="rect">
-            <a:avLst/>
-          </a:prstGeom>
-          <a:noFill/>
-          <a:ln/>
-        </p:spPr>
-        <p:txBody>
-          <a:bodyPr wrap="square" lIns="0" tIns="0" rIns="0" bIns="0" rtlCol="0" anchor="t"/>
-          <a:lstStyle/>
-          <a:p>
-            <a:pPr algn="ctr" indent="0" marL="0">
-              <a:buNone/>
-            </a:pPr>
-            <a:r>
-              <a:rPr lang="en-US" sz="1000" b="1" dirty="0">
-                <a:solidFill>
-                  <a:schemeClr val="tx2"/>
-                </a:solidFill>
-              </a:rPr>
-              <a:t>Feb</a:t>
-            </a:r>
-            <a:endParaRPr lang="en-US" sz="1000" dirty="0"/>
-          </a:p>
-        </p:txBody>
-      </p:sp>
-      <p:sp>
-        <p:nvSpPr>
-          <p:cNvPr id="17" name="Text 15"/>
-          <p:cNvSpPr txBox="1"/>
-          <p:nvPr/>
-        </p:nvSpPr>
-        <p:spPr>
-          <a:xfrm>
-            <a:off x="6044184" y="1673352"/>
-            <a:ext cx="559613" cy="219456"/>
-          </a:xfrm>
-          <a:prstGeom prst="rect">
-            <a:avLst/>
-          </a:prstGeom>
-          <a:noFill/>
-          <a:ln/>
-        </p:spPr>
-        <p:txBody>
-          <a:bodyPr wrap="square" lIns="0" tIns="0" rIns="0" bIns="0" rtlCol="0" anchor="t"/>
-          <a:lstStyle/>
-          <a:p>
-            <a:pPr algn="ctr" indent="0" marL="0">
-              <a:buNone/>
-            </a:pPr>
-            <a:r>
-              <a:rPr lang="en-US" sz="1000" b="1" dirty="0">
-                <a:solidFill>
-                  <a:schemeClr val="tx2"/>
-                </a:solidFill>
-              </a:rPr>
-              <a:t>Mar</a:t>
-            </a:r>
-            <a:endParaRPr lang="en-US" sz="1000" dirty="0"/>
-          </a:p>
-        </p:txBody>
-      </p:sp>
-      <p:sp>
-        <p:nvSpPr>
-          <p:cNvPr id="18" name="Text 16"/>
-          <p:cNvSpPr txBox="1"/>
-          <p:nvPr/>
-        </p:nvSpPr>
-        <p:spPr>
-          <a:xfrm>
-            <a:off x="6603797" y="1673352"/>
-            <a:ext cx="559613" cy="219456"/>
-          </a:xfrm>
-          <a:prstGeom prst="rect">
-            <a:avLst/>
-          </a:prstGeom>
-          <a:noFill/>
-          <a:ln/>
-        </p:spPr>
-        <p:txBody>
-          <a:bodyPr wrap="square" lIns="0" tIns="0" rIns="0" bIns="0" rtlCol="0" anchor="t"/>
-          <a:lstStyle/>
-          <a:p>
-            <a:pPr algn="ctr" indent="0" marL="0">
-              <a:buNone/>
-            </a:pPr>
-            <a:r>
-              <a:rPr lang="en-US" sz="1000" b="1" dirty="0">
-                <a:solidFill>
-                  <a:schemeClr val="tx2"/>
-                </a:solidFill>
-              </a:rPr>
-              <a:t>Abr</a:t>
-            </a:r>
-            <a:endParaRPr lang="en-US" sz="1000" dirty="0"/>
-          </a:p>
-        </p:txBody>
-      </p:sp>
-      <p:sp>
-        <p:nvSpPr>
-          <p:cNvPr id="19" name="Text 17"/>
-          <p:cNvSpPr txBox="1"/>
-          <p:nvPr/>
-        </p:nvSpPr>
-        <p:spPr>
-          <a:xfrm>
-            <a:off x="7163410" y="1673352"/>
-            <a:ext cx="559613" cy="219456"/>
-          </a:xfrm>
-          <a:prstGeom prst="rect">
-            <a:avLst/>
-          </a:prstGeom>
-          <a:noFill/>
-          <a:ln/>
-        </p:spPr>
-        <p:txBody>
-          <a:bodyPr wrap="square" lIns="0" tIns="0" rIns="0" bIns="0" rtlCol="0" anchor="t"/>
-          <a:lstStyle/>
-          <a:p>
-            <a:pPr algn="ctr" indent="0" marL="0">
-              <a:buNone/>
-            </a:pPr>
-            <a:r>
-              <a:rPr lang="en-US" sz="1000" b="1" dirty="0">
-                <a:solidFill>
-                  <a:schemeClr val="tx2"/>
-                </a:solidFill>
-              </a:rPr>
-              <a:t>May</a:t>
-            </a:r>
-            <a:endParaRPr lang="en-US" sz="1000" dirty="0"/>
-          </a:p>
-        </p:txBody>
-      </p:sp>
-      <p:sp>
-        <p:nvSpPr>
-          <p:cNvPr id="20" name="Text 18"/>
-          <p:cNvSpPr txBox="1"/>
-          <p:nvPr/>
-        </p:nvSpPr>
-        <p:spPr>
-          <a:xfrm>
-            <a:off x="7723022" y="1673352"/>
-            <a:ext cx="559613" cy="219456"/>
-          </a:xfrm>
-          <a:prstGeom prst="rect">
-            <a:avLst/>
-          </a:prstGeom>
-          <a:noFill/>
-          <a:ln/>
-        </p:spPr>
-        <p:txBody>
-          <a:bodyPr wrap="square" lIns="0" tIns="0" rIns="0" bIns="0" rtlCol="0" anchor="t"/>
-          <a:lstStyle/>
-          <a:p>
-            <a:pPr algn="ctr" indent="0" marL="0">
-              <a:buNone/>
-            </a:pPr>
-            <a:r>
-              <a:rPr lang="en-US" sz="1000" b="1" dirty="0">
-                <a:solidFill>
-                  <a:schemeClr val="tx2"/>
-                </a:solidFill>
-              </a:rPr>
-              <a:t>Jun</a:t>
-            </a:r>
-            <a:endParaRPr lang="en-US" sz="1000" dirty="0"/>
-          </a:p>
-        </p:txBody>
-      </p:sp>
-      <p:sp>
-        <p:nvSpPr>
-          <p:cNvPr id="21" name="Text 19"/>
-          <p:cNvSpPr txBox="1"/>
-          <p:nvPr/>
-        </p:nvSpPr>
-        <p:spPr>
-          <a:xfrm>
-            <a:off x="8282635" y="1673352"/>
-            <a:ext cx="559613" cy="219456"/>
-          </a:xfrm>
-          <a:prstGeom prst="rect">
-            <a:avLst/>
-          </a:prstGeom>
-          <a:noFill/>
-          <a:ln/>
-        </p:spPr>
-        <p:txBody>
-          <a:bodyPr wrap="square" lIns="0" tIns="0" rIns="0" bIns="0" rtlCol="0" anchor="t"/>
-          <a:lstStyle/>
-          <a:p>
-            <a:pPr algn="ctr" indent="0" marL="0">
-              <a:buNone/>
-            </a:pPr>
-            <a:r>
-              <a:rPr lang="en-US" sz="1000" b="1" dirty="0">
-                <a:solidFill>
-                  <a:schemeClr val="tx2"/>
-                </a:solidFill>
-              </a:rPr>
-              <a:t>Jul</a:t>
-            </a:r>
-            <a:endParaRPr lang="en-US" sz="1000" dirty="0"/>
-          </a:p>
-        </p:txBody>
-      </p:sp>
-      <p:sp>
-        <p:nvSpPr>
-          <p:cNvPr id="22" name="Text 20"/>
-          <p:cNvSpPr txBox="1"/>
-          <p:nvPr/>
-        </p:nvSpPr>
-        <p:spPr>
-          <a:xfrm>
-            <a:off x="8842248" y="1673352"/>
-            <a:ext cx="559613" cy="219456"/>
-          </a:xfrm>
-          <a:prstGeom prst="rect">
-            <a:avLst/>
-          </a:prstGeom>
-          <a:noFill/>
-          <a:ln/>
-        </p:spPr>
-        <p:txBody>
-          <a:bodyPr wrap="square" lIns="0" tIns="0" rIns="0" bIns="0" rtlCol="0" anchor="t"/>
-          <a:lstStyle/>
-          <a:p>
-            <a:pPr algn="ctr" indent="0" marL="0">
-              <a:buNone/>
-            </a:pPr>
-            <a:r>
-              <a:rPr lang="en-US" sz="1000" b="1" dirty="0">
-                <a:solidFill>
-                  <a:schemeClr val="tx2"/>
-                </a:solidFill>
-              </a:rPr>
-              <a:t>Ago</a:t>
-            </a:r>
-            <a:endParaRPr lang="en-US" sz="1000" dirty="0"/>
-          </a:p>
-        </p:txBody>
-      </p:sp>
-      <p:sp>
-        <p:nvSpPr>
-          <p:cNvPr id="23" name="Text 21"/>
-          <p:cNvSpPr txBox="1"/>
-          <p:nvPr/>
-        </p:nvSpPr>
-        <p:spPr>
-          <a:xfrm>
-            <a:off x="9401861" y="1673352"/>
-            <a:ext cx="559613" cy="219456"/>
-          </a:xfrm>
-          <a:prstGeom prst="rect">
-            <a:avLst/>
-          </a:prstGeom>
-          <a:noFill/>
-          <a:ln/>
-        </p:spPr>
-        <p:txBody>
-          <a:bodyPr wrap="square" lIns="0" tIns="0" rIns="0" bIns="0" rtlCol="0" anchor="t"/>
-          <a:lstStyle/>
-          <a:p>
-            <a:pPr algn="ctr" indent="0" marL="0">
-              <a:buNone/>
-            </a:pPr>
-            <a:r>
-              <a:rPr lang="en-US" sz="1000" b="1" dirty="0">
-                <a:solidFill>
-                  <a:schemeClr val="tx2"/>
-                </a:solidFill>
-              </a:rPr>
-              <a:t>Set</a:t>
-            </a:r>
-            <a:endParaRPr lang="en-US" sz="1000" dirty="0"/>
-          </a:p>
-        </p:txBody>
-      </p:sp>
-      <p:sp>
-        <p:nvSpPr>
-          <p:cNvPr id="24" name="Text 22"/>
-          <p:cNvSpPr txBox="1"/>
-          <p:nvPr/>
-        </p:nvSpPr>
-        <p:spPr>
-          <a:xfrm>
-            <a:off x="9961474" y="1673352"/>
-            <a:ext cx="559613" cy="219456"/>
-          </a:xfrm>
-          <a:prstGeom prst="rect">
-            <a:avLst/>
-          </a:prstGeom>
-          <a:noFill/>
-          <a:ln/>
-        </p:spPr>
-        <p:txBody>
-          <a:bodyPr wrap="square" lIns="0" tIns="0" rIns="0" bIns="0" rtlCol="0" anchor="t"/>
-          <a:lstStyle/>
-          <a:p>
-            <a:pPr algn="ctr" indent="0" marL="0">
-              <a:buNone/>
-            </a:pPr>
-            <a:r>
-              <a:rPr lang="en-US" sz="1000" b="1" dirty="0">
-                <a:solidFill>
-                  <a:schemeClr val="tx2"/>
-                </a:solidFill>
-              </a:rPr>
-              <a:t>Oct</a:t>
-            </a:r>
-            <a:endParaRPr lang="en-US" sz="1000" dirty="0"/>
-          </a:p>
-        </p:txBody>
-      </p:sp>
-      <p:sp>
-        <p:nvSpPr>
-          <p:cNvPr id="25" name="Text 23"/>
-          <p:cNvSpPr txBox="1"/>
-          <p:nvPr/>
-        </p:nvSpPr>
-        <p:spPr>
-          <a:xfrm>
-            <a:off x="10521086" y="1673352"/>
-            <a:ext cx="559613" cy="219456"/>
-          </a:xfrm>
-          <a:prstGeom prst="rect">
-            <a:avLst/>
-          </a:prstGeom>
-          <a:noFill/>
-          <a:ln/>
-        </p:spPr>
-        <p:txBody>
-          <a:bodyPr wrap="square" lIns="0" tIns="0" rIns="0" bIns="0" rtlCol="0" anchor="t"/>
-          <a:lstStyle/>
-          <a:p>
-            <a:pPr algn="ctr" indent="0" marL="0">
-              <a:buNone/>
-            </a:pPr>
-            <a:r>
-              <a:rPr lang="en-US" sz="1000" b="1" dirty="0">
-                <a:solidFill>
-                  <a:schemeClr val="tx2"/>
-                </a:solidFill>
-              </a:rPr>
-              <a:t>Nov</a:t>
-            </a:r>
-            <a:endParaRPr lang="en-US" sz="1000" dirty="0"/>
-          </a:p>
-        </p:txBody>
-      </p:sp>
-      <p:sp>
-        <p:nvSpPr>
-          <p:cNvPr id="26" name="Text 24"/>
-          <p:cNvSpPr txBox="1"/>
-          <p:nvPr/>
-        </p:nvSpPr>
-        <p:spPr>
-          <a:xfrm>
-            <a:off x="11080699" y="1673352"/>
-            <a:ext cx="559613" cy="219456"/>
-          </a:xfrm>
-          <a:prstGeom prst="rect">
-            <a:avLst/>
-          </a:prstGeom>
-          <a:noFill/>
-          <a:ln/>
-        </p:spPr>
-        <p:txBody>
-          <a:bodyPr wrap="square" lIns="0" tIns="0" rIns="0" bIns="0" rtlCol="0" anchor="t"/>
-          <a:lstStyle/>
-          <a:p>
-            <a:pPr algn="ctr" indent="0" marL="0">
-              <a:buNone/>
-            </a:pPr>
-            <a:r>
-              <a:rPr lang="en-US" sz="1000" b="1" dirty="0">
-                <a:solidFill>
-                  <a:schemeClr val="tx2"/>
-                </a:solidFill>
-              </a:rPr>
-              <a:t>Dic</a:t>
-            </a:r>
-            <a:endParaRPr lang="en-US" sz="1000" dirty="0"/>
-          </a:p>
-        </p:txBody>
-      </p:sp>
-      <p:sp>
-        <p:nvSpPr>
-          <p:cNvPr id="27" name="Shape 25"/>
-          <p:cNvSpPr/>
-          <p:nvPr/>
-        </p:nvSpPr>
-        <p:spPr>
-          <a:xfrm>
-            <a:off x="3805733" y="1938528"/>
-            <a:ext cx="559613" cy="3570732"/>
-          </a:xfrm>
-          <a:prstGeom prst="rect">
-            <a:avLst/>
-          </a:prstGeom>
-          <a:solidFill>
-            <a:srgbClr val="F4E6D3"/>
-          </a:solidFill>
-          <a:ln w="12700">
-            <a:solidFill>
-              <a:srgbClr val="F4E6D3"/>
-            </a:solidFill>
-            <a:prstDash val="solid"/>
-          </a:ln>
-        </p:spPr>
-      </p:sp>
-      <p:sp>
-        <p:nvSpPr>
-          <p:cNvPr id="28" name="Shape 26"/>
-          <p:cNvSpPr/>
-          <p:nvPr/>
-        </p:nvSpPr>
-        <p:spPr>
-          <a:xfrm>
-            <a:off x="4924958" y="1938528"/>
-            <a:ext cx="559613" cy="3570732"/>
-          </a:xfrm>
-          <a:prstGeom prst="rect">
-            <a:avLst/>
-          </a:prstGeom>
-          <a:solidFill>
-            <a:srgbClr val="F4E6D3"/>
-          </a:solidFill>
-          <a:ln w="12700">
-            <a:solidFill>
-              <a:srgbClr val="F4E6D3"/>
-            </a:solidFill>
-            <a:prstDash val="solid"/>
-          </a:ln>
-        </p:spPr>
-      </p:sp>
-      <p:sp>
-        <p:nvSpPr>
-          <p:cNvPr id="29" name="Shape 27"/>
-          <p:cNvSpPr/>
-          <p:nvPr/>
-        </p:nvSpPr>
-        <p:spPr>
-          <a:xfrm>
-            <a:off x="6044184" y="1938528"/>
-            <a:ext cx="559613" cy="3570732"/>
-          </a:xfrm>
-          <a:prstGeom prst="rect">
-            <a:avLst/>
-          </a:prstGeom>
-          <a:solidFill>
-            <a:srgbClr val="F4E6D3"/>
-          </a:solidFill>
-          <a:ln w="12700">
-            <a:solidFill>
-              <a:srgbClr val="F4E6D3"/>
-            </a:solidFill>
-            <a:prstDash val="solid"/>
-          </a:ln>
-        </p:spPr>
-      </p:sp>
-      <p:sp>
-        <p:nvSpPr>
-          <p:cNvPr id="30" name="Shape 28"/>
-          <p:cNvSpPr/>
-          <p:nvPr/>
-        </p:nvSpPr>
-        <p:spPr>
-          <a:xfrm>
-            <a:off x="7163410" y="1938528"/>
-            <a:ext cx="559613" cy="3570732"/>
-          </a:xfrm>
-          <a:prstGeom prst="rect">
-            <a:avLst/>
-          </a:prstGeom>
-          <a:solidFill>
-            <a:srgbClr val="F4E6D3"/>
-          </a:solidFill>
-          <a:ln w="12700">
-            <a:solidFill>
-              <a:srgbClr val="F4E6D3"/>
-            </a:solidFill>
-            <a:prstDash val="solid"/>
-          </a:ln>
-        </p:spPr>
-      </p:sp>
-      <p:sp>
-        <p:nvSpPr>
-          <p:cNvPr id="31" name="Shape 29"/>
-          <p:cNvSpPr/>
-          <p:nvPr/>
-        </p:nvSpPr>
-        <p:spPr>
-          <a:xfrm>
-            <a:off x="8282635" y="1938528"/>
-            <a:ext cx="559613" cy="3570732"/>
-          </a:xfrm>
-          <a:prstGeom prst="rect">
-            <a:avLst/>
-          </a:prstGeom>
-          <a:solidFill>
-            <a:srgbClr val="F4E6D3"/>
-          </a:solidFill>
-          <a:ln w="12700">
-            <a:solidFill>
-              <a:srgbClr val="F4E6D3"/>
-            </a:solidFill>
-            <a:prstDash val="solid"/>
-          </a:ln>
-        </p:spPr>
-      </p:sp>
-      <p:sp>
-        <p:nvSpPr>
-          <p:cNvPr id="32" name="Shape 30"/>
-          <p:cNvSpPr/>
-          <p:nvPr/>
-        </p:nvSpPr>
-        <p:spPr>
-          <a:xfrm>
-            <a:off x="9401861" y="1938528"/>
-            <a:ext cx="559613" cy="3570732"/>
-          </a:xfrm>
-          <a:prstGeom prst="rect">
-            <a:avLst/>
-          </a:prstGeom>
-          <a:solidFill>
-            <a:srgbClr val="F4E6D3"/>
-          </a:solidFill>
-          <a:ln w="12700">
-            <a:solidFill>
-              <a:srgbClr val="F4E6D3"/>
-            </a:solidFill>
-            <a:prstDash val="solid"/>
-          </a:ln>
-        </p:spPr>
+            <a:pPr indent="0" marL="0">
+              <a:buNone/>
+            </a:pPr>
+            <a:r>
+              <a:rPr lang="en-US" sz="1050" b="1" spc="100" kern="0" dirty="0">
+                <a:solidFill>
+                  <a:schemeClr val="accent1"/>
+                </a:solidFill>
+              </a:rPr>
+              <a:t>OBJETIVOS DEL AÑO 2027</a:t>
+            </a:r>
+            <a:endParaRPr lang="en-US" sz="1050" dirty="0"/>
+          </a:p>
+        </p:txBody>
       </p:sp>
       <p:sp>
         <p:nvSpPr>
@@ -45354,323 +45591,13 @@
         </p:nvSpPr>
         <p:spPr>
           <a:xfrm>
-            <a:off x="10521086" y="1938528"/>
-            <a:ext cx="559613" cy="3570732"/>
-          </a:xfrm>
-          <a:prstGeom prst="rect">
-            <a:avLst/>
-          </a:prstGeom>
-          <a:solidFill>
-            <a:srgbClr val="F4E6D3"/>
-          </a:solidFill>
-          <a:ln w="12700">
-            <a:solidFill>
-              <a:srgbClr val="F4E6D3"/>
-            </a:solidFill>
-            <a:prstDash val="solid"/>
-          </a:ln>
-        </p:spPr>
-      </p:sp>
-      <p:sp>
-        <p:nvSpPr>
-          <p:cNvPr id="34" name="Shape 32"/>
-          <p:cNvSpPr/>
-          <p:nvPr/>
-        </p:nvSpPr>
-        <p:spPr>
-          <a:xfrm>
-            <a:off x="4924958" y="1645920"/>
-            <a:ext cx="0" cy="3863340"/>
-          </a:xfrm>
-          <a:prstGeom prst="line">
-            <a:avLst/>
-          </a:prstGeom>
-          <a:noFill/>
-          <a:ln w="15875">
-            <a:solidFill>
-              <a:schemeClr val="accent1"/>
-            </a:solidFill>
-            <a:prstDash val="dash"/>
-          </a:ln>
-        </p:spPr>
-      </p:sp>
-      <p:sp>
-        <p:nvSpPr>
-          <p:cNvPr id="35" name="Shape 33"/>
-          <p:cNvSpPr/>
-          <p:nvPr/>
-        </p:nvSpPr>
-        <p:spPr>
-          <a:xfrm>
-            <a:off x="548640" y="2029968"/>
-            <a:ext cx="109728" cy="141732"/>
-          </a:xfrm>
-          <a:prstGeom prst="rect">
-            <a:avLst/>
-          </a:prstGeom>
-          <a:solidFill>
-            <a:schemeClr val="accent2"/>
-          </a:solidFill>
-          <a:ln w="12700">
-            <a:solidFill>
-              <a:schemeClr val="accent2"/>
-            </a:solidFill>
-            <a:prstDash val="solid"/>
-          </a:ln>
-        </p:spPr>
-      </p:sp>
-      <p:sp>
-        <p:nvSpPr>
-          <p:cNvPr id="36" name="Text 34"/>
-          <p:cNvSpPr txBox="1"/>
-          <p:nvPr/>
-        </p:nvSpPr>
-        <p:spPr>
-          <a:xfrm>
-            <a:off x="731520" y="1938528"/>
-            <a:ext cx="2468880" cy="324612"/>
-          </a:xfrm>
-          <a:prstGeom prst="rect">
-            <a:avLst/>
-          </a:prstGeom>
-          <a:noFill/>
-          <a:ln/>
-        </p:spPr>
-        <p:txBody>
-          <a:bodyPr wrap="square" lIns="0" tIns="0" rIns="0" bIns="0" rtlCol="0" anchor="ctr"/>
-          <a:lstStyle/>
-          <a:p>
-            <a:pPr indent="0" marL="0">
-              <a:buNone/>
-            </a:pPr>
-            <a:r>
-              <a:rPr lang="en-US" sz="1050" dirty="0">
-                <a:solidFill>
-                  <a:schemeClr val="tx1"/>
-                </a:solidFill>
-              </a:rPr>
-              <a:t>Permisos, registro sanitario y etiqueta</a:t>
-            </a:r>
-            <a:endParaRPr lang="en-US" sz="1050" dirty="0"/>
-          </a:p>
-        </p:txBody>
-      </p:sp>
-      <p:sp>
-        <p:nvSpPr>
-          <p:cNvPr id="37" name="Shape 35"/>
-          <p:cNvSpPr/>
-          <p:nvPr/>
-        </p:nvSpPr>
-        <p:spPr>
-          <a:xfrm>
-            <a:off x="3282696" y="2002536"/>
-            <a:ext cx="1605686" cy="196596"/>
+            <a:off x="548640" y="5084064"/>
+            <a:ext cx="2130552" cy="1207008"/>
           </a:xfrm>
           <a:prstGeom prst="roundRect">
             <a:avLst>
-              <a:gd name="adj" fmla="val 46512"/>
+              <a:gd name="adj" fmla="val 7576"/>
             </a:avLst>
-          </a:prstGeom>
-          <a:solidFill>
-            <a:schemeClr val="accent2"/>
-          </a:solidFill>
-          <a:ln w="12700">
-            <a:solidFill>
-              <a:schemeClr val="accent2"/>
-            </a:solidFill>
-            <a:prstDash val="solid"/>
-          </a:ln>
-        </p:spPr>
-      </p:sp>
-      <p:sp>
-        <p:nvSpPr>
-          <p:cNvPr id="38" name="Shape 36"/>
-          <p:cNvSpPr/>
-          <p:nvPr/>
-        </p:nvSpPr>
-        <p:spPr>
-          <a:xfrm>
-            <a:off x="548640" y="2354580"/>
-            <a:ext cx="109728" cy="141732"/>
-          </a:xfrm>
-          <a:prstGeom prst="rect">
-            <a:avLst/>
-          </a:prstGeom>
-          <a:solidFill>
-            <a:schemeClr val="accent2"/>
-          </a:solidFill>
-          <a:ln w="12700">
-            <a:solidFill>
-              <a:schemeClr val="accent2"/>
-            </a:solidFill>
-            <a:prstDash val="solid"/>
-          </a:ln>
-        </p:spPr>
-      </p:sp>
-      <p:sp>
-        <p:nvSpPr>
-          <p:cNvPr id="39" name="Text 37"/>
-          <p:cNvSpPr txBox="1"/>
-          <p:nvPr/>
-        </p:nvSpPr>
-        <p:spPr>
-          <a:xfrm>
-            <a:off x="731520" y="2263140"/>
-            <a:ext cx="2468880" cy="324612"/>
-          </a:xfrm>
-          <a:prstGeom prst="rect">
-            <a:avLst/>
-          </a:prstGeom>
-          <a:noFill/>
-          <a:ln/>
-        </p:spPr>
-        <p:txBody>
-          <a:bodyPr wrap="square" lIns="0" tIns="0" rIns="0" bIns="0" rtlCol="0" anchor="ctr"/>
-          <a:lstStyle/>
-          <a:p>
-            <a:pPr indent="0" marL="0">
-              <a:buNone/>
-            </a:pPr>
-            <a:r>
-              <a:rPr lang="en-US" sz="1050" dirty="0">
-                <a:solidFill>
-                  <a:schemeClr val="tx1"/>
-                </a:solidFill>
-              </a:rPr>
-              <a:t>Probar la app y la receta con 10 familias</a:t>
-            </a:r>
-            <a:endParaRPr lang="en-US" sz="1050" dirty="0"/>
-          </a:p>
-        </p:txBody>
-      </p:sp>
-      <p:sp>
-        <p:nvSpPr>
-          <p:cNvPr id="40" name="Shape 38"/>
-          <p:cNvSpPr/>
-          <p:nvPr/>
-        </p:nvSpPr>
-        <p:spPr>
-          <a:xfrm>
-            <a:off x="3842309" y="2327148"/>
-            <a:ext cx="486461" cy="196596"/>
-          </a:xfrm>
-          <a:prstGeom prst="roundRect">
-            <a:avLst>
-              <a:gd name="adj" fmla="val 46512"/>
-            </a:avLst>
-          </a:prstGeom>
-          <a:solidFill>
-            <a:schemeClr val="accent2"/>
-          </a:solidFill>
-          <a:ln w="12700">
-            <a:solidFill>
-              <a:schemeClr val="accent2"/>
-            </a:solidFill>
-            <a:prstDash val="solid"/>
-          </a:ln>
-        </p:spPr>
-      </p:sp>
-      <p:sp>
-        <p:nvSpPr>
-          <p:cNvPr id="41" name="Shape 39"/>
-          <p:cNvSpPr/>
-          <p:nvPr/>
-        </p:nvSpPr>
-        <p:spPr>
-          <a:xfrm>
-            <a:off x="548640" y="2679192"/>
-            <a:ext cx="109728" cy="141732"/>
-          </a:xfrm>
-          <a:prstGeom prst="rect">
-            <a:avLst/>
-          </a:prstGeom>
-          <a:solidFill>
-            <a:schemeClr val="accent2"/>
-          </a:solidFill>
-          <a:ln w="12700">
-            <a:solidFill>
-              <a:schemeClr val="accent2"/>
-            </a:solidFill>
-            <a:prstDash val="solid"/>
-          </a:ln>
-        </p:spPr>
-      </p:sp>
-      <p:sp>
-        <p:nvSpPr>
-          <p:cNvPr id="42" name="Text 40"/>
-          <p:cNvSpPr txBox="1"/>
-          <p:nvPr/>
-        </p:nvSpPr>
-        <p:spPr>
-          <a:xfrm>
-            <a:off x="731520" y="2587752"/>
-            <a:ext cx="2468880" cy="324612"/>
-          </a:xfrm>
-          <a:prstGeom prst="rect">
-            <a:avLst/>
-          </a:prstGeom>
-          <a:noFill/>
-          <a:ln/>
-        </p:spPr>
-        <p:txBody>
-          <a:bodyPr wrap="square" lIns="0" tIns="0" rIns="0" bIns="0" rtlCol="0" anchor="ctr"/>
-          <a:lstStyle/>
-          <a:p>
-            <a:pPr indent="0" marL="0">
-              <a:buNone/>
-            </a:pPr>
-            <a:r>
-              <a:rPr lang="en-US" sz="1050" dirty="0">
-                <a:solidFill>
-                  <a:schemeClr val="tx1"/>
-                </a:solidFill>
-              </a:rPr>
-              <a:t>Fotos, video y lista de espera en WhatsApp</a:t>
-            </a:r>
-            <a:endParaRPr lang="en-US" sz="1050" dirty="0"/>
-          </a:p>
-        </p:txBody>
-      </p:sp>
-      <p:sp>
-        <p:nvSpPr>
-          <p:cNvPr id="43" name="Shape 41"/>
-          <p:cNvSpPr/>
-          <p:nvPr/>
-        </p:nvSpPr>
-        <p:spPr>
-          <a:xfrm>
-            <a:off x="3842309" y="2651760"/>
-            <a:ext cx="1046074" cy="196596"/>
-          </a:xfrm>
-          <a:prstGeom prst="roundRect">
-            <a:avLst>
-              <a:gd name="adj" fmla="val 46512"/>
-            </a:avLst>
-          </a:prstGeom>
-          <a:solidFill>
-            <a:schemeClr val="accent2"/>
-          </a:solidFill>
-          <a:ln w="12700">
-            <a:solidFill>
-              <a:schemeClr val="accent2"/>
-            </a:solidFill>
-            <a:prstDash val="solid"/>
-          </a:ln>
-        </p:spPr>
-      </p:sp>
-      <p:sp>
-        <p:nvSpPr>
-          <p:cNvPr id="44" name="Shape 42"/>
-          <p:cNvSpPr/>
-          <p:nvPr/>
-        </p:nvSpPr>
-        <p:spPr>
-          <a:xfrm>
-            <a:off x="548640" y="3003804"/>
-            <a:ext cx="109728" cy="141732"/>
-          </a:xfrm>
-          <a:prstGeom prst="rect">
-            <a:avLst/>
           </a:prstGeom>
           <a:solidFill>
             <a:schemeClr val="accent1"/>
@@ -45681,18 +45608,25 @@
             </a:solidFill>
             <a:prstDash val="solid"/>
           </a:ln>
-        </p:spPr>
-      </p:sp>
-      <p:sp>
-        <p:nvSpPr>
-          <p:cNvPr id="45" name="Text 43"/>
+          <a:effectLst>
+            <a:outerShdw sx="100000" sy="100000" kx="0" ky="0" algn="bl" rotWithShape="0" blurRad="101600" dist="25400" dir="5400000">
+              <a:srgbClr val="7A4A30">
+                <a:alpha val="14000"/>
+              </a:srgbClr>
+            </a:outerShdw>
+          </a:effectLst>
+        </p:spPr>
+      </p:sp>
+      <p:sp>
+        <p:nvSpPr>
+          <p:cNvPr id="34" name="Text 32"/>
           <p:cNvSpPr txBox="1"/>
           <p:nvPr/>
         </p:nvSpPr>
         <p:spPr>
           <a:xfrm>
-            <a:off x="731520" y="2912364"/>
-            <a:ext cx="2468880" cy="324612"/>
+            <a:off x="685800" y="5084064"/>
+            <a:ext cx="1901952" cy="1207008"/>
           </a:xfrm>
           <a:prstGeom prst="rect">
             <a:avLst/>
@@ -45708,79 +45642,159 @@
               <a:buNone/>
             </a:pPr>
             <a:r>
-              <a:rPr lang="en-US" sz="1050" dirty="0">
-                <a:solidFill>
-                  <a:schemeClr val="tx1"/>
-                </a:solidFill>
-              </a:rPr>
-              <a:t>Influencers y pauta de expectativa</a:t>
-            </a:r>
-            <a:endParaRPr lang="en-US" sz="1050" dirty="0"/>
-          </a:p>
-        </p:txBody>
-      </p:sp>
-      <p:sp>
-        <p:nvSpPr>
-          <p:cNvPr id="46" name="Shape 44"/>
+              <a:rPr lang="en-US" sz="1100" b="1" dirty="0">
+                <a:solidFill>
+                  <a:schemeClr val="accent5"/>
+                </a:solidFill>
+              </a:rPr>
+              <a:t>Vender lo que pide el Excel</a:t>
+            </a:r>
+            <a:endParaRPr lang="en-US" sz="1400" dirty="0"/>
+          </a:p>
+          <a:p>
+            <a:pPr indent="0" marL="0">
+              <a:buNone/>
+            </a:pPr>
+            <a:r>
+              <a:rPr lang="en-US" sz="1250" b="1" dirty="0">
+                <a:solidFill>
+                  <a:schemeClr val="bg1"/>
+                </a:solidFill>
+              </a:rPr>
+              <a:t>52,331 brownies y S/244,728 con IGV</a:t>
+            </a:r>
+            <a:endParaRPr lang="en-US" sz="1400" dirty="0"/>
+          </a:p>
+        </p:txBody>
+      </p:sp>
+      <p:sp>
+        <p:nvSpPr>
+          <p:cNvPr id="35" name="Shape 33"/>
           <p:cNvSpPr/>
           <p:nvPr/>
         </p:nvSpPr>
         <p:spPr>
           <a:xfrm>
-            <a:off x="4401922" y="2976372"/>
-            <a:ext cx="1046074" cy="196596"/>
+            <a:off x="2788920" y="5084064"/>
+            <a:ext cx="2130552" cy="1207008"/>
           </a:xfrm>
           <a:prstGeom prst="roundRect">
             <a:avLst>
-              <a:gd name="adj" fmla="val 46512"/>
+              <a:gd name="adj" fmla="val 7576"/>
             </a:avLst>
           </a:prstGeom>
           <a:solidFill>
-            <a:schemeClr val="accent1"/>
+            <a:schemeClr val="bg1"/>
           </a:solidFill>
           <a:ln w="12700">
             <a:solidFill>
-              <a:schemeClr val="accent1"/>
+              <a:schemeClr val="bg1"/>
             </a:solidFill>
             <a:prstDash val="solid"/>
           </a:ln>
-        </p:spPr>
-      </p:sp>
-      <p:sp>
-        <p:nvSpPr>
-          <p:cNvPr id="47" name="Shape 45"/>
+          <a:effectLst>
+            <a:outerShdw sx="100000" sy="100000" kx="0" ky="0" algn="bl" rotWithShape="0" blurRad="101600" dist="25400" dir="5400000">
+              <a:srgbClr val="7A4A30">
+                <a:alpha val="14000"/>
+              </a:srgbClr>
+            </a:outerShdw>
+          </a:effectLst>
+        </p:spPr>
+      </p:sp>
+      <p:sp>
+        <p:nvSpPr>
+          <p:cNvPr id="36" name="Text 34"/>
+          <p:cNvSpPr txBox="1"/>
+          <p:nvPr/>
+        </p:nvSpPr>
+        <p:spPr>
+          <a:xfrm>
+            <a:off x="2926080" y="5084064"/>
+            <a:ext cx="1901952" cy="1207008"/>
+          </a:xfrm>
+          <a:prstGeom prst="rect">
+            <a:avLst/>
+          </a:prstGeom>
+          <a:noFill/>
+          <a:ln/>
+        </p:spPr>
+        <p:txBody>
+          <a:bodyPr wrap="square" lIns="0" tIns="0" rIns="0" bIns="0" rtlCol="0" anchor="ctr"/>
+          <a:lstStyle/>
+          <a:p>
+            <a:pPr indent="0" marL="0">
+              <a:buNone/>
+            </a:pPr>
+            <a:r>
+              <a:rPr lang="en-US" sz="1100" b="1" dirty="0">
+                <a:solidFill>
+                  <a:schemeClr val="accent2"/>
+                </a:solidFill>
+              </a:rPr>
+              <a:t>Recompra por WhatsApp</a:t>
+            </a:r>
+            <a:endParaRPr lang="en-US" sz="1400" dirty="0"/>
+          </a:p>
+          <a:p>
+            <a:pPr indent="0" marL="0">
+              <a:buNone/>
+            </a:pPr>
+            <a:r>
+              <a:rPr lang="en-US" sz="1250" b="1" dirty="0">
+                <a:solidFill>
+                  <a:schemeClr val="tx2"/>
+                </a:solidFill>
+              </a:rPr>
+              <a:t>35 % de lo físico; base de 2,300 contactos</a:t>
+            </a:r>
+            <a:endParaRPr lang="en-US" sz="1400" dirty="0"/>
+          </a:p>
+        </p:txBody>
+      </p:sp>
+      <p:sp>
+        <p:nvSpPr>
+          <p:cNvPr id="37" name="Shape 35"/>
           <p:cNvSpPr/>
           <p:nvPr/>
         </p:nvSpPr>
         <p:spPr>
           <a:xfrm>
-            <a:off x="548640" y="3328416"/>
-            <a:ext cx="109728" cy="141732"/>
-          </a:xfrm>
-          <a:prstGeom prst="rect">
-            <a:avLst/>
+            <a:off x="5029200" y="5084064"/>
+            <a:ext cx="2130552" cy="1207008"/>
+          </a:xfrm>
+          <a:prstGeom prst="roundRect">
+            <a:avLst>
+              <a:gd name="adj" fmla="val 7576"/>
+            </a:avLst>
           </a:prstGeom>
           <a:solidFill>
-            <a:schemeClr val="accent1"/>
+            <a:schemeClr val="bg1"/>
           </a:solidFill>
           <a:ln w="12700">
             <a:solidFill>
-              <a:schemeClr val="accent1"/>
+              <a:schemeClr val="bg1"/>
             </a:solidFill>
             <a:prstDash val="solid"/>
           </a:ln>
-        </p:spPr>
-      </p:sp>
-      <p:sp>
-        <p:nvSpPr>
-          <p:cNvPr id="48" name="Text 46"/>
+          <a:effectLst>
+            <a:outerShdw sx="100000" sy="100000" kx="0" ky="0" algn="bl" rotWithShape="0" blurRad="101600" dist="25400" dir="5400000">
+              <a:srgbClr val="7A4A30">
+                <a:alpha val="14000"/>
+              </a:srgbClr>
+            </a:outerShdw>
+          </a:effectLst>
+        </p:spPr>
+      </p:sp>
+      <p:sp>
+        <p:nvSpPr>
+          <p:cNvPr id="38" name="Text 36"/>
           <p:cNvSpPr txBox="1"/>
           <p:nvPr/>
         </p:nvSpPr>
         <p:spPr>
           <a:xfrm>
-            <a:off x="731520" y="3236976"/>
-            <a:ext cx="2468880" cy="324612"/>
+            <a:off x="5166360" y="5084064"/>
+            <a:ext cx="1901952" cy="1207008"/>
           </a:xfrm>
           <a:prstGeom prst="rect">
             <a:avLst/>
@@ -45796,54 +45810,75 @@
               <a:buNone/>
             </a:pPr>
             <a:r>
-              <a:rPr lang="en-US" sz="1050" dirty="0">
-                <a:solidFill>
-                  <a:schemeClr val="tx1"/>
-                </a:solidFill>
-              </a:rPr>
-              <a:t>Degustación en stands: 1, 2 y 3 puntos</a:t>
-            </a:r>
-            <a:endParaRPr lang="en-US" sz="1050" dirty="0"/>
-          </a:p>
-        </p:txBody>
-      </p:sp>
-      <p:sp>
-        <p:nvSpPr>
-          <p:cNvPr id="49" name="Shape 47"/>
+              <a:rPr lang="en-US" sz="1100" b="1" dirty="0">
+                <a:solidFill>
+                  <a:schemeClr val="accent2"/>
+                </a:solidFill>
+              </a:rPr>
+              <a:t>Uso de la app</a:t>
+            </a:r>
+            <a:endParaRPr lang="en-US" sz="1400" dirty="0"/>
+          </a:p>
+          <a:p>
+            <a:pPr indent="0" marL="0">
+              <a:buNone/>
+            </a:pPr>
+            <a:r>
+              <a:rPr lang="en-US" sz="1250" b="1" dirty="0">
+                <a:solidFill>
+                  <a:schemeClr val="tx2"/>
+                </a:solidFill>
+              </a:rPr>
+              <a:t>30 % de los envases escaneados</a:t>
+            </a:r>
+            <a:endParaRPr lang="en-US" sz="1400" dirty="0"/>
+          </a:p>
+        </p:txBody>
+      </p:sp>
+      <p:sp>
+        <p:nvSpPr>
+          <p:cNvPr id="39" name="Shape 37"/>
           <p:cNvSpPr/>
           <p:nvPr/>
         </p:nvSpPr>
         <p:spPr>
           <a:xfrm>
-            <a:off x="4961534" y="3300984"/>
-            <a:ext cx="486461" cy="196596"/>
+            <a:off x="7269480" y="5084064"/>
+            <a:ext cx="2130552" cy="1207008"/>
           </a:xfrm>
           <a:prstGeom prst="roundRect">
             <a:avLst>
-              <a:gd name="adj" fmla="val 46512"/>
+              <a:gd name="adj" fmla="val 7576"/>
             </a:avLst>
           </a:prstGeom>
           <a:solidFill>
-            <a:schemeClr val="accent1"/>
+            <a:schemeClr val="bg1"/>
           </a:solidFill>
           <a:ln w="12700">
             <a:solidFill>
-              <a:schemeClr val="accent1"/>
+              <a:schemeClr val="bg1"/>
             </a:solidFill>
             <a:prstDash val="solid"/>
           </a:ln>
-        </p:spPr>
-      </p:sp>
-      <p:sp>
-        <p:nvSpPr>
-          <p:cNvPr id="50" name="Text 48"/>
+          <a:effectLst>
+            <a:outerShdw sx="100000" sy="100000" kx="0" ky="0" algn="bl" rotWithShape="0" blurRad="101600" dist="25400" dir="5400000">
+              <a:srgbClr val="7A4A30">
+                <a:alpha val="14000"/>
+              </a:srgbClr>
+            </a:outerShdw>
+          </a:effectLst>
+        </p:spPr>
+      </p:sp>
+      <p:sp>
+        <p:nvSpPr>
+          <p:cNvPr id="40" name="Text 38"/>
           <p:cNvSpPr txBox="1"/>
           <p:nvPr/>
         </p:nvSpPr>
         <p:spPr>
           <a:xfrm>
-            <a:off x="4924958" y="3300984"/>
-            <a:ext cx="559613" cy="196596"/>
+            <a:off x="7406640" y="5084064"/>
+            <a:ext cx="1901952" cy="1207008"/>
           </a:xfrm>
           <a:prstGeom prst="rect">
             <a:avLst/>
@@ -45855,58 +45890,79 @@
           <a:bodyPr wrap="square" lIns="0" tIns="0" rIns="0" bIns="0" rtlCol="0" anchor="ctr"/>
           <a:lstStyle/>
           <a:p>
-            <a:pPr algn="ctr" indent="0" marL="0">
-              <a:buNone/>
-            </a:pPr>
-            <a:r>
-              <a:rPr lang="en-US" sz="900" b="1" dirty="0">
-                <a:solidFill>
-                  <a:schemeClr val="bg1"/>
-                </a:solidFill>
-              </a:rPr>
-              <a:t>1</a:t>
-            </a:r>
-            <a:endParaRPr lang="en-US" sz="900" dirty="0"/>
-          </a:p>
-        </p:txBody>
-      </p:sp>
-      <p:sp>
-        <p:nvSpPr>
-          <p:cNvPr id="51" name="Shape 49"/>
+            <a:pPr indent="0" marL="0">
+              <a:buNone/>
+            </a:pPr>
+            <a:r>
+              <a:rPr lang="en-US" sz="1100" b="1" dirty="0">
+                <a:solidFill>
+                  <a:schemeClr val="accent2"/>
+                </a:solidFill>
+              </a:rPr>
+              <a:t>Mamás embajadoras</a:t>
+            </a:r>
+            <a:endParaRPr lang="en-US" sz="1400" dirty="0"/>
+          </a:p>
+          <a:p>
+            <a:pPr indent="0" marL="0">
+              <a:buNone/>
+            </a:pPr>
+            <a:r>
+              <a:rPr lang="en-US" sz="1250" b="1" dirty="0">
+                <a:solidFill>
+                  <a:schemeClr val="tx2"/>
+                </a:solidFill>
+              </a:rPr>
+              <a:t>230 familias nuevas (20 al mes)</a:t>
+            </a:r>
+            <a:endParaRPr lang="en-US" sz="1400" dirty="0"/>
+          </a:p>
+        </p:txBody>
+      </p:sp>
+      <p:sp>
+        <p:nvSpPr>
+          <p:cNvPr id="41" name="Shape 39"/>
           <p:cNvSpPr/>
           <p:nvPr/>
         </p:nvSpPr>
         <p:spPr>
           <a:xfrm>
-            <a:off x="5521147" y="3300984"/>
-            <a:ext cx="3284525" cy="196596"/>
+            <a:off x="9509760" y="5084064"/>
+            <a:ext cx="2130552" cy="1207008"/>
           </a:xfrm>
           <a:prstGeom prst="roundRect">
             <a:avLst>
-              <a:gd name="adj" fmla="val 46512"/>
+              <a:gd name="adj" fmla="val 7576"/>
             </a:avLst>
           </a:prstGeom>
           <a:solidFill>
-            <a:schemeClr val="accent1"/>
+            <a:schemeClr val="bg1"/>
           </a:solidFill>
           <a:ln w="12700">
             <a:solidFill>
-              <a:schemeClr val="accent1"/>
+              <a:schemeClr val="bg1"/>
             </a:solidFill>
             <a:prstDash val="solid"/>
           </a:ln>
-        </p:spPr>
-      </p:sp>
-      <p:sp>
-        <p:nvSpPr>
-          <p:cNvPr id="52" name="Text 50"/>
+          <a:effectLst>
+            <a:outerShdw sx="100000" sy="100000" kx="0" ky="0" algn="bl" rotWithShape="0" blurRad="101600" dist="25400" dir="5400000">
+              <a:srgbClr val="7A4A30">
+                <a:alpha val="14000"/>
+              </a:srgbClr>
+            </a:outerShdw>
+          </a:effectLst>
+        </p:spPr>
+      </p:sp>
+      <p:sp>
+        <p:nvSpPr>
+          <p:cNvPr id="42" name="Text 40"/>
           <p:cNvSpPr txBox="1"/>
           <p:nvPr/>
         </p:nvSpPr>
         <p:spPr>
           <a:xfrm>
-            <a:off x="5484571" y="3300984"/>
-            <a:ext cx="3357677" cy="196596"/>
+            <a:off x="9646920" y="5084064"/>
+            <a:ext cx="1901952" cy="1207008"/>
           </a:xfrm>
           <a:prstGeom prst="rect">
             <a:avLst/>
@@ -45918,1469 +45974,32 @@
           <a:bodyPr wrap="square" lIns="0" tIns="0" rIns="0" bIns="0" rtlCol="0" anchor="ctr"/>
           <a:lstStyle/>
           <a:p>
-            <a:pPr algn="ctr" indent="0" marL="0">
-              <a:buNone/>
-            </a:pPr>
-            <a:r>
-              <a:rPr lang="en-US" sz="900" b="1" dirty="0">
-                <a:solidFill>
-                  <a:schemeClr val="bg1"/>
-                </a:solidFill>
-              </a:rPr>
-              <a:t>2 puntos</a:t>
-            </a:r>
-            <a:endParaRPr lang="en-US" sz="900" dirty="0"/>
-          </a:p>
-        </p:txBody>
-      </p:sp>
-      <p:sp>
-        <p:nvSpPr>
-          <p:cNvPr id="53" name="Shape 51"/>
-          <p:cNvSpPr/>
-          <p:nvPr/>
-        </p:nvSpPr>
-        <p:spPr>
-          <a:xfrm>
-            <a:off x="8878824" y="3300984"/>
-            <a:ext cx="2724912" cy="196596"/>
-          </a:xfrm>
-          <a:prstGeom prst="roundRect">
-            <a:avLst>
-              <a:gd name="adj" fmla="val 46512"/>
-            </a:avLst>
-          </a:prstGeom>
-          <a:solidFill>
-            <a:schemeClr val="accent1"/>
-          </a:solidFill>
-          <a:ln w="12700">
-            <a:solidFill>
-              <a:schemeClr val="accent1"/>
-            </a:solidFill>
-            <a:prstDash val="solid"/>
-          </a:ln>
-        </p:spPr>
-      </p:sp>
-      <p:sp>
-        <p:nvSpPr>
-          <p:cNvPr id="54" name="Text 52"/>
-          <p:cNvSpPr txBox="1"/>
-          <p:nvPr/>
-        </p:nvSpPr>
-        <p:spPr>
-          <a:xfrm>
-            <a:off x="8842248" y="3300984"/>
-            <a:ext cx="2798064" cy="196596"/>
-          </a:xfrm>
-          <a:prstGeom prst="rect">
-            <a:avLst/>
-          </a:prstGeom>
-          <a:noFill/>
-          <a:ln/>
-        </p:spPr>
-        <p:txBody>
-          <a:bodyPr wrap="square" lIns="0" tIns="0" rIns="0" bIns="0" rtlCol="0" anchor="ctr"/>
-          <a:lstStyle/>
-          <a:p>
-            <a:pPr algn="ctr" indent="0" marL="0">
-              <a:buNone/>
-            </a:pPr>
-            <a:r>
-              <a:rPr lang="en-US" sz="900" b="1" dirty="0">
-                <a:solidFill>
-                  <a:schemeClr val="bg1"/>
-                </a:solidFill>
-              </a:rPr>
-              <a:t>3 puntos</a:t>
-            </a:r>
-            <a:endParaRPr lang="en-US" sz="900" dirty="0"/>
-          </a:p>
-        </p:txBody>
-      </p:sp>
-      <p:sp>
-        <p:nvSpPr>
-          <p:cNvPr id="55" name="Shape 53"/>
-          <p:cNvSpPr/>
-          <p:nvPr/>
-        </p:nvSpPr>
-        <p:spPr>
-          <a:xfrm>
-            <a:off x="548640" y="3653028"/>
-            <a:ext cx="109728" cy="141732"/>
-          </a:xfrm>
-          <a:prstGeom prst="rect">
-            <a:avLst/>
-          </a:prstGeom>
-          <a:solidFill>
-            <a:schemeClr val="accent6"/>
-          </a:solidFill>
-          <a:ln w="12700">
-            <a:solidFill>
-              <a:schemeClr val="accent6"/>
-            </a:solidFill>
-            <a:prstDash val="solid"/>
-          </a:ln>
-        </p:spPr>
-      </p:sp>
-      <p:sp>
-        <p:nvSpPr>
-          <p:cNvPr id="56" name="Text 54"/>
-          <p:cNvSpPr txBox="1"/>
-          <p:nvPr/>
-        </p:nvSpPr>
-        <p:spPr>
-          <a:xfrm>
-            <a:off x="731520" y="3561588"/>
-            <a:ext cx="2468880" cy="324612"/>
-          </a:xfrm>
-          <a:prstGeom prst="rect">
-            <a:avLst/>
-          </a:prstGeom>
-          <a:noFill/>
-          <a:ln/>
-        </p:spPr>
-        <p:txBody>
-          <a:bodyPr wrap="square" lIns="0" tIns="0" rIns="0" bIns="0" rtlCol="0" anchor="ctr"/>
-          <a:lstStyle/>
-          <a:p>
             <a:pPr indent="0" marL="0">
               <a:buNone/>
             </a:pPr>
             <a:r>
-              <a:rPr lang="en-US" sz="1050" dirty="0">
-                <a:solidFill>
-                  <a:schemeClr val="tx1"/>
-                </a:solidFill>
-              </a:rPr>
-              <a:t>Ferias pagadas: escolar y Día del Niño</a:t>
-            </a:r>
-            <a:endParaRPr lang="en-US" sz="1050" dirty="0"/>
-          </a:p>
-        </p:txBody>
-      </p:sp>
-      <p:sp>
-        <p:nvSpPr>
-          <p:cNvPr id="57" name="Shape 55"/>
-          <p:cNvSpPr/>
-          <p:nvPr/>
-        </p:nvSpPr>
-        <p:spPr>
-          <a:xfrm>
-            <a:off x="5521147" y="3625596"/>
-            <a:ext cx="486461" cy="196596"/>
-          </a:xfrm>
-          <a:prstGeom prst="roundRect">
-            <a:avLst>
-              <a:gd name="adj" fmla="val 46512"/>
-            </a:avLst>
-          </a:prstGeom>
-          <a:solidFill>
-            <a:schemeClr val="accent6"/>
-          </a:solidFill>
-          <a:ln w="12700">
-            <a:solidFill>
-              <a:schemeClr val="accent6"/>
-            </a:solidFill>
-            <a:prstDash val="solid"/>
-          </a:ln>
-        </p:spPr>
-      </p:sp>
-      <p:sp>
-        <p:nvSpPr>
-          <p:cNvPr id="58" name="Shape 56"/>
-          <p:cNvSpPr/>
-          <p:nvPr/>
-        </p:nvSpPr>
-        <p:spPr>
-          <a:xfrm>
-            <a:off x="6640373" y="3625596"/>
-            <a:ext cx="486461" cy="196596"/>
-          </a:xfrm>
-          <a:prstGeom prst="roundRect">
-            <a:avLst>
-              <a:gd name="adj" fmla="val 46512"/>
-            </a:avLst>
-          </a:prstGeom>
-          <a:solidFill>
-            <a:schemeClr val="accent6"/>
-          </a:solidFill>
-          <a:ln w="12700">
-            <a:solidFill>
-              <a:schemeClr val="accent6"/>
-            </a:solidFill>
-            <a:prstDash val="solid"/>
-          </a:ln>
-        </p:spPr>
-      </p:sp>
-      <p:sp>
-        <p:nvSpPr>
-          <p:cNvPr id="59" name="Shape 57"/>
-          <p:cNvSpPr/>
-          <p:nvPr/>
-        </p:nvSpPr>
-        <p:spPr>
-          <a:xfrm>
-            <a:off x="548640" y="3977640"/>
-            <a:ext cx="109728" cy="141732"/>
-          </a:xfrm>
-          <a:prstGeom prst="rect">
-            <a:avLst/>
-          </a:prstGeom>
-          <a:solidFill>
-            <a:schemeClr val="accent3"/>
-          </a:solidFill>
-          <a:ln w="12700">
-            <a:solidFill>
-              <a:schemeClr val="accent3"/>
-            </a:solidFill>
-            <a:prstDash val="solid"/>
-          </a:ln>
-        </p:spPr>
-      </p:sp>
-      <p:sp>
-        <p:nvSpPr>
-          <p:cNvPr id="60" name="Text 58"/>
-          <p:cNvSpPr txBox="1"/>
-          <p:nvPr/>
-        </p:nvSpPr>
-        <p:spPr>
-          <a:xfrm>
-            <a:off x="731520" y="3886200"/>
-            <a:ext cx="2468880" cy="324612"/>
-          </a:xfrm>
-          <a:prstGeom prst="rect">
-            <a:avLst/>
-          </a:prstGeom>
-          <a:noFill/>
-          <a:ln/>
-        </p:spPr>
-        <p:txBody>
-          <a:bodyPr wrap="square" lIns="0" tIns="0" rIns="0" bIns="0" rtlCol="0" anchor="ctr"/>
-          <a:lstStyle/>
+              <a:rPr lang="en-US" sz="1100" b="1" dirty="0">
+                <a:solidFill>
+                  <a:schemeClr val="accent2"/>
+                </a:solidFill>
+              </a:rPr>
+              <a:t>Colegios y naturistas</a:t>
+            </a:r>
+            <a:endParaRPr lang="en-US" sz="1400" dirty="0"/>
+          </a:p>
           <a:p>
             <a:pPr indent="0" marL="0">
               <a:buNone/>
             </a:pPr>
             <a:r>
-              <a:rPr lang="en-US" sz="1050" dirty="0">
-                <a:solidFill>
-                  <a:schemeClr val="tx1"/>
-                </a:solidFill>
-              </a:rPr>
-              <a:t>Kermeses, cumpleaños y ferias saludables</a:t>
-            </a:r>
-            <a:endParaRPr lang="en-US" sz="1050" dirty="0"/>
-          </a:p>
-        </p:txBody>
-      </p:sp>
-      <p:sp>
-        <p:nvSpPr>
-          <p:cNvPr id="61" name="Shape 59"/>
-          <p:cNvSpPr/>
-          <p:nvPr/>
-        </p:nvSpPr>
-        <p:spPr>
-          <a:xfrm>
-            <a:off x="4961534" y="3950208"/>
-            <a:ext cx="6642202" cy="196596"/>
-          </a:xfrm>
-          <a:prstGeom prst="roundRect">
-            <a:avLst>
-              <a:gd name="adj" fmla="val 46512"/>
-            </a:avLst>
-          </a:prstGeom>
-          <a:solidFill>
-            <a:schemeClr val="accent3"/>
-          </a:solidFill>
-          <a:ln w="12700">
-            <a:solidFill>
-              <a:schemeClr val="accent3"/>
-            </a:solidFill>
-            <a:prstDash val="solid"/>
-          </a:ln>
-        </p:spPr>
-      </p:sp>
-      <p:sp>
-        <p:nvSpPr>
-          <p:cNvPr id="62" name="Shape 60"/>
-          <p:cNvSpPr/>
-          <p:nvPr/>
-        </p:nvSpPr>
-        <p:spPr>
-          <a:xfrm>
-            <a:off x="548640" y="4302252"/>
-            <a:ext cx="109728" cy="141732"/>
-          </a:xfrm>
-          <a:prstGeom prst="rect">
-            <a:avLst/>
-          </a:prstGeom>
-          <a:solidFill>
-            <a:schemeClr val="accent5"/>
-          </a:solidFill>
-          <a:ln w="12700">
-            <a:solidFill>
-              <a:schemeClr val="accent5"/>
-            </a:solidFill>
-            <a:prstDash val="solid"/>
-          </a:ln>
-        </p:spPr>
-      </p:sp>
-      <p:sp>
-        <p:nvSpPr>
-          <p:cNvPr id="63" name="Text 61"/>
-          <p:cNvSpPr txBox="1"/>
-          <p:nvPr/>
-        </p:nvSpPr>
-        <p:spPr>
-          <a:xfrm>
-            <a:off x="731520" y="4210812"/>
-            <a:ext cx="2468880" cy="324612"/>
-          </a:xfrm>
-          <a:prstGeom prst="rect">
-            <a:avLst/>
-          </a:prstGeom>
-          <a:noFill/>
-          <a:ln/>
-        </p:spPr>
-        <p:txBody>
-          <a:bodyPr wrap="square" lIns="0" tIns="0" rIns="0" bIns="0" rtlCol="0" anchor="ctr"/>
-          <a:lstStyle/>
-          <a:p>
-            <a:pPr indent="0" marL="0">
-              <a:buNone/>
-            </a:pPr>
-            <a:r>
-              <a:rPr lang="en-US" sz="1050" dirty="0">
-                <a:solidFill>
-                  <a:schemeClr val="tx1"/>
-                </a:solidFill>
-              </a:rPr>
-              <a:t>Pauta digital (fuerte en feb., abr. y dic.)</a:t>
-            </a:r>
-            <a:endParaRPr lang="en-US" sz="1050" dirty="0"/>
-          </a:p>
-        </p:txBody>
-      </p:sp>
-      <p:sp>
-        <p:nvSpPr>
-          <p:cNvPr id="64" name="Shape 62"/>
-          <p:cNvSpPr/>
-          <p:nvPr/>
-        </p:nvSpPr>
-        <p:spPr>
-          <a:xfrm>
-            <a:off x="4961534" y="4274820"/>
-            <a:ext cx="6642202" cy="196596"/>
-          </a:xfrm>
-          <a:prstGeom prst="roundRect">
-            <a:avLst>
-              <a:gd name="adj" fmla="val 46512"/>
-            </a:avLst>
-          </a:prstGeom>
-          <a:solidFill>
-            <a:schemeClr val="accent5"/>
-          </a:solidFill>
-          <a:ln w="12700">
-            <a:solidFill>
-              <a:schemeClr val="accent5"/>
-            </a:solidFill>
-            <a:prstDash val="solid"/>
-          </a:ln>
-        </p:spPr>
-      </p:sp>
-      <p:sp>
-        <p:nvSpPr>
-          <p:cNvPr id="65" name="Shape 63"/>
-          <p:cNvSpPr/>
-          <p:nvPr/>
-        </p:nvSpPr>
-        <p:spPr>
-          <a:xfrm>
-            <a:off x="5521147" y="4274820"/>
-            <a:ext cx="486461" cy="196596"/>
-          </a:xfrm>
-          <a:prstGeom prst="roundRect">
-            <a:avLst>
-              <a:gd name="adj" fmla="val 46512"/>
-            </a:avLst>
-          </a:prstGeom>
-          <a:solidFill>
-            <a:schemeClr val="accent1"/>
-          </a:solidFill>
-          <a:ln w="12700">
-            <a:solidFill>
-              <a:schemeClr val="accent1"/>
-            </a:solidFill>
-            <a:prstDash val="solid"/>
-          </a:ln>
-        </p:spPr>
-      </p:sp>
-      <p:sp>
-        <p:nvSpPr>
-          <p:cNvPr id="66" name="Shape 64"/>
-          <p:cNvSpPr/>
-          <p:nvPr/>
-        </p:nvSpPr>
-        <p:spPr>
-          <a:xfrm>
-            <a:off x="6640373" y="4274820"/>
-            <a:ext cx="486461" cy="196596"/>
-          </a:xfrm>
-          <a:prstGeom prst="roundRect">
-            <a:avLst>
-              <a:gd name="adj" fmla="val 46512"/>
-            </a:avLst>
-          </a:prstGeom>
-          <a:solidFill>
-            <a:schemeClr val="accent1"/>
-          </a:solidFill>
-          <a:ln w="12700">
-            <a:solidFill>
-              <a:schemeClr val="accent1"/>
-            </a:solidFill>
-            <a:prstDash val="solid"/>
-          </a:ln>
-        </p:spPr>
-      </p:sp>
-      <p:sp>
-        <p:nvSpPr>
-          <p:cNvPr id="67" name="Shape 65"/>
-          <p:cNvSpPr/>
-          <p:nvPr/>
-        </p:nvSpPr>
-        <p:spPr>
-          <a:xfrm>
-            <a:off x="11117275" y="4274820"/>
-            <a:ext cx="486461" cy="196596"/>
-          </a:xfrm>
-          <a:prstGeom prst="roundRect">
-            <a:avLst>
-              <a:gd name="adj" fmla="val 46512"/>
-            </a:avLst>
-          </a:prstGeom>
-          <a:solidFill>
-            <a:schemeClr val="accent1"/>
-          </a:solidFill>
-          <a:ln w="12700">
-            <a:solidFill>
-              <a:schemeClr val="accent1"/>
-            </a:solidFill>
-            <a:prstDash val="solid"/>
-          </a:ln>
-        </p:spPr>
-      </p:sp>
-      <p:sp>
-        <p:nvSpPr>
-          <p:cNvPr id="68" name="Shape 66"/>
-          <p:cNvSpPr/>
-          <p:nvPr/>
-        </p:nvSpPr>
-        <p:spPr>
-          <a:xfrm>
-            <a:off x="548640" y="4626864"/>
-            <a:ext cx="109728" cy="141732"/>
-          </a:xfrm>
-          <a:prstGeom prst="rect">
-            <a:avLst/>
-          </a:prstGeom>
-          <a:solidFill>
-            <a:schemeClr val="accent4"/>
-          </a:solidFill>
-          <a:ln w="12700">
-            <a:solidFill>
-              <a:schemeClr val="accent4"/>
-            </a:solidFill>
-            <a:prstDash val="solid"/>
-          </a:ln>
-        </p:spPr>
-      </p:sp>
-      <p:sp>
-        <p:nvSpPr>
-          <p:cNvPr id="69" name="Text 67"/>
-          <p:cNvSpPr txBox="1"/>
-          <p:nvPr/>
-        </p:nvSpPr>
-        <p:spPr>
-          <a:xfrm>
-            <a:off x="731520" y="4535424"/>
-            <a:ext cx="2468880" cy="324612"/>
-          </a:xfrm>
-          <a:prstGeom prst="rect">
-            <a:avLst/>
-          </a:prstGeom>
-          <a:noFill/>
-          <a:ln/>
-        </p:spPr>
-        <p:txBody>
-          <a:bodyPr wrap="square" lIns="0" tIns="0" rIns="0" bIns="0" rtlCol="0" anchor="ctr"/>
-          <a:lstStyle/>
-          <a:p>
-            <a:pPr indent="0" marL="0">
-              <a:buNone/>
-            </a:pPr>
-            <a:r>
-              <a:rPr lang="en-US" sz="1050" dirty="0">
-                <a:solidFill>
-                  <a:schemeClr val="tx1"/>
-                </a:solidFill>
-              </a:rPr>
-              <a:t>Mamás embajadoras por salón</a:t>
-            </a:r>
-            <a:endParaRPr lang="en-US" sz="1050" dirty="0"/>
-          </a:p>
-        </p:txBody>
-      </p:sp>
-      <p:sp>
-        <p:nvSpPr>
-          <p:cNvPr id="70" name="Shape 68"/>
-          <p:cNvSpPr/>
-          <p:nvPr/>
-        </p:nvSpPr>
-        <p:spPr>
-          <a:xfrm>
-            <a:off x="4961534" y="4599432"/>
-            <a:ext cx="6642202" cy="196596"/>
-          </a:xfrm>
-          <a:prstGeom prst="roundRect">
-            <a:avLst>
-              <a:gd name="adj" fmla="val 46512"/>
-            </a:avLst>
-          </a:prstGeom>
-          <a:solidFill>
-            <a:schemeClr val="accent4"/>
-          </a:solidFill>
-          <a:ln w="12700">
-            <a:solidFill>
-              <a:schemeClr val="accent4"/>
-            </a:solidFill>
-            <a:prstDash val="solid"/>
-          </a:ln>
-        </p:spPr>
-      </p:sp>
-      <p:sp>
-        <p:nvSpPr>
-          <p:cNvPr id="71" name="Shape 69"/>
-          <p:cNvSpPr/>
-          <p:nvPr/>
-        </p:nvSpPr>
-        <p:spPr>
-          <a:xfrm>
-            <a:off x="548640" y="4951476"/>
-            <a:ext cx="109728" cy="141732"/>
-          </a:xfrm>
-          <a:prstGeom prst="rect">
-            <a:avLst/>
-          </a:prstGeom>
-          <a:solidFill>
-            <a:schemeClr val="accent4"/>
-          </a:solidFill>
-          <a:ln w="12700">
-            <a:solidFill>
-              <a:schemeClr val="accent4"/>
-            </a:solidFill>
-            <a:prstDash val="solid"/>
-          </a:ln>
-        </p:spPr>
-      </p:sp>
-      <p:sp>
-        <p:nvSpPr>
-          <p:cNvPr id="72" name="Text 70"/>
-          <p:cNvSpPr txBox="1"/>
-          <p:nvPr/>
-        </p:nvSpPr>
-        <p:spPr>
-          <a:xfrm>
-            <a:off x="731520" y="4860036"/>
-            <a:ext cx="2468880" cy="324612"/>
-          </a:xfrm>
-          <a:prstGeom prst="rect">
-            <a:avLst/>
-          </a:prstGeom>
-          <a:noFill/>
-          <a:ln/>
-        </p:spPr>
-        <p:txBody>
-          <a:bodyPr wrap="square" lIns="0" tIns="0" rIns="0" bIns="0" rtlCol="0" anchor="ctr"/>
-          <a:lstStyle/>
-          <a:p>
-            <a:pPr indent="0" marL="0">
-              <a:buNone/>
-            </a:pPr>
-            <a:r>
-              <a:rPr lang="en-US" sz="1050" dirty="0">
-                <a:solidFill>
-                  <a:schemeClr val="tx1"/>
-                </a:solidFill>
-              </a:rPr>
-              <a:t>App Andi: aviso de recompra y loncheras</a:t>
-            </a:r>
-            <a:endParaRPr lang="en-US" sz="1050" dirty="0"/>
-          </a:p>
-        </p:txBody>
-      </p:sp>
-      <p:sp>
-        <p:nvSpPr>
-          <p:cNvPr id="73" name="Shape 71"/>
-          <p:cNvSpPr/>
-          <p:nvPr/>
-        </p:nvSpPr>
-        <p:spPr>
-          <a:xfrm>
-            <a:off x="4961534" y="4924044"/>
-            <a:ext cx="6642202" cy="196596"/>
-          </a:xfrm>
-          <a:prstGeom prst="roundRect">
-            <a:avLst>
-              <a:gd name="adj" fmla="val 46512"/>
-            </a:avLst>
-          </a:prstGeom>
-          <a:solidFill>
-            <a:schemeClr val="accent4"/>
-          </a:solidFill>
-          <a:ln w="12700">
-            <a:solidFill>
-              <a:schemeClr val="accent4"/>
-            </a:solidFill>
-            <a:prstDash val="solid"/>
-          </a:ln>
-        </p:spPr>
-      </p:sp>
-      <p:sp>
-        <p:nvSpPr>
-          <p:cNvPr id="74" name="Shape 72"/>
-          <p:cNvSpPr/>
-          <p:nvPr/>
-        </p:nvSpPr>
-        <p:spPr>
-          <a:xfrm>
-            <a:off x="548640" y="5276088"/>
-            <a:ext cx="109728" cy="141732"/>
-          </a:xfrm>
-          <a:prstGeom prst="rect">
-            <a:avLst/>
-          </a:prstGeom>
-          <a:solidFill>
-            <a:schemeClr val="accent2"/>
-          </a:solidFill>
-          <a:ln w="12700">
-            <a:solidFill>
-              <a:schemeClr val="accent2"/>
-            </a:solidFill>
-            <a:prstDash val="solid"/>
-          </a:ln>
-        </p:spPr>
-      </p:sp>
-      <p:sp>
-        <p:nvSpPr>
-          <p:cNvPr id="75" name="Text 73"/>
-          <p:cNvSpPr txBox="1"/>
-          <p:nvPr/>
-        </p:nvSpPr>
-        <p:spPr>
-          <a:xfrm>
-            <a:off x="731520" y="5184648"/>
-            <a:ext cx="2468880" cy="324612"/>
-          </a:xfrm>
-          <a:prstGeom prst="rect">
-            <a:avLst/>
-          </a:prstGeom>
-          <a:noFill/>
-          <a:ln/>
-        </p:spPr>
-        <p:txBody>
-          <a:bodyPr wrap="square" lIns="0" tIns="0" rIns="0" bIns="0" rtlCol="0" anchor="ctr"/>
-          <a:lstStyle/>
-          <a:p>
-            <a:pPr indent="0" marL="0">
-              <a:buNone/>
-            </a:pPr>
-            <a:r>
-              <a:rPr lang="en-US" sz="1050" dirty="0">
-                <a:solidFill>
-                  <a:schemeClr val="tx1"/>
-                </a:solidFill>
-              </a:rPr>
-              <a:t>Quioscos escolares y tiendas naturistas</a:t>
-            </a:r>
-            <a:endParaRPr lang="en-US" sz="1050" dirty="0"/>
-          </a:p>
-        </p:txBody>
-      </p:sp>
-      <p:sp>
-        <p:nvSpPr>
-          <p:cNvPr id="76" name="Shape 74"/>
-          <p:cNvSpPr/>
-          <p:nvPr/>
-        </p:nvSpPr>
-        <p:spPr>
-          <a:xfrm>
-            <a:off x="4961534" y="5248656"/>
-            <a:ext cx="1046074" cy="196596"/>
-          </a:xfrm>
-          <a:prstGeom prst="roundRect">
-            <a:avLst>
-              <a:gd name="adj" fmla="val 46512"/>
-            </a:avLst>
-          </a:prstGeom>
-          <a:solidFill>
-            <a:schemeClr val="accent2"/>
-          </a:solidFill>
-          <a:ln w="12700">
-            <a:solidFill>
-              <a:schemeClr val="accent2"/>
-            </a:solidFill>
-            <a:prstDash val="solid"/>
-          </a:ln>
-        </p:spPr>
-      </p:sp>
-      <p:sp>
-        <p:nvSpPr>
-          <p:cNvPr id="77" name="Text 75"/>
-          <p:cNvSpPr txBox="1"/>
-          <p:nvPr/>
-        </p:nvSpPr>
-        <p:spPr>
-          <a:xfrm>
-            <a:off x="4924958" y="5248656"/>
-            <a:ext cx="1119226" cy="196596"/>
-          </a:xfrm>
-          <a:prstGeom prst="rect">
-            <a:avLst/>
-          </a:prstGeom>
-          <a:noFill/>
-          <a:ln/>
-        </p:spPr>
-        <p:txBody>
-          <a:bodyPr wrap="square" lIns="0" tIns="0" rIns="0" bIns="0" rtlCol="0" anchor="ctr"/>
-          <a:lstStyle/>
-          <a:p>
-            <a:pPr algn="ctr" indent="0" marL="0">
-              <a:buNone/>
-            </a:pPr>
-            <a:r>
-              <a:rPr lang="en-US" sz="900" b="1" dirty="0">
-                <a:solidFill>
-                  <a:schemeClr val="bg1"/>
-                </a:solidFill>
-              </a:rPr>
-              <a:t>naturistas</a:t>
-            </a:r>
-            <a:endParaRPr lang="en-US" sz="900" dirty="0"/>
-          </a:p>
-        </p:txBody>
-      </p:sp>
-      <p:sp>
-        <p:nvSpPr>
-          <p:cNvPr id="78" name="Shape 76"/>
-          <p:cNvSpPr/>
-          <p:nvPr/>
-        </p:nvSpPr>
-        <p:spPr>
-          <a:xfrm>
-            <a:off x="6080760" y="5248656"/>
-            <a:ext cx="5522976" cy="196596"/>
-          </a:xfrm>
-          <a:prstGeom prst="roundRect">
-            <a:avLst>
-              <a:gd name="adj" fmla="val 46512"/>
-            </a:avLst>
-          </a:prstGeom>
-          <a:solidFill>
-            <a:schemeClr val="accent2"/>
-          </a:solidFill>
-          <a:ln w="12700">
-            <a:solidFill>
-              <a:schemeClr val="accent2"/>
-            </a:solidFill>
-            <a:prstDash val="solid"/>
-          </a:ln>
-        </p:spPr>
-      </p:sp>
-      <p:sp>
-        <p:nvSpPr>
-          <p:cNvPr id="79" name="Text 77"/>
-          <p:cNvSpPr txBox="1"/>
-          <p:nvPr/>
-        </p:nvSpPr>
-        <p:spPr>
-          <a:xfrm>
-            <a:off x="6044184" y="5248656"/>
-            <a:ext cx="5596128" cy="196596"/>
-          </a:xfrm>
-          <a:prstGeom prst="rect">
-            <a:avLst/>
-          </a:prstGeom>
-          <a:noFill/>
-          <a:ln/>
-        </p:spPr>
-        <p:txBody>
-          <a:bodyPr wrap="square" lIns="0" tIns="0" rIns="0" bIns="0" rtlCol="0" anchor="ctr"/>
-          <a:lstStyle/>
-          <a:p>
-            <a:pPr algn="ctr" indent="0" marL="0">
-              <a:buNone/>
-            </a:pPr>
-            <a:r>
-              <a:rPr lang="en-US" sz="900" b="1" dirty="0">
-                <a:solidFill>
-                  <a:schemeClr val="bg1"/>
-                </a:solidFill>
-              </a:rPr>
-              <a:t>+ quioscos</a:t>
-            </a:r>
-            <a:endParaRPr lang="en-US" sz="900" dirty="0"/>
-          </a:p>
-        </p:txBody>
-      </p:sp>
-      <p:sp>
-        <p:nvSpPr>
-          <p:cNvPr id="80" name="Shape 78"/>
-          <p:cNvSpPr/>
-          <p:nvPr/>
-        </p:nvSpPr>
-        <p:spPr>
-          <a:xfrm>
-            <a:off x="548640" y="5582412"/>
-            <a:ext cx="11091672" cy="457200"/>
-          </a:xfrm>
-          <a:prstGeom prst="roundRect">
-            <a:avLst>
-              <a:gd name="adj" fmla="val 16000"/>
-            </a:avLst>
-          </a:prstGeom>
-          <a:solidFill>
-            <a:schemeClr val="tx2"/>
-          </a:solidFill>
-          <a:ln w="12700">
-            <a:solidFill>
-              <a:schemeClr val="tx2"/>
-            </a:solidFill>
-            <a:prstDash val="solid"/>
-          </a:ln>
-        </p:spPr>
-      </p:sp>
-      <p:sp>
-        <p:nvSpPr>
-          <p:cNvPr id="81" name="Text 79"/>
-          <p:cNvSpPr txBox="1"/>
-          <p:nvPr/>
-        </p:nvSpPr>
-        <p:spPr>
-          <a:xfrm>
-            <a:off x="731520" y="5582412"/>
-            <a:ext cx="2468880" cy="457200"/>
-          </a:xfrm>
-          <a:prstGeom prst="rect">
-            <a:avLst/>
-          </a:prstGeom>
-          <a:noFill/>
-          <a:ln/>
-        </p:spPr>
-        <p:txBody>
-          <a:bodyPr wrap="square" lIns="0" tIns="0" rIns="0" bIns="0" rtlCol="0" anchor="ctr"/>
-          <a:lstStyle/>
-          <a:p>
-            <a:pPr indent="0" marL="0">
-              <a:buNone/>
-            </a:pPr>
-            <a:r>
-              <a:rPr lang="en-US" sz="1100" b="1" dirty="0">
-                <a:solidFill>
-                  <a:schemeClr val="bg1"/>
-                </a:solidFill>
-              </a:rPr>
-              <a:t>Inversión del mes (S/)</a:t>
-            </a:r>
-            <a:endParaRPr lang="en-US" sz="1100" dirty="0"/>
-          </a:p>
-          <a:p>
-            <a:pPr indent="0" marL="0">
-              <a:buNone/>
-            </a:pPr>
-            <a:r>
-              <a:rPr lang="en-US" sz="950" dirty="0">
-                <a:solidFill>
-                  <a:schemeClr val="accent3"/>
-                </a:solidFill>
-              </a:rPr>
-              <a:t>total S/24,544</a:t>
-            </a:r>
-            <a:endParaRPr lang="en-US" sz="1100" dirty="0"/>
-          </a:p>
-        </p:txBody>
-      </p:sp>
-      <p:sp>
-        <p:nvSpPr>
-          <p:cNvPr id="82" name="Text 80"/>
-          <p:cNvSpPr txBox="1"/>
-          <p:nvPr/>
-        </p:nvSpPr>
-        <p:spPr>
-          <a:xfrm>
-            <a:off x="3246120" y="5582412"/>
-            <a:ext cx="559613" cy="457200"/>
-          </a:xfrm>
-          <a:prstGeom prst="rect">
-            <a:avLst/>
-          </a:prstGeom>
-          <a:noFill/>
-          <a:ln/>
-        </p:spPr>
-        <p:txBody>
-          <a:bodyPr wrap="square" lIns="0" tIns="0" rIns="0" bIns="0" rtlCol="0" anchor="ctr"/>
-          <a:lstStyle/>
-          <a:p>
-            <a:pPr algn="ctr" indent="0" marL="0">
-              <a:buNone/>
-            </a:pPr>
-            <a:r>
-              <a:rPr lang="en-US" sz="1050" b="1" dirty="0">
-                <a:solidFill>
-                  <a:schemeClr val="bg1"/>
-                </a:solidFill>
-              </a:rPr>
-              <a:t>–</a:t>
-            </a:r>
-            <a:endParaRPr lang="en-US" sz="1050" dirty="0"/>
-          </a:p>
-        </p:txBody>
-      </p:sp>
-      <p:sp>
-        <p:nvSpPr>
-          <p:cNvPr id="83" name="Text 81"/>
-          <p:cNvSpPr txBox="1"/>
-          <p:nvPr/>
-        </p:nvSpPr>
-        <p:spPr>
-          <a:xfrm>
-            <a:off x="3805733" y="5582412"/>
-            <a:ext cx="559613" cy="457200"/>
-          </a:xfrm>
-          <a:prstGeom prst="rect">
-            <a:avLst/>
-          </a:prstGeom>
-          <a:noFill/>
-          <a:ln/>
-        </p:spPr>
-        <p:txBody>
-          <a:bodyPr wrap="square" lIns="0" tIns="0" rIns="0" bIns="0" rtlCol="0" anchor="ctr"/>
-          <a:lstStyle/>
-          <a:p>
-            <a:pPr algn="ctr" indent="0" marL="0">
-              <a:buNone/>
-            </a:pPr>
-            <a:r>
-              <a:rPr lang="en-US" sz="1050" b="1" dirty="0">
-                <a:solidFill>
-                  <a:schemeClr val="bg1"/>
-                </a:solidFill>
-              </a:rPr>
-              <a:t>300</a:t>
-            </a:r>
-            <a:endParaRPr lang="en-US" sz="1050" dirty="0"/>
-          </a:p>
-        </p:txBody>
-      </p:sp>
-      <p:sp>
-        <p:nvSpPr>
-          <p:cNvPr id="84" name="Text 82"/>
-          <p:cNvSpPr txBox="1"/>
-          <p:nvPr/>
-        </p:nvSpPr>
-        <p:spPr>
-          <a:xfrm>
-            <a:off x="4365346" y="5582412"/>
-            <a:ext cx="559613" cy="457200"/>
-          </a:xfrm>
-          <a:prstGeom prst="rect">
-            <a:avLst/>
-          </a:prstGeom>
-          <a:noFill/>
-          <a:ln/>
-        </p:spPr>
-        <p:txBody>
-          <a:bodyPr wrap="square" lIns="0" tIns="0" rIns="0" bIns="0" rtlCol="0" anchor="ctr"/>
-          <a:lstStyle/>
-          <a:p>
-            <a:pPr algn="ctr" indent="0" marL="0">
-              <a:buNone/>
-            </a:pPr>
-            <a:r>
-              <a:rPr lang="en-US" sz="1050" b="1" dirty="0">
-                <a:solidFill>
-                  <a:schemeClr val="bg1"/>
-                </a:solidFill>
-              </a:rPr>
-              <a:t>1,458</a:t>
-            </a:r>
-            <a:endParaRPr lang="en-US" sz="1050" dirty="0"/>
-          </a:p>
-        </p:txBody>
-      </p:sp>
-      <p:sp>
-        <p:nvSpPr>
-          <p:cNvPr id="85" name="Text 83"/>
-          <p:cNvSpPr txBox="1"/>
-          <p:nvPr/>
-        </p:nvSpPr>
-        <p:spPr>
-          <a:xfrm>
-            <a:off x="4924958" y="5582412"/>
-            <a:ext cx="559613" cy="457200"/>
-          </a:xfrm>
-          <a:prstGeom prst="rect">
-            <a:avLst/>
-          </a:prstGeom>
-          <a:noFill/>
-          <a:ln/>
-        </p:spPr>
-        <p:txBody>
-          <a:bodyPr wrap="square" lIns="0" tIns="0" rIns="0" bIns="0" rtlCol="0" anchor="ctr"/>
-          <a:lstStyle/>
-          <a:p>
-            <a:pPr algn="ctr" indent="0" marL="0">
-              <a:buNone/>
-            </a:pPr>
-            <a:r>
-              <a:rPr lang="en-US" sz="1050" b="1" dirty="0">
-                <a:solidFill>
-                  <a:schemeClr val="bg1"/>
-                </a:solidFill>
-              </a:rPr>
-              <a:t>2,506</a:t>
-            </a:r>
-            <a:endParaRPr lang="en-US" sz="1050" dirty="0"/>
-          </a:p>
-        </p:txBody>
-      </p:sp>
-      <p:sp>
-        <p:nvSpPr>
-          <p:cNvPr id="86" name="Text 84"/>
-          <p:cNvSpPr txBox="1"/>
-          <p:nvPr/>
-        </p:nvSpPr>
-        <p:spPr>
-          <a:xfrm>
-            <a:off x="5484571" y="5582412"/>
-            <a:ext cx="559613" cy="457200"/>
-          </a:xfrm>
-          <a:prstGeom prst="rect">
-            <a:avLst/>
-          </a:prstGeom>
-          <a:noFill/>
-          <a:ln/>
-        </p:spPr>
-        <p:txBody>
-          <a:bodyPr wrap="square" lIns="0" tIns="0" rIns="0" bIns="0" rtlCol="0" anchor="ctr"/>
-          <a:lstStyle/>
-          <a:p>
-            <a:pPr algn="ctr" indent="0" marL="0">
-              <a:buNone/>
-            </a:pPr>
-            <a:r>
-              <a:rPr lang="en-US" sz="1050" b="1" dirty="0">
-                <a:solidFill>
-                  <a:schemeClr val="accent3"/>
-                </a:solidFill>
-              </a:rPr>
-              <a:t>3,290</a:t>
-            </a:r>
-            <a:endParaRPr lang="en-US" sz="1050" dirty="0"/>
-          </a:p>
-        </p:txBody>
-      </p:sp>
-      <p:sp>
-        <p:nvSpPr>
-          <p:cNvPr id="87" name="Text 85"/>
-          <p:cNvSpPr txBox="1"/>
-          <p:nvPr/>
-        </p:nvSpPr>
-        <p:spPr>
-          <a:xfrm>
-            <a:off x="6044184" y="5582412"/>
-            <a:ext cx="559613" cy="457200"/>
-          </a:xfrm>
-          <a:prstGeom prst="rect">
-            <a:avLst/>
-          </a:prstGeom>
-          <a:noFill/>
-          <a:ln/>
-        </p:spPr>
-        <p:txBody>
-          <a:bodyPr wrap="square" lIns="0" tIns="0" rIns="0" bIns="0" rtlCol="0" anchor="ctr"/>
-          <a:lstStyle/>
-          <a:p>
-            <a:pPr algn="ctr" indent="0" marL="0">
-              <a:buNone/>
-            </a:pPr>
-            <a:r>
-              <a:rPr lang="en-US" sz="1050" b="1" dirty="0">
-                <a:solidFill>
-                  <a:schemeClr val="bg1"/>
-                </a:solidFill>
-              </a:rPr>
-              <a:t>1,540</a:t>
-            </a:r>
-            <a:endParaRPr lang="en-US" sz="1050" dirty="0"/>
-          </a:p>
-        </p:txBody>
-      </p:sp>
-      <p:sp>
-        <p:nvSpPr>
-          <p:cNvPr id="88" name="Text 86"/>
-          <p:cNvSpPr txBox="1"/>
-          <p:nvPr/>
-        </p:nvSpPr>
-        <p:spPr>
-          <a:xfrm>
-            <a:off x="6603797" y="5582412"/>
-            <a:ext cx="559613" cy="457200"/>
-          </a:xfrm>
-          <a:prstGeom prst="rect">
-            <a:avLst/>
-          </a:prstGeom>
-          <a:noFill/>
-          <a:ln/>
-        </p:spPr>
-        <p:txBody>
-          <a:bodyPr wrap="square" lIns="0" tIns="0" rIns="0" bIns="0" rtlCol="0" anchor="ctr"/>
-          <a:lstStyle/>
-          <a:p>
-            <a:pPr algn="ctr" indent="0" marL="0">
-              <a:buNone/>
-            </a:pPr>
-            <a:r>
-              <a:rPr lang="en-US" sz="1050" b="1" dirty="0">
-                <a:solidFill>
-                  <a:schemeClr val="accent3"/>
-                </a:solidFill>
-              </a:rPr>
-              <a:t>3,610</a:t>
-            </a:r>
-            <a:endParaRPr lang="en-US" sz="1050" dirty="0"/>
-          </a:p>
-        </p:txBody>
-      </p:sp>
-      <p:sp>
-        <p:nvSpPr>
-          <p:cNvPr id="89" name="Text 87"/>
-          <p:cNvSpPr txBox="1"/>
-          <p:nvPr/>
-        </p:nvSpPr>
-        <p:spPr>
-          <a:xfrm>
-            <a:off x="7163410" y="5582412"/>
-            <a:ext cx="559613" cy="457200"/>
-          </a:xfrm>
-          <a:prstGeom prst="rect">
-            <a:avLst/>
-          </a:prstGeom>
-          <a:noFill/>
-          <a:ln/>
-        </p:spPr>
-        <p:txBody>
-          <a:bodyPr wrap="square" lIns="0" tIns="0" rIns="0" bIns="0" rtlCol="0" anchor="ctr"/>
-          <a:lstStyle/>
-          <a:p>
-            <a:pPr algn="ctr" indent="0" marL="0">
-              <a:buNone/>
-            </a:pPr>
-            <a:r>
-              <a:rPr lang="en-US" sz="1050" b="1" dirty="0">
-                <a:solidFill>
-                  <a:schemeClr val="bg1"/>
-                </a:solidFill>
-              </a:rPr>
-              <a:t>1,700</a:t>
-            </a:r>
-            <a:endParaRPr lang="en-US" sz="1050" dirty="0"/>
-          </a:p>
-        </p:txBody>
-      </p:sp>
-      <p:sp>
-        <p:nvSpPr>
-          <p:cNvPr id="90" name="Text 88"/>
-          <p:cNvSpPr txBox="1"/>
-          <p:nvPr/>
-        </p:nvSpPr>
-        <p:spPr>
-          <a:xfrm>
-            <a:off x="7723022" y="5582412"/>
-            <a:ext cx="559613" cy="457200"/>
-          </a:xfrm>
-          <a:prstGeom prst="rect">
-            <a:avLst/>
-          </a:prstGeom>
-          <a:noFill/>
-          <a:ln/>
-        </p:spPr>
-        <p:txBody>
-          <a:bodyPr wrap="square" lIns="0" tIns="0" rIns="0" bIns="0" rtlCol="0" anchor="ctr"/>
-          <a:lstStyle/>
-          <a:p>
-            <a:pPr algn="ctr" indent="0" marL="0">
-              <a:buNone/>
-            </a:pPr>
-            <a:r>
-              <a:rPr lang="en-US" sz="1050" b="1" dirty="0">
-                <a:solidFill>
-                  <a:schemeClr val="bg1"/>
-                </a:solidFill>
-              </a:rPr>
-              <a:t>1,540</a:t>
-            </a:r>
-            <a:endParaRPr lang="en-US" sz="1050" dirty="0"/>
-          </a:p>
-        </p:txBody>
-      </p:sp>
-      <p:sp>
-        <p:nvSpPr>
-          <p:cNvPr id="91" name="Text 89"/>
-          <p:cNvSpPr txBox="1"/>
-          <p:nvPr/>
-        </p:nvSpPr>
-        <p:spPr>
-          <a:xfrm>
-            <a:off x="8282635" y="5582412"/>
-            <a:ext cx="559613" cy="457200"/>
-          </a:xfrm>
-          <a:prstGeom prst="rect">
-            <a:avLst/>
-          </a:prstGeom>
-          <a:noFill/>
-          <a:ln/>
-        </p:spPr>
-        <p:txBody>
-          <a:bodyPr wrap="square" lIns="0" tIns="0" rIns="0" bIns="0" rtlCol="0" anchor="ctr"/>
-          <a:lstStyle/>
-          <a:p>
-            <a:pPr algn="ctr" indent="0" marL="0">
-              <a:buNone/>
-            </a:pPr>
-            <a:r>
-              <a:rPr lang="en-US" sz="1050" b="1" dirty="0">
-                <a:solidFill>
-                  <a:schemeClr val="bg1"/>
-                </a:solidFill>
-              </a:rPr>
-              <a:t>1,380</a:t>
-            </a:r>
-            <a:endParaRPr lang="en-US" sz="1050" dirty="0"/>
-          </a:p>
-        </p:txBody>
-      </p:sp>
-      <p:sp>
-        <p:nvSpPr>
-          <p:cNvPr id="92" name="Text 90"/>
-          <p:cNvSpPr txBox="1"/>
-          <p:nvPr/>
-        </p:nvSpPr>
-        <p:spPr>
-          <a:xfrm>
-            <a:off x="8842248" y="5582412"/>
-            <a:ext cx="559613" cy="457200"/>
-          </a:xfrm>
-          <a:prstGeom prst="rect">
-            <a:avLst/>
-          </a:prstGeom>
-          <a:noFill/>
-          <a:ln/>
-        </p:spPr>
-        <p:txBody>
-          <a:bodyPr wrap="square" lIns="0" tIns="0" rIns="0" bIns="0" rtlCol="0" anchor="ctr"/>
-          <a:lstStyle/>
-          <a:p>
-            <a:pPr algn="ctr" indent="0" marL="0">
-              <a:buNone/>
-            </a:pPr>
-            <a:r>
-              <a:rPr lang="en-US" sz="1050" b="1" dirty="0">
-                <a:solidFill>
-                  <a:schemeClr val="bg1"/>
-                </a:solidFill>
-              </a:rPr>
-              <a:t>1,540</a:t>
-            </a:r>
-            <a:endParaRPr lang="en-US" sz="1050" dirty="0"/>
-          </a:p>
-        </p:txBody>
-      </p:sp>
-      <p:sp>
-        <p:nvSpPr>
-          <p:cNvPr id="93" name="Text 91"/>
-          <p:cNvSpPr txBox="1"/>
-          <p:nvPr/>
-        </p:nvSpPr>
-        <p:spPr>
-          <a:xfrm>
-            <a:off x="9401861" y="5582412"/>
-            <a:ext cx="559613" cy="457200"/>
-          </a:xfrm>
-          <a:prstGeom prst="rect">
-            <a:avLst/>
-          </a:prstGeom>
-          <a:noFill/>
-          <a:ln/>
-        </p:spPr>
-        <p:txBody>
-          <a:bodyPr wrap="square" lIns="0" tIns="0" rIns="0" bIns="0" rtlCol="0" anchor="ctr"/>
-          <a:lstStyle/>
-          <a:p>
-            <a:pPr algn="ctr" indent="0" marL="0">
-              <a:buNone/>
-            </a:pPr>
-            <a:r>
-              <a:rPr lang="en-US" sz="1050" b="1" dirty="0">
-                <a:solidFill>
-                  <a:schemeClr val="bg1"/>
-                </a:solidFill>
-              </a:rPr>
-              <a:t>1,540</a:t>
-            </a:r>
-            <a:endParaRPr lang="en-US" sz="1050" dirty="0"/>
-          </a:p>
-        </p:txBody>
-      </p:sp>
-      <p:sp>
-        <p:nvSpPr>
-          <p:cNvPr id="94" name="Text 92"/>
-          <p:cNvSpPr txBox="1"/>
-          <p:nvPr/>
-        </p:nvSpPr>
-        <p:spPr>
-          <a:xfrm>
-            <a:off x="9961474" y="5582412"/>
-            <a:ext cx="559613" cy="457200"/>
-          </a:xfrm>
-          <a:prstGeom prst="rect">
-            <a:avLst/>
-          </a:prstGeom>
-          <a:noFill/>
-          <a:ln/>
-        </p:spPr>
-        <p:txBody>
-          <a:bodyPr wrap="square" lIns="0" tIns="0" rIns="0" bIns="0" rtlCol="0" anchor="ctr"/>
-          <a:lstStyle/>
-          <a:p>
-            <a:pPr algn="ctr" indent="0" marL="0">
-              <a:buNone/>
-            </a:pPr>
-            <a:r>
-              <a:rPr lang="en-US" sz="1050" b="1" dirty="0">
-                <a:solidFill>
-                  <a:schemeClr val="bg1"/>
-                </a:solidFill>
-              </a:rPr>
-              <a:t>1,540</a:t>
-            </a:r>
-            <a:endParaRPr lang="en-US" sz="1050" dirty="0"/>
-          </a:p>
-        </p:txBody>
-      </p:sp>
-      <p:sp>
-        <p:nvSpPr>
-          <p:cNvPr id="95" name="Text 93"/>
-          <p:cNvSpPr txBox="1"/>
-          <p:nvPr/>
-        </p:nvSpPr>
-        <p:spPr>
-          <a:xfrm>
-            <a:off x="10521086" y="5582412"/>
-            <a:ext cx="559613" cy="457200"/>
-          </a:xfrm>
-          <a:prstGeom prst="rect">
-            <a:avLst/>
-          </a:prstGeom>
-          <a:noFill/>
-          <a:ln/>
-        </p:spPr>
-        <p:txBody>
-          <a:bodyPr wrap="square" lIns="0" tIns="0" rIns="0" bIns="0" rtlCol="0" anchor="ctr"/>
-          <a:lstStyle/>
-          <a:p>
-            <a:pPr algn="ctr" indent="0" marL="0">
-              <a:buNone/>
-            </a:pPr>
-            <a:r>
-              <a:rPr lang="en-US" sz="1050" b="1" dirty="0">
-                <a:solidFill>
-                  <a:schemeClr val="bg1"/>
-                </a:solidFill>
-              </a:rPr>
-              <a:t>1,380</a:t>
-            </a:r>
-            <a:endParaRPr lang="en-US" sz="1050" dirty="0"/>
-          </a:p>
-        </p:txBody>
-      </p:sp>
-      <p:sp>
-        <p:nvSpPr>
-          <p:cNvPr id="96" name="Text 94"/>
-          <p:cNvSpPr txBox="1"/>
-          <p:nvPr/>
-        </p:nvSpPr>
-        <p:spPr>
-          <a:xfrm>
-            <a:off x="11080699" y="5582412"/>
-            <a:ext cx="559613" cy="457200"/>
-          </a:xfrm>
-          <a:prstGeom prst="rect">
-            <a:avLst/>
-          </a:prstGeom>
-          <a:noFill/>
-          <a:ln/>
-        </p:spPr>
-        <p:txBody>
-          <a:bodyPr wrap="square" lIns="0" tIns="0" rIns="0" bIns="0" rtlCol="0" anchor="ctr"/>
-          <a:lstStyle/>
-          <a:p>
-            <a:pPr algn="ctr" indent="0" marL="0">
-              <a:buNone/>
-            </a:pPr>
-            <a:r>
-              <a:rPr lang="en-US" sz="1050" b="1" dirty="0">
-                <a:solidFill>
-                  <a:schemeClr val="bg1"/>
-                </a:solidFill>
-              </a:rPr>
-              <a:t>1,220</a:t>
-            </a:r>
-            <a:endParaRPr lang="en-US" sz="1050" dirty="0"/>
-          </a:p>
-        </p:txBody>
-      </p:sp>
-      <p:sp>
-        <p:nvSpPr>
-          <p:cNvPr id="97" name="Text 95"/>
-          <p:cNvSpPr txBox="1"/>
-          <p:nvPr/>
-        </p:nvSpPr>
-        <p:spPr>
-          <a:xfrm>
-            <a:off x="548640" y="6067044"/>
-            <a:ext cx="11091672" cy="274320"/>
-          </a:xfrm>
-          <a:prstGeom prst="rect">
-            <a:avLst/>
-          </a:prstGeom>
-          <a:noFill/>
-          <a:ln/>
-        </p:spPr>
-        <p:txBody>
-          <a:bodyPr wrap="square" lIns="0" tIns="0" rIns="0" bIns="0" rtlCol="0" anchor="t"/>
-          <a:lstStyle/>
-          <a:p>
-            <a:pPr indent="0" marL="0">
-              <a:buNone/>
-            </a:pPr>
-            <a:r>
-              <a:rPr lang="en-US" sz="950" i="1" dirty="0">
-                <a:solidFill>
-                  <a:schemeClr val="accent2"/>
-                </a:solidFill>
-              </a:rPr>
-              <a:t>Incluye pauta S/700 y embajadoras S/200 al mes, ferias (S/1,800 + vendedor/a 3 días), eventos (vendedor/a + aporte, S/160) y el lanzamiento (S/3,204, ya en la inversión). El espacio y los vendedores de los stands van aparte.</a:t>
-            </a:r>
-            <a:endParaRPr lang="en-US" sz="950" dirty="0"/>
+              <a:rPr lang="en-US" sz="1250" b="1" dirty="0">
+                <a:solidFill>
+                  <a:schemeClr val="tx2"/>
+                </a:solidFill>
+              </a:rPr>
+              <a:t>5 colegios (2 A y 3 B) y 8 tiendas</a:t>
+            </a:r>
+            <a:endParaRPr lang="en-US" sz="1400" dirty="0"/>
           </a:p>
         </p:txBody>
       </p:sp>
@@ -47486,6 +46105,4649 @@
                   <a:schemeClr val="accent1"/>
                 </a:solidFill>
               </a:rPr>
+              <a:t>PLAN DE MARKETING · CRONOGRAMA</a:t>
+            </a:r>
+            <a:endParaRPr lang="en-US" sz="1200" dirty="0"/>
+          </a:p>
+        </p:txBody>
+      </p:sp>
+      <p:sp>
+        <p:nvSpPr>
+          <p:cNvPr id="3" name="Text 0"/>
+          <p:cNvSpPr/>
+          <p:nvPr>
+            <p:ph idx="101" type="title" hasCustomPrompt="1"/>
+          </p:nvPr>
+        </p:nvSpPr>
+        <p:spPr>
+          <a:xfrm>
+            <a:off x="548640" y="566928"/>
+            <a:ext cx="11091672" cy="731520"/>
+          </a:xfrm>
+          <a:prstGeom prst="rect">
+            <a:avLst/>
+          </a:prstGeom>
+          <a:noFill/>
+          <a:ln/>
+        </p:spPr>
+        <p:txBody>
+          <a:bodyPr wrap="square" lIns="0" tIns="0" rIns="0" bIns="0" rtlCol="0" anchor="t"/>
+          <a:lstStyle/>
+          <a:p>
+            <a:pPr algn="l" indent="0" marL="0">
+              <a:buNone/>
+            </a:pPr>
+            <a:r>
+              <a:rPr lang="en-US" sz="3400" b="1" dirty="0">
+                <a:solidFill>
+                  <a:schemeClr val="tx2"/>
+                </a:solidFill>
+              </a:rPr>
+              <a:t>Qué hacemos cada mes y qué meta buscamos</a:t>
+            </a:r>
+            <a:endParaRPr lang="en-US" sz="3400" dirty="0"/>
+          </a:p>
+        </p:txBody>
+      </p:sp>
+      <p:sp>
+        <p:nvSpPr>
+          <p:cNvPr id="4" name="Shape 2"/>
+          <p:cNvSpPr/>
+          <p:nvPr/>
+        </p:nvSpPr>
+        <p:spPr>
+          <a:xfrm>
+            <a:off x="3767328" y="1353312"/>
+            <a:ext cx="1541678" cy="256032"/>
+          </a:xfrm>
+          <a:prstGeom prst="rect">
+            <a:avLst/>
+          </a:prstGeom>
+          <a:solidFill>
+            <a:schemeClr val="accent2"/>
+          </a:solidFill>
+          <a:ln w="12700">
+            <a:solidFill>
+              <a:schemeClr val="accent2"/>
+            </a:solidFill>
+            <a:prstDash val="solid"/>
+          </a:ln>
+        </p:spPr>
+      </p:sp>
+      <p:sp>
+        <p:nvSpPr>
+          <p:cNvPr id="5" name="Text 3"/>
+          <p:cNvSpPr txBox="1"/>
+          <p:nvPr/>
+        </p:nvSpPr>
+        <p:spPr>
+          <a:xfrm>
+            <a:off x="3749040" y="1353312"/>
+            <a:ext cx="1578254" cy="256032"/>
+          </a:xfrm>
+          <a:prstGeom prst="rect">
+            <a:avLst/>
+          </a:prstGeom>
+          <a:noFill/>
+          <a:ln/>
+        </p:spPr>
+        <p:txBody>
+          <a:bodyPr wrap="square" lIns="0" tIns="0" rIns="0" bIns="0" rtlCol="0" anchor="ctr"/>
+          <a:lstStyle/>
+          <a:p>
+            <a:pPr algn="ctr" indent="0" marL="0">
+              <a:buNone/>
+            </a:pPr>
+            <a:r>
+              <a:rPr lang="en-US" sz="900" b="1" spc="50" kern="0" dirty="0">
+                <a:solidFill>
+                  <a:schemeClr val="bg1"/>
+                </a:solidFill>
+              </a:rPr>
+              <a:t>PRELANZAMIENTO 2026</a:t>
+            </a:r>
+            <a:endParaRPr lang="en-US" sz="900" dirty="0"/>
+          </a:p>
+        </p:txBody>
+      </p:sp>
+      <p:sp>
+        <p:nvSpPr>
+          <p:cNvPr id="6" name="Shape 4"/>
+          <p:cNvSpPr/>
+          <p:nvPr/>
+        </p:nvSpPr>
+        <p:spPr>
+          <a:xfrm>
+            <a:off x="5345582" y="1353312"/>
+            <a:ext cx="1015594" cy="256032"/>
+          </a:xfrm>
+          <a:prstGeom prst="rect">
+            <a:avLst/>
+          </a:prstGeom>
+          <a:solidFill>
+            <a:schemeClr val="accent1"/>
+          </a:solidFill>
+          <a:ln w="12700">
+            <a:solidFill>
+              <a:schemeClr val="accent1"/>
+            </a:solidFill>
+            <a:prstDash val="solid"/>
+          </a:ln>
+        </p:spPr>
+      </p:sp>
+      <p:sp>
+        <p:nvSpPr>
+          <p:cNvPr id="7" name="Text 5"/>
+          <p:cNvSpPr txBox="1"/>
+          <p:nvPr/>
+        </p:nvSpPr>
+        <p:spPr>
+          <a:xfrm>
+            <a:off x="5327294" y="1353312"/>
+            <a:ext cx="1052170" cy="256032"/>
+          </a:xfrm>
+          <a:prstGeom prst="rect">
+            <a:avLst/>
+          </a:prstGeom>
+          <a:noFill/>
+          <a:ln/>
+        </p:spPr>
+        <p:txBody>
+          <a:bodyPr wrap="square" lIns="0" tIns="0" rIns="0" bIns="0" rtlCol="0" anchor="ctr"/>
+          <a:lstStyle/>
+          <a:p>
+            <a:pPr algn="ctr" indent="0" marL="0">
+              <a:buNone/>
+            </a:pPr>
+            <a:r>
+              <a:rPr lang="en-US" sz="900" b="1" spc="50" kern="0" dirty="0">
+                <a:solidFill>
+                  <a:schemeClr val="bg1"/>
+                </a:solidFill>
+              </a:rPr>
+              <a:t>LANZAMIENTO</a:t>
+            </a:r>
+            <a:endParaRPr lang="en-US" sz="900" dirty="0"/>
+          </a:p>
+        </p:txBody>
+      </p:sp>
+      <p:sp>
+        <p:nvSpPr>
+          <p:cNvPr id="8" name="Shape 6"/>
+          <p:cNvSpPr/>
+          <p:nvPr/>
+        </p:nvSpPr>
+        <p:spPr>
+          <a:xfrm>
+            <a:off x="6397752" y="1353312"/>
+            <a:ext cx="2593848" cy="256032"/>
+          </a:xfrm>
+          <a:prstGeom prst="rect">
+            <a:avLst/>
+          </a:prstGeom>
+          <a:solidFill>
+            <a:schemeClr val="accent4"/>
+          </a:solidFill>
+          <a:ln w="12700">
+            <a:solidFill>
+              <a:schemeClr val="accent4"/>
+            </a:solidFill>
+            <a:prstDash val="solid"/>
+          </a:ln>
+        </p:spPr>
+      </p:sp>
+      <p:sp>
+        <p:nvSpPr>
+          <p:cNvPr id="9" name="Text 7"/>
+          <p:cNvSpPr txBox="1"/>
+          <p:nvPr/>
+        </p:nvSpPr>
+        <p:spPr>
+          <a:xfrm>
+            <a:off x="6379464" y="1353312"/>
+            <a:ext cx="2630424" cy="256032"/>
+          </a:xfrm>
+          <a:prstGeom prst="rect">
+            <a:avLst/>
+          </a:prstGeom>
+          <a:noFill/>
+          <a:ln/>
+        </p:spPr>
+        <p:txBody>
+          <a:bodyPr wrap="square" lIns="0" tIns="0" rIns="0" bIns="0" rtlCol="0" anchor="ctr"/>
+          <a:lstStyle/>
+          <a:p>
+            <a:pPr algn="ctr" indent="0" marL="0">
+              <a:buNone/>
+            </a:pPr>
+            <a:r>
+              <a:rPr lang="en-US" sz="900" b="1" spc="50" kern="0" dirty="0">
+                <a:solidFill>
+                  <a:schemeClr val="bg1"/>
+                </a:solidFill>
+              </a:rPr>
+              <a:t>CRECER</a:t>
+            </a:r>
+            <a:endParaRPr lang="en-US" sz="900" dirty="0"/>
+          </a:p>
+        </p:txBody>
+      </p:sp>
+      <p:sp>
+        <p:nvSpPr>
+          <p:cNvPr id="10" name="Shape 8"/>
+          <p:cNvSpPr/>
+          <p:nvPr/>
+        </p:nvSpPr>
+        <p:spPr>
+          <a:xfrm>
+            <a:off x="9028176" y="1353312"/>
+            <a:ext cx="2593848" cy="256032"/>
+          </a:xfrm>
+          <a:prstGeom prst="rect">
+            <a:avLst/>
+          </a:prstGeom>
+          <a:solidFill>
+            <a:schemeClr val="tx2"/>
+          </a:solidFill>
+          <a:ln w="12700">
+            <a:solidFill>
+              <a:schemeClr val="tx2"/>
+            </a:solidFill>
+            <a:prstDash val="solid"/>
+          </a:ln>
+        </p:spPr>
+      </p:sp>
+      <p:sp>
+        <p:nvSpPr>
+          <p:cNvPr id="11" name="Text 9"/>
+          <p:cNvSpPr txBox="1"/>
+          <p:nvPr/>
+        </p:nvSpPr>
+        <p:spPr>
+          <a:xfrm>
+            <a:off x="9009888" y="1353312"/>
+            <a:ext cx="2630424" cy="256032"/>
+          </a:xfrm>
+          <a:prstGeom prst="rect">
+            <a:avLst/>
+          </a:prstGeom>
+          <a:noFill/>
+          <a:ln/>
+        </p:spPr>
+        <p:txBody>
+          <a:bodyPr wrap="square" lIns="0" tIns="0" rIns="0" bIns="0" rtlCol="0" anchor="ctr"/>
+          <a:lstStyle/>
+          <a:p>
+            <a:pPr algn="ctr" indent="0" marL="0">
+              <a:buNone/>
+            </a:pPr>
+            <a:r>
+              <a:rPr lang="en-US" sz="900" b="1" spc="50" kern="0" dirty="0">
+                <a:solidFill>
+                  <a:schemeClr val="bg1"/>
+                </a:solidFill>
+              </a:rPr>
+              <a:t>EXPANDIR</a:t>
+            </a:r>
+            <a:endParaRPr lang="en-US" sz="900" dirty="0"/>
+          </a:p>
+        </p:txBody>
+      </p:sp>
+      <p:sp>
+        <p:nvSpPr>
+          <p:cNvPr id="12" name="Text 10"/>
+          <p:cNvSpPr txBox="1"/>
+          <p:nvPr/>
+        </p:nvSpPr>
+        <p:spPr>
+          <a:xfrm>
+            <a:off x="3749040" y="1636776"/>
+            <a:ext cx="526085" cy="201168"/>
+          </a:xfrm>
+          <a:prstGeom prst="rect">
+            <a:avLst/>
+          </a:prstGeom>
+          <a:noFill/>
+          <a:ln/>
+        </p:spPr>
+        <p:txBody>
+          <a:bodyPr wrap="square" lIns="0" tIns="0" rIns="0" bIns="0" rtlCol="0" anchor="t"/>
+          <a:lstStyle/>
+          <a:p>
+            <a:pPr algn="ctr" indent="0" marL="0">
+              <a:buNone/>
+            </a:pPr>
+            <a:r>
+              <a:rPr lang="en-US" sz="950" b="1" dirty="0">
+                <a:solidFill>
+                  <a:schemeClr val="accent2"/>
+                </a:solidFill>
+              </a:rPr>
+              <a:t>Oct</a:t>
+            </a:r>
+            <a:endParaRPr lang="en-US" sz="950" dirty="0"/>
+          </a:p>
+        </p:txBody>
+      </p:sp>
+      <p:sp>
+        <p:nvSpPr>
+          <p:cNvPr id="13" name="Text 11"/>
+          <p:cNvSpPr txBox="1"/>
+          <p:nvPr/>
+        </p:nvSpPr>
+        <p:spPr>
+          <a:xfrm>
+            <a:off x="4275125" y="1636776"/>
+            <a:ext cx="526085" cy="201168"/>
+          </a:xfrm>
+          <a:prstGeom prst="rect">
+            <a:avLst/>
+          </a:prstGeom>
+          <a:noFill/>
+          <a:ln/>
+        </p:spPr>
+        <p:txBody>
+          <a:bodyPr wrap="square" lIns="0" tIns="0" rIns="0" bIns="0" rtlCol="0" anchor="t"/>
+          <a:lstStyle/>
+          <a:p>
+            <a:pPr algn="ctr" indent="0" marL="0">
+              <a:buNone/>
+            </a:pPr>
+            <a:r>
+              <a:rPr lang="en-US" sz="950" b="1" dirty="0">
+                <a:solidFill>
+                  <a:schemeClr val="accent2"/>
+                </a:solidFill>
+              </a:rPr>
+              <a:t>Nov</a:t>
+            </a:r>
+            <a:endParaRPr lang="en-US" sz="950" dirty="0"/>
+          </a:p>
+        </p:txBody>
+      </p:sp>
+      <p:sp>
+        <p:nvSpPr>
+          <p:cNvPr id="14" name="Text 12"/>
+          <p:cNvSpPr txBox="1"/>
+          <p:nvPr/>
+        </p:nvSpPr>
+        <p:spPr>
+          <a:xfrm>
+            <a:off x="4801210" y="1636776"/>
+            <a:ext cx="526085" cy="201168"/>
+          </a:xfrm>
+          <a:prstGeom prst="rect">
+            <a:avLst/>
+          </a:prstGeom>
+          <a:noFill/>
+          <a:ln/>
+        </p:spPr>
+        <p:txBody>
+          <a:bodyPr wrap="square" lIns="0" tIns="0" rIns="0" bIns="0" rtlCol="0" anchor="t"/>
+          <a:lstStyle/>
+          <a:p>
+            <a:pPr algn="ctr" indent="0" marL="0">
+              <a:buNone/>
+            </a:pPr>
+            <a:r>
+              <a:rPr lang="en-US" sz="950" b="1" dirty="0">
+                <a:solidFill>
+                  <a:schemeClr val="accent2"/>
+                </a:solidFill>
+              </a:rPr>
+              <a:t>Dic</a:t>
+            </a:r>
+            <a:endParaRPr lang="en-US" sz="950" dirty="0"/>
+          </a:p>
+        </p:txBody>
+      </p:sp>
+      <p:sp>
+        <p:nvSpPr>
+          <p:cNvPr id="15" name="Text 13"/>
+          <p:cNvSpPr txBox="1"/>
+          <p:nvPr/>
+        </p:nvSpPr>
+        <p:spPr>
+          <a:xfrm>
+            <a:off x="5327294" y="1636776"/>
+            <a:ext cx="526085" cy="201168"/>
+          </a:xfrm>
+          <a:prstGeom prst="rect">
+            <a:avLst/>
+          </a:prstGeom>
+          <a:noFill/>
+          <a:ln/>
+        </p:spPr>
+        <p:txBody>
+          <a:bodyPr wrap="square" lIns="0" tIns="0" rIns="0" bIns="0" rtlCol="0" anchor="t"/>
+          <a:lstStyle/>
+          <a:p>
+            <a:pPr algn="ctr" indent="0" marL="0">
+              <a:buNone/>
+            </a:pPr>
+            <a:r>
+              <a:rPr lang="en-US" sz="950" b="1" dirty="0">
+                <a:solidFill>
+                  <a:schemeClr val="tx2"/>
+                </a:solidFill>
+              </a:rPr>
+              <a:t>Ene</a:t>
+            </a:r>
+            <a:endParaRPr lang="en-US" sz="950" dirty="0"/>
+          </a:p>
+        </p:txBody>
+      </p:sp>
+      <p:sp>
+        <p:nvSpPr>
+          <p:cNvPr id="16" name="Text 14"/>
+          <p:cNvSpPr txBox="1"/>
+          <p:nvPr/>
+        </p:nvSpPr>
+        <p:spPr>
+          <a:xfrm>
+            <a:off x="5853379" y="1636776"/>
+            <a:ext cx="526085" cy="201168"/>
+          </a:xfrm>
+          <a:prstGeom prst="rect">
+            <a:avLst/>
+          </a:prstGeom>
+          <a:noFill/>
+          <a:ln/>
+        </p:spPr>
+        <p:txBody>
+          <a:bodyPr wrap="square" lIns="0" tIns="0" rIns="0" bIns="0" rtlCol="0" anchor="t"/>
+          <a:lstStyle/>
+          <a:p>
+            <a:pPr algn="ctr" indent="0" marL="0">
+              <a:buNone/>
+            </a:pPr>
+            <a:r>
+              <a:rPr lang="en-US" sz="950" b="1" dirty="0">
+                <a:solidFill>
+                  <a:schemeClr val="tx2"/>
+                </a:solidFill>
+              </a:rPr>
+              <a:t>Feb</a:t>
+            </a:r>
+            <a:endParaRPr lang="en-US" sz="950" dirty="0"/>
+          </a:p>
+        </p:txBody>
+      </p:sp>
+      <p:sp>
+        <p:nvSpPr>
+          <p:cNvPr id="17" name="Text 15"/>
+          <p:cNvSpPr txBox="1"/>
+          <p:nvPr/>
+        </p:nvSpPr>
+        <p:spPr>
+          <a:xfrm>
+            <a:off x="6379464" y="1636776"/>
+            <a:ext cx="526085" cy="201168"/>
+          </a:xfrm>
+          <a:prstGeom prst="rect">
+            <a:avLst/>
+          </a:prstGeom>
+          <a:noFill/>
+          <a:ln/>
+        </p:spPr>
+        <p:txBody>
+          <a:bodyPr wrap="square" lIns="0" tIns="0" rIns="0" bIns="0" rtlCol="0" anchor="t"/>
+          <a:lstStyle/>
+          <a:p>
+            <a:pPr algn="ctr" indent="0" marL="0">
+              <a:buNone/>
+            </a:pPr>
+            <a:r>
+              <a:rPr lang="en-US" sz="950" b="1" dirty="0">
+                <a:solidFill>
+                  <a:schemeClr val="tx2"/>
+                </a:solidFill>
+              </a:rPr>
+              <a:t>Mar</a:t>
+            </a:r>
+            <a:endParaRPr lang="en-US" sz="950" dirty="0"/>
+          </a:p>
+        </p:txBody>
+      </p:sp>
+      <p:sp>
+        <p:nvSpPr>
+          <p:cNvPr id="18" name="Text 16"/>
+          <p:cNvSpPr txBox="1"/>
+          <p:nvPr/>
+        </p:nvSpPr>
+        <p:spPr>
+          <a:xfrm>
+            <a:off x="6905549" y="1636776"/>
+            <a:ext cx="526085" cy="201168"/>
+          </a:xfrm>
+          <a:prstGeom prst="rect">
+            <a:avLst/>
+          </a:prstGeom>
+          <a:noFill/>
+          <a:ln/>
+        </p:spPr>
+        <p:txBody>
+          <a:bodyPr wrap="square" lIns="0" tIns="0" rIns="0" bIns="0" rtlCol="0" anchor="t"/>
+          <a:lstStyle/>
+          <a:p>
+            <a:pPr algn="ctr" indent="0" marL="0">
+              <a:buNone/>
+            </a:pPr>
+            <a:r>
+              <a:rPr lang="en-US" sz="950" b="1" dirty="0">
+                <a:solidFill>
+                  <a:schemeClr val="tx2"/>
+                </a:solidFill>
+              </a:rPr>
+              <a:t>Abr</a:t>
+            </a:r>
+            <a:endParaRPr lang="en-US" sz="950" dirty="0"/>
+          </a:p>
+        </p:txBody>
+      </p:sp>
+      <p:sp>
+        <p:nvSpPr>
+          <p:cNvPr id="19" name="Text 17"/>
+          <p:cNvSpPr txBox="1"/>
+          <p:nvPr/>
+        </p:nvSpPr>
+        <p:spPr>
+          <a:xfrm>
+            <a:off x="7431634" y="1636776"/>
+            <a:ext cx="526085" cy="201168"/>
+          </a:xfrm>
+          <a:prstGeom prst="rect">
+            <a:avLst/>
+          </a:prstGeom>
+          <a:noFill/>
+          <a:ln/>
+        </p:spPr>
+        <p:txBody>
+          <a:bodyPr wrap="square" lIns="0" tIns="0" rIns="0" bIns="0" rtlCol="0" anchor="t"/>
+          <a:lstStyle/>
+          <a:p>
+            <a:pPr algn="ctr" indent="0" marL="0">
+              <a:buNone/>
+            </a:pPr>
+            <a:r>
+              <a:rPr lang="en-US" sz="950" b="1" dirty="0">
+                <a:solidFill>
+                  <a:schemeClr val="tx2"/>
+                </a:solidFill>
+              </a:rPr>
+              <a:t>May</a:t>
+            </a:r>
+            <a:endParaRPr lang="en-US" sz="950" dirty="0"/>
+          </a:p>
+        </p:txBody>
+      </p:sp>
+      <p:sp>
+        <p:nvSpPr>
+          <p:cNvPr id="20" name="Text 18"/>
+          <p:cNvSpPr txBox="1"/>
+          <p:nvPr/>
+        </p:nvSpPr>
+        <p:spPr>
+          <a:xfrm>
+            <a:off x="7957718" y="1636776"/>
+            <a:ext cx="526085" cy="201168"/>
+          </a:xfrm>
+          <a:prstGeom prst="rect">
+            <a:avLst/>
+          </a:prstGeom>
+          <a:noFill/>
+          <a:ln/>
+        </p:spPr>
+        <p:txBody>
+          <a:bodyPr wrap="square" lIns="0" tIns="0" rIns="0" bIns="0" rtlCol="0" anchor="t"/>
+          <a:lstStyle/>
+          <a:p>
+            <a:pPr algn="ctr" indent="0" marL="0">
+              <a:buNone/>
+            </a:pPr>
+            <a:r>
+              <a:rPr lang="en-US" sz="950" b="1" dirty="0">
+                <a:solidFill>
+                  <a:schemeClr val="tx2"/>
+                </a:solidFill>
+              </a:rPr>
+              <a:t>Jun</a:t>
+            </a:r>
+            <a:endParaRPr lang="en-US" sz="950" dirty="0"/>
+          </a:p>
+        </p:txBody>
+      </p:sp>
+      <p:sp>
+        <p:nvSpPr>
+          <p:cNvPr id="21" name="Text 19"/>
+          <p:cNvSpPr txBox="1"/>
+          <p:nvPr/>
+        </p:nvSpPr>
+        <p:spPr>
+          <a:xfrm>
+            <a:off x="8483803" y="1636776"/>
+            <a:ext cx="526085" cy="201168"/>
+          </a:xfrm>
+          <a:prstGeom prst="rect">
+            <a:avLst/>
+          </a:prstGeom>
+          <a:noFill/>
+          <a:ln/>
+        </p:spPr>
+        <p:txBody>
+          <a:bodyPr wrap="square" lIns="0" tIns="0" rIns="0" bIns="0" rtlCol="0" anchor="t"/>
+          <a:lstStyle/>
+          <a:p>
+            <a:pPr algn="ctr" indent="0" marL="0">
+              <a:buNone/>
+            </a:pPr>
+            <a:r>
+              <a:rPr lang="en-US" sz="950" b="1" dirty="0">
+                <a:solidFill>
+                  <a:schemeClr val="tx2"/>
+                </a:solidFill>
+              </a:rPr>
+              <a:t>Jul</a:t>
+            </a:r>
+            <a:endParaRPr lang="en-US" sz="950" dirty="0"/>
+          </a:p>
+        </p:txBody>
+      </p:sp>
+      <p:sp>
+        <p:nvSpPr>
+          <p:cNvPr id="22" name="Text 20"/>
+          <p:cNvSpPr txBox="1"/>
+          <p:nvPr/>
+        </p:nvSpPr>
+        <p:spPr>
+          <a:xfrm>
+            <a:off x="9009888" y="1636776"/>
+            <a:ext cx="526085" cy="201168"/>
+          </a:xfrm>
+          <a:prstGeom prst="rect">
+            <a:avLst/>
+          </a:prstGeom>
+          <a:noFill/>
+          <a:ln/>
+        </p:spPr>
+        <p:txBody>
+          <a:bodyPr wrap="square" lIns="0" tIns="0" rIns="0" bIns="0" rtlCol="0" anchor="t"/>
+          <a:lstStyle/>
+          <a:p>
+            <a:pPr algn="ctr" indent="0" marL="0">
+              <a:buNone/>
+            </a:pPr>
+            <a:r>
+              <a:rPr lang="en-US" sz="950" b="1" dirty="0">
+                <a:solidFill>
+                  <a:schemeClr val="tx2"/>
+                </a:solidFill>
+              </a:rPr>
+              <a:t>Ago</a:t>
+            </a:r>
+            <a:endParaRPr lang="en-US" sz="950" dirty="0"/>
+          </a:p>
+        </p:txBody>
+      </p:sp>
+      <p:sp>
+        <p:nvSpPr>
+          <p:cNvPr id="23" name="Text 21"/>
+          <p:cNvSpPr txBox="1"/>
+          <p:nvPr/>
+        </p:nvSpPr>
+        <p:spPr>
+          <a:xfrm>
+            <a:off x="9535973" y="1636776"/>
+            <a:ext cx="526085" cy="201168"/>
+          </a:xfrm>
+          <a:prstGeom prst="rect">
+            <a:avLst/>
+          </a:prstGeom>
+          <a:noFill/>
+          <a:ln/>
+        </p:spPr>
+        <p:txBody>
+          <a:bodyPr wrap="square" lIns="0" tIns="0" rIns="0" bIns="0" rtlCol="0" anchor="t"/>
+          <a:lstStyle/>
+          <a:p>
+            <a:pPr algn="ctr" indent="0" marL="0">
+              <a:buNone/>
+            </a:pPr>
+            <a:r>
+              <a:rPr lang="en-US" sz="950" b="1" dirty="0">
+                <a:solidFill>
+                  <a:schemeClr val="tx2"/>
+                </a:solidFill>
+              </a:rPr>
+              <a:t>Set</a:t>
+            </a:r>
+            <a:endParaRPr lang="en-US" sz="950" dirty="0"/>
+          </a:p>
+        </p:txBody>
+      </p:sp>
+      <p:sp>
+        <p:nvSpPr>
+          <p:cNvPr id="24" name="Text 22"/>
+          <p:cNvSpPr txBox="1"/>
+          <p:nvPr/>
+        </p:nvSpPr>
+        <p:spPr>
+          <a:xfrm>
+            <a:off x="10062058" y="1636776"/>
+            <a:ext cx="526085" cy="201168"/>
+          </a:xfrm>
+          <a:prstGeom prst="rect">
+            <a:avLst/>
+          </a:prstGeom>
+          <a:noFill/>
+          <a:ln/>
+        </p:spPr>
+        <p:txBody>
+          <a:bodyPr wrap="square" lIns="0" tIns="0" rIns="0" bIns="0" rtlCol="0" anchor="t"/>
+          <a:lstStyle/>
+          <a:p>
+            <a:pPr algn="ctr" indent="0" marL="0">
+              <a:buNone/>
+            </a:pPr>
+            <a:r>
+              <a:rPr lang="en-US" sz="950" b="1" dirty="0">
+                <a:solidFill>
+                  <a:schemeClr val="tx2"/>
+                </a:solidFill>
+              </a:rPr>
+              <a:t>Oct</a:t>
+            </a:r>
+            <a:endParaRPr lang="en-US" sz="950" dirty="0"/>
+          </a:p>
+        </p:txBody>
+      </p:sp>
+      <p:sp>
+        <p:nvSpPr>
+          <p:cNvPr id="25" name="Text 23"/>
+          <p:cNvSpPr txBox="1"/>
+          <p:nvPr/>
+        </p:nvSpPr>
+        <p:spPr>
+          <a:xfrm>
+            <a:off x="10588142" y="1636776"/>
+            <a:ext cx="526085" cy="201168"/>
+          </a:xfrm>
+          <a:prstGeom prst="rect">
+            <a:avLst/>
+          </a:prstGeom>
+          <a:noFill/>
+          <a:ln/>
+        </p:spPr>
+        <p:txBody>
+          <a:bodyPr wrap="square" lIns="0" tIns="0" rIns="0" bIns="0" rtlCol="0" anchor="t"/>
+          <a:lstStyle/>
+          <a:p>
+            <a:pPr algn="ctr" indent="0" marL="0">
+              <a:buNone/>
+            </a:pPr>
+            <a:r>
+              <a:rPr lang="en-US" sz="950" b="1" dirty="0">
+                <a:solidFill>
+                  <a:schemeClr val="tx2"/>
+                </a:solidFill>
+              </a:rPr>
+              <a:t>Nov</a:t>
+            </a:r>
+            <a:endParaRPr lang="en-US" sz="950" dirty="0"/>
+          </a:p>
+        </p:txBody>
+      </p:sp>
+      <p:sp>
+        <p:nvSpPr>
+          <p:cNvPr id="26" name="Text 24"/>
+          <p:cNvSpPr txBox="1"/>
+          <p:nvPr/>
+        </p:nvSpPr>
+        <p:spPr>
+          <a:xfrm>
+            <a:off x="11114227" y="1636776"/>
+            <a:ext cx="526085" cy="201168"/>
+          </a:xfrm>
+          <a:prstGeom prst="rect">
+            <a:avLst/>
+          </a:prstGeom>
+          <a:noFill/>
+          <a:ln/>
+        </p:spPr>
+        <p:txBody>
+          <a:bodyPr wrap="square" lIns="0" tIns="0" rIns="0" bIns="0" rtlCol="0" anchor="t"/>
+          <a:lstStyle/>
+          <a:p>
+            <a:pPr algn="ctr" indent="0" marL="0">
+              <a:buNone/>
+            </a:pPr>
+            <a:r>
+              <a:rPr lang="en-US" sz="950" b="1" dirty="0">
+                <a:solidFill>
+                  <a:schemeClr val="tx2"/>
+                </a:solidFill>
+              </a:rPr>
+              <a:t>Dic</a:t>
+            </a:r>
+            <a:endParaRPr lang="en-US" sz="950" dirty="0"/>
+          </a:p>
+        </p:txBody>
+      </p:sp>
+      <p:sp>
+        <p:nvSpPr>
+          <p:cNvPr id="27" name="Shape 25"/>
+          <p:cNvSpPr/>
+          <p:nvPr/>
+        </p:nvSpPr>
+        <p:spPr>
+          <a:xfrm>
+            <a:off x="4275125" y="1865376"/>
+            <a:ext cx="526085" cy="3346704"/>
+          </a:xfrm>
+          <a:prstGeom prst="rect">
+            <a:avLst/>
+          </a:prstGeom>
+          <a:solidFill>
+            <a:srgbClr val="F4E6D3"/>
+          </a:solidFill>
+          <a:ln w="12700">
+            <a:solidFill>
+              <a:srgbClr val="F4E6D3"/>
+            </a:solidFill>
+            <a:prstDash val="solid"/>
+          </a:ln>
+        </p:spPr>
+      </p:sp>
+      <p:sp>
+        <p:nvSpPr>
+          <p:cNvPr id="28" name="Shape 26"/>
+          <p:cNvSpPr/>
+          <p:nvPr/>
+        </p:nvSpPr>
+        <p:spPr>
+          <a:xfrm>
+            <a:off x="5327294" y="1865376"/>
+            <a:ext cx="526085" cy="3346704"/>
+          </a:xfrm>
+          <a:prstGeom prst="rect">
+            <a:avLst/>
+          </a:prstGeom>
+          <a:solidFill>
+            <a:srgbClr val="F4E6D3"/>
+          </a:solidFill>
+          <a:ln w="12700">
+            <a:solidFill>
+              <a:srgbClr val="F4E6D3"/>
+            </a:solidFill>
+            <a:prstDash val="solid"/>
+          </a:ln>
+        </p:spPr>
+      </p:sp>
+      <p:sp>
+        <p:nvSpPr>
+          <p:cNvPr id="29" name="Shape 27"/>
+          <p:cNvSpPr/>
+          <p:nvPr/>
+        </p:nvSpPr>
+        <p:spPr>
+          <a:xfrm>
+            <a:off x="6379464" y="1865376"/>
+            <a:ext cx="526085" cy="3346704"/>
+          </a:xfrm>
+          <a:prstGeom prst="rect">
+            <a:avLst/>
+          </a:prstGeom>
+          <a:solidFill>
+            <a:srgbClr val="F4E6D3"/>
+          </a:solidFill>
+          <a:ln w="12700">
+            <a:solidFill>
+              <a:srgbClr val="F4E6D3"/>
+            </a:solidFill>
+            <a:prstDash val="solid"/>
+          </a:ln>
+        </p:spPr>
+      </p:sp>
+      <p:sp>
+        <p:nvSpPr>
+          <p:cNvPr id="30" name="Shape 28"/>
+          <p:cNvSpPr/>
+          <p:nvPr/>
+        </p:nvSpPr>
+        <p:spPr>
+          <a:xfrm>
+            <a:off x="7431634" y="1865376"/>
+            <a:ext cx="526085" cy="3346704"/>
+          </a:xfrm>
+          <a:prstGeom prst="rect">
+            <a:avLst/>
+          </a:prstGeom>
+          <a:solidFill>
+            <a:srgbClr val="F4E6D3"/>
+          </a:solidFill>
+          <a:ln w="12700">
+            <a:solidFill>
+              <a:srgbClr val="F4E6D3"/>
+            </a:solidFill>
+            <a:prstDash val="solid"/>
+          </a:ln>
+        </p:spPr>
+      </p:sp>
+      <p:sp>
+        <p:nvSpPr>
+          <p:cNvPr id="31" name="Shape 29"/>
+          <p:cNvSpPr/>
+          <p:nvPr/>
+        </p:nvSpPr>
+        <p:spPr>
+          <a:xfrm>
+            <a:off x="8483803" y="1865376"/>
+            <a:ext cx="526085" cy="3346704"/>
+          </a:xfrm>
+          <a:prstGeom prst="rect">
+            <a:avLst/>
+          </a:prstGeom>
+          <a:solidFill>
+            <a:srgbClr val="F4E6D3"/>
+          </a:solidFill>
+          <a:ln w="12700">
+            <a:solidFill>
+              <a:srgbClr val="F4E6D3"/>
+            </a:solidFill>
+            <a:prstDash val="solid"/>
+          </a:ln>
+        </p:spPr>
+      </p:sp>
+      <p:sp>
+        <p:nvSpPr>
+          <p:cNvPr id="32" name="Shape 30"/>
+          <p:cNvSpPr/>
+          <p:nvPr/>
+        </p:nvSpPr>
+        <p:spPr>
+          <a:xfrm>
+            <a:off x="9535973" y="1865376"/>
+            <a:ext cx="526085" cy="3346704"/>
+          </a:xfrm>
+          <a:prstGeom prst="rect">
+            <a:avLst/>
+          </a:prstGeom>
+          <a:solidFill>
+            <a:srgbClr val="F4E6D3"/>
+          </a:solidFill>
+          <a:ln w="12700">
+            <a:solidFill>
+              <a:srgbClr val="F4E6D3"/>
+            </a:solidFill>
+            <a:prstDash val="solid"/>
+          </a:ln>
+        </p:spPr>
+      </p:sp>
+      <p:sp>
+        <p:nvSpPr>
+          <p:cNvPr id="33" name="Shape 31"/>
+          <p:cNvSpPr/>
+          <p:nvPr/>
+        </p:nvSpPr>
+        <p:spPr>
+          <a:xfrm>
+            <a:off x="10588142" y="1865376"/>
+            <a:ext cx="526085" cy="3346704"/>
+          </a:xfrm>
+          <a:prstGeom prst="rect">
+            <a:avLst/>
+          </a:prstGeom>
+          <a:solidFill>
+            <a:srgbClr val="F4E6D3"/>
+          </a:solidFill>
+          <a:ln w="12700">
+            <a:solidFill>
+              <a:srgbClr val="F4E6D3"/>
+            </a:solidFill>
+            <a:prstDash val="solid"/>
+          </a:ln>
+        </p:spPr>
+      </p:sp>
+      <p:sp>
+        <p:nvSpPr>
+          <p:cNvPr id="34" name="Shape 32"/>
+          <p:cNvSpPr/>
+          <p:nvPr/>
+        </p:nvSpPr>
+        <p:spPr>
+          <a:xfrm>
+            <a:off x="5327294" y="1609344"/>
+            <a:ext cx="0" cy="3621024"/>
+          </a:xfrm>
+          <a:prstGeom prst="line">
+            <a:avLst/>
+          </a:prstGeom>
+          <a:noFill/>
+          <a:ln w="15875">
+            <a:solidFill>
+              <a:schemeClr val="accent1"/>
+            </a:solidFill>
+            <a:prstDash val="dash"/>
+          </a:ln>
+        </p:spPr>
+      </p:sp>
+      <p:sp>
+        <p:nvSpPr>
+          <p:cNvPr id="35" name="Text 33"/>
+          <p:cNvSpPr txBox="1"/>
+          <p:nvPr/>
+        </p:nvSpPr>
+        <p:spPr>
+          <a:xfrm>
+            <a:off x="548640" y="1883664"/>
+            <a:ext cx="868680" cy="242316"/>
+          </a:xfrm>
+          <a:prstGeom prst="rect">
+            <a:avLst/>
+          </a:prstGeom>
+          <a:noFill/>
+          <a:ln/>
+        </p:spPr>
+        <p:txBody>
+          <a:bodyPr wrap="square" lIns="0" tIns="0" rIns="0" bIns="0" rtlCol="0" anchor="ctr"/>
+          <a:lstStyle/>
+          <a:p>
+            <a:pPr indent="0" marL="0">
+              <a:buNone/>
+            </a:pPr>
+            <a:r>
+              <a:rPr lang="en-US" sz="800" b="1" spc="50" kern="0" dirty="0">
+                <a:solidFill>
+                  <a:schemeClr val="accent2"/>
+                </a:solidFill>
+              </a:rPr>
+              <a:t>PREPARAR</a:t>
+            </a:r>
+            <a:endParaRPr lang="en-US" sz="800" dirty="0"/>
+          </a:p>
+        </p:txBody>
+      </p:sp>
+      <p:sp>
+        <p:nvSpPr>
+          <p:cNvPr id="36" name="Shape 34"/>
+          <p:cNvSpPr/>
+          <p:nvPr/>
+        </p:nvSpPr>
+        <p:spPr>
+          <a:xfrm>
+            <a:off x="1417320" y="1938528"/>
+            <a:ext cx="64008" cy="132588"/>
+          </a:xfrm>
+          <a:prstGeom prst="rect">
+            <a:avLst/>
+          </a:prstGeom>
+          <a:solidFill>
+            <a:schemeClr val="accent2"/>
+          </a:solidFill>
+          <a:ln w="12700">
+            <a:solidFill>
+              <a:schemeClr val="accent2"/>
+            </a:solidFill>
+            <a:prstDash val="solid"/>
+          </a:ln>
+        </p:spPr>
+      </p:sp>
+      <p:sp>
+        <p:nvSpPr>
+          <p:cNvPr id="37" name="Text 35"/>
+          <p:cNvSpPr txBox="1"/>
+          <p:nvPr/>
+        </p:nvSpPr>
+        <p:spPr>
+          <a:xfrm>
+            <a:off x="1536192" y="1865376"/>
+            <a:ext cx="2176272" cy="278892"/>
+          </a:xfrm>
+          <a:prstGeom prst="rect">
+            <a:avLst/>
+          </a:prstGeom>
+          <a:noFill/>
+          <a:ln/>
+        </p:spPr>
+        <p:txBody>
+          <a:bodyPr wrap="square" lIns="0" tIns="0" rIns="0" bIns="0" rtlCol="0" anchor="ctr"/>
+          <a:lstStyle/>
+          <a:p>
+            <a:pPr indent="0" marL="0">
+              <a:buNone/>
+            </a:pPr>
+            <a:r>
+              <a:rPr lang="en-US" sz="900" dirty="0">
+                <a:solidFill>
+                  <a:schemeClr val="tx1"/>
+                </a:solidFill>
+              </a:rPr>
+              <a:t>Redes, WhatsApp Business y lista de espera</a:t>
+            </a:r>
+            <a:endParaRPr lang="en-US" sz="900" dirty="0"/>
+          </a:p>
+        </p:txBody>
+      </p:sp>
+      <p:sp>
+        <p:nvSpPr>
+          <p:cNvPr id="38" name="Shape 36"/>
+          <p:cNvSpPr/>
+          <p:nvPr/>
+        </p:nvSpPr>
+        <p:spPr>
+          <a:xfrm>
+            <a:off x="3776472" y="1911096"/>
+            <a:ext cx="1523390" cy="187452"/>
+          </a:xfrm>
+          <a:prstGeom prst="roundRect">
+            <a:avLst>
+              <a:gd name="adj" fmla="val 39024"/>
+            </a:avLst>
+          </a:prstGeom>
+          <a:solidFill>
+            <a:schemeClr val="accent2"/>
+          </a:solidFill>
+          <a:ln w="12700">
+            <a:solidFill>
+              <a:schemeClr val="accent2"/>
+            </a:solidFill>
+            <a:prstDash val="solid"/>
+          </a:ln>
+        </p:spPr>
+      </p:sp>
+      <p:sp>
+        <p:nvSpPr>
+          <p:cNvPr id="39" name="Text 37"/>
+          <p:cNvSpPr txBox="1"/>
+          <p:nvPr/>
+        </p:nvSpPr>
+        <p:spPr>
+          <a:xfrm>
+            <a:off x="3730752" y="1911096"/>
+            <a:ext cx="1614830" cy="187452"/>
+          </a:xfrm>
+          <a:prstGeom prst="rect">
+            <a:avLst/>
+          </a:prstGeom>
+          <a:noFill/>
+          <a:ln/>
+        </p:spPr>
+        <p:txBody>
+          <a:bodyPr wrap="square" lIns="0" tIns="0" rIns="0" bIns="0" rtlCol="0" anchor="ctr"/>
+          <a:lstStyle/>
+          <a:p>
+            <a:pPr algn="ctr" indent="0" marL="0">
+              <a:buNone/>
+            </a:pPr>
+            <a:r>
+              <a:rPr lang="en-US" sz="800" b="1" dirty="0">
+                <a:solidFill>
+                  <a:schemeClr val="bg1"/>
+                </a:solidFill>
+              </a:rPr>
+              <a:t>Lista de espera</a:t>
+            </a:r>
+            <a:endParaRPr lang="en-US" sz="800" dirty="0"/>
+          </a:p>
+        </p:txBody>
+      </p:sp>
+      <p:sp>
+        <p:nvSpPr>
+          <p:cNvPr id="40" name="Shape 38"/>
+          <p:cNvSpPr/>
+          <p:nvPr/>
+        </p:nvSpPr>
+        <p:spPr>
+          <a:xfrm>
+            <a:off x="1417320" y="2217420"/>
+            <a:ext cx="64008" cy="132588"/>
+          </a:xfrm>
+          <a:prstGeom prst="rect">
+            <a:avLst/>
+          </a:prstGeom>
+          <a:solidFill>
+            <a:schemeClr val="accent2"/>
+          </a:solidFill>
+          <a:ln w="12700">
+            <a:solidFill>
+              <a:schemeClr val="accent2"/>
+            </a:solidFill>
+            <a:prstDash val="solid"/>
+          </a:ln>
+        </p:spPr>
+      </p:sp>
+      <p:sp>
+        <p:nvSpPr>
+          <p:cNvPr id="41" name="Text 39"/>
+          <p:cNvSpPr txBox="1"/>
+          <p:nvPr/>
+        </p:nvSpPr>
+        <p:spPr>
+          <a:xfrm>
+            <a:off x="1536192" y="2144268"/>
+            <a:ext cx="2176272" cy="278892"/>
+          </a:xfrm>
+          <a:prstGeom prst="rect">
+            <a:avLst/>
+          </a:prstGeom>
+          <a:noFill/>
+          <a:ln/>
+        </p:spPr>
+        <p:txBody>
+          <a:bodyPr wrap="square" lIns="0" tIns="0" rIns="0" bIns="0" rtlCol="0" anchor="ctr"/>
+          <a:lstStyle/>
+          <a:p>
+            <a:pPr indent="0" marL="0">
+              <a:buNone/>
+            </a:pPr>
+            <a:r>
+              <a:rPr lang="en-US" sz="900" dirty="0">
+                <a:solidFill>
+                  <a:schemeClr val="tx1"/>
+                </a:solidFill>
+              </a:rPr>
+              <a:t>Video de lanzamiento con niños (consentido)</a:t>
+            </a:r>
+            <a:endParaRPr lang="en-US" sz="900" dirty="0"/>
+          </a:p>
+        </p:txBody>
+      </p:sp>
+      <p:sp>
+        <p:nvSpPr>
+          <p:cNvPr id="42" name="Shape 40"/>
+          <p:cNvSpPr/>
+          <p:nvPr/>
+        </p:nvSpPr>
+        <p:spPr>
+          <a:xfrm>
+            <a:off x="4302557" y="2189988"/>
+            <a:ext cx="471221" cy="187452"/>
+          </a:xfrm>
+          <a:prstGeom prst="roundRect">
+            <a:avLst>
+              <a:gd name="adj" fmla="val 39024"/>
+            </a:avLst>
+          </a:prstGeom>
+          <a:solidFill>
+            <a:schemeClr val="accent2"/>
+          </a:solidFill>
+          <a:ln w="12700">
+            <a:solidFill>
+              <a:schemeClr val="accent2"/>
+            </a:solidFill>
+            <a:prstDash val="solid"/>
+          </a:ln>
+        </p:spPr>
+      </p:sp>
+      <p:sp>
+        <p:nvSpPr>
+          <p:cNvPr id="43" name="Text 41"/>
+          <p:cNvSpPr txBox="1"/>
+          <p:nvPr/>
+        </p:nvSpPr>
+        <p:spPr>
+          <a:xfrm>
+            <a:off x="4256837" y="2189988"/>
+            <a:ext cx="562661" cy="187452"/>
+          </a:xfrm>
+          <a:prstGeom prst="rect">
+            <a:avLst/>
+          </a:prstGeom>
+          <a:noFill/>
+          <a:ln/>
+        </p:spPr>
+        <p:txBody>
+          <a:bodyPr wrap="square" lIns="0" tIns="0" rIns="0" bIns="0" rtlCol="0" anchor="ctr"/>
+          <a:lstStyle/>
+          <a:p>
+            <a:pPr algn="ctr" indent="0" marL="0">
+              <a:buNone/>
+            </a:pPr>
+            <a:r>
+              <a:rPr lang="en-US" sz="700" b="1" dirty="0">
+                <a:solidFill>
+                  <a:schemeClr val="bg1"/>
+                </a:solidFill>
+              </a:rPr>
+              <a:t>S/300</a:t>
+            </a:r>
+            <a:endParaRPr lang="en-US" sz="700" dirty="0"/>
+          </a:p>
+        </p:txBody>
+      </p:sp>
+      <p:sp>
+        <p:nvSpPr>
+          <p:cNvPr id="44" name="Shape 42"/>
+          <p:cNvSpPr/>
+          <p:nvPr/>
+        </p:nvSpPr>
+        <p:spPr>
+          <a:xfrm>
+            <a:off x="1417320" y="2496312"/>
+            <a:ext cx="64008" cy="132588"/>
+          </a:xfrm>
+          <a:prstGeom prst="rect">
+            <a:avLst/>
+          </a:prstGeom>
+          <a:solidFill>
+            <a:schemeClr val="accent2"/>
+          </a:solidFill>
+          <a:ln w="12700">
+            <a:solidFill>
+              <a:schemeClr val="accent2"/>
+            </a:solidFill>
+            <a:prstDash val="solid"/>
+          </a:ln>
+        </p:spPr>
+      </p:sp>
+      <p:sp>
+        <p:nvSpPr>
+          <p:cNvPr id="45" name="Text 43"/>
+          <p:cNvSpPr txBox="1"/>
+          <p:nvPr/>
+        </p:nvSpPr>
+        <p:spPr>
+          <a:xfrm>
+            <a:off x="1536192" y="2423160"/>
+            <a:ext cx="2176272" cy="278892"/>
+          </a:xfrm>
+          <a:prstGeom prst="rect">
+            <a:avLst/>
+          </a:prstGeom>
+          <a:noFill/>
+          <a:ln/>
+        </p:spPr>
+        <p:txBody>
+          <a:bodyPr wrap="square" lIns="0" tIns="0" rIns="0" bIns="0" rtlCol="0" anchor="ctr"/>
+          <a:lstStyle/>
+          <a:p>
+            <a:pPr indent="0" marL="0">
+              <a:buNone/>
+            </a:pPr>
+            <a:r>
+              <a:rPr lang="en-US" sz="900" dirty="0">
+                <a:solidFill>
+                  <a:schemeClr val="tx1"/>
+                </a:solidFill>
+              </a:rPr>
+              <a:t>Influencers y pauta de expectativa</a:t>
+            </a:r>
+            <a:endParaRPr lang="en-US" sz="900" dirty="0"/>
+          </a:p>
+        </p:txBody>
+      </p:sp>
+      <p:sp>
+        <p:nvSpPr>
+          <p:cNvPr id="46" name="Shape 44"/>
+          <p:cNvSpPr/>
+          <p:nvPr/>
+        </p:nvSpPr>
+        <p:spPr>
+          <a:xfrm>
+            <a:off x="4828642" y="2468880"/>
+            <a:ext cx="997306" cy="187452"/>
+          </a:xfrm>
+          <a:prstGeom prst="roundRect">
+            <a:avLst>
+              <a:gd name="adj" fmla="val 39024"/>
+            </a:avLst>
+          </a:prstGeom>
+          <a:solidFill>
+            <a:schemeClr val="accent2"/>
+          </a:solidFill>
+          <a:ln w="12700">
+            <a:solidFill>
+              <a:schemeClr val="accent2"/>
+            </a:solidFill>
+            <a:prstDash val="solid"/>
+          </a:ln>
+        </p:spPr>
+      </p:sp>
+      <p:sp>
+        <p:nvSpPr>
+          <p:cNvPr id="47" name="Text 45"/>
+          <p:cNvSpPr txBox="1"/>
+          <p:nvPr/>
+        </p:nvSpPr>
+        <p:spPr>
+          <a:xfrm>
+            <a:off x="4782922" y="2468880"/>
+            <a:ext cx="1088746" cy="187452"/>
+          </a:xfrm>
+          <a:prstGeom prst="rect">
+            <a:avLst/>
+          </a:prstGeom>
+          <a:noFill/>
+          <a:ln/>
+        </p:spPr>
+        <p:txBody>
+          <a:bodyPr wrap="square" lIns="0" tIns="0" rIns="0" bIns="0" rtlCol="0" anchor="ctr"/>
+          <a:lstStyle/>
+          <a:p>
+            <a:pPr algn="ctr" indent="0" marL="0">
+              <a:buNone/>
+            </a:pPr>
+            <a:r>
+              <a:rPr lang="en-US" sz="800" b="1" dirty="0">
+                <a:solidFill>
+                  <a:schemeClr val="bg1"/>
+                </a:solidFill>
+              </a:rPr>
+              <a:t>40 packs</a:t>
+            </a:r>
+            <a:endParaRPr lang="en-US" sz="800" dirty="0"/>
+          </a:p>
+        </p:txBody>
+      </p:sp>
+      <p:sp>
+        <p:nvSpPr>
+          <p:cNvPr id="48" name="Text 46"/>
+          <p:cNvSpPr txBox="1"/>
+          <p:nvPr/>
+        </p:nvSpPr>
+        <p:spPr>
+          <a:xfrm>
+            <a:off x="548640" y="2720340"/>
+            <a:ext cx="868680" cy="242316"/>
+          </a:xfrm>
+          <a:prstGeom prst="rect">
+            <a:avLst/>
+          </a:prstGeom>
+          <a:noFill/>
+          <a:ln/>
+        </p:spPr>
+        <p:txBody>
+          <a:bodyPr wrap="square" lIns="0" tIns="0" rIns="0" bIns="0" rtlCol="0" anchor="ctr"/>
+          <a:lstStyle/>
+          <a:p>
+            <a:pPr indent="0" marL="0">
+              <a:buNone/>
+            </a:pPr>
+            <a:r>
+              <a:rPr lang="en-US" sz="800" b="1" spc="50" kern="0" dirty="0">
+                <a:solidFill>
+                  <a:schemeClr val="accent1"/>
+                </a:solidFill>
+              </a:rPr>
+              <a:t>LANZAR</a:t>
+            </a:r>
+            <a:endParaRPr lang="en-US" sz="800" dirty="0"/>
+          </a:p>
+        </p:txBody>
+      </p:sp>
+      <p:sp>
+        <p:nvSpPr>
+          <p:cNvPr id="49" name="Shape 47"/>
+          <p:cNvSpPr/>
+          <p:nvPr/>
+        </p:nvSpPr>
+        <p:spPr>
+          <a:xfrm>
+            <a:off x="1417320" y="2775204"/>
+            <a:ext cx="64008" cy="132588"/>
+          </a:xfrm>
+          <a:prstGeom prst="rect">
+            <a:avLst/>
+          </a:prstGeom>
+          <a:solidFill>
+            <a:schemeClr val="accent1"/>
+          </a:solidFill>
+          <a:ln w="12700">
+            <a:solidFill>
+              <a:schemeClr val="accent1"/>
+            </a:solidFill>
+            <a:prstDash val="solid"/>
+          </a:ln>
+        </p:spPr>
+      </p:sp>
+      <p:sp>
+        <p:nvSpPr>
+          <p:cNvPr id="50" name="Text 48"/>
+          <p:cNvSpPr txBox="1"/>
+          <p:nvPr/>
+        </p:nvSpPr>
+        <p:spPr>
+          <a:xfrm>
+            <a:off x="1536192" y="2702052"/>
+            <a:ext cx="2176272" cy="278892"/>
+          </a:xfrm>
+          <a:prstGeom prst="rect">
+            <a:avLst/>
+          </a:prstGeom>
+          <a:noFill/>
+          <a:ln/>
+        </p:spPr>
+        <p:txBody>
+          <a:bodyPr wrap="square" lIns="0" tIns="0" rIns="0" bIns="0" rtlCol="0" anchor="ctr"/>
+          <a:lstStyle/>
+          <a:p>
+            <a:pPr indent="0" marL="0">
+              <a:buNone/>
+            </a:pPr>
+            <a:r>
+              <a:rPr lang="en-US" sz="900" dirty="0">
+                <a:solidFill>
+                  <a:schemeClr val="tx1"/>
+                </a:solidFill>
+              </a:rPr>
+              <a:t>Apertura de los puntos 1, 2 y 3</a:t>
+            </a:r>
+            <a:endParaRPr lang="en-US" sz="900" dirty="0"/>
+          </a:p>
+        </p:txBody>
+      </p:sp>
+      <p:sp>
+        <p:nvSpPr>
+          <p:cNvPr id="51" name="Shape 49"/>
+          <p:cNvSpPr/>
+          <p:nvPr/>
+        </p:nvSpPr>
+        <p:spPr>
+          <a:xfrm>
+            <a:off x="5354726" y="2747772"/>
+            <a:ext cx="471221" cy="187452"/>
+          </a:xfrm>
+          <a:prstGeom prst="roundRect">
+            <a:avLst>
+              <a:gd name="adj" fmla="val 39024"/>
+            </a:avLst>
+          </a:prstGeom>
+          <a:solidFill>
+            <a:schemeClr val="accent1"/>
+          </a:solidFill>
+          <a:ln w="12700">
+            <a:solidFill>
+              <a:schemeClr val="accent1"/>
+            </a:solidFill>
+            <a:prstDash val="solid"/>
+          </a:ln>
+        </p:spPr>
+      </p:sp>
+      <p:sp>
+        <p:nvSpPr>
+          <p:cNvPr id="52" name="Text 50"/>
+          <p:cNvSpPr txBox="1"/>
+          <p:nvPr/>
+        </p:nvSpPr>
+        <p:spPr>
+          <a:xfrm>
+            <a:off x="5309006" y="2747772"/>
+            <a:ext cx="562661" cy="187452"/>
+          </a:xfrm>
+          <a:prstGeom prst="rect">
+            <a:avLst/>
+          </a:prstGeom>
+          <a:noFill/>
+          <a:ln/>
+        </p:spPr>
+        <p:txBody>
+          <a:bodyPr wrap="square" lIns="0" tIns="0" rIns="0" bIns="0" rtlCol="0" anchor="ctr"/>
+          <a:lstStyle/>
+          <a:p>
+            <a:pPr algn="ctr" indent="0" marL="0">
+              <a:buNone/>
+            </a:pPr>
+            <a:r>
+              <a:rPr lang="en-US" sz="700" b="1" dirty="0">
+                <a:solidFill>
+                  <a:schemeClr val="bg1"/>
+                </a:solidFill>
+              </a:rPr>
+              <a:t>Jockey</a:t>
+            </a:r>
+            <a:endParaRPr lang="en-US" sz="700" dirty="0"/>
+          </a:p>
+        </p:txBody>
+      </p:sp>
+      <p:sp>
+        <p:nvSpPr>
+          <p:cNvPr id="53" name="Shape 51"/>
+          <p:cNvSpPr/>
+          <p:nvPr/>
+        </p:nvSpPr>
+        <p:spPr>
+          <a:xfrm>
+            <a:off x="5880811" y="2747772"/>
+            <a:ext cx="471221" cy="187452"/>
+          </a:xfrm>
+          <a:prstGeom prst="roundRect">
+            <a:avLst>
+              <a:gd name="adj" fmla="val 39024"/>
+            </a:avLst>
+          </a:prstGeom>
+          <a:solidFill>
+            <a:schemeClr val="accent1"/>
+          </a:solidFill>
+          <a:ln w="12700">
+            <a:solidFill>
+              <a:schemeClr val="accent1"/>
+            </a:solidFill>
+            <a:prstDash val="solid"/>
+          </a:ln>
+        </p:spPr>
+      </p:sp>
+      <p:sp>
+        <p:nvSpPr>
+          <p:cNvPr id="54" name="Text 52"/>
+          <p:cNvSpPr txBox="1"/>
+          <p:nvPr/>
+        </p:nvSpPr>
+        <p:spPr>
+          <a:xfrm>
+            <a:off x="5835091" y="2747772"/>
+            <a:ext cx="562661" cy="187452"/>
+          </a:xfrm>
+          <a:prstGeom prst="rect">
+            <a:avLst/>
+          </a:prstGeom>
+          <a:noFill/>
+          <a:ln/>
+        </p:spPr>
+        <p:txBody>
+          <a:bodyPr wrap="square" lIns="0" tIns="0" rIns="0" bIns="0" rtlCol="0" anchor="ctr"/>
+          <a:lstStyle/>
+          <a:p>
+            <a:pPr algn="ctr" indent="0" marL="0">
+              <a:buNone/>
+            </a:pPr>
+            <a:r>
+              <a:rPr lang="en-US" sz="700" b="1" dirty="0">
+                <a:solidFill>
+                  <a:schemeClr val="bg1"/>
+                </a:solidFill>
+              </a:rPr>
+              <a:t>Punto 2 (B)</a:t>
+            </a:r>
+            <a:endParaRPr lang="en-US" sz="700" dirty="0"/>
+          </a:p>
+        </p:txBody>
+      </p:sp>
+      <p:sp>
+        <p:nvSpPr>
+          <p:cNvPr id="55" name="Shape 53"/>
+          <p:cNvSpPr/>
+          <p:nvPr/>
+        </p:nvSpPr>
+        <p:spPr>
+          <a:xfrm>
+            <a:off x="9037320" y="2747772"/>
+            <a:ext cx="471221" cy="187452"/>
+          </a:xfrm>
+          <a:prstGeom prst="roundRect">
+            <a:avLst>
+              <a:gd name="adj" fmla="val 39024"/>
+            </a:avLst>
+          </a:prstGeom>
+          <a:solidFill>
+            <a:schemeClr val="accent1"/>
+          </a:solidFill>
+          <a:ln w="12700">
+            <a:solidFill>
+              <a:schemeClr val="accent1"/>
+            </a:solidFill>
+            <a:prstDash val="solid"/>
+          </a:ln>
+        </p:spPr>
+      </p:sp>
+      <p:sp>
+        <p:nvSpPr>
+          <p:cNvPr id="56" name="Text 54"/>
+          <p:cNvSpPr txBox="1"/>
+          <p:nvPr/>
+        </p:nvSpPr>
+        <p:spPr>
+          <a:xfrm>
+            <a:off x="8991600" y="2747772"/>
+            <a:ext cx="562661" cy="187452"/>
+          </a:xfrm>
+          <a:prstGeom prst="rect">
+            <a:avLst/>
+          </a:prstGeom>
+          <a:noFill/>
+          <a:ln/>
+        </p:spPr>
+        <p:txBody>
+          <a:bodyPr wrap="square" lIns="0" tIns="0" rIns="0" bIns="0" rtlCol="0" anchor="ctr"/>
+          <a:lstStyle/>
+          <a:p>
+            <a:pPr algn="ctr" indent="0" marL="0">
+              <a:buNone/>
+            </a:pPr>
+            <a:r>
+              <a:rPr lang="en-US" sz="700" b="1" dirty="0">
+                <a:solidFill>
+                  <a:schemeClr val="bg1"/>
+                </a:solidFill>
+              </a:rPr>
+              <a:t>Punto 3 (A)</a:t>
+            </a:r>
+            <a:endParaRPr lang="en-US" sz="700" dirty="0"/>
+          </a:p>
+        </p:txBody>
+      </p:sp>
+      <p:sp>
+        <p:nvSpPr>
+          <p:cNvPr id="57" name="Shape 55"/>
+          <p:cNvSpPr/>
+          <p:nvPr/>
+        </p:nvSpPr>
+        <p:spPr>
+          <a:xfrm>
+            <a:off x="1417320" y="3054096"/>
+            <a:ext cx="64008" cy="132588"/>
+          </a:xfrm>
+          <a:prstGeom prst="rect">
+            <a:avLst/>
+          </a:prstGeom>
+          <a:solidFill>
+            <a:schemeClr val="accent1"/>
+          </a:solidFill>
+          <a:ln w="12700">
+            <a:solidFill>
+              <a:schemeClr val="accent1"/>
+            </a:solidFill>
+            <a:prstDash val="solid"/>
+          </a:ln>
+        </p:spPr>
+      </p:sp>
+      <p:sp>
+        <p:nvSpPr>
+          <p:cNvPr id="58" name="Text 56"/>
+          <p:cNvSpPr txBox="1"/>
+          <p:nvPr/>
+        </p:nvSpPr>
+        <p:spPr>
+          <a:xfrm>
+            <a:off x="1536192" y="2980944"/>
+            <a:ext cx="2176272" cy="278892"/>
+          </a:xfrm>
+          <a:prstGeom prst="rect">
+            <a:avLst/>
+          </a:prstGeom>
+          <a:noFill/>
+          <a:ln/>
+        </p:spPr>
+        <p:txBody>
+          <a:bodyPr wrap="square" lIns="0" tIns="0" rIns="0" bIns="0" rtlCol="0" anchor="ctr"/>
+          <a:lstStyle/>
+          <a:p>
+            <a:pPr indent="0" marL="0">
+              <a:buNone/>
+            </a:pPr>
+            <a:r>
+              <a:rPr lang="en-US" sz="900" dirty="0">
+                <a:solidFill>
+                  <a:schemeClr val="tx1"/>
+                </a:solidFill>
+              </a:rPr>
+              <a:t>Ferias pagadas con meta de 50 contactos</a:t>
+            </a:r>
+            <a:endParaRPr lang="en-US" sz="900" dirty="0"/>
+          </a:p>
+        </p:txBody>
+      </p:sp>
+      <p:sp>
+        <p:nvSpPr>
+          <p:cNvPr id="59" name="Shape 57"/>
+          <p:cNvSpPr/>
+          <p:nvPr/>
+        </p:nvSpPr>
+        <p:spPr>
+          <a:xfrm>
+            <a:off x="5880811" y="3026664"/>
+            <a:ext cx="471221" cy="187452"/>
+          </a:xfrm>
+          <a:prstGeom prst="roundRect">
+            <a:avLst>
+              <a:gd name="adj" fmla="val 39024"/>
+            </a:avLst>
+          </a:prstGeom>
+          <a:solidFill>
+            <a:schemeClr val="accent1"/>
+          </a:solidFill>
+          <a:ln w="12700">
+            <a:solidFill>
+              <a:schemeClr val="accent1"/>
+            </a:solidFill>
+            <a:prstDash val="solid"/>
+          </a:ln>
+        </p:spPr>
+      </p:sp>
+      <p:sp>
+        <p:nvSpPr>
+          <p:cNvPr id="60" name="Text 58"/>
+          <p:cNvSpPr txBox="1"/>
+          <p:nvPr/>
+        </p:nvSpPr>
+        <p:spPr>
+          <a:xfrm>
+            <a:off x="5835091" y="3026664"/>
+            <a:ext cx="562661" cy="187452"/>
+          </a:xfrm>
+          <a:prstGeom prst="rect">
+            <a:avLst/>
+          </a:prstGeom>
+          <a:noFill/>
+          <a:ln/>
+        </p:spPr>
+        <p:txBody>
+          <a:bodyPr wrap="square" lIns="0" tIns="0" rIns="0" bIns="0" rtlCol="0" anchor="ctr"/>
+          <a:lstStyle/>
+          <a:p>
+            <a:pPr algn="ctr" indent="0" marL="0">
+              <a:buNone/>
+            </a:pPr>
+            <a:r>
+              <a:rPr lang="en-US" sz="700" b="1" dirty="0">
+                <a:solidFill>
+                  <a:schemeClr val="bg1"/>
+                </a:solidFill>
+              </a:rPr>
+              <a:t>Escolar</a:t>
+            </a:r>
+            <a:endParaRPr lang="en-US" sz="700" dirty="0"/>
+          </a:p>
+        </p:txBody>
+      </p:sp>
+      <p:sp>
+        <p:nvSpPr>
+          <p:cNvPr id="61" name="Shape 59"/>
+          <p:cNvSpPr/>
+          <p:nvPr/>
+        </p:nvSpPr>
+        <p:spPr>
+          <a:xfrm>
+            <a:off x="6932981" y="3026664"/>
+            <a:ext cx="471221" cy="187452"/>
+          </a:xfrm>
+          <a:prstGeom prst="roundRect">
+            <a:avLst>
+              <a:gd name="adj" fmla="val 39024"/>
+            </a:avLst>
+          </a:prstGeom>
+          <a:solidFill>
+            <a:schemeClr val="accent1"/>
+          </a:solidFill>
+          <a:ln w="12700">
+            <a:solidFill>
+              <a:schemeClr val="accent1"/>
+            </a:solidFill>
+            <a:prstDash val="solid"/>
+          </a:ln>
+        </p:spPr>
+      </p:sp>
+      <p:sp>
+        <p:nvSpPr>
+          <p:cNvPr id="62" name="Text 60"/>
+          <p:cNvSpPr txBox="1"/>
+          <p:nvPr/>
+        </p:nvSpPr>
+        <p:spPr>
+          <a:xfrm>
+            <a:off x="6887261" y="3026664"/>
+            <a:ext cx="562661" cy="187452"/>
+          </a:xfrm>
+          <a:prstGeom prst="rect">
+            <a:avLst/>
+          </a:prstGeom>
+          <a:noFill/>
+          <a:ln/>
+        </p:spPr>
+        <p:txBody>
+          <a:bodyPr wrap="square" lIns="0" tIns="0" rIns="0" bIns="0" rtlCol="0" anchor="ctr"/>
+          <a:lstStyle/>
+          <a:p>
+            <a:pPr algn="ctr" indent="0" marL="0">
+              <a:buNone/>
+            </a:pPr>
+            <a:r>
+              <a:rPr lang="en-US" sz="700" b="1" dirty="0">
+                <a:solidFill>
+                  <a:schemeClr val="bg1"/>
+                </a:solidFill>
+              </a:rPr>
+              <a:t>11-abr</a:t>
+            </a:r>
+            <a:endParaRPr lang="en-US" sz="700" dirty="0"/>
+          </a:p>
+        </p:txBody>
+      </p:sp>
+      <p:sp>
+        <p:nvSpPr>
+          <p:cNvPr id="63" name="Text 61"/>
+          <p:cNvSpPr txBox="1"/>
+          <p:nvPr/>
+        </p:nvSpPr>
+        <p:spPr>
+          <a:xfrm>
+            <a:off x="548640" y="3278124"/>
+            <a:ext cx="868680" cy="242316"/>
+          </a:xfrm>
+          <a:prstGeom prst="rect">
+            <a:avLst/>
+          </a:prstGeom>
+          <a:noFill/>
+          <a:ln/>
+        </p:spPr>
+        <p:txBody>
+          <a:bodyPr wrap="square" lIns="0" tIns="0" rIns="0" bIns="0" rtlCol="0" anchor="ctr"/>
+          <a:lstStyle/>
+          <a:p>
+            <a:pPr indent="0" marL="0">
+              <a:buNone/>
+            </a:pPr>
+            <a:r>
+              <a:rPr lang="en-US" sz="800" b="1" spc="50" kern="0" dirty="0">
+                <a:solidFill>
+                  <a:schemeClr val="accent4"/>
+                </a:solidFill>
+              </a:rPr>
+              <a:t>FIDELIZAR</a:t>
+            </a:r>
+            <a:endParaRPr lang="en-US" sz="800" dirty="0"/>
+          </a:p>
+        </p:txBody>
+      </p:sp>
+      <p:sp>
+        <p:nvSpPr>
+          <p:cNvPr id="64" name="Shape 62"/>
+          <p:cNvSpPr/>
+          <p:nvPr/>
+        </p:nvSpPr>
+        <p:spPr>
+          <a:xfrm>
+            <a:off x="1417320" y="3332988"/>
+            <a:ext cx="64008" cy="132588"/>
+          </a:xfrm>
+          <a:prstGeom prst="rect">
+            <a:avLst/>
+          </a:prstGeom>
+          <a:solidFill>
+            <a:schemeClr val="accent4"/>
+          </a:solidFill>
+          <a:ln w="12700">
+            <a:solidFill>
+              <a:schemeClr val="accent4"/>
+            </a:solidFill>
+            <a:prstDash val="solid"/>
+          </a:ln>
+        </p:spPr>
+      </p:sp>
+      <p:sp>
+        <p:nvSpPr>
+          <p:cNvPr id="65" name="Text 63"/>
+          <p:cNvSpPr txBox="1"/>
+          <p:nvPr/>
+        </p:nvSpPr>
+        <p:spPr>
+          <a:xfrm>
+            <a:off x="1536192" y="3259836"/>
+            <a:ext cx="2176272" cy="278892"/>
+          </a:xfrm>
+          <a:prstGeom prst="rect">
+            <a:avLst/>
+          </a:prstGeom>
+          <a:noFill/>
+          <a:ln/>
+        </p:spPr>
+        <p:txBody>
+          <a:bodyPr wrap="square" lIns="0" tIns="0" rIns="0" bIns="0" rtlCol="0" anchor="ctr"/>
+          <a:lstStyle/>
+          <a:p>
+            <a:pPr indent="0" marL="0">
+              <a:buNone/>
+            </a:pPr>
+            <a:r>
+              <a:rPr lang="en-US" sz="900" dirty="0">
+                <a:solidFill>
+                  <a:schemeClr val="tx1"/>
+                </a:solidFill>
+              </a:rPr>
+              <a:t>Recompra por WhatsApp con aviso de la app</a:t>
+            </a:r>
+            <a:endParaRPr lang="en-US" sz="900" dirty="0"/>
+          </a:p>
+        </p:txBody>
+      </p:sp>
+      <p:sp>
+        <p:nvSpPr>
+          <p:cNvPr id="66" name="Shape 64"/>
+          <p:cNvSpPr/>
+          <p:nvPr/>
+        </p:nvSpPr>
+        <p:spPr>
+          <a:xfrm>
+            <a:off x="5354726" y="3305556"/>
+            <a:ext cx="6258154" cy="187452"/>
+          </a:xfrm>
+          <a:prstGeom prst="roundRect">
+            <a:avLst>
+              <a:gd name="adj" fmla="val 39024"/>
+            </a:avLst>
+          </a:prstGeom>
+          <a:solidFill>
+            <a:schemeClr val="accent4"/>
+          </a:solidFill>
+          <a:ln w="12700">
+            <a:solidFill>
+              <a:schemeClr val="accent4"/>
+            </a:solidFill>
+            <a:prstDash val="solid"/>
+          </a:ln>
+        </p:spPr>
+      </p:sp>
+      <p:sp>
+        <p:nvSpPr>
+          <p:cNvPr id="67" name="Text 65"/>
+          <p:cNvSpPr txBox="1"/>
+          <p:nvPr/>
+        </p:nvSpPr>
+        <p:spPr>
+          <a:xfrm>
+            <a:off x="5309006" y="3305556"/>
+            <a:ext cx="6349594" cy="187452"/>
+          </a:xfrm>
+          <a:prstGeom prst="rect">
+            <a:avLst/>
+          </a:prstGeom>
+          <a:noFill/>
+          <a:ln/>
+        </p:spPr>
+        <p:txBody>
+          <a:bodyPr wrap="square" lIns="0" tIns="0" rIns="0" bIns="0" rtlCol="0" anchor="ctr"/>
+          <a:lstStyle/>
+          <a:p>
+            <a:pPr algn="ctr" indent="0" marL="0">
+              <a:buNone/>
+            </a:pPr>
+            <a:r>
+              <a:rPr lang="en-US" sz="800" b="1" dirty="0">
+                <a:solidFill>
+                  <a:schemeClr val="bg1"/>
+                </a:solidFill>
+              </a:rPr>
+              <a:t>35 % de lo físico</a:t>
+            </a:r>
+            <a:endParaRPr lang="en-US" sz="800" dirty="0"/>
+          </a:p>
+        </p:txBody>
+      </p:sp>
+      <p:sp>
+        <p:nvSpPr>
+          <p:cNvPr id="68" name="Shape 66"/>
+          <p:cNvSpPr/>
+          <p:nvPr/>
+        </p:nvSpPr>
+        <p:spPr>
+          <a:xfrm>
+            <a:off x="1417320" y="3611880"/>
+            <a:ext cx="64008" cy="132588"/>
+          </a:xfrm>
+          <a:prstGeom prst="rect">
+            <a:avLst/>
+          </a:prstGeom>
+          <a:solidFill>
+            <a:schemeClr val="accent4"/>
+          </a:solidFill>
+          <a:ln w="12700">
+            <a:solidFill>
+              <a:schemeClr val="accent4"/>
+            </a:solidFill>
+            <a:prstDash val="solid"/>
+          </a:ln>
+        </p:spPr>
+      </p:sp>
+      <p:sp>
+        <p:nvSpPr>
+          <p:cNvPr id="69" name="Text 67"/>
+          <p:cNvSpPr txBox="1"/>
+          <p:nvPr/>
+        </p:nvSpPr>
+        <p:spPr>
+          <a:xfrm>
+            <a:off x="1536192" y="3538728"/>
+            <a:ext cx="2176272" cy="278892"/>
+          </a:xfrm>
+          <a:prstGeom prst="rect">
+            <a:avLst/>
+          </a:prstGeom>
+          <a:noFill/>
+          <a:ln/>
+        </p:spPr>
+        <p:txBody>
+          <a:bodyPr wrap="square" lIns="0" tIns="0" rIns="0" bIns="0" rtlCol="0" anchor="ctr"/>
+          <a:lstStyle/>
+          <a:p>
+            <a:pPr indent="0" marL="0">
+              <a:buNone/>
+            </a:pPr>
+            <a:r>
+              <a:rPr lang="en-US" sz="900" dirty="0">
+                <a:solidFill>
+                  <a:schemeClr val="tx1"/>
+                </a:solidFill>
+              </a:rPr>
+              <a:t>Mamás embajadoras con código</a:t>
+            </a:r>
+            <a:endParaRPr lang="en-US" sz="900" dirty="0"/>
+          </a:p>
+        </p:txBody>
+      </p:sp>
+      <p:sp>
+        <p:nvSpPr>
+          <p:cNvPr id="70" name="Shape 68"/>
+          <p:cNvSpPr/>
+          <p:nvPr/>
+        </p:nvSpPr>
+        <p:spPr>
+          <a:xfrm>
+            <a:off x="5354726" y="3584448"/>
+            <a:ext cx="997306" cy="187452"/>
+          </a:xfrm>
+          <a:prstGeom prst="roundRect">
+            <a:avLst>
+              <a:gd name="adj" fmla="val 39024"/>
+            </a:avLst>
+          </a:prstGeom>
+          <a:solidFill>
+            <a:schemeClr val="accent4"/>
+          </a:solidFill>
+          <a:ln w="12700">
+            <a:solidFill>
+              <a:schemeClr val="accent4"/>
+            </a:solidFill>
+            <a:prstDash val="solid"/>
+          </a:ln>
+        </p:spPr>
+      </p:sp>
+      <p:sp>
+        <p:nvSpPr>
+          <p:cNvPr id="71" name="Text 69"/>
+          <p:cNvSpPr txBox="1"/>
+          <p:nvPr/>
+        </p:nvSpPr>
+        <p:spPr>
+          <a:xfrm>
+            <a:off x="5309006" y="3584448"/>
+            <a:ext cx="1088746" cy="187452"/>
+          </a:xfrm>
+          <a:prstGeom prst="rect">
+            <a:avLst/>
+          </a:prstGeom>
+          <a:noFill/>
+          <a:ln/>
+        </p:spPr>
+        <p:txBody>
+          <a:bodyPr wrap="square" lIns="0" tIns="0" rIns="0" bIns="0" rtlCol="0" anchor="ctr"/>
+          <a:lstStyle/>
+          <a:p>
+            <a:pPr algn="ctr" indent="0" marL="0">
+              <a:buNone/>
+            </a:pPr>
+            <a:r>
+              <a:rPr lang="en-US" sz="800" b="1" dirty="0">
+                <a:solidFill>
+                  <a:schemeClr val="bg1"/>
+                </a:solidFill>
+              </a:rPr>
+              <a:t>Fundadoras</a:t>
+            </a:r>
+            <a:endParaRPr lang="en-US" sz="800" dirty="0"/>
+          </a:p>
+        </p:txBody>
+      </p:sp>
+      <p:sp>
+        <p:nvSpPr>
+          <p:cNvPr id="72" name="Shape 70"/>
+          <p:cNvSpPr/>
+          <p:nvPr/>
+        </p:nvSpPr>
+        <p:spPr>
+          <a:xfrm>
+            <a:off x="6406896" y="3584448"/>
+            <a:ext cx="5205984" cy="187452"/>
+          </a:xfrm>
+          <a:prstGeom prst="roundRect">
+            <a:avLst>
+              <a:gd name="adj" fmla="val 39024"/>
+            </a:avLst>
+          </a:prstGeom>
+          <a:solidFill>
+            <a:schemeClr val="accent4"/>
+          </a:solidFill>
+          <a:ln w="12700">
+            <a:solidFill>
+              <a:schemeClr val="accent4"/>
+            </a:solidFill>
+            <a:prstDash val="solid"/>
+          </a:ln>
+        </p:spPr>
+      </p:sp>
+      <p:sp>
+        <p:nvSpPr>
+          <p:cNvPr id="73" name="Text 71"/>
+          <p:cNvSpPr txBox="1"/>
+          <p:nvPr/>
+        </p:nvSpPr>
+        <p:spPr>
+          <a:xfrm>
+            <a:off x="6361176" y="3584448"/>
+            <a:ext cx="5297424" cy="187452"/>
+          </a:xfrm>
+          <a:prstGeom prst="rect">
+            <a:avLst/>
+          </a:prstGeom>
+          <a:noFill/>
+          <a:ln/>
+        </p:spPr>
+        <p:txBody>
+          <a:bodyPr wrap="square" lIns="0" tIns="0" rIns="0" bIns="0" rtlCol="0" anchor="ctr"/>
+          <a:lstStyle/>
+          <a:p>
+            <a:pPr algn="ctr" indent="0" marL="0">
+              <a:buNone/>
+            </a:pPr>
+            <a:r>
+              <a:rPr lang="en-US" sz="800" b="1" dirty="0">
+                <a:solidFill>
+                  <a:schemeClr val="bg1"/>
+                </a:solidFill>
+              </a:rPr>
+              <a:t>20 familias/mes</a:t>
+            </a:r>
+            <a:endParaRPr lang="en-US" sz="800" dirty="0"/>
+          </a:p>
+        </p:txBody>
+      </p:sp>
+      <p:sp>
+        <p:nvSpPr>
+          <p:cNvPr id="74" name="Shape 72"/>
+          <p:cNvSpPr/>
+          <p:nvPr/>
+        </p:nvSpPr>
+        <p:spPr>
+          <a:xfrm>
+            <a:off x="1417320" y="3890772"/>
+            <a:ext cx="64008" cy="132588"/>
+          </a:xfrm>
+          <a:prstGeom prst="rect">
+            <a:avLst/>
+          </a:prstGeom>
+          <a:solidFill>
+            <a:schemeClr val="accent4"/>
+          </a:solidFill>
+          <a:ln w="12700">
+            <a:solidFill>
+              <a:schemeClr val="accent4"/>
+            </a:solidFill>
+            <a:prstDash val="solid"/>
+          </a:ln>
+        </p:spPr>
+      </p:sp>
+      <p:sp>
+        <p:nvSpPr>
+          <p:cNvPr id="75" name="Text 73"/>
+          <p:cNvSpPr txBox="1"/>
+          <p:nvPr/>
+        </p:nvSpPr>
+        <p:spPr>
+          <a:xfrm>
+            <a:off x="1536192" y="3817620"/>
+            <a:ext cx="2176272" cy="278892"/>
+          </a:xfrm>
+          <a:prstGeom prst="rect">
+            <a:avLst/>
+          </a:prstGeom>
+          <a:noFill/>
+          <a:ln/>
+        </p:spPr>
+        <p:txBody>
+          <a:bodyPr wrap="square" lIns="0" tIns="0" rIns="0" bIns="0" rtlCol="0" anchor="ctr"/>
+          <a:lstStyle/>
+          <a:p>
+            <a:pPr indent="0" marL="0">
+              <a:buNone/>
+            </a:pPr>
+            <a:r>
+              <a:rPr lang="en-US" sz="900" dirty="0">
+                <a:solidFill>
+                  <a:schemeClr val="tx1"/>
+                </a:solidFill>
+              </a:rPr>
+              <a:t>Campaña "Escanea tu lote" en stands</a:t>
+            </a:r>
+            <a:endParaRPr lang="en-US" sz="900" dirty="0"/>
+          </a:p>
+        </p:txBody>
+      </p:sp>
+      <p:sp>
+        <p:nvSpPr>
+          <p:cNvPr id="76" name="Shape 74"/>
+          <p:cNvSpPr/>
+          <p:nvPr/>
+        </p:nvSpPr>
+        <p:spPr>
+          <a:xfrm>
+            <a:off x="5354726" y="3863340"/>
+            <a:ext cx="2049475" cy="187452"/>
+          </a:xfrm>
+          <a:prstGeom prst="roundRect">
+            <a:avLst>
+              <a:gd name="adj" fmla="val 39024"/>
+            </a:avLst>
+          </a:prstGeom>
+          <a:solidFill>
+            <a:schemeClr val="accent4"/>
+          </a:solidFill>
+          <a:ln w="12700">
+            <a:solidFill>
+              <a:schemeClr val="accent4"/>
+            </a:solidFill>
+            <a:prstDash val="solid"/>
+          </a:ln>
+        </p:spPr>
+      </p:sp>
+      <p:sp>
+        <p:nvSpPr>
+          <p:cNvPr id="77" name="Text 75"/>
+          <p:cNvSpPr txBox="1"/>
+          <p:nvPr/>
+        </p:nvSpPr>
+        <p:spPr>
+          <a:xfrm>
+            <a:off x="5309006" y="3863340"/>
+            <a:ext cx="2140915" cy="187452"/>
+          </a:xfrm>
+          <a:prstGeom prst="rect">
+            <a:avLst/>
+          </a:prstGeom>
+          <a:noFill/>
+          <a:ln/>
+        </p:spPr>
+        <p:txBody>
+          <a:bodyPr wrap="square" lIns="0" tIns="0" rIns="0" bIns="0" rtlCol="0" anchor="ctr"/>
+          <a:lstStyle/>
+          <a:p>
+            <a:pPr algn="ctr" indent="0" marL="0">
+              <a:buNone/>
+            </a:pPr>
+            <a:r>
+              <a:rPr lang="en-US" sz="800" b="1" dirty="0">
+                <a:solidFill>
+                  <a:schemeClr val="bg1"/>
+                </a:solidFill>
+              </a:rPr>
+              <a:t>15 % a 28 %</a:t>
+            </a:r>
+            <a:endParaRPr lang="en-US" sz="800" dirty="0"/>
+          </a:p>
+        </p:txBody>
+      </p:sp>
+      <p:sp>
+        <p:nvSpPr>
+          <p:cNvPr id="78" name="Shape 76"/>
+          <p:cNvSpPr/>
+          <p:nvPr/>
+        </p:nvSpPr>
+        <p:spPr>
+          <a:xfrm>
+            <a:off x="9037320" y="3863340"/>
+            <a:ext cx="471221" cy="187452"/>
+          </a:xfrm>
+          <a:prstGeom prst="roundRect">
+            <a:avLst>
+              <a:gd name="adj" fmla="val 39024"/>
+            </a:avLst>
+          </a:prstGeom>
+          <a:solidFill>
+            <a:schemeClr val="accent4"/>
+          </a:solidFill>
+          <a:ln w="12700">
+            <a:solidFill>
+              <a:schemeClr val="accent4"/>
+            </a:solidFill>
+            <a:prstDash val="solid"/>
+          </a:ln>
+        </p:spPr>
+      </p:sp>
+      <p:sp>
+        <p:nvSpPr>
+          <p:cNvPr id="79" name="Text 77"/>
+          <p:cNvSpPr txBox="1"/>
+          <p:nvPr/>
+        </p:nvSpPr>
+        <p:spPr>
+          <a:xfrm>
+            <a:off x="8991600" y="3863340"/>
+            <a:ext cx="562661" cy="187452"/>
+          </a:xfrm>
+          <a:prstGeom prst="rect">
+            <a:avLst/>
+          </a:prstGeom>
+          <a:noFill/>
+          <a:ln/>
+        </p:spPr>
+        <p:txBody>
+          <a:bodyPr wrap="square" lIns="0" tIns="0" rIns="0" bIns="0" rtlCol="0" anchor="ctr"/>
+          <a:lstStyle/>
+          <a:p>
+            <a:pPr algn="ctr" indent="0" marL="0">
+              <a:buNone/>
+            </a:pPr>
+            <a:r>
+              <a:rPr lang="en-US" sz="700" b="1" dirty="0">
+                <a:solidFill>
+                  <a:schemeClr val="bg1"/>
+                </a:solidFill>
+              </a:rPr>
+              <a:t>Punto 3</a:t>
+            </a:r>
+            <a:endParaRPr lang="en-US" sz="700" dirty="0"/>
+          </a:p>
+        </p:txBody>
+      </p:sp>
+      <p:sp>
+        <p:nvSpPr>
+          <p:cNvPr id="80" name="Text 78"/>
+          <p:cNvSpPr txBox="1"/>
+          <p:nvPr/>
+        </p:nvSpPr>
+        <p:spPr>
+          <a:xfrm>
+            <a:off x="548640" y="4114800"/>
+            <a:ext cx="868680" cy="242316"/>
+          </a:xfrm>
+          <a:prstGeom prst="rect">
+            <a:avLst/>
+          </a:prstGeom>
+          <a:noFill/>
+          <a:ln/>
+        </p:spPr>
+        <p:txBody>
+          <a:bodyPr wrap="square" lIns="0" tIns="0" rIns="0" bIns="0" rtlCol="0" anchor="ctr"/>
+          <a:lstStyle/>
+          <a:p>
+            <a:pPr indent="0" marL="0">
+              <a:buNone/>
+            </a:pPr>
+            <a:r>
+              <a:rPr lang="en-US" sz="800" b="1" spc="50" kern="0" dirty="0">
+                <a:solidFill>
+                  <a:schemeClr val="accent3"/>
+                </a:solidFill>
+              </a:rPr>
+              <a:t>CRECER</a:t>
+            </a:r>
+            <a:endParaRPr lang="en-US" sz="800" dirty="0"/>
+          </a:p>
+        </p:txBody>
+      </p:sp>
+      <p:sp>
+        <p:nvSpPr>
+          <p:cNvPr id="81" name="Shape 79"/>
+          <p:cNvSpPr/>
+          <p:nvPr/>
+        </p:nvSpPr>
+        <p:spPr>
+          <a:xfrm>
+            <a:off x="1417320" y="4169664"/>
+            <a:ext cx="64008" cy="132588"/>
+          </a:xfrm>
+          <a:prstGeom prst="rect">
+            <a:avLst/>
+          </a:prstGeom>
+          <a:solidFill>
+            <a:schemeClr val="accent3"/>
+          </a:solidFill>
+          <a:ln w="12700">
+            <a:solidFill>
+              <a:schemeClr val="accent3"/>
+            </a:solidFill>
+            <a:prstDash val="solid"/>
+          </a:ln>
+        </p:spPr>
+      </p:sp>
+      <p:sp>
+        <p:nvSpPr>
+          <p:cNvPr id="82" name="Text 80"/>
+          <p:cNvSpPr txBox="1"/>
+          <p:nvPr/>
+        </p:nvSpPr>
+        <p:spPr>
+          <a:xfrm>
+            <a:off x="1536192" y="4096512"/>
+            <a:ext cx="2176272" cy="278892"/>
+          </a:xfrm>
+          <a:prstGeom prst="rect">
+            <a:avLst/>
+          </a:prstGeom>
+          <a:noFill/>
+          <a:ln/>
+        </p:spPr>
+        <p:txBody>
+          <a:bodyPr wrap="square" lIns="0" tIns="0" rIns="0" bIns="0" rtlCol="0" anchor="ctr"/>
+          <a:lstStyle/>
+          <a:p>
+            <a:pPr indent="0" marL="0">
+              <a:buNone/>
+            </a:pPr>
+            <a:r>
+              <a:rPr lang="en-US" sz="900" dirty="0">
+                <a:solidFill>
+                  <a:schemeClr val="tx1"/>
+                </a:solidFill>
+              </a:rPr>
+              <a:t>Quioscos en colegios A y B</a:t>
+            </a:r>
+            <a:endParaRPr lang="en-US" sz="900" dirty="0"/>
+          </a:p>
+        </p:txBody>
+      </p:sp>
+      <p:sp>
+        <p:nvSpPr>
+          <p:cNvPr id="83" name="Shape 81"/>
+          <p:cNvSpPr/>
+          <p:nvPr/>
+        </p:nvSpPr>
+        <p:spPr>
+          <a:xfrm>
+            <a:off x="6406896" y="4142232"/>
+            <a:ext cx="2575560" cy="187452"/>
+          </a:xfrm>
+          <a:prstGeom prst="roundRect">
+            <a:avLst>
+              <a:gd name="adj" fmla="val 39024"/>
+            </a:avLst>
+          </a:prstGeom>
+          <a:solidFill>
+            <a:schemeClr val="accent3"/>
+          </a:solidFill>
+          <a:ln w="12700">
+            <a:solidFill>
+              <a:schemeClr val="accent3"/>
+            </a:solidFill>
+            <a:prstDash val="solid"/>
+          </a:ln>
+        </p:spPr>
+      </p:sp>
+      <p:sp>
+        <p:nvSpPr>
+          <p:cNvPr id="84" name="Text 82"/>
+          <p:cNvSpPr txBox="1"/>
+          <p:nvPr/>
+        </p:nvSpPr>
+        <p:spPr>
+          <a:xfrm>
+            <a:off x="6361176" y="4142232"/>
+            <a:ext cx="2667000" cy="187452"/>
+          </a:xfrm>
+          <a:prstGeom prst="rect">
+            <a:avLst/>
+          </a:prstGeom>
+          <a:noFill/>
+          <a:ln/>
+        </p:spPr>
+        <p:txBody>
+          <a:bodyPr wrap="square" lIns="0" tIns="0" rIns="0" bIns="0" rtlCol="0" anchor="ctr"/>
+          <a:lstStyle/>
+          <a:p>
+            <a:pPr algn="ctr" indent="0" marL="0">
+              <a:buNone/>
+            </a:pPr>
+            <a:r>
+              <a:rPr lang="en-US" sz="800" b="1" dirty="0">
+                <a:solidFill>
+                  <a:schemeClr val="tx2"/>
+                </a:solidFill>
+              </a:rPr>
+              <a:t>1 a 3</a:t>
+            </a:r>
+            <a:endParaRPr lang="en-US" sz="800" dirty="0"/>
+          </a:p>
+        </p:txBody>
+      </p:sp>
+      <p:sp>
+        <p:nvSpPr>
+          <p:cNvPr id="85" name="Shape 83"/>
+          <p:cNvSpPr/>
+          <p:nvPr/>
+        </p:nvSpPr>
+        <p:spPr>
+          <a:xfrm>
+            <a:off x="9037320" y="4142232"/>
+            <a:ext cx="2575560" cy="187452"/>
+          </a:xfrm>
+          <a:prstGeom prst="roundRect">
+            <a:avLst>
+              <a:gd name="adj" fmla="val 39024"/>
+            </a:avLst>
+          </a:prstGeom>
+          <a:solidFill>
+            <a:schemeClr val="accent3"/>
+          </a:solidFill>
+          <a:ln w="12700">
+            <a:solidFill>
+              <a:schemeClr val="accent3"/>
+            </a:solidFill>
+            <a:prstDash val="solid"/>
+          </a:ln>
+        </p:spPr>
+      </p:sp>
+      <p:sp>
+        <p:nvSpPr>
+          <p:cNvPr id="86" name="Text 84"/>
+          <p:cNvSpPr txBox="1"/>
+          <p:nvPr/>
+        </p:nvSpPr>
+        <p:spPr>
+          <a:xfrm>
+            <a:off x="8991600" y="4142232"/>
+            <a:ext cx="2667000" cy="187452"/>
+          </a:xfrm>
+          <a:prstGeom prst="rect">
+            <a:avLst/>
+          </a:prstGeom>
+          <a:noFill/>
+          <a:ln/>
+        </p:spPr>
+        <p:txBody>
+          <a:bodyPr wrap="square" lIns="0" tIns="0" rIns="0" bIns="0" rtlCol="0" anchor="ctr"/>
+          <a:lstStyle/>
+          <a:p>
+            <a:pPr algn="ctr" indent="0" marL="0">
+              <a:buNone/>
+            </a:pPr>
+            <a:r>
+              <a:rPr lang="en-US" sz="800" b="1" dirty="0">
+                <a:solidFill>
+                  <a:schemeClr val="tx2"/>
+                </a:solidFill>
+              </a:rPr>
+              <a:t>4 a 5</a:t>
+            </a:r>
+            <a:endParaRPr lang="en-US" sz="800" dirty="0"/>
+          </a:p>
+        </p:txBody>
+      </p:sp>
+      <p:sp>
+        <p:nvSpPr>
+          <p:cNvPr id="87" name="Shape 85"/>
+          <p:cNvSpPr/>
+          <p:nvPr/>
+        </p:nvSpPr>
+        <p:spPr>
+          <a:xfrm>
+            <a:off x="1417320" y="4448556"/>
+            <a:ext cx="64008" cy="132588"/>
+          </a:xfrm>
+          <a:prstGeom prst="rect">
+            <a:avLst/>
+          </a:prstGeom>
+          <a:solidFill>
+            <a:schemeClr val="accent3"/>
+          </a:solidFill>
+          <a:ln w="12700">
+            <a:solidFill>
+              <a:schemeClr val="accent3"/>
+            </a:solidFill>
+            <a:prstDash val="solid"/>
+          </a:ln>
+        </p:spPr>
+      </p:sp>
+      <p:sp>
+        <p:nvSpPr>
+          <p:cNvPr id="88" name="Text 86"/>
+          <p:cNvSpPr txBox="1"/>
+          <p:nvPr/>
+        </p:nvSpPr>
+        <p:spPr>
+          <a:xfrm>
+            <a:off x="1536192" y="4375404"/>
+            <a:ext cx="2176272" cy="278892"/>
+          </a:xfrm>
+          <a:prstGeom prst="rect">
+            <a:avLst/>
+          </a:prstGeom>
+          <a:noFill/>
+          <a:ln/>
+        </p:spPr>
+        <p:txBody>
+          <a:bodyPr wrap="square" lIns="0" tIns="0" rIns="0" bIns="0" rtlCol="0" anchor="ctr"/>
+          <a:lstStyle/>
+          <a:p>
+            <a:pPr indent="0" marL="0">
+              <a:buNone/>
+            </a:pPr>
+            <a:r>
+              <a:rPr lang="en-US" sz="900" dirty="0">
+                <a:solidFill>
+                  <a:schemeClr val="tx1"/>
+                </a:solidFill>
+              </a:rPr>
+              <a:t>Eventos sin costo: kermeses y cumpleaños</a:t>
+            </a:r>
+            <a:endParaRPr lang="en-US" sz="900" dirty="0"/>
+          </a:p>
+        </p:txBody>
+      </p:sp>
+      <p:sp>
+        <p:nvSpPr>
+          <p:cNvPr id="89" name="Shape 87"/>
+          <p:cNvSpPr/>
+          <p:nvPr/>
+        </p:nvSpPr>
+        <p:spPr>
+          <a:xfrm>
+            <a:off x="5354726" y="4421124"/>
+            <a:ext cx="997306" cy="187452"/>
+          </a:xfrm>
+          <a:prstGeom prst="roundRect">
+            <a:avLst>
+              <a:gd name="adj" fmla="val 39024"/>
+            </a:avLst>
+          </a:prstGeom>
+          <a:solidFill>
+            <a:schemeClr val="accent3"/>
+          </a:solidFill>
+          <a:ln w="12700">
+            <a:solidFill>
+              <a:schemeClr val="accent3"/>
+            </a:solidFill>
+            <a:prstDash val="solid"/>
+          </a:ln>
+        </p:spPr>
+      </p:sp>
+      <p:sp>
+        <p:nvSpPr>
+          <p:cNvPr id="90" name="Text 88"/>
+          <p:cNvSpPr txBox="1"/>
+          <p:nvPr/>
+        </p:nvSpPr>
+        <p:spPr>
+          <a:xfrm>
+            <a:off x="5309006" y="4421124"/>
+            <a:ext cx="1088746" cy="187452"/>
+          </a:xfrm>
+          <a:prstGeom prst="rect">
+            <a:avLst/>
+          </a:prstGeom>
+          <a:noFill/>
+          <a:ln/>
+        </p:spPr>
+        <p:txBody>
+          <a:bodyPr wrap="square" lIns="0" tIns="0" rIns="0" bIns="0" rtlCol="0" anchor="ctr"/>
+          <a:lstStyle/>
+          <a:p>
+            <a:pPr algn="ctr" indent="0" marL="0">
+              <a:buNone/>
+            </a:pPr>
+            <a:r>
+              <a:rPr lang="en-US" sz="800" b="1" dirty="0">
+                <a:solidFill>
+                  <a:schemeClr val="tx2"/>
+                </a:solidFill>
+              </a:rPr>
+              <a:t>1–2/mes</a:t>
+            </a:r>
+            <a:endParaRPr lang="en-US" sz="800" dirty="0"/>
+          </a:p>
+        </p:txBody>
+      </p:sp>
+      <p:sp>
+        <p:nvSpPr>
+          <p:cNvPr id="91" name="Shape 89"/>
+          <p:cNvSpPr/>
+          <p:nvPr/>
+        </p:nvSpPr>
+        <p:spPr>
+          <a:xfrm>
+            <a:off x="6406896" y="4421124"/>
+            <a:ext cx="4153814" cy="187452"/>
+          </a:xfrm>
+          <a:prstGeom prst="roundRect">
+            <a:avLst>
+              <a:gd name="adj" fmla="val 39024"/>
+            </a:avLst>
+          </a:prstGeom>
+          <a:solidFill>
+            <a:schemeClr val="accent3"/>
+          </a:solidFill>
+          <a:ln w="12700">
+            <a:solidFill>
+              <a:schemeClr val="accent3"/>
+            </a:solidFill>
+            <a:prstDash val="solid"/>
+          </a:ln>
+        </p:spPr>
+      </p:sp>
+      <p:sp>
+        <p:nvSpPr>
+          <p:cNvPr id="92" name="Text 90"/>
+          <p:cNvSpPr txBox="1"/>
+          <p:nvPr/>
+        </p:nvSpPr>
+        <p:spPr>
+          <a:xfrm>
+            <a:off x="6361176" y="4421124"/>
+            <a:ext cx="4245254" cy="187452"/>
+          </a:xfrm>
+          <a:prstGeom prst="rect">
+            <a:avLst/>
+          </a:prstGeom>
+          <a:noFill/>
+          <a:ln/>
+        </p:spPr>
+        <p:txBody>
+          <a:bodyPr wrap="square" lIns="0" tIns="0" rIns="0" bIns="0" rtlCol="0" anchor="ctr"/>
+          <a:lstStyle/>
+          <a:p>
+            <a:pPr algn="ctr" indent="0" marL="0">
+              <a:buNone/>
+            </a:pPr>
+            <a:r>
+              <a:rPr lang="en-US" sz="800" b="1" dirty="0">
+                <a:solidFill>
+                  <a:schemeClr val="tx2"/>
+                </a:solidFill>
+              </a:rPr>
+              <a:t>3–5/mes</a:t>
+            </a:r>
+            <a:endParaRPr lang="en-US" sz="800" dirty="0"/>
+          </a:p>
+        </p:txBody>
+      </p:sp>
+      <p:sp>
+        <p:nvSpPr>
+          <p:cNvPr id="93" name="Shape 91"/>
+          <p:cNvSpPr/>
+          <p:nvPr/>
+        </p:nvSpPr>
+        <p:spPr>
+          <a:xfrm>
+            <a:off x="10615574" y="4421124"/>
+            <a:ext cx="997306" cy="187452"/>
+          </a:xfrm>
+          <a:prstGeom prst="roundRect">
+            <a:avLst>
+              <a:gd name="adj" fmla="val 39024"/>
+            </a:avLst>
+          </a:prstGeom>
+          <a:solidFill>
+            <a:schemeClr val="accent3"/>
+          </a:solidFill>
+          <a:ln w="12700">
+            <a:solidFill>
+              <a:schemeClr val="accent3"/>
+            </a:solidFill>
+            <a:prstDash val="solid"/>
+          </a:ln>
+        </p:spPr>
+      </p:sp>
+      <p:sp>
+        <p:nvSpPr>
+          <p:cNvPr id="94" name="Text 92"/>
+          <p:cNvSpPr txBox="1"/>
+          <p:nvPr/>
+        </p:nvSpPr>
+        <p:spPr>
+          <a:xfrm>
+            <a:off x="10569854" y="4421124"/>
+            <a:ext cx="1088746" cy="187452"/>
+          </a:xfrm>
+          <a:prstGeom prst="rect">
+            <a:avLst/>
+          </a:prstGeom>
+          <a:noFill/>
+          <a:ln/>
+        </p:spPr>
+        <p:txBody>
+          <a:bodyPr wrap="square" lIns="0" tIns="0" rIns="0" bIns="0" rtlCol="0" anchor="ctr"/>
+          <a:lstStyle/>
+          <a:p>
+            <a:pPr algn="ctr" indent="0" marL="0">
+              <a:buNone/>
+            </a:pPr>
+            <a:r>
+              <a:rPr lang="en-US" sz="800" b="1" dirty="0">
+                <a:solidFill>
+                  <a:schemeClr val="tx2"/>
+                </a:solidFill>
+              </a:rPr>
+              <a:t>2–3/mes</a:t>
+            </a:r>
+            <a:endParaRPr lang="en-US" sz="800" dirty="0"/>
+          </a:p>
+        </p:txBody>
+      </p:sp>
+      <p:sp>
+        <p:nvSpPr>
+          <p:cNvPr id="95" name="Shape 93"/>
+          <p:cNvSpPr/>
+          <p:nvPr/>
+        </p:nvSpPr>
+        <p:spPr>
+          <a:xfrm>
+            <a:off x="1417320" y="4727448"/>
+            <a:ext cx="64008" cy="132588"/>
+          </a:xfrm>
+          <a:prstGeom prst="rect">
+            <a:avLst/>
+          </a:prstGeom>
+          <a:solidFill>
+            <a:schemeClr val="accent3"/>
+          </a:solidFill>
+          <a:ln w="12700">
+            <a:solidFill>
+              <a:schemeClr val="accent3"/>
+            </a:solidFill>
+            <a:prstDash val="solid"/>
+          </a:ln>
+        </p:spPr>
+      </p:sp>
+      <p:sp>
+        <p:nvSpPr>
+          <p:cNvPr id="96" name="Text 94"/>
+          <p:cNvSpPr txBox="1"/>
+          <p:nvPr/>
+        </p:nvSpPr>
+        <p:spPr>
+          <a:xfrm>
+            <a:off x="1536192" y="4654296"/>
+            <a:ext cx="2176272" cy="278892"/>
+          </a:xfrm>
+          <a:prstGeom prst="rect">
+            <a:avLst/>
+          </a:prstGeom>
+          <a:noFill/>
+          <a:ln/>
+        </p:spPr>
+        <p:txBody>
+          <a:bodyPr wrap="square" lIns="0" tIns="0" rIns="0" bIns="0" rtlCol="0" anchor="ctr"/>
+          <a:lstStyle/>
+          <a:p>
+            <a:pPr indent="0" marL="0">
+              <a:buNone/>
+            </a:pPr>
+            <a:r>
+              <a:rPr lang="en-US" sz="900" dirty="0">
+                <a:solidFill>
+                  <a:schemeClr val="tx1"/>
+                </a:solidFill>
+              </a:rPr>
+              <a:t>Campañas Madre, Padre y Día del Niño</a:t>
+            </a:r>
+            <a:endParaRPr lang="en-US" sz="900" dirty="0"/>
+          </a:p>
+        </p:txBody>
+      </p:sp>
+      <p:sp>
+        <p:nvSpPr>
+          <p:cNvPr id="97" name="Shape 95"/>
+          <p:cNvSpPr/>
+          <p:nvPr/>
+        </p:nvSpPr>
+        <p:spPr>
+          <a:xfrm>
+            <a:off x="7459066" y="4700016"/>
+            <a:ext cx="471221" cy="187452"/>
+          </a:xfrm>
+          <a:prstGeom prst="roundRect">
+            <a:avLst>
+              <a:gd name="adj" fmla="val 39024"/>
+            </a:avLst>
+          </a:prstGeom>
+          <a:solidFill>
+            <a:schemeClr val="accent3"/>
+          </a:solidFill>
+          <a:ln w="12700">
+            <a:solidFill>
+              <a:schemeClr val="accent3"/>
+            </a:solidFill>
+            <a:prstDash val="solid"/>
+          </a:ln>
+        </p:spPr>
+      </p:sp>
+      <p:sp>
+        <p:nvSpPr>
+          <p:cNvPr id="98" name="Text 96"/>
+          <p:cNvSpPr txBox="1"/>
+          <p:nvPr/>
+        </p:nvSpPr>
+        <p:spPr>
+          <a:xfrm>
+            <a:off x="7413346" y="4700016"/>
+            <a:ext cx="562661" cy="187452"/>
+          </a:xfrm>
+          <a:prstGeom prst="rect">
+            <a:avLst/>
+          </a:prstGeom>
+          <a:noFill/>
+          <a:ln/>
+        </p:spPr>
+        <p:txBody>
+          <a:bodyPr wrap="square" lIns="0" tIns="0" rIns="0" bIns="0" rtlCol="0" anchor="ctr"/>
+          <a:lstStyle/>
+          <a:p>
+            <a:pPr algn="ctr" indent="0" marL="0">
+              <a:buNone/>
+            </a:pPr>
+            <a:r>
+              <a:rPr lang="en-US" sz="700" b="1" dirty="0">
+                <a:solidFill>
+                  <a:schemeClr val="tx2"/>
+                </a:solidFill>
+              </a:rPr>
+              <a:t>9-may</a:t>
+            </a:r>
+            <a:endParaRPr lang="en-US" sz="700" dirty="0"/>
+          </a:p>
+        </p:txBody>
+      </p:sp>
+      <p:sp>
+        <p:nvSpPr>
+          <p:cNvPr id="99" name="Shape 97"/>
+          <p:cNvSpPr/>
+          <p:nvPr/>
+        </p:nvSpPr>
+        <p:spPr>
+          <a:xfrm>
+            <a:off x="7985150" y="4700016"/>
+            <a:ext cx="471221" cy="187452"/>
+          </a:xfrm>
+          <a:prstGeom prst="roundRect">
+            <a:avLst>
+              <a:gd name="adj" fmla="val 39024"/>
+            </a:avLst>
+          </a:prstGeom>
+          <a:solidFill>
+            <a:schemeClr val="accent3"/>
+          </a:solidFill>
+          <a:ln w="12700">
+            <a:solidFill>
+              <a:schemeClr val="accent3"/>
+            </a:solidFill>
+            <a:prstDash val="solid"/>
+          </a:ln>
+        </p:spPr>
+      </p:sp>
+      <p:sp>
+        <p:nvSpPr>
+          <p:cNvPr id="100" name="Text 98"/>
+          <p:cNvSpPr txBox="1"/>
+          <p:nvPr/>
+        </p:nvSpPr>
+        <p:spPr>
+          <a:xfrm>
+            <a:off x="7939430" y="4700016"/>
+            <a:ext cx="562661" cy="187452"/>
+          </a:xfrm>
+          <a:prstGeom prst="rect">
+            <a:avLst/>
+          </a:prstGeom>
+          <a:noFill/>
+          <a:ln/>
+        </p:spPr>
+        <p:txBody>
+          <a:bodyPr wrap="square" lIns="0" tIns="0" rIns="0" bIns="0" rtlCol="0" anchor="ctr"/>
+          <a:lstStyle/>
+          <a:p>
+            <a:pPr algn="ctr" indent="0" marL="0">
+              <a:buNone/>
+            </a:pPr>
+            <a:r>
+              <a:rPr lang="en-US" sz="700" b="1" dirty="0">
+                <a:solidFill>
+                  <a:schemeClr val="tx2"/>
+                </a:solidFill>
+              </a:rPr>
+              <a:t>20-jun</a:t>
+            </a:r>
+            <a:endParaRPr lang="en-US" sz="700" dirty="0"/>
+          </a:p>
+        </p:txBody>
+      </p:sp>
+      <p:sp>
+        <p:nvSpPr>
+          <p:cNvPr id="101" name="Shape 99"/>
+          <p:cNvSpPr/>
+          <p:nvPr/>
+        </p:nvSpPr>
+        <p:spPr>
+          <a:xfrm>
+            <a:off x="9037320" y="4700016"/>
+            <a:ext cx="471221" cy="187452"/>
+          </a:xfrm>
+          <a:prstGeom prst="roundRect">
+            <a:avLst>
+              <a:gd name="adj" fmla="val 39024"/>
+            </a:avLst>
+          </a:prstGeom>
+          <a:solidFill>
+            <a:schemeClr val="accent3"/>
+          </a:solidFill>
+          <a:ln w="12700">
+            <a:solidFill>
+              <a:schemeClr val="accent3"/>
+            </a:solidFill>
+            <a:prstDash val="solid"/>
+          </a:ln>
+        </p:spPr>
+      </p:sp>
+      <p:sp>
+        <p:nvSpPr>
+          <p:cNvPr id="102" name="Text 100"/>
+          <p:cNvSpPr txBox="1"/>
+          <p:nvPr/>
+        </p:nvSpPr>
+        <p:spPr>
+          <a:xfrm>
+            <a:off x="8991600" y="4700016"/>
+            <a:ext cx="562661" cy="187452"/>
+          </a:xfrm>
+          <a:prstGeom prst="rect">
+            <a:avLst/>
+          </a:prstGeom>
+          <a:noFill/>
+          <a:ln/>
+        </p:spPr>
+        <p:txBody>
+          <a:bodyPr wrap="square" lIns="0" tIns="0" rIns="0" bIns="0" rtlCol="0" anchor="ctr"/>
+          <a:lstStyle/>
+          <a:p>
+            <a:pPr algn="ctr" indent="0" marL="0">
+              <a:buNone/>
+            </a:pPr>
+            <a:r>
+              <a:rPr lang="en-US" sz="700" b="1" dirty="0">
+                <a:solidFill>
+                  <a:schemeClr val="tx2"/>
+                </a:solidFill>
+              </a:rPr>
+              <a:t>15-ago</a:t>
+            </a:r>
+            <a:endParaRPr lang="en-US" sz="700" dirty="0"/>
+          </a:p>
+        </p:txBody>
+      </p:sp>
+      <p:sp>
+        <p:nvSpPr>
+          <p:cNvPr id="103" name="Shape 101"/>
+          <p:cNvSpPr/>
+          <p:nvPr/>
+        </p:nvSpPr>
+        <p:spPr>
+          <a:xfrm>
+            <a:off x="1417320" y="5006340"/>
+            <a:ext cx="64008" cy="132588"/>
+          </a:xfrm>
+          <a:prstGeom prst="rect">
+            <a:avLst/>
+          </a:prstGeom>
+          <a:solidFill>
+            <a:schemeClr val="accent3"/>
+          </a:solidFill>
+          <a:ln w="12700">
+            <a:solidFill>
+              <a:schemeClr val="accent3"/>
+            </a:solidFill>
+            <a:prstDash val="solid"/>
+          </a:ln>
+        </p:spPr>
+      </p:sp>
+      <p:sp>
+        <p:nvSpPr>
+          <p:cNvPr id="104" name="Text 102"/>
+          <p:cNvSpPr txBox="1"/>
+          <p:nvPr/>
+        </p:nvSpPr>
+        <p:spPr>
+          <a:xfrm>
+            <a:off x="1536192" y="4933188"/>
+            <a:ext cx="2176272" cy="278892"/>
+          </a:xfrm>
+          <a:prstGeom prst="rect">
+            <a:avLst/>
+          </a:prstGeom>
+          <a:noFill/>
+          <a:ln/>
+        </p:spPr>
+        <p:txBody>
+          <a:bodyPr wrap="square" lIns="0" tIns="0" rIns="0" bIns="0" rtlCol="0" anchor="ctr"/>
+          <a:lstStyle/>
+          <a:p>
+            <a:pPr indent="0" marL="0">
+              <a:buNone/>
+            </a:pPr>
+            <a:r>
+              <a:rPr lang="en-US" sz="900" dirty="0">
+                <a:solidFill>
+                  <a:schemeClr val="tx1"/>
+                </a:solidFill>
+              </a:rPr>
+              <a:t>Navidad: cajas para regalo y empresas</a:t>
+            </a:r>
+            <a:endParaRPr lang="en-US" sz="900" dirty="0"/>
+          </a:p>
+        </p:txBody>
+      </p:sp>
+      <p:sp>
+        <p:nvSpPr>
+          <p:cNvPr id="105" name="Shape 103"/>
+          <p:cNvSpPr/>
+          <p:nvPr/>
+        </p:nvSpPr>
+        <p:spPr>
+          <a:xfrm>
+            <a:off x="10615574" y="4978908"/>
+            <a:ext cx="997306" cy="187452"/>
+          </a:xfrm>
+          <a:prstGeom prst="roundRect">
+            <a:avLst>
+              <a:gd name="adj" fmla="val 39024"/>
+            </a:avLst>
+          </a:prstGeom>
+          <a:solidFill>
+            <a:schemeClr val="accent3"/>
+          </a:solidFill>
+          <a:ln w="12700">
+            <a:solidFill>
+              <a:schemeClr val="accent3"/>
+            </a:solidFill>
+            <a:prstDash val="solid"/>
+          </a:ln>
+        </p:spPr>
+      </p:sp>
+      <p:sp>
+        <p:nvSpPr>
+          <p:cNvPr id="106" name="Text 104"/>
+          <p:cNvSpPr txBox="1"/>
+          <p:nvPr/>
+        </p:nvSpPr>
+        <p:spPr>
+          <a:xfrm>
+            <a:off x="10569854" y="4978908"/>
+            <a:ext cx="1088746" cy="187452"/>
+          </a:xfrm>
+          <a:prstGeom prst="rect">
+            <a:avLst/>
+          </a:prstGeom>
+          <a:noFill/>
+          <a:ln/>
+        </p:spPr>
+        <p:txBody>
+          <a:bodyPr wrap="square" lIns="0" tIns="0" rIns="0" bIns="0" rtlCol="0" anchor="ctr"/>
+          <a:lstStyle/>
+          <a:p>
+            <a:pPr algn="ctr" indent="0" marL="0">
+              <a:buNone/>
+            </a:pPr>
+            <a:r>
+              <a:rPr lang="en-US" sz="800" b="1" dirty="0">
+                <a:solidFill>
+                  <a:schemeClr val="tx2"/>
+                </a:solidFill>
+              </a:rPr>
+              <a:t>Por pedido</a:t>
+            </a:r>
+            <a:endParaRPr lang="en-US" sz="800" dirty="0"/>
+          </a:p>
+        </p:txBody>
+      </p:sp>
+      <p:sp>
+        <p:nvSpPr>
+          <p:cNvPr id="107" name="Shape 105"/>
+          <p:cNvSpPr/>
+          <p:nvPr/>
+        </p:nvSpPr>
+        <p:spPr>
+          <a:xfrm>
+            <a:off x="548640" y="5276088"/>
+            <a:ext cx="11091672" cy="384048"/>
+          </a:xfrm>
+          <a:prstGeom prst="roundRect">
+            <a:avLst>
+              <a:gd name="adj" fmla="val 19048"/>
+            </a:avLst>
+          </a:prstGeom>
+          <a:solidFill>
+            <a:schemeClr val="tx2"/>
+          </a:solidFill>
+          <a:ln w="12700">
+            <a:solidFill>
+              <a:schemeClr val="tx2"/>
+            </a:solidFill>
+            <a:prstDash val="solid"/>
+          </a:ln>
+        </p:spPr>
+      </p:sp>
+      <p:sp>
+        <p:nvSpPr>
+          <p:cNvPr id="108" name="Text 106"/>
+          <p:cNvSpPr txBox="1"/>
+          <p:nvPr/>
+        </p:nvSpPr>
+        <p:spPr>
+          <a:xfrm>
+            <a:off x="731520" y="5276088"/>
+            <a:ext cx="2971800" cy="384048"/>
+          </a:xfrm>
+          <a:prstGeom prst="rect">
+            <a:avLst/>
+          </a:prstGeom>
+          <a:noFill/>
+          <a:ln/>
+        </p:spPr>
+        <p:txBody>
+          <a:bodyPr wrap="square" lIns="0" tIns="0" rIns="0" bIns="0" rtlCol="0" anchor="ctr"/>
+          <a:lstStyle/>
+          <a:p>
+            <a:pPr indent="0" marL="0">
+              <a:buNone/>
+            </a:pPr>
+            <a:r>
+              <a:rPr lang="en-US" sz="1050" b="1" dirty="0">
+                <a:solidFill>
+                  <a:schemeClr val="bg1"/>
+                </a:solidFill>
+              </a:rPr>
+              <a:t>Inversión del mes (S/)  </a:t>
+            </a:r>
+            <a:pPr indent="0" marL="0">
+              <a:buNone/>
+            </a:pPr>
+            <a:r>
+              <a:rPr lang="en-US" sz="900" dirty="0">
+                <a:solidFill>
+                  <a:schemeClr val="accent3"/>
+                </a:solidFill>
+              </a:rPr>
+              <a:t>total 24,544</a:t>
+            </a:r>
+            <a:endParaRPr lang="en-US" sz="1050" dirty="0"/>
+          </a:p>
+        </p:txBody>
+      </p:sp>
+      <p:sp>
+        <p:nvSpPr>
+          <p:cNvPr id="109" name="Text 107"/>
+          <p:cNvSpPr txBox="1"/>
+          <p:nvPr/>
+        </p:nvSpPr>
+        <p:spPr>
+          <a:xfrm>
+            <a:off x="3749040" y="5276088"/>
+            <a:ext cx="526085" cy="384048"/>
+          </a:xfrm>
+          <a:prstGeom prst="rect">
+            <a:avLst/>
+          </a:prstGeom>
+          <a:noFill/>
+          <a:ln/>
+        </p:spPr>
+        <p:txBody>
+          <a:bodyPr wrap="square" lIns="0" tIns="0" rIns="0" bIns="0" rtlCol="0" anchor="ctr"/>
+          <a:lstStyle/>
+          <a:p>
+            <a:pPr algn="ctr" indent="0" marL="0">
+              <a:buNone/>
+            </a:pPr>
+            <a:r>
+              <a:rPr lang="en-US" sz="950" b="1" dirty="0">
+                <a:solidFill>
+                  <a:schemeClr val="bg1"/>
+                </a:solidFill>
+              </a:rPr>
+              <a:t>–</a:t>
+            </a:r>
+            <a:endParaRPr lang="en-US" sz="950" dirty="0"/>
+          </a:p>
+        </p:txBody>
+      </p:sp>
+      <p:sp>
+        <p:nvSpPr>
+          <p:cNvPr id="110" name="Text 108"/>
+          <p:cNvSpPr txBox="1"/>
+          <p:nvPr/>
+        </p:nvSpPr>
+        <p:spPr>
+          <a:xfrm>
+            <a:off x="4275125" y="5276088"/>
+            <a:ext cx="526085" cy="384048"/>
+          </a:xfrm>
+          <a:prstGeom prst="rect">
+            <a:avLst/>
+          </a:prstGeom>
+          <a:noFill/>
+          <a:ln/>
+        </p:spPr>
+        <p:txBody>
+          <a:bodyPr wrap="square" lIns="0" tIns="0" rIns="0" bIns="0" rtlCol="0" anchor="ctr"/>
+          <a:lstStyle/>
+          <a:p>
+            <a:pPr algn="ctr" indent="0" marL="0">
+              <a:buNone/>
+            </a:pPr>
+            <a:r>
+              <a:rPr lang="en-US" sz="950" b="1" dirty="0">
+                <a:solidFill>
+                  <a:schemeClr val="bg1"/>
+                </a:solidFill>
+              </a:rPr>
+              <a:t>300</a:t>
+            </a:r>
+            <a:endParaRPr lang="en-US" sz="950" dirty="0"/>
+          </a:p>
+        </p:txBody>
+      </p:sp>
+      <p:sp>
+        <p:nvSpPr>
+          <p:cNvPr id="111" name="Text 109"/>
+          <p:cNvSpPr txBox="1"/>
+          <p:nvPr/>
+        </p:nvSpPr>
+        <p:spPr>
+          <a:xfrm>
+            <a:off x="4801210" y="5276088"/>
+            <a:ext cx="526085" cy="384048"/>
+          </a:xfrm>
+          <a:prstGeom prst="rect">
+            <a:avLst/>
+          </a:prstGeom>
+          <a:noFill/>
+          <a:ln/>
+        </p:spPr>
+        <p:txBody>
+          <a:bodyPr wrap="square" lIns="0" tIns="0" rIns="0" bIns="0" rtlCol="0" anchor="ctr"/>
+          <a:lstStyle/>
+          <a:p>
+            <a:pPr algn="ctr" indent="0" marL="0">
+              <a:buNone/>
+            </a:pPr>
+            <a:r>
+              <a:rPr lang="en-US" sz="950" b="1" dirty="0">
+                <a:solidFill>
+                  <a:schemeClr val="bg1"/>
+                </a:solidFill>
+              </a:rPr>
+              <a:t>1,458</a:t>
+            </a:r>
+            <a:endParaRPr lang="en-US" sz="950" dirty="0"/>
+          </a:p>
+        </p:txBody>
+      </p:sp>
+      <p:sp>
+        <p:nvSpPr>
+          <p:cNvPr id="112" name="Text 110"/>
+          <p:cNvSpPr txBox="1"/>
+          <p:nvPr/>
+        </p:nvSpPr>
+        <p:spPr>
+          <a:xfrm>
+            <a:off x="5327294" y="5276088"/>
+            <a:ext cx="526085" cy="384048"/>
+          </a:xfrm>
+          <a:prstGeom prst="rect">
+            <a:avLst/>
+          </a:prstGeom>
+          <a:noFill/>
+          <a:ln/>
+        </p:spPr>
+        <p:txBody>
+          <a:bodyPr wrap="square" lIns="0" tIns="0" rIns="0" bIns="0" rtlCol="0" anchor="ctr"/>
+          <a:lstStyle/>
+          <a:p>
+            <a:pPr algn="ctr" indent="0" marL="0">
+              <a:buNone/>
+            </a:pPr>
+            <a:r>
+              <a:rPr lang="en-US" sz="950" b="1" dirty="0">
+                <a:solidFill>
+                  <a:schemeClr val="bg1"/>
+                </a:solidFill>
+              </a:rPr>
+              <a:t>2,506</a:t>
+            </a:r>
+            <a:endParaRPr lang="en-US" sz="950" dirty="0"/>
+          </a:p>
+        </p:txBody>
+      </p:sp>
+      <p:sp>
+        <p:nvSpPr>
+          <p:cNvPr id="113" name="Text 111"/>
+          <p:cNvSpPr txBox="1"/>
+          <p:nvPr/>
+        </p:nvSpPr>
+        <p:spPr>
+          <a:xfrm>
+            <a:off x="5853379" y="5276088"/>
+            <a:ext cx="526085" cy="384048"/>
+          </a:xfrm>
+          <a:prstGeom prst="rect">
+            <a:avLst/>
+          </a:prstGeom>
+          <a:noFill/>
+          <a:ln/>
+        </p:spPr>
+        <p:txBody>
+          <a:bodyPr wrap="square" lIns="0" tIns="0" rIns="0" bIns="0" rtlCol="0" anchor="ctr"/>
+          <a:lstStyle/>
+          <a:p>
+            <a:pPr algn="ctr" indent="0" marL="0">
+              <a:buNone/>
+            </a:pPr>
+            <a:r>
+              <a:rPr lang="en-US" sz="950" b="1" dirty="0">
+                <a:solidFill>
+                  <a:schemeClr val="accent3"/>
+                </a:solidFill>
+              </a:rPr>
+              <a:t>3,290</a:t>
+            </a:r>
+            <a:endParaRPr lang="en-US" sz="950" dirty="0"/>
+          </a:p>
+        </p:txBody>
+      </p:sp>
+      <p:sp>
+        <p:nvSpPr>
+          <p:cNvPr id="114" name="Text 112"/>
+          <p:cNvSpPr txBox="1"/>
+          <p:nvPr/>
+        </p:nvSpPr>
+        <p:spPr>
+          <a:xfrm>
+            <a:off x="6379464" y="5276088"/>
+            <a:ext cx="526085" cy="384048"/>
+          </a:xfrm>
+          <a:prstGeom prst="rect">
+            <a:avLst/>
+          </a:prstGeom>
+          <a:noFill/>
+          <a:ln/>
+        </p:spPr>
+        <p:txBody>
+          <a:bodyPr wrap="square" lIns="0" tIns="0" rIns="0" bIns="0" rtlCol="0" anchor="ctr"/>
+          <a:lstStyle/>
+          <a:p>
+            <a:pPr algn="ctr" indent="0" marL="0">
+              <a:buNone/>
+            </a:pPr>
+            <a:r>
+              <a:rPr lang="en-US" sz="950" b="1" dirty="0">
+                <a:solidFill>
+                  <a:schemeClr val="bg1"/>
+                </a:solidFill>
+              </a:rPr>
+              <a:t>1,540</a:t>
+            </a:r>
+            <a:endParaRPr lang="en-US" sz="950" dirty="0"/>
+          </a:p>
+        </p:txBody>
+      </p:sp>
+      <p:sp>
+        <p:nvSpPr>
+          <p:cNvPr id="115" name="Text 113"/>
+          <p:cNvSpPr txBox="1"/>
+          <p:nvPr/>
+        </p:nvSpPr>
+        <p:spPr>
+          <a:xfrm>
+            <a:off x="6905549" y="5276088"/>
+            <a:ext cx="526085" cy="384048"/>
+          </a:xfrm>
+          <a:prstGeom prst="rect">
+            <a:avLst/>
+          </a:prstGeom>
+          <a:noFill/>
+          <a:ln/>
+        </p:spPr>
+        <p:txBody>
+          <a:bodyPr wrap="square" lIns="0" tIns="0" rIns="0" bIns="0" rtlCol="0" anchor="ctr"/>
+          <a:lstStyle/>
+          <a:p>
+            <a:pPr algn="ctr" indent="0" marL="0">
+              <a:buNone/>
+            </a:pPr>
+            <a:r>
+              <a:rPr lang="en-US" sz="950" b="1" dirty="0">
+                <a:solidFill>
+                  <a:schemeClr val="accent3"/>
+                </a:solidFill>
+              </a:rPr>
+              <a:t>3,610</a:t>
+            </a:r>
+            <a:endParaRPr lang="en-US" sz="950" dirty="0"/>
+          </a:p>
+        </p:txBody>
+      </p:sp>
+      <p:sp>
+        <p:nvSpPr>
+          <p:cNvPr id="116" name="Text 114"/>
+          <p:cNvSpPr txBox="1"/>
+          <p:nvPr/>
+        </p:nvSpPr>
+        <p:spPr>
+          <a:xfrm>
+            <a:off x="7431634" y="5276088"/>
+            <a:ext cx="526085" cy="384048"/>
+          </a:xfrm>
+          <a:prstGeom prst="rect">
+            <a:avLst/>
+          </a:prstGeom>
+          <a:noFill/>
+          <a:ln/>
+        </p:spPr>
+        <p:txBody>
+          <a:bodyPr wrap="square" lIns="0" tIns="0" rIns="0" bIns="0" rtlCol="0" anchor="ctr"/>
+          <a:lstStyle/>
+          <a:p>
+            <a:pPr algn="ctr" indent="0" marL="0">
+              <a:buNone/>
+            </a:pPr>
+            <a:r>
+              <a:rPr lang="en-US" sz="950" b="1" dirty="0">
+                <a:solidFill>
+                  <a:schemeClr val="bg1"/>
+                </a:solidFill>
+              </a:rPr>
+              <a:t>1,700</a:t>
+            </a:r>
+            <a:endParaRPr lang="en-US" sz="950" dirty="0"/>
+          </a:p>
+        </p:txBody>
+      </p:sp>
+      <p:sp>
+        <p:nvSpPr>
+          <p:cNvPr id="117" name="Text 115"/>
+          <p:cNvSpPr txBox="1"/>
+          <p:nvPr/>
+        </p:nvSpPr>
+        <p:spPr>
+          <a:xfrm>
+            <a:off x="7957718" y="5276088"/>
+            <a:ext cx="526085" cy="384048"/>
+          </a:xfrm>
+          <a:prstGeom prst="rect">
+            <a:avLst/>
+          </a:prstGeom>
+          <a:noFill/>
+          <a:ln/>
+        </p:spPr>
+        <p:txBody>
+          <a:bodyPr wrap="square" lIns="0" tIns="0" rIns="0" bIns="0" rtlCol="0" anchor="ctr"/>
+          <a:lstStyle/>
+          <a:p>
+            <a:pPr algn="ctr" indent="0" marL="0">
+              <a:buNone/>
+            </a:pPr>
+            <a:r>
+              <a:rPr lang="en-US" sz="950" b="1" dirty="0">
+                <a:solidFill>
+                  <a:schemeClr val="bg1"/>
+                </a:solidFill>
+              </a:rPr>
+              <a:t>1,540</a:t>
+            </a:r>
+            <a:endParaRPr lang="en-US" sz="950" dirty="0"/>
+          </a:p>
+        </p:txBody>
+      </p:sp>
+      <p:sp>
+        <p:nvSpPr>
+          <p:cNvPr id="118" name="Text 116"/>
+          <p:cNvSpPr txBox="1"/>
+          <p:nvPr/>
+        </p:nvSpPr>
+        <p:spPr>
+          <a:xfrm>
+            <a:off x="8483803" y="5276088"/>
+            <a:ext cx="526085" cy="384048"/>
+          </a:xfrm>
+          <a:prstGeom prst="rect">
+            <a:avLst/>
+          </a:prstGeom>
+          <a:noFill/>
+          <a:ln/>
+        </p:spPr>
+        <p:txBody>
+          <a:bodyPr wrap="square" lIns="0" tIns="0" rIns="0" bIns="0" rtlCol="0" anchor="ctr"/>
+          <a:lstStyle/>
+          <a:p>
+            <a:pPr algn="ctr" indent="0" marL="0">
+              <a:buNone/>
+            </a:pPr>
+            <a:r>
+              <a:rPr lang="en-US" sz="950" b="1" dirty="0">
+                <a:solidFill>
+                  <a:schemeClr val="bg1"/>
+                </a:solidFill>
+              </a:rPr>
+              <a:t>1,380</a:t>
+            </a:r>
+            <a:endParaRPr lang="en-US" sz="950" dirty="0"/>
+          </a:p>
+        </p:txBody>
+      </p:sp>
+      <p:sp>
+        <p:nvSpPr>
+          <p:cNvPr id="119" name="Text 117"/>
+          <p:cNvSpPr txBox="1"/>
+          <p:nvPr/>
+        </p:nvSpPr>
+        <p:spPr>
+          <a:xfrm>
+            <a:off x="9009888" y="5276088"/>
+            <a:ext cx="526085" cy="384048"/>
+          </a:xfrm>
+          <a:prstGeom prst="rect">
+            <a:avLst/>
+          </a:prstGeom>
+          <a:noFill/>
+          <a:ln/>
+        </p:spPr>
+        <p:txBody>
+          <a:bodyPr wrap="square" lIns="0" tIns="0" rIns="0" bIns="0" rtlCol="0" anchor="ctr"/>
+          <a:lstStyle/>
+          <a:p>
+            <a:pPr algn="ctr" indent="0" marL="0">
+              <a:buNone/>
+            </a:pPr>
+            <a:r>
+              <a:rPr lang="en-US" sz="950" b="1" dirty="0">
+                <a:solidFill>
+                  <a:schemeClr val="bg1"/>
+                </a:solidFill>
+              </a:rPr>
+              <a:t>1,540</a:t>
+            </a:r>
+            <a:endParaRPr lang="en-US" sz="950" dirty="0"/>
+          </a:p>
+        </p:txBody>
+      </p:sp>
+      <p:sp>
+        <p:nvSpPr>
+          <p:cNvPr id="120" name="Text 118"/>
+          <p:cNvSpPr txBox="1"/>
+          <p:nvPr/>
+        </p:nvSpPr>
+        <p:spPr>
+          <a:xfrm>
+            <a:off x="9535973" y="5276088"/>
+            <a:ext cx="526085" cy="384048"/>
+          </a:xfrm>
+          <a:prstGeom prst="rect">
+            <a:avLst/>
+          </a:prstGeom>
+          <a:noFill/>
+          <a:ln/>
+        </p:spPr>
+        <p:txBody>
+          <a:bodyPr wrap="square" lIns="0" tIns="0" rIns="0" bIns="0" rtlCol="0" anchor="ctr"/>
+          <a:lstStyle/>
+          <a:p>
+            <a:pPr algn="ctr" indent="0" marL="0">
+              <a:buNone/>
+            </a:pPr>
+            <a:r>
+              <a:rPr lang="en-US" sz="950" b="1" dirty="0">
+                <a:solidFill>
+                  <a:schemeClr val="bg1"/>
+                </a:solidFill>
+              </a:rPr>
+              <a:t>1,540</a:t>
+            </a:r>
+            <a:endParaRPr lang="en-US" sz="950" dirty="0"/>
+          </a:p>
+        </p:txBody>
+      </p:sp>
+      <p:sp>
+        <p:nvSpPr>
+          <p:cNvPr id="121" name="Text 119"/>
+          <p:cNvSpPr txBox="1"/>
+          <p:nvPr/>
+        </p:nvSpPr>
+        <p:spPr>
+          <a:xfrm>
+            <a:off x="10062058" y="5276088"/>
+            <a:ext cx="526085" cy="384048"/>
+          </a:xfrm>
+          <a:prstGeom prst="rect">
+            <a:avLst/>
+          </a:prstGeom>
+          <a:noFill/>
+          <a:ln/>
+        </p:spPr>
+        <p:txBody>
+          <a:bodyPr wrap="square" lIns="0" tIns="0" rIns="0" bIns="0" rtlCol="0" anchor="ctr"/>
+          <a:lstStyle/>
+          <a:p>
+            <a:pPr algn="ctr" indent="0" marL="0">
+              <a:buNone/>
+            </a:pPr>
+            <a:r>
+              <a:rPr lang="en-US" sz="950" b="1" dirty="0">
+                <a:solidFill>
+                  <a:schemeClr val="bg1"/>
+                </a:solidFill>
+              </a:rPr>
+              <a:t>1,540</a:t>
+            </a:r>
+            <a:endParaRPr lang="en-US" sz="950" dirty="0"/>
+          </a:p>
+        </p:txBody>
+      </p:sp>
+      <p:sp>
+        <p:nvSpPr>
+          <p:cNvPr id="122" name="Text 120"/>
+          <p:cNvSpPr txBox="1"/>
+          <p:nvPr/>
+        </p:nvSpPr>
+        <p:spPr>
+          <a:xfrm>
+            <a:off x="10588142" y="5276088"/>
+            <a:ext cx="526085" cy="384048"/>
+          </a:xfrm>
+          <a:prstGeom prst="rect">
+            <a:avLst/>
+          </a:prstGeom>
+          <a:noFill/>
+          <a:ln/>
+        </p:spPr>
+        <p:txBody>
+          <a:bodyPr wrap="square" lIns="0" tIns="0" rIns="0" bIns="0" rtlCol="0" anchor="ctr"/>
+          <a:lstStyle/>
+          <a:p>
+            <a:pPr algn="ctr" indent="0" marL="0">
+              <a:buNone/>
+            </a:pPr>
+            <a:r>
+              <a:rPr lang="en-US" sz="950" b="1" dirty="0">
+                <a:solidFill>
+                  <a:schemeClr val="bg1"/>
+                </a:solidFill>
+              </a:rPr>
+              <a:t>1,380</a:t>
+            </a:r>
+            <a:endParaRPr lang="en-US" sz="950" dirty="0"/>
+          </a:p>
+        </p:txBody>
+      </p:sp>
+      <p:sp>
+        <p:nvSpPr>
+          <p:cNvPr id="123" name="Text 121"/>
+          <p:cNvSpPr txBox="1"/>
+          <p:nvPr/>
+        </p:nvSpPr>
+        <p:spPr>
+          <a:xfrm>
+            <a:off x="11114227" y="5276088"/>
+            <a:ext cx="526085" cy="384048"/>
+          </a:xfrm>
+          <a:prstGeom prst="rect">
+            <a:avLst/>
+          </a:prstGeom>
+          <a:noFill/>
+          <a:ln/>
+        </p:spPr>
+        <p:txBody>
+          <a:bodyPr wrap="square" lIns="0" tIns="0" rIns="0" bIns="0" rtlCol="0" anchor="ctr"/>
+          <a:lstStyle/>
+          <a:p>
+            <a:pPr algn="ctr" indent="0" marL="0">
+              <a:buNone/>
+            </a:pPr>
+            <a:r>
+              <a:rPr lang="en-US" sz="950" b="1" dirty="0">
+                <a:solidFill>
+                  <a:schemeClr val="bg1"/>
+                </a:solidFill>
+              </a:rPr>
+              <a:t>1,220</a:t>
+            </a:r>
+            <a:endParaRPr lang="en-US" sz="950" dirty="0"/>
+          </a:p>
+        </p:txBody>
+      </p:sp>
+      <p:sp>
+        <p:nvSpPr>
+          <p:cNvPr id="124" name="Shape 122"/>
+          <p:cNvSpPr/>
+          <p:nvPr/>
+        </p:nvSpPr>
+        <p:spPr>
+          <a:xfrm>
+            <a:off x="548640" y="5696712"/>
+            <a:ext cx="11091672" cy="457200"/>
+          </a:xfrm>
+          <a:prstGeom prst="roundRect">
+            <a:avLst>
+              <a:gd name="adj" fmla="val 16000"/>
+            </a:avLst>
+          </a:prstGeom>
+          <a:solidFill>
+            <a:schemeClr val="bg1"/>
+          </a:solidFill>
+          <a:ln w="12700">
+            <a:solidFill>
+              <a:schemeClr val="bg1"/>
+            </a:solidFill>
+            <a:prstDash val="solid"/>
+          </a:ln>
+        </p:spPr>
+      </p:sp>
+      <p:sp>
+        <p:nvSpPr>
+          <p:cNvPr id="125" name="Text 123"/>
+          <p:cNvSpPr txBox="1"/>
+          <p:nvPr/>
+        </p:nvSpPr>
+        <p:spPr>
+          <a:xfrm>
+            <a:off x="731520" y="5696712"/>
+            <a:ext cx="2971800" cy="457200"/>
+          </a:xfrm>
+          <a:prstGeom prst="rect">
+            <a:avLst/>
+          </a:prstGeom>
+          <a:noFill/>
+          <a:ln/>
+        </p:spPr>
+        <p:txBody>
+          <a:bodyPr wrap="square" lIns="0" tIns="0" rIns="0" bIns="0" rtlCol="0" anchor="ctr"/>
+          <a:lstStyle/>
+          <a:p>
+            <a:pPr indent="0" marL="0">
+              <a:buNone/>
+            </a:pPr>
+            <a:r>
+              <a:rPr lang="en-US" sz="1050" b="1" dirty="0">
+                <a:solidFill>
+                  <a:schemeClr val="tx2"/>
+                </a:solidFill>
+              </a:rPr>
+              <a:t>Meta del mes</a:t>
+            </a:r>
+            <a:endParaRPr lang="en-US" sz="1050" dirty="0"/>
+          </a:p>
+        </p:txBody>
+      </p:sp>
+      <p:sp>
+        <p:nvSpPr>
+          <p:cNvPr id="126" name="Text 124"/>
+          <p:cNvSpPr txBox="1"/>
+          <p:nvPr/>
+        </p:nvSpPr>
+        <p:spPr>
+          <a:xfrm>
+            <a:off x="3749040" y="5696712"/>
+            <a:ext cx="526085" cy="457200"/>
+          </a:xfrm>
+          <a:prstGeom prst="rect">
+            <a:avLst/>
+          </a:prstGeom>
+          <a:noFill/>
+          <a:ln/>
+        </p:spPr>
+        <p:txBody>
+          <a:bodyPr wrap="square" lIns="0" tIns="0" rIns="0" bIns="0" rtlCol="0" anchor="ctr"/>
+          <a:lstStyle/>
+          <a:p>
+            <a:pPr algn="ctr" indent="0" marL="0">
+              <a:buNone/>
+            </a:pPr>
+            <a:r>
+              <a:rPr lang="en-US" sz="750" dirty="0">
+                <a:solidFill>
+                  <a:schemeClr val="accent2"/>
+                </a:solidFill>
+              </a:rPr>
+              <a:t>20 en espera</a:t>
+            </a:r>
+            <a:endParaRPr lang="en-US" sz="750" dirty="0"/>
+          </a:p>
+        </p:txBody>
+      </p:sp>
+      <p:sp>
+        <p:nvSpPr>
+          <p:cNvPr id="127" name="Text 125"/>
+          <p:cNvSpPr txBox="1"/>
+          <p:nvPr/>
+        </p:nvSpPr>
+        <p:spPr>
+          <a:xfrm>
+            <a:off x="4275125" y="5696712"/>
+            <a:ext cx="526085" cy="457200"/>
+          </a:xfrm>
+          <a:prstGeom prst="rect">
+            <a:avLst/>
+          </a:prstGeom>
+          <a:noFill/>
+          <a:ln/>
+        </p:spPr>
+        <p:txBody>
+          <a:bodyPr wrap="square" lIns="0" tIns="0" rIns="0" bIns="0" rtlCol="0" anchor="ctr"/>
+          <a:lstStyle/>
+          <a:p>
+            <a:pPr algn="ctr" indent="0" marL="0">
+              <a:buNone/>
+            </a:pPr>
+            <a:r>
+              <a:rPr lang="en-US" sz="750" dirty="0">
+                <a:solidFill>
+                  <a:schemeClr val="accent2"/>
+                </a:solidFill>
+              </a:rPr>
+              <a:t>50 en espera</a:t>
+            </a:r>
+            <a:endParaRPr lang="en-US" sz="750" dirty="0"/>
+          </a:p>
+        </p:txBody>
+      </p:sp>
+      <p:sp>
+        <p:nvSpPr>
+          <p:cNvPr id="128" name="Text 126"/>
+          <p:cNvSpPr txBox="1"/>
+          <p:nvPr/>
+        </p:nvSpPr>
+        <p:spPr>
+          <a:xfrm>
+            <a:off x="4801210" y="5696712"/>
+            <a:ext cx="526085" cy="457200"/>
+          </a:xfrm>
+          <a:prstGeom prst="rect">
+            <a:avLst/>
+          </a:prstGeom>
+          <a:noFill/>
+          <a:ln/>
+        </p:spPr>
+        <p:txBody>
+          <a:bodyPr wrap="square" lIns="0" tIns="0" rIns="0" bIns="0" rtlCol="0" anchor="ctr"/>
+          <a:lstStyle/>
+          <a:p>
+            <a:pPr algn="ctr" indent="0" marL="0">
+              <a:buNone/>
+            </a:pPr>
+            <a:r>
+              <a:rPr lang="en-US" sz="750" dirty="0">
+                <a:solidFill>
+                  <a:schemeClr val="accent2"/>
+                </a:solidFill>
+              </a:rPr>
+              <a:t>100 en espera</a:t>
+            </a:r>
+            <a:endParaRPr lang="en-US" sz="750" dirty="0"/>
+          </a:p>
+        </p:txBody>
+      </p:sp>
+      <p:sp>
+        <p:nvSpPr>
+          <p:cNvPr id="129" name="Text 127"/>
+          <p:cNvSpPr txBox="1"/>
+          <p:nvPr/>
+        </p:nvSpPr>
+        <p:spPr>
+          <a:xfrm>
+            <a:off x="5327294" y="5696712"/>
+            <a:ext cx="526085" cy="457200"/>
+          </a:xfrm>
+          <a:prstGeom prst="rect">
+            <a:avLst/>
+          </a:prstGeom>
+          <a:noFill/>
+          <a:ln/>
+        </p:spPr>
+        <p:txBody>
+          <a:bodyPr wrap="square" lIns="0" tIns="0" rIns="0" bIns="0" rtlCol="0" anchor="ctr"/>
+          <a:lstStyle/>
+          <a:p>
+            <a:pPr algn="ctr" indent="0" marL="0">
+              <a:buNone/>
+            </a:pPr>
+            <a:r>
+              <a:rPr lang="en-US" sz="950" b="1" dirty="0">
+                <a:solidFill>
+                  <a:schemeClr val="accent1"/>
+                </a:solidFill>
+              </a:rPr>
+              <a:t>870</a:t>
+            </a:r>
+            <a:endParaRPr lang="en-US" sz="950" dirty="0"/>
+          </a:p>
+        </p:txBody>
+      </p:sp>
+      <p:sp>
+        <p:nvSpPr>
+          <p:cNvPr id="130" name="Text 128"/>
+          <p:cNvSpPr txBox="1"/>
+          <p:nvPr/>
+        </p:nvSpPr>
+        <p:spPr>
+          <a:xfrm>
+            <a:off x="5853379" y="5696712"/>
+            <a:ext cx="526085" cy="457200"/>
+          </a:xfrm>
+          <a:prstGeom prst="rect">
+            <a:avLst/>
+          </a:prstGeom>
+          <a:noFill/>
+          <a:ln/>
+        </p:spPr>
+        <p:txBody>
+          <a:bodyPr wrap="square" lIns="0" tIns="0" rIns="0" bIns="0" rtlCol="0" anchor="ctr"/>
+          <a:lstStyle/>
+          <a:p>
+            <a:pPr algn="ctr" indent="0" marL="0">
+              <a:buNone/>
+            </a:pPr>
+            <a:r>
+              <a:rPr lang="en-US" sz="950" b="1" dirty="0">
+                <a:solidFill>
+                  <a:schemeClr val="accent1"/>
+                </a:solidFill>
+              </a:rPr>
+              <a:t>2,830</a:t>
+            </a:r>
+            <a:endParaRPr lang="en-US" sz="950" dirty="0"/>
+          </a:p>
+        </p:txBody>
+      </p:sp>
+      <p:sp>
+        <p:nvSpPr>
+          <p:cNvPr id="131" name="Text 129"/>
+          <p:cNvSpPr txBox="1"/>
+          <p:nvPr/>
+        </p:nvSpPr>
+        <p:spPr>
+          <a:xfrm>
+            <a:off x="6379464" y="5696712"/>
+            <a:ext cx="526085" cy="457200"/>
+          </a:xfrm>
+          <a:prstGeom prst="rect">
+            <a:avLst/>
+          </a:prstGeom>
+          <a:noFill/>
+          <a:ln/>
+        </p:spPr>
+        <p:txBody>
+          <a:bodyPr wrap="square" lIns="0" tIns="0" rIns="0" bIns="0" rtlCol="0" anchor="ctr"/>
+          <a:lstStyle/>
+          <a:p>
+            <a:pPr algn="ctr" indent="0" marL="0">
+              <a:buNone/>
+            </a:pPr>
+            <a:r>
+              <a:rPr lang="en-US" sz="950" b="1" dirty="0">
+                <a:solidFill>
+                  <a:schemeClr val="accent1"/>
+                </a:solidFill>
+              </a:rPr>
+              <a:t>3,734</a:t>
+            </a:r>
+            <a:endParaRPr lang="en-US" sz="950" dirty="0"/>
+          </a:p>
+        </p:txBody>
+      </p:sp>
+      <p:sp>
+        <p:nvSpPr>
+          <p:cNvPr id="132" name="Text 130"/>
+          <p:cNvSpPr txBox="1"/>
+          <p:nvPr/>
+        </p:nvSpPr>
+        <p:spPr>
+          <a:xfrm>
+            <a:off x="6905549" y="5696712"/>
+            <a:ext cx="526085" cy="457200"/>
+          </a:xfrm>
+          <a:prstGeom prst="rect">
+            <a:avLst/>
+          </a:prstGeom>
+          <a:noFill/>
+          <a:ln/>
+        </p:spPr>
+        <p:txBody>
+          <a:bodyPr wrap="square" lIns="0" tIns="0" rIns="0" bIns="0" rtlCol="0" anchor="ctr"/>
+          <a:lstStyle/>
+          <a:p>
+            <a:pPr algn="ctr" indent="0" marL="0">
+              <a:buNone/>
+            </a:pPr>
+            <a:r>
+              <a:rPr lang="en-US" sz="950" b="1" dirty="0">
+                <a:solidFill>
+                  <a:schemeClr val="accent1"/>
+                </a:solidFill>
+              </a:rPr>
+              <a:t>4,420</a:t>
+            </a:r>
+            <a:endParaRPr lang="en-US" sz="950" dirty="0"/>
+          </a:p>
+        </p:txBody>
+      </p:sp>
+      <p:sp>
+        <p:nvSpPr>
+          <p:cNvPr id="133" name="Text 131"/>
+          <p:cNvSpPr txBox="1"/>
+          <p:nvPr/>
+        </p:nvSpPr>
+        <p:spPr>
+          <a:xfrm>
+            <a:off x="7431634" y="5696712"/>
+            <a:ext cx="526085" cy="457200"/>
+          </a:xfrm>
+          <a:prstGeom prst="rect">
+            <a:avLst/>
+          </a:prstGeom>
+          <a:noFill/>
+          <a:ln/>
+        </p:spPr>
+        <p:txBody>
+          <a:bodyPr wrap="square" lIns="0" tIns="0" rIns="0" bIns="0" rtlCol="0" anchor="ctr"/>
+          <a:lstStyle/>
+          <a:p>
+            <a:pPr algn="ctr" indent="0" marL="0">
+              <a:buNone/>
+            </a:pPr>
+            <a:r>
+              <a:rPr lang="en-US" sz="950" b="1" dirty="0">
+                <a:solidFill>
+                  <a:schemeClr val="accent1"/>
+                </a:solidFill>
+              </a:rPr>
+              <a:t>4,304</a:t>
+            </a:r>
+            <a:endParaRPr lang="en-US" sz="950" dirty="0"/>
+          </a:p>
+        </p:txBody>
+      </p:sp>
+      <p:sp>
+        <p:nvSpPr>
+          <p:cNvPr id="134" name="Text 132"/>
+          <p:cNvSpPr txBox="1"/>
+          <p:nvPr/>
+        </p:nvSpPr>
+        <p:spPr>
+          <a:xfrm>
+            <a:off x="7957718" y="5696712"/>
+            <a:ext cx="526085" cy="457200"/>
+          </a:xfrm>
+          <a:prstGeom prst="rect">
+            <a:avLst/>
+          </a:prstGeom>
+          <a:noFill/>
+          <a:ln/>
+        </p:spPr>
+        <p:txBody>
+          <a:bodyPr wrap="square" lIns="0" tIns="0" rIns="0" bIns="0" rtlCol="0" anchor="ctr"/>
+          <a:lstStyle/>
+          <a:p>
+            <a:pPr algn="ctr" indent="0" marL="0">
+              <a:buNone/>
+            </a:pPr>
+            <a:r>
+              <a:rPr lang="en-US" sz="950" b="1" dirty="0">
+                <a:solidFill>
+                  <a:schemeClr val="accent1"/>
+                </a:solidFill>
+              </a:rPr>
+              <a:t>4,038</a:t>
+            </a:r>
+            <a:endParaRPr lang="en-US" sz="950" dirty="0"/>
+          </a:p>
+        </p:txBody>
+      </p:sp>
+      <p:sp>
+        <p:nvSpPr>
+          <p:cNvPr id="135" name="Text 133"/>
+          <p:cNvSpPr txBox="1"/>
+          <p:nvPr/>
+        </p:nvSpPr>
+        <p:spPr>
+          <a:xfrm>
+            <a:off x="8483803" y="5696712"/>
+            <a:ext cx="526085" cy="457200"/>
+          </a:xfrm>
+          <a:prstGeom prst="rect">
+            <a:avLst/>
+          </a:prstGeom>
+          <a:noFill/>
+          <a:ln/>
+        </p:spPr>
+        <p:txBody>
+          <a:bodyPr wrap="square" lIns="0" tIns="0" rIns="0" bIns="0" rtlCol="0" anchor="ctr"/>
+          <a:lstStyle/>
+          <a:p>
+            <a:pPr algn="ctr" indent="0" marL="0">
+              <a:buNone/>
+            </a:pPr>
+            <a:r>
+              <a:rPr lang="en-US" sz="950" b="1" dirty="0">
+                <a:solidFill>
+                  <a:schemeClr val="accent1"/>
+                </a:solidFill>
+              </a:rPr>
+              <a:t>3,824</a:t>
+            </a:r>
+            <a:endParaRPr lang="en-US" sz="950" dirty="0"/>
+          </a:p>
+        </p:txBody>
+      </p:sp>
+      <p:sp>
+        <p:nvSpPr>
+          <p:cNvPr id="136" name="Text 134"/>
+          <p:cNvSpPr txBox="1"/>
+          <p:nvPr/>
+        </p:nvSpPr>
+        <p:spPr>
+          <a:xfrm>
+            <a:off x="9009888" y="5696712"/>
+            <a:ext cx="526085" cy="457200"/>
+          </a:xfrm>
+          <a:prstGeom prst="rect">
+            <a:avLst/>
+          </a:prstGeom>
+          <a:noFill/>
+          <a:ln/>
+        </p:spPr>
+        <p:txBody>
+          <a:bodyPr wrap="square" lIns="0" tIns="0" rIns="0" bIns="0" rtlCol="0" anchor="ctr"/>
+          <a:lstStyle/>
+          <a:p>
+            <a:pPr algn="ctr" indent="0" marL="0">
+              <a:buNone/>
+            </a:pPr>
+            <a:r>
+              <a:rPr lang="en-US" sz="950" b="1" dirty="0">
+                <a:solidFill>
+                  <a:schemeClr val="accent1"/>
+                </a:solidFill>
+              </a:rPr>
+              <a:t>5,208</a:t>
+            </a:r>
+            <a:endParaRPr lang="en-US" sz="950" dirty="0"/>
+          </a:p>
+        </p:txBody>
+      </p:sp>
+      <p:sp>
+        <p:nvSpPr>
+          <p:cNvPr id="137" name="Text 135"/>
+          <p:cNvSpPr txBox="1"/>
+          <p:nvPr/>
+        </p:nvSpPr>
+        <p:spPr>
+          <a:xfrm>
+            <a:off x="9535973" y="5696712"/>
+            <a:ext cx="526085" cy="457200"/>
+          </a:xfrm>
+          <a:prstGeom prst="rect">
+            <a:avLst/>
+          </a:prstGeom>
+          <a:noFill/>
+          <a:ln/>
+        </p:spPr>
+        <p:txBody>
+          <a:bodyPr wrap="square" lIns="0" tIns="0" rIns="0" bIns="0" rtlCol="0" anchor="ctr"/>
+          <a:lstStyle/>
+          <a:p>
+            <a:pPr algn="ctr" indent="0" marL="0">
+              <a:buNone/>
+            </a:pPr>
+            <a:r>
+              <a:rPr lang="en-US" sz="950" b="1" dirty="0">
+                <a:solidFill>
+                  <a:schemeClr val="accent1"/>
+                </a:solidFill>
+              </a:rPr>
+              <a:t>5,603</a:t>
+            </a:r>
+            <a:endParaRPr lang="en-US" sz="950" dirty="0"/>
+          </a:p>
+        </p:txBody>
+      </p:sp>
+      <p:sp>
+        <p:nvSpPr>
+          <p:cNvPr id="138" name="Text 136"/>
+          <p:cNvSpPr txBox="1"/>
+          <p:nvPr/>
+        </p:nvSpPr>
+        <p:spPr>
+          <a:xfrm>
+            <a:off x="10062058" y="5696712"/>
+            <a:ext cx="526085" cy="457200"/>
+          </a:xfrm>
+          <a:prstGeom prst="rect">
+            <a:avLst/>
+          </a:prstGeom>
+          <a:noFill/>
+          <a:ln/>
+        </p:spPr>
+        <p:txBody>
+          <a:bodyPr wrap="square" lIns="0" tIns="0" rIns="0" bIns="0" rtlCol="0" anchor="ctr"/>
+          <a:lstStyle/>
+          <a:p>
+            <a:pPr algn="ctr" indent="0" marL="0">
+              <a:buNone/>
+            </a:pPr>
+            <a:r>
+              <a:rPr lang="en-US" sz="950" b="1" dirty="0">
+                <a:solidFill>
+                  <a:schemeClr val="accent1"/>
+                </a:solidFill>
+              </a:rPr>
+              <a:t>6,011</a:t>
+            </a:r>
+            <a:endParaRPr lang="en-US" sz="950" dirty="0"/>
+          </a:p>
+        </p:txBody>
+      </p:sp>
+      <p:sp>
+        <p:nvSpPr>
+          <p:cNvPr id="139" name="Text 137"/>
+          <p:cNvSpPr txBox="1"/>
+          <p:nvPr/>
+        </p:nvSpPr>
+        <p:spPr>
+          <a:xfrm>
+            <a:off x="10588142" y="5696712"/>
+            <a:ext cx="526085" cy="457200"/>
+          </a:xfrm>
+          <a:prstGeom prst="rect">
+            <a:avLst/>
+          </a:prstGeom>
+          <a:noFill/>
+          <a:ln/>
+        </p:spPr>
+        <p:txBody>
+          <a:bodyPr wrap="square" lIns="0" tIns="0" rIns="0" bIns="0" rtlCol="0" anchor="ctr"/>
+          <a:lstStyle/>
+          <a:p>
+            <a:pPr algn="ctr" indent="0" marL="0">
+              <a:buNone/>
+            </a:pPr>
+            <a:r>
+              <a:rPr lang="en-US" sz="950" b="1" dirty="0">
+                <a:solidFill>
+                  <a:schemeClr val="accent1"/>
+                </a:solidFill>
+              </a:rPr>
+              <a:t>5,861</a:t>
+            </a:r>
+            <a:endParaRPr lang="en-US" sz="950" dirty="0"/>
+          </a:p>
+        </p:txBody>
+      </p:sp>
+      <p:sp>
+        <p:nvSpPr>
+          <p:cNvPr id="140" name="Text 138"/>
+          <p:cNvSpPr txBox="1"/>
+          <p:nvPr/>
+        </p:nvSpPr>
+        <p:spPr>
+          <a:xfrm>
+            <a:off x="11114227" y="5696712"/>
+            <a:ext cx="526085" cy="457200"/>
+          </a:xfrm>
+          <a:prstGeom prst="rect">
+            <a:avLst/>
+          </a:prstGeom>
+          <a:noFill/>
+          <a:ln/>
+        </p:spPr>
+        <p:txBody>
+          <a:bodyPr wrap="square" lIns="0" tIns="0" rIns="0" bIns="0" rtlCol="0" anchor="ctr"/>
+          <a:lstStyle/>
+          <a:p>
+            <a:pPr algn="ctr" indent="0" marL="0">
+              <a:buNone/>
+            </a:pPr>
+            <a:r>
+              <a:rPr lang="en-US" sz="950" b="1" dirty="0">
+                <a:solidFill>
+                  <a:schemeClr val="accent1"/>
+                </a:solidFill>
+              </a:rPr>
+              <a:t>5,628</a:t>
+            </a:r>
+            <a:endParaRPr lang="en-US" sz="950" dirty="0"/>
+          </a:p>
+        </p:txBody>
+      </p:sp>
+      <p:sp>
+        <p:nvSpPr>
+          <p:cNvPr id="141" name="Text 139"/>
+          <p:cNvSpPr txBox="1"/>
+          <p:nvPr/>
+        </p:nvSpPr>
+        <p:spPr>
+          <a:xfrm>
+            <a:off x="548640" y="6181344"/>
+            <a:ext cx="11091672" cy="237744"/>
+          </a:xfrm>
+          <a:prstGeom prst="rect">
+            <a:avLst/>
+          </a:prstGeom>
+          <a:noFill/>
+          <a:ln/>
+        </p:spPr>
+        <p:txBody>
+          <a:bodyPr wrap="square" lIns="0" tIns="0" rIns="0" bIns="0" rtlCol="0" anchor="t"/>
+          <a:lstStyle/>
+          <a:p>
+            <a:pPr indent="0" marL="0">
+              <a:buNone/>
+            </a:pPr>
+            <a:r>
+              <a:rPr lang="en-US" sz="850" i="1" dirty="0">
+                <a:solidFill>
+                  <a:schemeClr val="accent2"/>
+                </a:solidFill>
+              </a:rPr>
+              <a:t>Inversión: pauta S/700 y embajadoras S/200 al mes, ferias (S/1,800 + vendedor/a 3 días), eventos (S/160) y lanzamiento (S/3,204, ya en la inversión). De oct. a dic. de 2026 la meta es de contactos en lista de espera.</a:t>
+            </a:r>
+            <a:endParaRPr lang="en-US" sz="850" dirty="0"/>
+          </a:p>
+        </p:txBody>
+      </p:sp>
+      <p:sp>
+        <p:nvSpPr>
+          <p:cNvPr id="25" name="Slide Number Placeholder 0"/>
+          <p:cNvSpPr>
+            <a:spLocks noGrp="1"/>
+          </p:cNvSpPr>
+          <p:nvPr>
+            <p:ph type="sldNum" sz="quarter" idx="4294967295"/>
+          </p:nvPr>
+        </p:nvSpPr>
+        <p:spPr>
+          <a:xfrm>
+            <a:off x="11430000" y="6437376"/>
+            <a:ext cx="457200" cy="256032"/>
+          </a:xfrm>
+          <a:prstGeom prst="rect">
+            <a:avLst/>
+          </a:prstGeom>
+          <a:extLst>
+            <a:ext uri="{C572A759-6A51-4108-AA02-DFA0A04FC94B}">
+              <ma14:wrappingTextBoxFlag xmlns:ma14="http://schemas.microsoft.com/office/mac/drawingml/2011/main" val="0"/>
+            </a:ext>
+          </a:extLst>
+        </p:spPr>
+        <p:txBody>
+          <a:bodyPr/>
+          <a:lstStyle>
+            <a:lvl1pPr>
+              <a:defRPr sz="1000">
+                <a:solidFill>
+                  <a:srgbClr val="6B3A2A"/>
+                </a:solidFill>
+              </a:defRPr>
+            </a:lvl1pPr>
+          </a:lstStyle>
+          <a:p>
+            <a:pPr algn="l"/>
+            <a:fld id="{F7021451-1387-4CA6-816F-3879F97B5CBC}" type="slidenum">
+              <a:rPr b="0" lang="en-US"/>
+              <a:t>35</a:t>
+            </a:fld>
+            <a:endParaRPr lang="en-US"/>
+          </a:p>
+        </p:txBody>
+      </p:sp>
+    </p:spTree>
+  </p:cSld>
+  <p:clrMapOvr>
+    <a:masterClrMapping/>
+  </p:clrMapOvr>
+</p:sld>
+</file>
+
+<file path=ppt/slides/slide36.xml><?xml version="1.0" encoding="utf-8"?>
+<p:sld xmlns:a="http://schemas.openxmlformats.org/drawingml/2006/main" xmlns:r="http://schemas.openxmlformats.org/officeDocument/2006/relationships" xmlns:p="http://schemas.openxmlformats.org/presentationml/2006/main">
+  <p:cSld name="Slide 36">
+    <p:spTree>
+      <p:nvGrpSpPr>
+        <p:cNvPr id="1" name=""/>
+        <p:cNvGrpSpPr/>
+        <p:nvPr/>
+      </p:nvGrpSpPr>
+      <p:grpSpPr>
+        <a:xfrm>
+          <a:off x="0" y="0"/>
+          <a:ext cx="0" cy="0"/>
+          <a:chOff x="0" y="0"/>
+          <a:chExt cx="0" cy="0"/>
+        </a:xfrm>
+      </p:grpSpPr>
+      <p:sp>
+        <p:nvSpPr>
+          <p:cNvPr id="2" name="Text 0"/>
+          <p:cNvSpPr/>
+          <p:nvPr>
+            <p:ph idx="100" type="body" hasCustomPrompt="1"/>
+          </p:nvPr>
+        </p:nvSpPr>
+        <p:spPr>
+          <a:xfrm>
+            <a:off x="548640" y="274320"/>
+            <a:ext cx="9144000" cy="292608"/>
+          </a:xfrm>
+          <a:prstGeom prst="rect">
+            <a:avLst/>
+          </a:prstGeom>
+          <a:noFill/>
+          <a:ln/>
+        </p:spPr>
+        <p:txBody>
+          <a:bodyPr wrap="square" lIns="0" tIns="0" rIns="0" bIns="0" rtlCol="0" anchor="t"/>
+          <a:lstStyle/>
+          <a:p>
+            <a:pPr indent="0" marL="0">
+              <a:buNone/>
+            </a:pPr>
+            <a:r>
+              <a:rPr lang="en-US" sz="1200" b="1" spc="200" kern="0" dirty="0">
+                <a:solidFill>
+                  <a:schemeClr val="accent1"/>
+                </a:solidFill>
+              </a:rPr>
               <a:t>CIERRE · CÓMO SEGUIMOS CRECIENDO</a:t>
             </a:r>
             <a:endParaRPr lang="en-US" sz="1200" dirty="0"/>
@@ -49178,7 +52440,7 @@
             <a:pPr algn="l"/>
             <a:fld id="{F7021451-1387-4CA6-816F-3879F97B5CBC}" type="slidenum">
               <a:rPr b="0" lang="en-US"/>
-              <a:t>35</a:t>
+              <a:t>36</a:t>
             </a:fld>
             <a:endParaRPr lang="en-US"/>
           </a:p>
@@ -49192,9 +52454,9 @@
 </p:sld>
 </file>
 
-<file path=ppt/slides/slide36.xml><?xml version="1.0" encoding="utf-8"?>
+<file path=ppt/slides/slide37.xml><?xml version="1.0" encoding="utf-8"?>
 <p:sld xmlns:a="http://schemas.openxmlformats.org/drawingml/2006/main" xmlns:r="http://schemas.openxmlformats.org/officeDocument/2006/relationships" xmlns:p="http://schemas.openxmlformats.org/presentationml/2006/main">
-  <p:cSld name="Slide 36">
+  <p:cSld name="Slide 37">
     <p:spTree>
       <p:nvGrpSpPr>
         <p:cNvPr id="1" name=""/>
